--- a/content/W04/D3/slides/C2_W04_D03_half2_STUDENT.pptx
+++ b/content/W04/D3/slides/C2_W04_D03_half2_STUDENT.pptx
@@ -16,6 +16,8 @@
     <p:sldId id="264" r:id="rId16"/>
     <p:sldId id="265" r:id="rId17"/>
     <p:sldId id="266" r:id="rId18"/>
+    <p:sldId id="267" r:id="rId19"/>
+    <p:sldId id="268" r:id="rId20"/>
   </p:sldIdLst>
   <p:sldSz cx="12191695" cy="6858000" type="screen4x3"/>
   <p:notesSz cx="6858000" cy="9144000"/>
@@ -512,22 +514,22 @@
           <a:lstStyle/>
           <a:p>
             <a:r>
-              <a:t>Open with the morning's close summary already in view: three slots, two caveats, Rs 12.6 lakh a</a:t>
-            </a:r>
-          </a:p>
-          <a:p>
-            <a:r>
-              <a:t>month. The afternoon's first 60 minutes run the unguided chapter 3 part 2 and the interview</a:t>
-            </a:r>
-          </a:p>
-          <a:p>
-            <a:r>
-              <a:t>transcript, then the handoff line into the W4-2 faculty block (tentative).</a:t>
-            </a:r>
-          </a:p>
-          <a:p>
-            <a:r>
-              <a:t>Transition: the unguided block's prompt.</a:t>
+              <a:t>On screen after lunch. The morning ended with the method: lift above a 1 percent floor, a slot</a:t>
+            </a:r>
+          </a:p>
+          <a:p>
+            <a:r>
+              <a:t>priced at Rs 17,280 against Rs 3,240 a day, Rs 6.3 lakh a month recovered. The afternoon's first</a:t>
+            </a:r>
+          </a:p>
+          <a:p>
+            <a:r>
+              <a:t>60 minutes run the unguided strip, the interview room and the Kahoot.</a:t>
+            </a:r>
+          </a:p>
+          <a:p>
+            <a:r>
+              <a:t>The IITGN faculty session (tentative) takes the next 120. Transition: the brief.</a:t>
             </a:r>
           </a:p>
         </p:txBody>
@@ -597,17 +599,12 @@
           <a:lstStyle/>
           <a:p>
             <a:r>
-              <a:t>LIVE, 1 minute. Read it aloud as it stands. Say the W4-2 block is tentative until IIT Gandhinagar</a:t>
-            </a:r>
-          </a:p>
-          <a:p>
-            <a:r>
-              <a:t>confirms. Tomorrow's pre-read ships tonight.</a:t>
-            </a:r>
-          </a:p>
-          <a:p>
-            <a:r>
-              <a:t>Transition: the Kahoot and the close.</a:t>
+              <a:t>LIVE, 15 minutes for the section: the handoff, the Kahoot and the close. Transition: the handoff</a:t>
+            </a:r>
+          </a:p>
+          <a:p>
+            <a:r>
+              <a:t>line.</a:t>
             </a:r>
           </a:p>
         </p:txBody>
@@ -677,27 +674,162 @@
           <a:lstStyle/>
           <a:p>
             <a:r>
-              <a:t>LIVE, 15 minutes. Run the Kahoot. Item 6 is the return question from Tuesday; the rest cover</a:t>
-            </a:r>
-          </a:p>
-          <a:p>
-            <a:r>
-              <a:t>today's five levels. Close the day with the one-line summary: pairs beat chance by lift, three</a:t>
-            </a:r>
-          </a:p>
-          <a:p>
-            <a:r>
-              <a:t>slots pay the growth lead's bill, and the Kalpa lab repeats the same method on the Rs 199</a:t>
-            </a:r>
-          </a:p>
-          <a:p>
-            <a:r>
-              <a:t>charger.</a:t>
-            </a:r>
-          </a:p>
-          <a:p>
-            <a:r>
-              <a:t>Transition: the day ends; tomorrow is Zomato Gold and the cohort triangle.</a:t>
+              <a:t>LIVE, 1 minute. Read the line as it stands. Park any question about how long a watch-list trial</a:t>
+            </a:r>
+          </a:p>
+          <a:p>
+            <a:r>
+              <a:t>must run for the faculty session (tentative). Transition: the Kahoot.</a:t>
+            </a:r>
+          </a:p>
+        </p:txBody>
+      </p:sp>
+      <p:sp>
+        <p:nvSpPr>
+          <p:cNvPr id="4" name="Slide Number Placeholder 3"/>
+          <p:cNvSpPr>
+            <a:spLocks noGrp="1"/>
+          </p:cNvSpPr>
+          <p:nvPr>
+            <p:ph type="sldNum" idx="5" sz="quarter"/>
+          </p:nvPr>
+        </p:nvSpPr>
+        <p:spPr/>
+      </p:sp>
+    </p:spTree>
+  </p:cSld>
+  <p:clrMapOvr>
+    <a:masterClrMapping/>
+  </p:clrMapOvr>
+</p:notes>
+</file>
+
+<file path=ppt/notesSlides/notesSlide12.xml><?xml version="1.0" encoding="utf-8"?>
+<p:notes xmlns:a="http://schemas.openxmlformats.org/drawingml/2006/main" xmlns:p="http://schemas.openxmlformats.org/presentationml/2006/main" xmlns:r="http://schemas.openxmlformats.org/officeDocument/2006/relationships">
+  <p:cSld>
+    <p:spTree>
+      <p:nvGrpSpPr>
+        <p:cNvPr id="1" name=""/>
+        <p:cNvGrpSpPr/>
+        <p:nvPr/>
+      </p:nvGrpSpPr>
+      <p:grpSpPr>
+        <a:xfrm>
+          <a:off x="0" y="0"/>
+          <a:ext cx="0" cy="0"/>
+          <a:chOff x="0" y="0"/>
+          <a:chExt cx="0" cy="0"/>
+        </a:xfrm>
+      </p:grpSpPr>
+      <p:sp>
+        <p:nvSpPr>
+          <p:cNvPr id="2" name="Slide Image Placeholder 1"/>
+          <p:cNvSpPr>
+            <a:spLocks noGrp="1"/>
+          </p:cNvSpPr>
+          <p:nvPr>
+            <p:ph type="sldImg" idx="2"/>
+          </p:nvPr>
+        </p:nvSpPr>
+        <p:spPr/>
+      </p:sp>
+      <p:sp>
+        <p:nvSpPr>
+          <p:cNvPr id="3" name="Notes Placeholder 2"/>
+          <p:cNvSpPr>
+            <a:spLocks noGrp="1"/>
+          </p:cNvSpPr>
+          <p:nvPr>
+            <p:ph type="body" idx="3" sz="quarter"/>
+          </p:nvPr>
+        </p:nvSpPr>
+        <p:spPr/>
+        <p:txBody>
+          <a:bodyPr/>
+          <a:lstStyle/>
+          <a:p>
+            <a:r>
+              <a:t>LIVE, 10 minutes. Run the Kahoot pack from the kahoot folder; it is ungraded. Re-teach in one line</a:t>
+            </a:r>
+          </a:p>
+          <a:p>
+            <a:r>
+              <a:t>any item most of the room misses. Transition: the close.</a:t>
+            </a:r>
+          </a:p>
+        </p:txBody>
+      </p:sp>
+      <p:sp>
+        <p:nvSpPr>
+          <p:cNvPr id="4" name="Slide Number Placeholder 3"/>
+          <p:cNvSpPr>
+            <a:spLocks noGrp="1"/>
+          </p:cNvSpPr>
+          <p:nvPr>
+            <p:ph type="sldNum" idx="5" sz="quarter"/>
+          </p:nvPr>
+        </p:nvSpPr>
+        <p:spPr/>
+      </p:sp>
+    </p:spTree>
+  </p:cSld>
+  <p:clrMapOvr>
+    <a:masterClrMapping/>
+  </p:clrMapOvr>
+</p:notes>
+</file>
+
+<file path=ppt/notesSlides/notesSlide13.xml><?xml version="1.0" encoding="utf-8"?>
+<p:notes xmlns:a="http://schemas.openxmlformats.org/drawingml/2006/main" xmlns:p="http://schemas.openxmlformats.org/presentationml/2006/main" xmlns:r="http://schemas.openxmlformats.org/officeDocument/2006/relationships">
+  <p:cSld>
+    <p:spTree>
+      <p:nvGrpSpPr>
+        <p:cNvPr id="1" name=""/>
+        <p:cNvGrpSpPr/>
+        <p:nvPr/>
+      </p:nvGrpSpPr>
+      <p:grpSpPr>
+        <a:xfrm>
+          <a:off x="0" y="0"/>
+          <a:ext cx="0" cy="0"/>
+          <a:chOff x="0" y="0"/>
+          <a:chExt cx="0" cy="0"/>
+        </a:xfrm>
+      </p:grpSpPr>
+      <p:sp>
+        <p:nvSpPr>
+          <p:cNvPr id="2" name="Slide Image Placeholder 1"/>
+          <p:cNvSpPr>
+            <a:spLocks noGrp="1"/>
+          </p:cNvSpPr>
+          <p:nvPr>
+            <p:ph type="sldImg" idx="2"/>
+          </p:nvPr>
+        </p:nvSpPr>
+        <p:spPr/>
+      </p:sp>
+      <p:sp>
+        <p:nvSpPr>
+          <p:cNvPr id="3" name="Notes Placeholder 2"/>
+          <p:cNvSpPr>
+            <a:spLocks noGrp="1"/>
+          </p:cNvSpPr>
+          <p:nvPr>
+            <p:ph type="body" idx="3" sz="quarter"/>
+          </p:nvPr>
+        </p:nvSpPr>
+        <p:spPr/>
+        <p:txBody>
+          <a:bodyPr/>
+          <a:lstStyle/>
+          <a:p>
+            <a:r>
+              <a:t>LIVE, 4 minutes. Ask two learners to say the sentence without notes. The lab after class runs the</a:t>
+            </a:r>
+          </a:p>
+          <a:p>
+            <a:r>
+              <a:t>same method on Kalpa Retail's baskets. Tomorrow's pre-read ships tonight.</a:t>
             </a:r>
           </a:p>
         </p:txBody>
@@ -767,22 +899,12 @@
           <a:lstStyle/>
           <a:p>
             <a:r>
-              <a:t>LIVE, 30 minutes in nine groups. Each group picks three pairs from the pairs table, writes the</a:t>
-            </a:r>
-          </a:p>
-          <a:p>
-            <a:r>
-              <a:t>one-paragraph proposal with the rupee value and the caveat, and answers the category manager's</a:t>
-            </a:r>
-          </a:p>
-          <a:p>
-            <a:r>
-              <a:t>one line in two sentences.</a:t>
-            </a:r>
-          </a:p>
-          <a:p>
-            <a:r>
-              <a:t>Transition: the prompt in full.</a:t>
+              <a:t>LIVE, 1 minute. Chapter 3, part two, level L5, unguided in the nine groups on notebook 03.</a:t>
+            </a:r>
+          </a:p>
+          <a:p>
+            <a:r>
+              <a:t>Transition: the brief.</a:t>
             </a:r>
           </a:p>
         </p:txBody>
@@ -852,22 +974,22 @@
           <a:lstStyle/>
           <a:p>
             <a:r>
-              <a:t>LIVE, 2 minutes. Say the four steps and the time. Say the TA will circulate; a group's proposal</a:t>
-            </a:r>
-          </a:p>
-          <a:p>
-            <a:r>
-              <a:t>is judged on the lift above the floor, the labelled rupee gap and the two-sentence answer to the</a:t>
-            </a:r>
-          </a:p>
-          <a:p>
-            <a:r>
-              <a:t>manager.</a:t>
-            </a:r>
-          </a:p>
-          <a:p>
-            <a:r>
-              <a:t>Transition: the proposal template.</a:t>
+              <a:t>LIVE, 4 minutes to brief, then 25 minutes of group work. The TA moves between tables. A group that</a:t>
+            </a:r>
+          </a:p>
+          <a:p>
+            <a:r>
+              <a:t>picks a pair below the floor is asked "how many carts would the slot touch?". A group that prices</a:t>
+            </a:r>
+          </a:p>
+          <a:p>
+            <a:r>
+              <a:t>sales instead of margin is asked "which number does the growth lead keep?". Transition: the</a:t>
+            </a:r>
+          </a:p>
+          <a:p>
+            <a:r>
+              <a:t>template.</a:t>
             </a:r>
           </a:p>
         </p:txBody>
@@ -937,17 +1059,12 @@
           <a:lstStyle/>
           <a:p>
             <a:r>
-              <a:t>LIVE, 1 minute. Hand each group the one-page template. The template lives in exercises/guided</a:t>
-            </a:r>
-          </a:p>
-          <a:p>
-            <a:r>
-              <a:t>and the solutions in exercises/solutions, released at the close.</a:t>
-            </a:r>
-          </a:p>
-          <a:p>
-            <a:r>
-              <a:t>Transition: into the interview question.</a:t>
+              <a:t>LIVE, 1 minute. The template sits in exercises/unguided; the worked answer is released at the</a:t>
+            </a:r>
+          </a:p>
+          <a:p>
+            <a:r>
+              <a:t>close. Transition: the objection each group must answer.</a:t>
             </a:r>
           </a:p>
         </p:txBody>
@@ -1017,17 +1134,17 @@
           <a:lstStyle/>
           <a:p>
             <a:r>
-              <a:t>LIVE, 2 minutes. Walk the six boxes. Say the room has 30 minutes to run this on the notebook</a:t>
-            </a:r>
-          </a:p>
-          <a:p>
-            <a:r>
-              <a:t>output they wrote in chapter 2 and the rupee model from chapter 3.</a:t>
-            </a:r>
-          </a:p>
-          <a:p>
-            <a:r>
-              <a:t>Transition: into the interview question.</a:t>
+              <a:t>LIVE, 5 minutes. Tuesday's four moves, used on today's numbers: restate until the owner agrees,</a:t>
+            </a:r>
+          </a:p>
+          <a:p>
+            <a:r>
+              <a:t>answer from the evidence, concede what is true, say what would change your mind. Two groups read</a:t>
+            </a:r>
+          </a:p>
+          <a:p>
+            <a:r>
+              <a:t>their answers aloud; the room names the move each sentence makes. Transition: the interview room.</a:t>
             </a:r>
           </a:p>
         </p:txBody>
@@ -1097,22 +1214,12 @@
           <a:lstStyle/>
           <a:p>
             <a:r>
-              <a:t>LIVE, 15 minutes. Read the transcript aloud with one learner playing the candidate. The weak</a:t>
-            </a:r>
-          </a:p>
-          <a:p>
-            <a:r>
-              <a:t>answer and the hire-grade answer sit side by side. Score on the Aced criteria: structure, the</a:t>
-            </a:r>
-          </a:p>
-          <a:p>
-            <a:r>
-              <a:t>denominator named, the trap seen, the number tied to a decision.</a:t>
-            </a:r>
-          </a:p>
-          <a:p>
-            <a:r>
-              <a:t>Transition: the transcript.</a:t>
+              <a:t>LIVE, 10 minutes for the section. Level L6. The full transcript with its scorecard is read in pairs</a:t>
+            </a:r>
+          </a:p>
+          <a:p>
+            <a:r>
+              <a:t>from the extras folder. Transition: the question.</a:t>
             </a:r>
           </a:p>
         </p:txBody>
@@ -1182,22 +1289,17 @@
           <a:lstStyle/>
           <a:p>
             <a:r>
-              <a:t>LIVE, 6 minutes. Walk the two answers side by side. Say what the interviewer listens for: the</a:t>
-            </a:r>
-          </a:p>
-          <a:p>
-            <a:r>
-              <a:t>base rate named, the mechanism named, a decision drawn. Say Aced's scorecard: structure first,</a:t>
-            </a:r>
-          </a:p>
-          <a:p>
-            <a:r>
-              <a:t>assumptions stated, trap seen, decision named, each 0 to 2.</a:t>
-            </a:r>
-          </a:p>
-          <a:p>
-            <a:r>
-              <a:t>Transition: the AI-company variant answered.</a:t>
+              <a:t>LIVE, 4 minutes. Pairs read the two answers side by side and score both on the scorecard's seven</a:t>
+            </a:r>
+          </a:p>
+          <a:p>
+            <a:r>
+              <a:t>lines. The weak answer is not wrong about confidence's meaning; it is wrong about what to do with</a:t>
+            </a:r>
+          </a:p>
+          <a:p>
+            <a:r>
+              <a:t>it. Transition: the follow-ups.</a:t>
             </a:r>
           </a:p>
         </p:txBody>
@@ -1267,22 +1369,12 @@
           <a:lstStyle/>
           <a:p>
             <a:r>
-              <a:t>LIVE, 3 minutes. Walk the two steps: offline on held-out carts by lift over the base rate, then</a:t>
-            </a:r>
-          </a:p>
-          <a:p>
-            <a:r>
-              <a:t>online by a holdout. Say the lesson transfers: whenever a popular item looks like a winner,</a:t>
-            </a:r>
-          </a:p>
-          <a:p>
-            <a:r>
-              <a:t>divide by the base rate before celebrating.</a:t>
-            </a:r>
-          </a:p>
-          <a:p>
-            <a:r>
-              <a:t>Transition: the Kahoot and the handoff.</a:t>
+              <a:t>LIVE, 3 minutes. Each follow-up is one of the morning's traps asked as a question. Transition: the</a:t>
+            </a:r>
+          </a:p>
+          <a:p>
+            <a:r>
+              <a:t>same idea at an AI company.</a:t>
             </a:r>
           </a:p>
         </p:txBody>
@@ -1352,17 +1444,12 @@
           <a:lstStyle/>
           <a:p>
             <a:r>
-              <a:t>LIVE, 2 minutes. Hand the room over with the sentence below. Say the faculty block is tentative</a:t>
-            </a:r>
-          </a:p>
-          <a:p>
-            <a:r>
-              <a:t>until IITGN confirms (`data/programme/facts.yaml`, decision `faculty`).</a:t>
-            </a:r>
-          </a:p>
-          <a:p>
-            <a:r>
-              <a:t>Transition: the handoff line.</a:t>
+              <a:t>LIVE, 3 minutes. Programme-written variant; it names no company figure. The base-rate trap is the</a:t>
+            </a:r>
+          </a:p>
+          <a:p>
+            <a:r>
+              <a:t>same one the strip fell into, now inside a model's evaluation. Transition: the handoff.</a:t>
             </a:r>
           </a:p>
         </p:txBody>
@@ -4594,7 +4681,7 @@
         <p:spPr>
           <a:xfrm>
             <a:off x="621792" y="2807208"/>
-            <a:ext cx="10582351" cy="663956"/>
+            <a:ext cx="10582351" cy="1291336"/>
           </a:xfrm>
           <a:prstGeom prst="rect">
             <a:avLst/>
@@ -4615,7 +4702,7 @@
                 </a:solidFill>
                 <a:latin typeface="Georgia"/>
               </a:rPr>
-              <a:t>The three slots and the Kalpa transfer</a:t>
+              <a:t>Instamart Pune: the strip re-ranked, priced and defended</a:t>
             </a:r>
           </a:p>
         </p:txBody>
@@ -4628,7 +4715,7 @@
         </p:nvSpPr>
         <p:spPr>
           <a:xfrm>
-            <a:off x="621792" y="3635756"/>
+            <a:off x="621792" y="4263136"/>
             <a:ext cx="10033711" cy="663956"/>
           </a:xfrm>
           <a:prstGeom prst="rect">
@@ -4650,7 +4737,7 @@
                 </a:solidFill>
                 <a:latin typeface="Georgia"/>
               </a:rPr>
-              <a:t>“Which three pairs fill the strip, and which measure cannot be fooled by popularity.”</a:t>
+              <a:t>“Rank the pairs the strip should show, explain why its click-through fell, and put a rupee value on a slot, by Friday.”</a:t>
             </a:r>
           </a:p>
         </p:txBody>
@@ -4663,8 +4750,8 @@
         </p:nvSpPr>
         <p:spPr>
           <a:xfrm>
-            <a:off x="621792" y="4354576"/>
-            <a:ext cx="10033711" cy="218186"/>
+            <a:off x="621792" y="4981956"/>
+            <a:ext cx="10033711" cy="399796"/>
           </a:xfrm>
           <a:prstGeom prst="rect">
             <a:avLst/>
@@ -4685,7 +4772,7 @@
                 </a:solidFill>
                 <a:latin typeface="Calibri"/>
               </a:rPr>
-              <a:t>The afternoon's unguided chapter, the interview room and the handoff into the IITGN block</a:t>
+              <a:t>The ask on the ticket, to the category manager and the growth lead. Illustrative case: the company is real, the situation and the data are synthetic, built for this class.</a:t>
             </a:r>
           </a:p>
         </p:txBody>
@@ -4698,7 +4785,7 @@
         </p:nvSpPr>
         <p:spPr>
           <a:xfrm>
-            <a:off x="621792" y="5212080"/>
+            <a:off x="621792" y="5701792"/>
             <a:ext cx="365760" cy="251205"/>
           </a:xfrm>
           <a:prstGeom prst="rect">
@@ -4720,7 +4807,7 @@
                 </a:solidFill>
                 <a:latin typeface="Georgia"/>
               </a:rPr>
-              <a:t>06</a:t>
+              <a:t>03</a:t>
             </a:r>
           </a:p>
         </p:txBody>
@@ -4733,8 +4820,8 @@
         </p:nvSpPr>
         <p:spPr>
           <a:xfrm>
-            <a:off x="1005839" y="5248656"/>
-            <a:ext cx="1993392" cy="185166"/>
+            <a:off x="1005839" y="5738368"/>
+            <a:ext cx="1779936" cy="185166"/>
           </a:xfrm>
           <a:prstGeom prst="rect">
             <a:avLst/>
@@ -4755,7 +4842,7 @@
                 </a:solidFill>
                 <a:latin typeface="Calibri"/>
               </a:rPr>
-              <a:t>Pick three slots and defend them</a:t>
+              <a:t>Which strip would you ship?</a:t>
             </a:r>
           </a:p>
         </p:txBody>
@@ -4768,7 +4855,7 @@
         </p:nvSpPr>
         <p:spPr>
           <a:xfrm>
-            <a:off x="3182112" y="5212080"/>
+            <a:off x="2968656" y="5701792"/>
             <a:ext cx="365760" cy="251205"/>
           </a:xfrm>
           <a:prstGeom prst="rect">
@@ -4790,7 +4877,7 @@
                 </a:solidFill>
                 <a:latin typeface="Georgia"/>
               </a:rPr>
-              <a:t>07</a:t>
+              <a:t>04</a:t>
             </a:r>
           </a:p>
         </p:txBody>
@@ -4803,8 +4890,8 @@
         </p:nvSpPr>
         <p:spPr>
           <a:xfrm>
-            <a:off x="3566160" y="5248656"/>
-            <a:ext cx="1993392" cy="333756"/>
+            <a:off x="3352704" y="5738368"/>
+            <a:ext cx="1247584" cy="185166"/>
           </a:xfrm>
           <a:prstGeom prst="rect">
             <a:avLst/>
@@ -4825,7 +4912,7 @@
                 </a:solidFill>
                 <a:latin typeface="Calibri"/>
               </a:rPr>
-              <a:t>The interview question the day equips</a:t>
+              <a:t>The interview room</a:t>
             </a:r>
           </a:p>
         </p:txBody>
@@ -4838,7 +4925,7 @@
         </p:nvSpPr>
         <p:spPr>
           <a:xfrm>
-            <a:off x="5742432" y="5212080"/>
+            <a:off x="4783169" y="5701792"/>
             <a:ext cx="365760" cy="251205"/>
           </a:xfrm>
           <a:prstGeom prst="rect">
@@ -4860,7 +4947,7 @@
                 </a:solidFill>
                 <a:latin typeface="Georgia"/>
               </a:rPr>
-              <a:t>08</a:t>
+              <a:t>05</a:t>
             </a:r>
           </a:p>
         </p:txBody>
@@ -4873,8 +4960,8 @@
         </p:nvSpPr>
         <p:spPr>
           <a:xfrm>
-            <a:off x="6126480" y="5248656"/>
-            <a:ext cx="1993392" cy="333756"/>
+            <a:off x="5167217" y="5738368"/>
+            <a:ext cx="1661636" cy="185166"/>
           </a:xfrm>
           <a:prstGeom prst="rect">
             <a:avLst/>
@@ -4895,7 +4982,7 @@
                 </a:solidFill>
                 <a:latin typeface="Calibri"/>
               </a:rPr>
-              <a:t>The handoff into the W4-2 faculty block (tentative)</a:t>
+              <a:t>The handoff and the close</a:t>
             </a:r>
           </a:p>
         </p:txBody>
@@ -4930,7 +5017,7 @@
                 </a:solidFill>
                 <a:latin typeface="Calibri"/>
               </a:rPr>
-              <a:t>Week 4, Day 3. The three slots and the Kalpa transfer</a:t>
+              <a:t>Week 4, Day 3. Instamart Pune: the strip re-ranked, priced and defended</a:t>
             </a:r>
           </a:p>
         </p:txBody>
@@ -4965,7 +5052,7 @@
                 </a:solidFill>
                 <a:latin typeface="Calibri"/>
               </a:rPr>
-              <a:t>1 / 11</a:t>
+              <a:t>1 / 13</a:t>
             </a:r>
           </a:p>
         </p:txBody>
@@ -4990,7 +5077,7 @@
       <p:grpSpPr/>
       <p:pic>
         <p:nvPicPr>
-          <p:cNvPr id="2" name="Picture 1" descr="bg_light.jpg"/>
+          <p:cNvPr id="2" name="Picture 1" descr="bg_dark.jpg"/>
           <p:cNvPicPr>
             <a:picLocks noChangeAspect="1"/>
           </p:cNvPicPr>
@@ -5062,7 +5149,7 @@
             <a:r>
               <a:rPr sz="900" b="1" i="0">
                 <a:solidFill>
-                  <a:srgbClr val="1A0F5C"/>
+                  <a:srgbClr val="FFFFFF"/>
                 </a:solidFill>
                 <a:latin typeface="Calibri"/>
               </a:rPr>
@@ -5097,7 +5184,7 @@
             <a:r>
               <a:rPr sz="550" b="1" i="0" spc="300">
                 <a:solidFill>
-                  <a:srgbClr val="6B6690"/>
+                  <a:srgbClr val="CFC9EE"/>
                 </a:solidFill>
                 <a:latin typeface="Calibri"/>
               </a:rPr>
@@ -5132,11 +5219,11 @@
             <a:r>
               <a:rPr sz="550" b="1" i="0" spc="300">
                 <a:solidFill>
-                  <a:srgbClr val="6B6690"/>
+                  <a:srgbClr val="CFC9EE"/>
                 </a:solidFill>
                 <a:latin typeface="Calibri"/>
               </a:rPr>
-              <a:t>WEEK 4  ·  DAY 3  ·  KALPA GLOBAL CAPABILITY CENTRE</a:t>
+              <a:t>PG DIPLOMA IN AI-ML AND AGENTIC AI ENGINEERING  ·  COHORT 2</a:t>
             </a:r>
           </a:p>
         </p:txBody>
@@ -5149,29 +5236,29 @@
         </p:nvSpPr>
         <p:spPr>
           <a:xfrm>
-            <a:off x="530352" y="676656"/>
-            <a:ext cx="11130991" cy="512064"/>
-          </a:xfrm>
-          <a:prstGeom prst="rect">
-            <a:avLst/>
-          </a:prstGeom>
-          <a:noFill/>
-        </p:spPr>
-        <p:txBody>
-          <a:bodyPr wrap="square" anchor="b" lIns="0" rIns="0" tIns="0" bIns="0">
+            <a:off x="731519" y="1143000"/>
+            <a:ext cx="3657600" cy="1371600"/>
+          </a:xfrm>
+          <a:prstGeom prst="rect">
+            <a:avLst/>
+          </a:prstGeom>
+          <a:noFill/>
+        </p:spPr>
+        <p:txBody>
+          <a:bodyPr wrap="square" anchor="t" lIns="0" rIns="0" tIns="0" bIns="0">
             <a:spAutoFit/>
           </a:bodyPr>
           <a:lstStyle/>
           <a:p>
             <a:pPr algn="l"/>
             <a:r>
-              <a:rPr sz="2600" b="0" i="0">
-                <a:solidFill>
-                  <a:srgbClr val="1A0F5C"/>
+              <a:rPr sz="9600" b="0" i="0">
+                <a:solidFill>
+                  <a:srgbClr val="D9A7FF"/>
                 </a:solidFill>
                 <a:latin typeface="Georgia"/>
               </a:rPr>
-              <a:t>Handoff: lift read as probability</a:t>
+              <a:t>05</a:t>
             </a:r>
           </a:p>
         </p:txBody>
@@ -5184,8 +5271,8 @@
         </p:nvSpPr>
         <p:spPr>
           <a:xfrm>
-            <a:off x="530352" y="1243584"/>
-            <a:ext cx="11130991" cy="234696"/>
+            <a:off x="731519" y="2606040"/>
+            <a:ext cx="10673791" cy="731520"/>
           </a:xfrm>
           <a:prstGeom prst="rect">
             <a:avLst/>
@@ -5200,27 +5287,172 @@
           <a:p>
             <a:pPr algn="l"/>
             <a:r>
-              <a:rPr sz="1200" b="0" i="0">
-                <a:solidFill>
-                  <a:srgbClr val="6B6690"/>
+              <a:rPr sz="4000" b="0" i="0">
+                <a:solidFill>
+                  <a:srgbClr val="FFFFFF"/>
+                </a:solidFill>
+                <a:latin typeface="Georgia"/>
+              </a:rPr>
+              <a:t>The handoff and the close</a:t>
+            </a:r>
+          </a:p>
+        </p:txBody>
+      </p:sp>
+      <p:sp>
+        <p:nvSpPr>
+          <p:cNvPr id="9" name="TextBox 8"/>
+          <p:cNvSpPr txBox="1"/>
+          <p:nvPr/>
+        </p:nvSpPr>
+        <p:spPr>
+          <a:xfrm>
+            <a:off x="731519" y="3520440"/>
+            <a:ext cx="9509760" cy="284226"/>
+          </a:xfrm>
+          <a:prstGeom prst="rect">
+            <a:avLst/>
+          </a:prstGeom>
+          <a:noFill/>
+        </p:spPr>
+        <p:txBody>
+          <a:bodyPr wrap="square" anchor="t" lIns="0" rIns="0" tIns="0" bIns="0">
+            <a:spAutoFit/>
+          </a:bodyPr>
+          <a:lstStyle/>
+          <a:p>
+            <a:pPr algn="l"/>
+            <a:r>
+              <a:rPr sz="1500" b="0" i="0">
+                <a:solidFill>
+                  <a:srgbClr val="E4E1F1"/>
                 </a:solidFill>
                 <a:latin typeface="Calibri"/>
               </a:rPr>
-              <a:t>What the trainer says, word for word, before the faculty takes over.</a:t>
-            </a:r>
-          </a:p>
-        </p:txBody>
-      </p:sp>
-      <p:sp>
-        <p:nvSpPr>
-          <p:cNvPr id="9" name="Rounded Rectangle 8"/>
+              <a:t>What does the next session take from here, and what does the room take home?</a:t>
+            </a:r>
+          </a:p>
+        </p:txBody>
+      </p:sp>
+      <p:sp>
+        <p:nvSpPr>
+          <p:cNvPr id="10" name="Rounded Rectangle 9"/>
           <p:cNvSpPr/>
           <p:nvPr/>
         </p:nvSpPr>
         <p:spPr>
           <a:xfrm>
-            <a:off x="530352" y="1956816"/>
-            <a:ext cx="45720" cy="1320799"/>
+            <a:off x="731519" y="5074920"/>
+            <a:ext cx="1964591" cy="310896"/>
+          </a:xfrm>
+          <a:prstGeom prst="roundRect">
+            <a:avLst>
+              <a:gd name="adj" fmla="val 50000"/>
+            </a:avLst>
+          </a:prstGeom>
+          <a:noFill/>
+          <a:ln w="9525">
+            <a:solidFill>
+              <a:srgbClr val="CFC9EE"/>
+            </a:solidFill>
+          </a:ln>
+          <a:effectLst/>
+        </p:spPr>
+        <p:style>
+          <a:lnRef idx="1">
+            <a:schemeClr val="accent1"/>
+          </a:lnRef>
+          <a:fillRef idx="3">
+            <a:schemeClr val="accent1"/>
+          </a:fillRef>
+          <a:effectRef idx="2">
+            <a:schemeClr val="accent1"/>
+          </a:effectRef>
+          <a:fontRef idx="minor">
+            <a:schemeClr val="lt1"/>
+          </a:fontRef>
+        </p:style>
+        <p:txBody>
+          <a:bodyPr rtlCol="0" anchor="ctr" wrap="none" lIns="25400" rIns="25400" tIns="0" bIns="0"/>
+          <a:lstStyle/>
+          <a:p>
+            <a:pPr algn="ctr"/>
+            <a:r>
+              <a:rPr sz="850" b="0">
+                <a:solidFill>
+                  <a:srgbClr val="CFC9EE"/>
+                </a:solidFill>
+                <a:latin typeface="Calibri"/>
+              </a:rPr>
+              <a:t>Which strip would you ship?</a:t>
+            </a:r>
+          </a:p>
+        </p:txBody>
+      </p:sp>
+      <p:sp>
+        <p:nvSpPr>
+          <p:cNvPr id="11" name="Rounded Rectangle 10"/>
+          <p:cNvSpPr/>
+          <p:nvPr/>
+        </p:nvSpPr>
+        <p:spPr>
+          <a:xfrm>
+            <a:off x="2805839" y="5074920"/>
+            <a:ext cx="1431647" cy="310896"/>
+          </a:xfrm>
+          <a:prstGeom prst="roundRect">
+            <a:avLst>
+              <a:gd name="adj" fmla="val 50000"/>
+            </a:avLst>
+          </a:prstGeom>
+          <a:noFill/>
+          <a:ln w="9525">
+            <a:solidFill>
+              <a:srgbClr val="CFC9EE"/>
+            </a:solidFill>
+          </a:ln>
+          <a:effectLst/>
+        </p:spPr>
+        <p:style>
+          <a:lnRef idx="1">
+            <a:schemeClr val="accent1"/>
+          </a:lnRef>
+          <a:fillRef idx="3">
+            <a:schemeClr val="accent1"/>
+          </a:fillRef>
+          <a:effectRef idx="2">
+            <a:schemeClr val="accent1"/>
+          </a:effectRef>
+          <a:fontRef idx="minor">
+            <a:schemeClr val="lt1"/>
+          </a:fontRef>
+        </p:style>
+        <p:txBody>
+          <a:bodyPr rtlCol="0" anchor="ctr" wrap="none" lIns="25400" rIns="25400" tIns="0" bIns="0"/>
+          <a:lstStyle/>
+          <a:p>
+            <a:pPr algn="ctr"/>
+            <a:r>
+              <a:rPr sz="850" b="0">
+                <a:solidFill>
+                  <a:srgbClr val="CFC9EE"/>
+                </a:solidFill>
+                <a:latin typeface="Calibri"/>
+              </a:rPr>
+              <a:t>The interview room</a:t>
+            </a:r>
+          </a:p>
+        </p:txBody>
+      </p:sp>
+      <p:sp>
+        <p:nvSpPr>
+          <p:cNvPr id="12" name="Rounded Rectangle 11"/>
+          <p:cNvSpPr/>
+          <p:nvPr/>
+        </p:nvSpPr>
+        <p:spPr>
+          <a:xfrm>
+            <a:off x="4347214" y="5074920"/>
+            <a:ext cx="1846159" cy="310896"/>
           </a:xfrm>
           <a:prstGeom prst="roundRect">
             <a:avLst>
@@ -5250,23 +5482,32 @@
           </a:fontRef>
         </p:style>
         <p:txBody>
-          <a:bodyPr rtlCol="0" anchor="ctr" wrap="square"/>
+          <a:bodyPr rtlCol="0" anchor="ctr" wrap="none" lIns="25400" rIns="25400" tIns="0" bIns="0"/>
           <a:lstStyle/>
           <a:p>
             <a:pPr algn="ctr"/>
-          </a:p>
-        </p:txBody>
-      </p:sp>
-      <p:sp>
-        <p:nvSpPr>
-          <p:cNvPr id="10" name="TextBox 9"/>
-          <p:cNvSpPr txBox="1"/>
-          <p:nvPr/>
-        </p:nvSpPr>
-        <p:spPr>
-          <a:xfrm>
-            <a:off x="786384" y="1956816"/>
-            <a:ext cx="10820095" cy="1320799"/>
+            <a:r>
+              <a:rPr sz="850" b="1">
+                <a:solidFill>
+                  <a:srgbClr val="1A0F5C"/>
+                </a:solidFill>
+                <a:latin typeface="Calibri"/>
+              </a:rPr>
+              <a:t>The handoff and the close</a:t>
+            </a:r>
+          </a:p>
+        </p:txBody>
+      </p:sp>
+      <p:sp>
+        <p:nvSpPr>
+          <p:cNvPr id="13" name="TextBox 12"/>
+          <p:cNvSpPr txBox="1"/>
+          <p:nvPr/>
+        </p:nvSpPr>
+        <p:spPr>
+          <a:xfrm>
+            <a:off x="530352" y="6437376"/>
+            <a:ext cx="9667951" cy="160401"/>
           </a:xfrm>
           <a:prstGeom prst="rect">
             <a:avLst/>
@@ -5279,258 +5520,22 @@
           </a:bodyPr>
           <a:lstStyle/>
           <a:p>
-            <a:r>
-              <a:rPr sz="1600" b="0" i="1">
-                <a:solidFill>
-                  <a:srgbClr val="1A0F5C"/>
-                </a:solidFill>
-                <a:latin typeface="Georgia"/>
-              </a:rPr>
-              <a:t>You counted support, confidence and lift on twelve carts and on forty thousand. The next 120 minutes show the same three numbers as probabilities: a lift near one is independence made visible, which is what milk showed you. The support floor you set is what lets an algorithm skip counting every combination.</a:t>
-            </a:r>
-          </a:p>
-        </p:txBody>
-      </p:sp>
-      <p:sp>
-        <p:nvSpPr>
-          <p:cNvPr id="11" name="Oval 10"/>
-          <p:cNvSpPr/>
-          <p:nvPr/>
-        </p:nvSpPr>
-        <p:spPr>
-          <a:xfrm>
-            <a:off x="530352" y="6492240"/>
-            <a:ext cx="64008" cy="64008"/>
-          </a:xfrm>
-          <a:prstGeom prst="ellipse">
-            <a:avLst/>
-          </a:prstGeom>
-          <a:solidFill>
-            <a:srgbClr val="CFC9EE"/>
-          </a:solidFill>
-          <a:ln>
-            <a:noFill/>
-          </a:ln>
-          <a:effectLst/>
-        </p:spPr>
-        <p:style>
-          <a:lnRef idx="1">
-            <a:schemeClr val="accent1"/>
-          </a:lnRef>
-          <a:fillRef idx="3">
-            <a:schemeClr val="accent1"/>
-          </a:fillRef>
-          <a:effectRef idx="2">
-            <a:schemeClr val="accent1"/>
-          </a:effectRef>
-          <a:fontRef idx="minor">
-            <a:schemeClr val="lt1"/>
-          </a:fontRef>
-        </p:style>
-        <p:txBody>
-          <a:bodyPr rtlCol="0" anchor="ctr" wrap="square"/>
-          <a:lstStyle/>
-          <a:p>
-            <a:pPr algn="ctr"/>
-          </a:p>
-        </p:txBody>
-      </p:sp>
-      <p:sp>
-        <p:nvSpPr>
-          <p:cNvPr id="12" name="TextBox 11"/>
-          <p:cNvSpPr txBox="1"/>
-          <p:nvPr/>
-        </p:nvSpPr>
-        <p:spPr>
-          <a:xfrm>
-            <a:off x="640080" y="6437376"/>
-            <a:ext cx="1746504" cy="152146"/>
-          </a:xfrm>
-          <a:prstGeom prst="rect">
-            <a:avLst/>
-          </a:prstGeom>
-          <a:noFill/>
-        </p:spPr>
-        <p:txBody>
-          <a:bodyPr wrap="square" anchor="t" lIns="0" rIns="0" tIns="0" bIns="0">
-            <a:spAutoFit/>
-          </a:bodyPr>
-          <a:lstStyle/>
-          <a:p>
             <a:pPr algn="l"/>
             <a:r>
-              <a:rPr sz="700" b="0" i="0">
-                <a:solidFill>
-                  <a:srgbClr val="6B6690"/>
+              <a:rPr sz="750" b="0" i="0">
+                <a:solidFill>
+                  <a:srgbClr val="CFC9EE"/>
                 </a:solidFill>
                 <a:latin typeface="Calibri"/>
               </a:rPr>
-              <a:t>Pick three slots and defend them</a:t>
-            </a:r>
-          </a:p>
-        </p:txBody>
-      </p:sp>
-      <p:sp>
-        <p:nvSpPr>
-          <p:cNvPr id="13" name="Oval 12"/>
-          <p:cNvSpPr/>
-          <p:nvPr/>
-        </p:nvSpPr>
-        <p:spPr>
-          <a:xfrm>
-            <a:off x="2478024" y="6492240"/>
-            <a:ext cx="64008" cy="64008"/>
-          </a:xfrm>
-          <a:prstGeom prst="ellipse">
-            <a:avLst/>
-          </a:prstGeom>
-          <a:solidFill>
-            <a:srgbClr val="CFC9EE"/>
-          </a:solidFill>
-          <a:ln>
-            <a:noFill/>
-          </a:ln>
-          <a:effectLst/>
-        </p:spPr>
-        <p:style>
-          <a:lnRef idx="1">
-            <a:schemeClr val="accent1"/>
-          </a:lnRef>
-          <a:fillRef idx="3">
-            <a:schemeClr val="accent1"/>
-          </a:fillRef>
-          <a:effectRef idx="2">
-            <a:schemeClr val="accent1"/>
-          </a:effectRef>
-          <a:fontRef idx="minor">
-            <a:schemeClr val="lt1"/>
-          </a:fontRef>
-        </p:style>
-        <p:txBody>
-          <a:bodyPr rtlCol="0" anchor="ctr" wrap="square"/>
-          <a:lstStyle/>
-          <a:p>
-            <a:pPr algn="ctr"/>
+              <a:t>Week 4 Day 3: what goes with what, beyond chance</a:t>
+            </a:r>
           </a:p>
         </p:txBody>
       </p:sp>
       <p:sp>
         <p:nvSpPr>
           <p:cNvPr id="14" name="TextBox 13"/>
-          <p:cNvSpPr txBox="1"/>
-          <p:nvPr/>
-        </p:nvSpPr>
-        <p:spPr>
-          <a:xfrm>
-            <a:off x="2587752" y="6437376"/>
-            <a:ext cx="1976532" cy="152146"/>
-          </a:xfrm>
-          <a:prstGeom prst="rect">
-            <a:avLst/>
-          </a:prstGeom>
-          <a:noFill/>
-        </p:spPr>
-        <p:txBody>
-          <a:bodyPr wrap="square" anchor="t" lIns="0" rIns="0" tIns="0" bIns="0">
-            <a:spAutoFit/>
-          </a:bodyPr>
-          <a:lstStyle/>
-          <a:p>
-            <a:pPr algn="l"/>
-            <a:r>
-              <a:rPr sz="700" b="0" i="0">
-                <a:solidFill>
-                  <a:srgbClr val="6B6690"/>
-                </a:solidFill>
-                <a:latin typeface="Calibri"/>
-              </a:rPr>
-              <a:t>The interview question the day equips</a:t>
-            </a:r>
-          </a:p>
-        </p:txBody>
-      </p:sp>
-      <p:sp>
-        <p:nvSpPr>
-          <p:cNvPr id="15" name="Oval 14"/>
-          <p:cNvSpPr/>
-          <p:nvPr/>
-        </p:nvSpPr>
-        <p:spPr>
-          <a:xfrm>
-            <a:off x="4655724" y="6492240"/>
-            <a:ext cx="64008" cy="64008"/>
-          </a:xfrm>
-          <a:prstGeom prst="ellipse">
-            <a:avLst/>
-          </a:prstGeom>
-          <a:solidFill>
-            <a:srgbClr val="5B3FD6"/>
-          </a:solidFill>
-          <a:ln>
-            <a:noFill/>
-          </a:ln>
-          <a:effectLst/>
-        </p:spPr>
-        <p:style>
-          <a:lnRef idx="1">
-            <a:schemeClr val="accent1"/>
-          </a:lnRef>
-          <a:fillRef idx="3">
-            <a:schemeClr val="accent1"/>
-          </a:fillRef>
-          <a:effectRef idx="2">
-            <a:schemeClr val="accent1"/>
-          </a:effectRef>
-          <a:fontRef idx="minor">
-            <a:schemeClr val="lt1"/>
-          </a:fontRef>
-        </p:style>
-        <p:txBody>
-          <a:bodyPr rtlCol="0" anchor="ctr" wrap="square"/>
-          <a:lstStyle/>
-          <a:p>
-            <a:pPr algn="ctr"/>
-          </a:p>
-        </p:txBody>
-      </p:sp>
-      <p:sp>
-        <p:nvSpPr>
-          <p:cNvPr id="16" name="TextBox 15"/>
-          <p:cNvSpPr txBox="1"/>
-          <p:nvPr/>
-        </p:nvSpPr>
-        <p:spPr>
-          <a:xfrm>
-            <a:off x="4765452" y="6437376"/>
-            <a:ext cx="2194560" cy="267716"/>
-          </a:xfrm>
-          <a:prstGeom prst="rect">
-            <a:avLst/>
-          </a:prstGeom>
-          <a:noFill/>
-        </p:spPr>
-        <p:txBody>
-          <a:bodyPr wrap="square" anchor="t" lIns="0" rIns="0" tIns="0" bIns="0">
-            <a:spAutoFit/>
-          </a:bodyPr>
-          <a:lstStyle/>
-          <a:p>
-            <a:pPr algn="l"/>
-            <a:r>
-              <a:rPr sz="700" b="1" i="0">
-                <a:solidFill>
-                  <a:srgbClr val="5B3FD6"/>
-                </a:solidFill>
-                <a:latin typeface="Calibri"/>
-              </a:rPr>
-              <a:t>The handoff into the W4-2 faculty block (tentative)</a:t>
-            </a:r>
-          </a:p>
-        </p:txBody>
-      </p:sp>
-      <p:sp>
-        <p:nvSpPr>
-          <p:cNvPr id="17" name="TextBox 16"/>
           <p:cNvSpPr txBox="1"/>
           <p:nvPr/>
         </p:nvSpPr>
@@ -5554,11 +5559,11 @@
             <a:r>
               <a:rPr sz="750" b="0" i="0">
                 <a:solidFill>
-                  <a:srgbClr val="6B6690"/>
+                  <a:srgbClr val="CFC9EE"/>
                 </a:solidFill>
                 <a:latin typeface="Calibri"/>
               </a:rPr>
-              <a:t>S45  ·  10 / 11</a:t>
+              <a:t>10 / 13</a:t>
             </a:r>
           </a:p>
         </p:txBody>
@@ -5764,7 +5769,7 @@
                 </a:solidFill>
                 <a:latin typeface="Georgia"/>
               </a:rPr>
-              <a:t>Kahoot and close</a:t>
+              <a:t>Handoff: lift read as probability, next</a:t>
             </a:r>
           </a:p>
         </p:txBody>
@@ -5799,23 +5804,142 @@
                 </a:solidFill>
                 <a:latin typeface="Calibri"/>
               </a:rPr>
-              <a:t>The eight items of today's ungraded quiz.</a:t>
-            </a:r>
-          </a:p>
-        </p:txBody>
-      </p:sp>
-      <p:sp>
-        <p:nvSpPr>
-          <p:cNvPr id="9" name="Rectangle 8"/>
+              <a:t>What does the IITGN faculty session (tentative) pick up from the morning?</a:t>
+            </a:r>
+          </a:p>
+        </p:txBody>
+      </p:sp>
+      <p:sp>
+        <p:nvSpPr>
+          <p:cNvPr id="9" name="Rounded Rectangle 8"/>
           <p:cNvSpPr/>
           <p:nvPr/>
         </p:nvSpPr>
         <p:spPr>
           <a:xfrm>
-            <a:off x="1146028" y="2523744"/>
-            <a:ext cx="9899637" cy="18288"/>
-          </a:xfrm>
-          <a:prstGeom prst="rect">
+            <a:off x="530352" y="1956816"/>
+            <a:ext cx="45720" cy="1036319"/>
+          </a:xfrm>
+          <a:prstGeom prst="roundRect">
+            <a:avLst>
+              <a:gd name="adj" fmla="val 50000"/>
+            </a:avLst>
+          </a:prstGeom>
+          <a:solidFill>
+            <a:srgbClr val="D9A7FF"/>
+          </a:solidFill>
+          <a:ln>
+            <a:noFill/>
+          </a:ln>
+          <a:effectLst/>
+        </p:spPr>
+        <p:style>
+          <a:lnRef idx="1">
+            <a:schemeClr val="accent1"/>
+          </a:lnRef>
+          <a:fillRef idx="3">
+            <a:schemeClr val="accent1"/>
+          </a:fillRef>
+          <a:effectRef idx="2">
+            <a:schemeClr val="accent1"/>
+          </a:effectRef>
+          <a:fontRef idx="minor">
+            <a:schemeClr val="lt1"/>
+          </a:fontRef>
+        </p:style>
+        <p:txBody>
+          <a:bodyPr rtlCol="0" anchor="ctr" wrap="square"/>
+          <a:lstStyle/>
+          <a:p>
+            <a:pPr algn="ctr"/>
+          </a:p>
+        </p:txBody>
+      </p:sp>
+      <p:sp>
+        <p:nvSpPr>
+          <p:cNvPr id="10" name="TextBox 9"/>
+          <p:cNvSpPr txBox="1"/>
+          <p:nvPr/>
+        </p:nvSpPr>
+        <p:spPr>
+          <a:xfrm>
+            <a:off x="786384" y="1956816"/>
+            <a:ext cx="10820095" cy="1036319"/>
+          </a:xfrm>
+          <a:prstGeom prst="rect">
+            <a:avLst/>
+          </a:prstGeom>
+          <a:noFill/>
+        </p:spPr>
+        <p:txBody>
+          <a:bodyPr wrap="square" anchor="t" lIns="0" rIns="0" tIns="0" bIns="0">
+            <a:spAutoFit/>
+          </a:bodyPr>
+          <a:lstStyle/>
+          <a:p>
+            <a:r>
+              <a:rPr sz="1600" b="0" i="1">
+                <a:solidFill>
+                  <a:srgbClr val="1A0F5C"/>
+                </a:solidFill>
+                <a:latin typeface="Georgia"/>
+              </a:rPr>
+              <a:t>You counted lift on twelve carts and on forty thousand. The next 120 minutes show the same three numbers as probabilities: a lift near one is independence made visible, which is what milk showed you, and the support floor you set is what lets an algorithm skip counting every combination.</a:t>
+            </a:r>
+          </a:p>
+        </p:txBody>
+      </p:sp>
+      <p:sp>
+        <p:nvSpPr>
+          <p:cNvPr id="11" name="TextBox 10"/>
+          <p:cNvSpPr txBox="1"/>
+          <p:nvPr/>
+        </p:nvSpPr>
+        <p:spPr>
+          <a:xfrm>
+            <a:off x="530352" y="3139440"/>
+            <a:ext cx="11130991" cy="495807"/>
+          </a:xfrm>
+          <a:prstGeom prst="rect">
+            <a:avLst/>
+          </a:prstGeom>
+          <a:noFill/>
+        </p:spPr>
+        <p:txBody>
+          <a:bodyPr wrap="square" anchor="t" lIns="0" rIns="0" tIns="0" bIns="0">
+            <a:spAutoFit/>
+          </a:bodyPr>
+          <a:lstStyle/>
+          <a:p>
+            <a:pPr>
+              <a:spcAft>
+                <a:spcPts val="800"/>
+              </a:spcAft>
+            </a:pPr>
+            <a:r>
+              <a:rPr sz="1600" b="0" i="0">
+                <a:solidFill>
+                  <a:srgbClr val="1A1440"/>
+                </a:solidFill>
+                <a:latin typeface="Calibri"/>
+              </a:rPr>
+              <a:t>The IITGN faculty session is tentative until IIT Gandhinagar confirms it.</a:t>
+            </a:r>
+          </a:p>
+        </p:txBody>
+      </p:sp>
+      <p:sp>
+        <p:nvSpPr>
+          <p:cNvPr id="12" name="Oval 11"/>
+          <p:cNvSpPr/>
+          <p:nvPr/>
+        </p:nvSpPr>
+        <p:spPr>
+          <a:xfrm>
+            <a:off x="530352" y="6492240"/>
+            <a:ext cx="64008" cy="64008"/>
+          </a:xfrm>
+          <a:prstGeom prst="ellipse">
             <a:avLst/>
           </a:prstGeom>
           <a:solidFill>
@@ -5850,14 +5974,14 @@
       </p:sp>
       <p:sp>
         <p:nvSpPr>
-          <p:cNvPr id="10" name="TextBox 9"/>
-          <p:cNvSpPr txBox="1"/>
-          <p:nvPr/>
-        </p:nvSpPr>
-        <p:spPr>
-          <a:xfrm>
-            <a:off x="530352" y="1956816"/>
-            <a:ext cx="1231353" cy="168656"/>
+          <p:cNvPr id="13" name="TextBox 12"/>
+          <p:cNvSpPr txBox="1"/>
+          <p:nvPr/>
+        </p:nvSpPr>
+        <p:spPr>
+          <a:xfrm>
+            <a:off x="640080" y="6437376"/>
+            <a:ext cx="1516475" cy="152146"/>
           </a:xfrm>
           <a:prstGeom prst="rect">
             <a:avLst/>
@@ -5870,29 +5994,108 @@
           </a:bodyPr>
           <a:lstStyle/>
           <a:p>
+            <a:pPr algn="l"/>
+            <a:r>
+              <a:rPr sz="700" b="0" i="0">
+                <a:solidFill>
+                  <a:srgbClr val="6B6690"/>
+                </a:solidFill>
+                <a:latin typeface="Calibri"/>
+              </a:rPr>
+              <a:t>Which strip would you ship?</a:t>
+            </a:r>
+          </a:p>
+        </p:txBody>
+      </p:sp>
+      <p:sp>
+        <p:nvSpPr>
+          <p:cNvPr id="14" name="Oval 13"/>
+          <p:cNvSpPr/>
+          <p:nvPr/>
+        </p:nvSpPr>
+        <p:spPr>
+          <a:xfrm>
+            <a:off x="2247995" y="6492240"/>
+            <a:ext cx="64008" cy="64008"/>
+          </a:xfrm>
+          <a:prstGeom prst="ellipse">
+            <a:avLst/>
+          </a:prstGeom>
+          <a:solidFill>
+            <a:srgbClr val="CFC9EE"/>
+          </a:solidFill>
+          <a:ln>
+            <a:noFill/>
+          </a:ln>
+          <a:effectLst/>
+        </p:spPr>
+        <p:style>
+          <a:lnRef idx="1">
+            <a:schemeClr val="accent1"/>
+          </a:lnRef>
+          <a:fillRef idx="3">
+            <a:schemeClr val="accent1"/>
+          </a:fillRef>
+          <a:effectRef idx="2">
+            <a:schemeClr val="accent1"/>
+          </a:effectRef>
+          <a:fontRef idx="minor">
+            <a:schemeClr val="lt1"/>
+          </a:fontRef>
+        </p:style>
+        <p:txBody>
+          <a:bodyPr rtlCol="0" anchor="ctr" wrap="square"/>
+          <a:lstStyle/>
+          <a:p>
             <a:pPr algn="ctr"/>
-            <a:r>
-              <a:rPr sz="800" b="1" i="0" spc="250">
-                <a:solidFill>
-                  <a:srgbClr val="5B3FD6"/>
+          </a:p>
+        </p:txBody>
+      </p:sp>
+      <p:sp>
+        <p:nvSpPr>
+          <p:cNvPr id="15" name="TextBox 14"/>
+          <p:cNvSpPr txBox="1"/>
+          <p:nvPr/>
+        </p:nvSpPr>
+        <p:spPr>
+          <a:xfrm>
+            <a:off x="2357723" y="6437376"/>
+            <a:ext cx="1102423" cy="152146"/>
+          </a:xfrm>
+          <a:prstGeom prst="rect">
+            <a:avLst/>
+          </a:prstGeom>
+          <a:noFill/>
+        </p:spPr>
+        <p:txBody>
+          <a:bodyPr wrap="square" anchor="t" lIns="0" rIns="0" tIns="0" bIns="0">
+            <a:spAutoFit/>
+          </a:bodyPr>
+          <a:lstStyle/>
+          <a:p>
+            <a:pPr algn="l"/>
+            <a:r>
+              <a:rPr sz="700" b="0" i="0">
+                <a:solidFill>
+                  <a:srgbClr val="6B6690"/>
                 </a:solidFill>
                 <a:latin typeface="Calibri"/>
               </a:rPr>
-              <a:t>ITEM 1</a:t>
-            </a:r>
-          </a:p>
-        </p:txBody>
-      </p:sp>
-      <p:sp>
-        <p:nvSpPr>
-          <p:cNvPr id="11" name="Oval 10"/>
+              <a:t>The interview room</a:t>
+            </a:r>
+          </a:p>
+        </p:txBody>
+      </p:sp>
+      <p:sp>
+        <p:nvSpPr>
+          <p:cNvPr id="16" name="Oval 15"/>
           <p:cNvSpPr/>
           <p:nvPr/>
         </p:nvSpPr>
         <p:spPr>
           <a:xfrm>
-            <a:off x="1045444" y="2432304"/>
-            <a:ext cx="201168" cy="201168"/>
+            <a:off x="3551586" y="6492240"/>
+            <a:ext cx="64008" cy="64008"/>
           </a:xfrm>
           <a:prstGeom prst="ellipse">
             <a:avLst/>
@@ -5929,6 +6132,440 @@
       </p:sp>
       <p:sp>
         <p:nvSpPr>
+          <p:cNvPr id="17" name="TextBox 16"/>
+          <p:cNvSpPr txBox="1"/>
+          <p:nvPr/>
+        </p:nvSpPr>
+        <p:spPr>
+          <a:xfrm>
+            <a:off x="3661314" y="6437376"/>
+            <a:ext cx="1424463" cy="152146"/>
+          </a:xfrm>
+          <a:prstGeom prst="rect">
+            <a:avLst/>
+          </a:prstGeom>
+          <a:noFill/>
+        </p:spPr>
+        <p:txBody>
+          <a:bodyPr wrap="square" anchor="t" lIns="0" rIns="0" tIns="0" bIns="0">
+            <a:spAutoFit/>
+          </a:bodyPr>
+          <a:lstStyle/>
+          <a:p>
+            <a:pPr algn="l"/>
+            <a:r>
+              <a:rPr sz="700" b="1" i="0">
+                <a:solidFill>
+                  <a:srgbClr val="5B3FD6"/>
+                </a:solidFill>
+                <a:latin typeface="Calibri"/>
+              </a:rPr>
+              <a:t>The handoff and the close</a:t>
+            </a:r>
+          </a:p>
+        </p:txBody>
+      </p:sp>
+      <p:sp>
+        <p:nvSpPr>
+          <p:cNvPr id="18" name="TextBox 17"/>
+          <p:cNvSpPr txBox="1"/>
+          <p:nvPr/>
+        </p:nvSpPr>
+        <p:spPr>
+          <a:xfrm>
+            <a:off x="10198303" y="6437376"/>
+            <a:ext cx="1463040" cy="160401"/>
+          </a:xfrm>
+          <a:prstGeom prst="rect">
+            <a:avLst/>
+          </a:prstGeom>
+          <a:noFill/>
+        </p:spPr>
+        <p:txBody>
+          <a:bodyPr wrap="square" anchor="t" lIns="0" rIns="0" tIns="0" bIns="0">
+            <a:spAutoFit/>
+          </a:bodyPr>
+          <a:lstStyle/>
+          <a:p>
+            <a:pPr algn="r"/>
+            <a:r>
+              <a:rPr sz="750" b="0" i="0">
+                <a:solidFill>
+                  <a:srgbClr val="6B6690"/>
+                </a:solidFill>
+                <a:latin typeface="Calibri"/>
+              </a:rPr>
+              <a:t>S44  ·  11 / 13</a:t>
+            </a:r>
+          </a:p>
+        </p:txBody>
+      </p:sp>
+    </p:spTree>
+  </p:cSld>
+  <p:clrMapOvr>
+    <a:masterClrMapping/>
+  </p:clrMapOvr>
+</p:sld>
+</file>
+
+<file path=ppt/slides/slide12.xml><?xml version="1.0" encoding="utf-8"?>
+<p:sld xmlns:a="http://schemas.openxmlformats.org/drawingml/2006/main" xmlns:p="http://schemas.openxmlformats.org/presentationml/2006/main" xmlns:r="http://schemas.openxmlformats.org/officeDocument/2006/relationships">
+  <p:cSld>
+    <p:spTree>
+      <p:nvGrpSpPr>
+        <p:cNvPr id="1" name=""/>
+        <p:cNvGrpSpPr/>
+        <p:nvPr/>
+      </p:nvGrpSpPr>
+      <p:grpSpPr/>
+      <p:pic>
+        <p:nvPicPr>
+          <p:cNvPr id="2" name="Picture 1" descr="bg_light.jpg"/>
+          <p:cNvPicPr>
+            <a:picLocks noChangeAspect="1"/>
+          </p:cNvPicPr>
+          <p:nvPr/>
+        </p:nvPicPr>
+        <p:blipFill>
+          <a:blip r:embed="rId2"/>
+          <a:stretch>
+            <a:fillRect/>
+          </a:stretch>
+        </p:blipFill>
+        <p:spPr>
+          <a:xfrm>
+            <a:off x="0" y="0"/>
+            <a:ext cx="12191695" cy="6858000"/>
+          </a:xfrm>
+          <a:prstGeom prst="rect">
+            <a:avLst/>
+          </a:prstGeom>
+        </p:spPr>
+      </p:pic>
+      <p:pic>
+        <p:nvPicPr>
+          <p:cNvPr id="3" name="Picture 2" descr="iitgn_logo.png"/>
+          <p:cNvPicPr>
+            <a:picLocks noChangeAspect="1"/>
+          </p:cNvPicPr>
+          <p:nvPr/>
+        </p:nvPicPr>
+        <p:blipFill>
+          <a:blip r:embed="rId3"/>
+          <a:stretch>
+            <a:fillRect/>
+          </a:stretch>
+        </p:blipFill>
+        <p:spPr>
+          <a:xfrm>
+            <a:off x="530352" y="201168"/>
+            <a:ext cx="420624" cy="420624"/>
+          </a:xfrm>
+          <a:prstGeom prst="rect">
+            <a:avLst/>
+          </a:prstGeom>
+        </p:spPr>
+      </p:pic>
+      <p:sp>
+        <p:nvSpPr>
+          <p:cNvPr id="4" name="TextBox 3"/>
+          <p:cNvSpPr txBox="1"/>
+          <p:nvPr/>
+        </p:nvSpPr>
+        <p:spPr>
+          <a:xfrm>
+            <a:off x="1042416" y="228600"/>
+            <a:ext cx="5120640" cy="185166"/>
+          </a:xfrm>
+          <a:prstGeom prst="rect">
+            <a:avLst/>
+          </a:prstGeom>
+          <a:noFill/>
+        </p:spPr>
+        <p:txBody>
+          <a:bodyPr wrap="square" anchor="t" lIns="0" rIns="0" tIns="0" bIns="0">
+            <a:spAutoFit/>
+          </a:bodyPr>
+          <a:lstStyle/>
+          <a:p>
+            <a:pPr algn="l"/>
+            <a:r>
+              <a:rPr sz="900" b="1" i="0">
+                <a:solidFill>
+                  <a:srgbClr val="1A0F5C"/>
+                </a:solidFill>
+                <a:latin typeface="Calibri"/>
+              </a:rPr>
+              <a:t>Indian Institute of Technology Gandhinagar</a:t>
+            </a:r>
+          </a:p>
+        </p:txBody>
+      </p:sp>
+      <p:sp>
+        <p:nvSpPr>
+          <p:cNvPr id="5" name="TextBox 4"/>
+          <p:cNvSpPr txBox="1"/>
+          <p:nvPr/>
+        </p:nvSpPr>
+        <p:spPr>
+          <a:xfrm>
+            <a:off x="1042416" y="420623"/>
+            <a:ext cx="5852160" cy="127381"/>
+          </a:xfrm>
+          <a:prstGeom prst="rect">
+            <a:avLst/>
+          </a:prstGeom>
+          <a:noFill/>
+        </p:spPr>
+        <p:txBody>
+          <a:bodyPr wrap="square" anchor="t" lIns="0" rIns="0" tIns="0" bIns="0">
+            <a:spAutoFit/>
+          </a:bodyPr>
+          <a:lstStyle/>
+          <a:p>
+            <a:pPr algn="l"/>
+            <a:r>
+              <a:rPr sz="550" b="1" i="0" spc="300">
+                <a:solidFill>
+                  <a:srgbClr val="6B6690"/>
+                </a:solidFill>
+                <a:latin typeface="Calibri"/>
+              </a:rPr>
+              <a:t>ADMINISTERED THROUGH THE COMPETENCY ADVANCEMENT ACADEMY</a:t>
+            </a:r>
+          </a:p>
+        </p:txBody>
+      </p:sp>
+      <p:sp>
+        <p:nvSpPr>
+          <p:cNvPr id="6" name="TextBox 5"/>
+          <p:cNvSpPr txBox="1"/>
+          <p:nvPr/>
+        </p:nvSpPr>
+        <p:spPr>
+          <a:xfrm>
+            <a:off x="5992063" y="310896"/>
+            <a:ext cx="5669280" cy="127381"/>
+          </a:xfrm>
+          <a:prstGeom prst="rect">
+            <a:avLst/>
+          </a:prstGeom>
+          <a:noFill/>
+        </p:spPr>
+        <p:txBody>
+          <a:bodyPr wrap="square" anchor="t" lIns="0" rIns="0" tIns="0" bIns="0">
+            <a:spAutoFit/>
+          </a:bodyPr>
+          <a:lstStyle/>
+          <a:p>
+            <a:pPr algn="r"/>
+            <a:r>
+              <a:rPr sz="550" b="1" i="0" spc="300">
+                <a:solidFill>
+                  <a:srgbClr val="6B6690"/>
+                </a:solidFill>
+                <a:latin typeface="Calibri"/>
+              </a:rPr>
+              <a:t>WEEK 4  ·  DAY 3  ·  KALPA GLOBAL CAPABILITY CENTRE</a:t>
+            </a:r>
+          </a:p>
+        </p:txBody>
+      </p:sp>
+      <p:sp>
+        <p:nvSpPr>
+          <p:cNvPr id="7" name="TextBox 6"/>
+          <p:cNvSpPr txBox="1"/>
+          <p:nvPr/>
+        </p:nvSpPr>
+        <p:spPr>
+          <a:xfrm>
+            <a:off x="530352" y="676656"/>
+            <a:ext cx="11130991" cy="512064"/>
+          </a:xfrm>
+          <a:prstGeom prst="rect">
+            <a:avLst/>
+          </a:prstGeom>
+          <a:noFill/>
+        </p:spPr>
+        <p:txBody>
+          <a:bodyPr wrap="square" anchor="b" lIns="0" rIns="0" tIns="0" bIns="0">
+            <a:spAutoFit/>
+          </a:bodyPr>
+          <a:lstStyle/>
+          <a:p>
+            <a:pPr algn="l"/>
+            <a:r>
+              <a:rPr sz="2600" b="0" i="0">
+                <a:solidFill>
+                  <a:srgbClr val="1A0F5C"/>
+                </a:solidFill>
+                <a:latin typeface="Georgia"/>
+              </a:rPr>
+              <a:t>Eight questions, twenty seconds each</a:t>
+            </a:r>
+          </a:p>
+        </p:txBody>
+      </p:sp>
+      <p:sp>
+        <p:nvSpPr>
+          <p:cNvPr id="8" name="TextBox 7"/>
+          <p:cNvSpPr txBox="1"/>
+          <p:nvPr/>
+        </p:nvSpPr>
+        <p:spPr>
+          <a:xfrm>
+            <a:off x="530352" y="1243584"/>
+            <a:ext cx="11130991" cy="234696"/>
+          </a:xfrm>
+          <a:prstGeom prst="rect">
+            <a:avLst/>
+          </a:prstGeom>
+          <a:noFill/>
+        </p:spPr>
+        <p:txBody>
+          <a:bodyPr wrap="square" anchor="t" lIns="0" rIns="0" tIns="0" bIns="0">
+            <a:spAutoFit/>
+          </a:bodyPr>
+          <a:lstStyle/>
+          <a:p>
+            <a:pPr algn="l"/>
+            <a:r>
+              <a:rPr sz="1200" b="0" i="0">
+                <a:solidFill>
+                  <a:srgbClr val="6B6690"/>
+                </a:solidFill>
+                <a:latin typeface="Calibri"/>
+              </a:rPr>
+              <a:t>Can the room make the day's calls at speed?</a:t>
+            </a:r>
+          </a:p>
+        </p:txBody>
+      </p:sp>
+      <p:sp>
+        <p:nvSpPr>
+          <p:cNvPr id="9" name="Rectangle 8"/>
+          <p:cNvSpPr/>
+          <p:nvPr/>
+        </p:nvSpPr>
+        <p:spPr>
+          <a:xfrm>
+            <a:off x="1853145" y="2523744"/>
+            <a:ext cx="8485403" cy="18288"/>
+          </a:xfrm>
+          <a:prstGeom prst="rect">
+            <a:avLst/>
+          </a:prstGeom>
+          <a:solidFill>
+            <a:srgbClr val="CFC9EE"/>
+          </a:solidFill>
+          <a:ln>
+            <a:noFill/>
+          </a:ln>
+          <a:effectLst/>
+        </p:spPr>
+        <p:style>
+          <a:lnRef idx="1">
+            <a:schemeClr val="accent1"/>
+          </a:lnRef>
+          <a:fillRef idx="3">
+            <a:schemeClr val="accent1"/>
+          </a:fillRef>
+          <a:effectRef idx="2">
+            <a:schemeClr val="accent1"/>
+          </a:effectRef>
+          <a:fontRef idx="minor">
+            <a:schemeClr val="lt1"/>
+          </a:fontRef>
+        </p:style>
+        <p:txBody>
+          <a:bodyPr rtlCol="0" anchor="ctr" wrap="square"/>
+          <a:lstStyle/>
+          <a:p>
+            <a:pPr algn="ctr"/>
+          </a:p>
+        </p:txBody>
+      </p:sp>
+      <p:sp>
+        <p:nvSpPr>
+          <p:cNvPr id="10" name="TextBox 9"/>
+          <p:cNvSpPr txBox="1"/>
+          <p:nvPr/>
+        </p:nvSpPr>
+        <p:spPr>
+          <a:xfrm>
+            <a:off x="530352" y="1956816"/>
+            <a:ext cx="2645587" cy="168656"/>
+          </a:xfrm>
+          <a:prstGeom prst="rect">
+            <a:avLst/>
+          </a:prstGeom>
+          <a:noFill/>
+        </p:spPr>
+        <p:txBody>
+          <a:bodyPr wrap="square" anchor="t" lIns="0" rIns="0" tIns="0" bIns="0">
+            <a:spAutoFit/>
+          </a:bodyPr>
+          <a:lstStyle/>
+          <a:p>
+            <a:pPr algn="ctr"/>
+            <a:r>
+              <a:rPr sz="800" b="1" i="0" spc="250">
+                <a:solidFill>
+                  <a:srgbClr val="5B3FD6"/>
+                </a:solidFill>
+                <a:latin typeface="Calibri"/>
+              </a:rPr>
+              <a:t>ITEMS 1 TO 3</a:t>
+            </a:r>
+          </a:p>
+        </p:txBody>
+      </p:sp>
+      <p:sp>
+        <p:nvSpPr>
+          <p:cNvPr id="11" name="Oval 10"/>
+          <p:cNvSpPr/>
+          <p:nvPr/>
+        </p:nvSpPr>
+        <p:spPr>
+          <a:xfrm>
+            <a:off x="1752561" y="2432304"/>
+            <a:ext cx="201168" cy="201168"/>
+          </a:xfrm>
+          <a:prstGeom prst="ellipse">
+            <a:avLst/>
+          </a:prstGeom>
+          <a:solidFill>
+            <a:srgbClr val="5B3FD6"/>
+          </a:solidFill>
+          <a:ln>
+            <a:noFill/>
+          </a:ln>
+          <a:effectLst/>
+        </p:spPr>
+        <p:style>
+          <a:lnRef idx="1">
+            <a:schemeClr val="accent1"/>
+          </a:lnRef>
+          <a:fillRef idx="3">
+            <a:schemeClr val="accent1"/>
+          </a:fillRef>
+          <a:effectRef idx="2">
+            <a:schemeClr val="accent1"/>
+          </a:effectRef>
+          <a:fontRef idx="minor">
+            <a:schemeClr val="lt1"/>
+          </a:fontRef>
+        </p:style>
+        <p:txBody>
+          <a:bodyPr rtlCol="0" anchor="ctr" wrap="square"/>
+          <a:lstStyle/>
+          <a:p>
+            <a:pPr algn="ctr"/>
+          </a:p>
+        </p:txBody>
+      </p:sp>
+      <p:sp>
+        <p:nvSpPr>
           <p:cNvPr id="12" name="Rounded Rectangle 11"/>
           <p:cNvSpPr/>
           <p:nvPr/>
@@ -5936,7 +6573,7 @@
         <p:spPr>
           <a:xfrm>
             <a:off x="530352" y="2843784"/>
-            <a:ext cx="1231353" cy="2113280"/>
+            <a:ext cx="2645587" cy="1249680"/>
           </a:xfrm>
           <a:prstGeom prst="roundRect">
             <a:avLst>
@@ -5990,7 +6627,7 @@
         <p:spPr>
           <a:xfrm>
             <a:off x="694944" y="2990088"/>
-            <a:ext cx="902169" cy="465836"/>
+            <a:ext cx="2316403" cy="251205"/>
           </a:xfrm>
           <a:prstGeom prst="rect">
             <a:avLst/>
@@ -6011,7 +6648,7 @@
                 </a:solidFill>
                 <a:latin typeface="Calibri"/>
               </a:rPr>
-              <a:t>Milk and bread</a:t>
+              <a:t>The three counts</a:t>
             </a:r>
           </a:p>
         </p:txBody>
@@ -6024,8 +6661,8 @@
         </p:nvSpPr>
         <p:spPr>
           <a:xfrm>
-            <a:off x="694944" y="3492500"/>
-            <a:ext cx="902169" cy="1027176"/>
+            <a:off x="694944" y="3277870"/>
+            <a:ext cx="2316403" cy="531876"/>
           </a:xfrm>
           <a:prstGeom prst="rect">
             <a:avLst/>
@@ -6046,7 +6683,7 @@
                 </a:solidFill>
                 <a:latin typeface="Calibri"/>
               </a:rPr>
-              <a:t>Which number is 0.74 on 40,000 Pune carts? Confidence from bread to milk.</a:t>
+              <a:t>Match each count to its question; compute lift from three counts; a popular partner read right.</a:t>
             </a:r>
           </a:p>
         </p:txBody>
@@ -6059,8 +6696,8 @@
         </p:nvSpPr>
         <p:spPr>
           <a:xfrm>
-            <a:off x="1944585" y="1956816"/>
-            <a:ext cx="1231353" cy="168656"/>
+            <a:off x="3358819" y="1956816"/>
+            <a:ext cx="2645587" cy="168656"/>
           </a:xfrm>
           <a:prstGeom prst="rect">
             <a:avLst/>
@@ -6081,7 +6718,7 @@
                 </a:solidFill>
                 <a:latin typeface="Calibri"/>
               </a:rPr>
-              <a:t>ITEM 2</a:t>
+              <a:t>ITEMS 4 AND 5</a:t>
             </a:r>
           </a:p>
         </p:txBody>
@@ -6094,7 +6731,7 @@
         </p:nvSpPr>
         <p:spPr>
           <a:xfrm>
-            <a:off x="2459678" y="2432304"/>
+            <a:off x="4581029" y="2432304"/>
             <a:ext cx="201168" cy="201168"/>
           </a:xfrm>
           <a:prstGeom prst="ellipse">
@@ -6138,8 +6775,8 @@
         </p:nvSpPr>
         <p:spPr>
           <a:xfrm>
-            <a:off x="1944585" y="2843784"/>
-            <a:ext cx="1231353" cy="2113280"/>
+            <a:off x="3358819" y="2843784"/>
+            <a:ext cx="2645587" cy="1249680"/>
           </a:xfrm>
           <a:prstGeom prst="roundRect">
             <a:avLst>
@@ -6192,8 +6829,8 @@
         </p:nvSpPr>
         <p:spPr>
           <a:xfrm>
-            <a:off x="2109177" y="2990088"/>
-            <a:ext cx="902169" cy="465836"/>
+            <a:off x="3523411" y="2990088"/>
+            <a:ext cx="2316403" cy="251205"/>
           </a:xfrm>
           <a:prstGeom prst="rect">
             <a:avLst/>
@@ -6214,7 +6851,7 @@
                 </a:solidFill>
                 <a:latin typeface="Calibri"/>
               </a:rPr>
-              <a:t>Lift read right</a:t>
+              <a:t>The floor and the rupee</a:t>
             </a:r>
           </a:p>
         </p:txBody>
@@ -6227,8 +6864,8 @@
         </p:nvSpPr>
         <p:spPr>
           <a:xfrm>
-            <a:off x="2109177" y="3492500"/>
-            <a:ext cx="902169" cy="1027176"/>
+            <a:off x="3523411" y="3277870"/>
+            <a:ext cx="2316403" cy="366776"/>
           </a:xfrm>
           <a:prstGeom prst="rect">
             <a:avLst/>
@@ -6249,7 +6886,7 @@
                 </a:solidFill>
                 <a:latin typeface="Calibri"/>
               </a:rPr>
-              <a:t>A pair's lift of 1.04 means found together as often as independence predicts.</a:t>
+              <a:t>A strong thin pair; what a promotion is worth.</a:t>
             </a:r>
           </a:p>
         </p:txBody>
@@ -6262,8 +6899,8 @@
         </p:nvSpPr>
         <p:spPr>
           <a:xfrm>
-            <a:off x="3358819" y="1956816"/>
-            <a:ext cx="1231353" cy="168656"/>
+            <a:off x="6187287" y="1956816"/>
+            <a:ext cx="2645587" cy="168656"/>
           </a:xfrm>
           <a:prstGeom prst="rect">
             <a:avLst/>
@@ -6284,7 +6921,7 @@
                 </a:solidFill>
                 <a:latin typeface="Calibri"/>
               </a:rPr>
-              <a:t>ITEM 3</a:t>
+              <a:t>ITEM 6</a:t>
             </a:r>
           </a:p>
         </p:txBody>
@@ -6297,7 +6934,7 @@
         </p:nvSpPr>
         <p:spPr>
           <a:xfrm>
-            <a:off x="3873912" y="2432304"/>
+            <a:off x="7409497" y="2432304"/>
             <a:ext cx="201168" cy="201168"/>
           </a:xfrm>
           <a:prstGeom prst="ellipse">
@@ -6341,8 +6978,8 @@
         </p:nvSpPr>
         <p:spPr>
           <a:xfrm>
-            <a:off x="3358819" y="2843784"/>
-            <a:ext cx="1231353" cy="2113280"/>
+            <a:off x="6187287" y="2843784"/>
+            <a:ext cx="2645587" cy="1249680"/>
           </a:xfrm>
           <a:prstGeom prst="roundRect">
             <a:avLst>
@@ -6395,8 +7032,8 @@
         </p:nvSpPr>
         <p:spPr>
           <a:xfrm>
-            <a:off x="3523411" y="2990088"/>
-            <a:ext cx="902169" cy="251205"/>
+            <a:off x="6351879" y="2990088"/>
+            <a:ext cx="2316403" cy="251205"/>
           </a:xfrm>
           <a:prstGeom prst="rect">
             <a:avLst/>
@@ -6417,7 +7054,7 @@
                 </a:solidFill>
                 <a:latin typeface="Calibri"/>
               </a:rPr>
-              <a:t>The blend</a:t>
+              <a:t>Tuesday's return question</a:t>
             </a:r>
           </a:p>
         </p:txBody>
@@ -6430,8 +7067,8 @@
         </p:nvSpPr>
         <p:spPr>
           <a:xfrm>
-            <a:off x="3523411" y="3277870"/>
-            <a:ext cx="902169" cy="1357376"/>
+            <a:off x="6351879" y="3277870"/>
+            <a:ext cx="2316403" cy="366776"/>
           </a:xfrm>
           <a:prstGeom prst="rect">
             <a:avLst/>
@@ -6452,7 +7089,7 @@
                 </a:solidFill>
                 <a:latin typeface="Calibri"/>
               </a:rPr>
-              <a:t>50 percent milk-slot impressions at 1.2 CTR plus 50 percent other at 6.4 blends to 3.8 percent.</a:t>
+              <a:t>The four moves of an answer to an objection that is partly right.</a:t>
             </a:r>
           </a:p>
         </p:txBody>
@@ -6465,8 +7102,8 @@
         </p:nvSpPr>
         <p:spPr>
           <a:xfrm>
-            <a:off x="4773053" y="1956816"/>
-            <a:ext cx="1231353" cy="168656"/>
+            <a:off x="9015755" y="1956816"/>
+            <a:ext cx="2645587" cy="168656"/>
           </a:xfrm>
           <a:prstGeom prst="rect">
             <a:avLst/>
@@ -6487,7 +7124,7 @@
                 </a:solidFill>
                 <a:latin typeface="Calibri"/>
               </a:rPr>
-              <a:t>ITEM 4</a:t>
+              <a:t>ITEMS 7 AND 8</a:t>
             </a:r>
           </a:p>
         </p:txBody>
@@ -6500,7 +7137,7 @@
         </p:nvSpPr>
         <p:spPr>
           <a:xfrm>
-            <a:off x="5288146" y="2432304"/>
+            <a:off x="10237965" y="2432304"/>
             <a:ext cx="201168" cy="201168"/>
           </a:xfrm>
           <a:prstGeom prst="ellipse">
@@ -6544,8 +7181,8 @@
         </p:nvSpPr>
         <p:spPr>
           <a:xfrm>
-            <a:off x="4773053" y="2843784"/>
-            <a:ext cx="1231353" cy="2113280"/>
+            <a:off x="9015755" y="2843784"/>
+            <a:ext cx="2645587" cy="1249680"/>
           </a:xfrm>
           <a:prstGeom prst="roundRect">
             <a:avLst>
@@ -6598,8 +7235,8 @@
         </p:nvSpPr>
         <p:spPr>
           <a:xfrm>
-            <a:off x="4937645" y="2990088"/>
-            <a:ext cx="902169" cy="465836"/>
+            <a:off x="9180347" y="2990088"/>
+            <a:ext cx="2316403" cy="251205"/>
           </a:xfrm>
           <a:prstGeom prst="rect">
             <a:avLst/>
@@ -6620,7 +7257,7 @@
                 </a:solidFill>
                 <a:latin typeface="Calibri"/>
               </a:rPr>
-              <a:t>The thin pair</a:t>
+              <a:t>The fall and the doubts</a:t>
             </a:r>
           </a:p>
         </p:txBody>
@@ -6633,8 +7270,8 @@
         </p:nvSpPr>
         <p:spPr>
           <a:xfrm>
-            <a:off x="4937645" y="3492500"/>
-            <a:ext cx="902169" cy="1192276"/>
+            <a:off x="9180347" y="3277870"/>
+            <a:ext cx="2316403" cy="366776"/>
           </a:xfrm>
           <a:prstGeom prst="rect">
             <a:avLst/>
@@ -6655,21 +7292,65 @@
                 </a:solidFill>
                 <a:latin typeface="Calibri"/>
               </a:rPr>
-              <a:t>Ice cream and chocolate sauce at lift 4.47 on 100 carts: watch list, not promote.</a:t>
-            </a:r>
-          </a:p>
-        </p:txBody>
-      </p:sp>
-      <p:sp>
-        <p:nvSpPr>
-          <p:cNvPr id="30" name="TextBox 29"/>
-          <p:cNvSpPr txBox="1"/>
-          <p:nvPr/>
-        </p:nvSpPr>
-        <p:spPr>
-          <a:xfrm>
-            <a:off x="6187287" y="1956816"/>
-            <a:ext cx="1231353" cy="168656"/>
+              <a:t>A blended rate split; counting each customer once.</a:t>
+            </a:r>
+          </a:p>
+        </p:txBody>
+      </p:sp>
+      <p:sp>
+        <p:nvSpPr>
+          <p:cNvPr id="30" name="Oval 29"/>
+          <p:cNvSpPr/>
+          <p:nvPr/>
+        </p:nvSpPr>
+        <p:spPr>
+          <a:xfrm>
+            <a:off x="530352" y="6492240"/>
+            <a:ext cx="64008" cy="64008"/>
+          </a:xfrm>
+          <a:prstGeom prst="ellipse">
+            <a:avLst/>
+          </a:prstGeom>
+          <a:solidFill>
+            <a:srgbClr val="CFC9EE"/>
+          </a:solidFill>
+          <a:ln>
+            <a:noFill/>
+          </a:ln>
+          <a:effectLst/>
+        </p:spPr>
+        <p:style>
+          <a:lnRef idx="1">
+            <a:schemeClr val="accent1"/>
+          </a:lnRef>
+          <a:fillRef idx="3">
+            <a:schemeClr val="accent1"/>
+          </a:fillRef>
+          <a:effectRef idx="2">
+            <a:schemeClr val="accent1"/>
+          </a:effectRef>
+          <a:fontRef idx="minor">
+            <a:schemeClr val="lt1"/>
+          </a:fontRef>
+        </p:style>
+        <p:txBody>
+          <a:bodyPr rtlCol="0" anchor="ctr" wrap="square"/>
+          <a:lstStyle/>
+          <a:p>
+            <a:pPr algn="ctr"/>
+          </a:p>
+        </p:txBody>
+      </p:sp>
+      <p:sp>
+        <p:nvSpPr>
+          <p:cNvPr id="31" name="TextBox 30"/>
+          <p:cNvSpPr txBox="1"/>
+          <p:nvPr/>
+        </p:nvSpPr>
+        <p:spPr>
+          <a:xfrm>
+            <a:off x="640080" y="6437376"/>
+            <a:ext cx="1516475" cy="152146"/>
           </a:xfrm>
           <a:prstGeom prst="rect">
             <a:avLst/>
@@ -6682,29 +7363,108 @@
           </a:bodyPr>
           <a:lstStyle/>
           <a:p>
+            <a:pPr algn="l"/>
+            <a:r>
+              <a:rPr sz="700" b="0" i="0">
+                <a:solidFill>
+                  <a:srgbClr val="6B6690"/>
+                </a:solidFill>
+                <a:latin typeface="Calibri"/>
+              </a:rPr>
+              <a:t>Which strip would you ship?</a:t>
+            </a:r>
+          </a:p>
+        </p:txBody>
+      </p:sp>
+      <p:sp>
+        <p:nvSpPr>
+          <p:cNvPr id="32" name="Oval 31"/>
+          <p:cNvSpPr/>
+          <p:nvPr/>
+        </p:nvSpPr>
+        <p:spPr>
+          <a:xfrm>
+            <a:off x="2247995" y="6492240"/>
+            <a:ext cx="64008" cy="64008"/>
+          </a:xfrm>
+          <a:prstGeom prst="ellipse">
+            <a:avLst/>
+          </a:prstGeom>
+          <a:solidFill>
+            <a:srgbClr val="CFC9EE"/>
+          </a:solidFill>
+          <a:ln>
+            <a:noFill/>
+          </a:ln>
+          <a:effectLst/>
+        </p:spPr>
+        <p:style>
+          <a:lnRef idx="1">
+            <a:schemeClr val="accent1"/>
+          </a:lnRef>
+          <a:fillRef idx="3">
+            <a:schemeClr val="accent1"/>
+          </a:fillRef>
+          <a:effectRef idx="2">
+            <a:schemeClr val="accent1"/>
+          </a:effectRef>
+          <a:fontRef idx="minor">
+            <a:schemeClr val="lt1"/>
+          </a:fontRef>
+        </p:style>
+        <p:txBody>
+          <a:bodyPr rtlCol="0" anchor="ctr" wrap="square"/>
+          <a:lstStyle/>
+          <a:p>
             <a:pPr algn="ctr"/>
-            <a:r>
-              <a:rPr sz="800" b="1" i="0" spc="250">
-                <a:solidFill>
-                  <a:srgbClr val="5B3FD6"/>
+          </a:p>
+        </p:txBody>
+      </p:sp>
+      <p:sp>
+        <p:nvSpPr>
+          <p:cNvPr id="33" name="TextBox 32"/>
+          <p:cNvSpPr txBox="1"/>
+          <p:nvPr/>
+        </p:nvSpPr>
+        <p:spPr>
+          <a:xfrm>
+            <a:off x="2357723" y="6437376"/>
+            <a:ext cx="1102423" cy="152146"/>
+          </a:xfrm>
+          <a:prstGeom prst="rect">
+            <a:avLst/>
+          </a:prstGeom>
+          <a:noFill/>
+        </p:spPr>
+        <p:txBody>
+          <a:bodyPr wrap="square" anchor="t" lIns="0" rIns="0" tIns="0" bIns="0">
+            <a:spAutoFit/>
+          </a:bodyPr>
+          <a:lstStyle/>
+          <a:p>
+            <a:pPr algn="l"/>
+            <a:r>
+              <a:rPr sz="700" b="0" i="0">
+                <a:solidFill>
+                  <a:srgbClr val="6B6690"/>
                 </a:solidFill>
                 <a:latin typeface="Calibri"/>
               </a:rPr>
-              <a:t>ITEM 5</a:t>
-            </a:r>
-          </a:p>
-        </p:txBody>
-      </p:sp>
-      <p:sp>
-        <p:nvSpPr>
-          <p:cNvPr id="31" name="Oval 30"/>
+              <a:t>The interview room</a:t>
+            </a:r>
+          </a:p>
+        </p:txBody>
+      </p:sp>
+      <p:sp>
+        <p:nvSpPr>
+          <p:cNvPr id="34" name="Oval 33"/>
           <p:cNvSpPr/>
           <p:nvPr/>
         </p:nvSpPr>
         <p:spPr>
           <a:xfrm>
-            <a:off x="6702380" y="2432304"/>
-            <a:ext cx="201168" cy="201168"/>
+            <a:off x="3551586" y="6492240"/>
+            <a:ext cx="64008" cy="64008"/>
           </a:xfrm>
           <a:prstGeom prst="ellipse">
             <a:avLst/>
@@ -6741,35 +7501,340 @@
       </p:sp>
       <p:sp>
         <p:nvSpPr>
-          <p:cNvPr id="32" name="Rounded Rectangle 31"/>
+          <p:cNvPr id="35" name="TextBox 34"/>
+          <p:cNvSpPr txBox="1"/>
+          <p:nvPr/>
+        </p:nvSpPr>
+        <p:spPr>
+          <a:xfrm>
+            <a:off x="3661314" y="6437376"/>
+            <a:ext cx="1424463" cy="152146"/>
+          </a:xfrm>
+          <a:prstGeom prst="rect">
+            <a:avLst/>
+          </a:prstGeom>
+          <a:noFill/>
+        </p:spPr>
+        <p:txBody>
+          <a:bodyPr wrap="square" anchor="t" lIns="0" rIns="0" tIns="0" bIns="0">
+            <a:spAutoFit/>
+          </a:bodyPr>
+          <a:lstStyle/>
+          <a:p>
+            <a:pPr algn="l"/>
+            <a:r>
+              <a:rPr sz="700" b="1" i="0">
+                <a:solidFill>
+                  <a:srgbClr val="5B3FD6"/>
+                </a:solidFill>
+                <a:latin typeface="Calibri"/>
+              </a:rPr>
+              <a:t>The handoff and the close</a:t>
+            </a:r>
+          </a:p>
+        </p:txBody>
+      </p:sp>
+      <p:sp>
+        <p:nvSpPr>
+          <p:cNvPr id="36" name="TextBox 35"/>
+          <p:cNvSpPr txBox="1"/>
+          <p:nvPr/>
+        </p:nvSpPr>
+        <p:spPr>
+          <a:xfrm>
+            <a:off x="10198303" y="6437376"/>
+            <a:ext cx="1463040" cy="160401"/>
+          </a:xfrm>
+          <a:prstGeom prst="rect">
+            <a:avLst/>
+          </a:prstGeom>
+          <a:noFill/>
+        </p:spPr>
+        <p:txBody>
+          <a:bodyPr wrap="square" anchor="t" lIns="0" rIns="0" tIns="0" bIns="0">
+            <a:spAutoFit/>
+          </a:bodyPr>
+          <a:lstStyle/>
+          <a:p>
+            <a:pPr algn="r"/>
+            <a:r>
+              <a:rPr sz="750" b="0" i="0">
+                <a:solidFill>
+                  <a:srgbClr val="6B6690"/>
+                </a:solidFill>
+                <a:latin typeface="Calibri"/>
+              </a:rPr>
+              <a:t>S45  ·  12 / 13</a:t>
+            </a:r>
+          </a:p>
+        </p:txBody>
+      </p:sp>
+    </p:spTree>
+  </p:cSld>
+  <p:clrMapOvr>
+    <a:masterClrMapping/>
+  </p:clrMapOvr>
+</p:sld>
+</file>
+
+<file path=ppt/slides/slide13.xml><?xml version="1.0" encoding="utf-8"?>
+<p:sld xmlns:a="http://schemas.openxmlformats.org/drawingml/2006/main" xmlns:p="http://schemas.openxmlformats.org/presentationml/2006/main" xmlns:r="http://schemas.openxmlformats.org/officeDocument/2006/relationships">
+  <p:cSld>
+    <p:spTree>
+      <p:nvGrpSpPr>
+        <p:cNvPr id="1" name=""/>
+        <p:cNvGrpSpPr/>
+        <p:nvPr/>
+      </p:nvGrpSpPr>
+      <p:grpSpPr/>
+      <p:pic>
+        <p:nvPicPr>
+          <p:cNvPr id="2" name="Picture 1" descr="bg_light.jpg"/>
+          <p:cNvPicPr>
+            <a:picLocks noChangeAspect="1"/>
+          </p:cNvPicPr>
+          <p:nvPr/>
+        </p:nvPicPr>
+        <p:blipFill>
+          <a:blip r:embed="rId2"/>
+          <a:stretch>
+            <a:fillRect/>
+          </a:stretch>
+        </p:blipFill>
+        <p:spPr>
+          <a:xfrm>
+            <a:off x="0" y="0"/>
+            <a:ext cx="12191695" cy="6858000"/>
+          </a:xfrm>
+          <a:prstGeom prst="rect">
+            <a:avLst/>
+          </a:prstGeom>
+        </p:spPr>
+      </p:pic>
+      <p:pic>
+        <p:nvPicPr>
+          <p:cNvPr id="3" name="Picture 2" descr="iitgn_logo.png"/>
+          <p:cNvPicPr>
+            <a:picLocks noChangeAspect="1"/>
+          </p:cNvPicPr>
+          <p:nvPr/>
+        </p:nvPicPr>
+        <p:blipFill>
+          <a:blip r:embed="rId3"/>
+          <a:stretch>
+            <a:fillRect/>
+          </a:stretch>
+        </p:blipFill>
+        <p:spPr>
+          <a:xfrm>
+            <a:off x="530352" y="201168"/>
+            <a:ext cx="420624" cy="420624"/>
+          </a:xfrm>
+          <a:prstGeom prst="rect">
+            <a:avLst/>
+          </a:prstGeom>
+        </p:spPr>
+      </p:pic>
+      <p:sp>
+        <p:nvSpPr>
+          <p:cNvPr id="4" name="TextBox 3"/>
+          <p:cNvSpPr txBox="1"/>
+          <p:nvPr/>
+        </p:nvSpPr>
+        <p:spPr>
+          <a:xfrm>
+            <a:off x="1042416" y="228600"/>
+            <a:ext cx="5120640" cy="185166"/>
+          </a:xfrm>
+          <a:prstGeom prst="rect">
+            <a:avLst/>
+          </a:prstGeom>
+          <a:noFill/>
+        </p:spPr>
+        <p:txBody>
+          <a:bodyPr wrap="square" anchor="t" lIns="0" rIns="0" tIns="0" bIns="0">
+            <a:spAutoFit/>
+          </a:bodyPr>
+          <a:lstStyle/>
+          <a:p>
+            <a:pPr algn="l"/>
+            <a:r>
+              <a:rPr sz="900" b="1" i="0">
+                <a:solidFill>
+                  <a:srgbClr val="1A0F5C"/>
+                </a:solidFill>
+                <a:latin typeface="Calibri"/>
+              </a:rPr>
+              <a:t>Indian Institute of Technology Gandhinagar</a:t>
+            </a:r>
+          </a:p>
+        </p:txBody>
+      </p:sp>
+      <p:sp>
+        <p:nvSpPr>
+          <p:cNvPr id="5" name="TextBox 4"/>
+          <p:cNvSpPr txBox="1"/>
+          <p:nvPr/>
+        </p:nvSpPr>
+        <p:spPr>
+          <a:xfrm>
+            <a:off x="1042416" y="420623"/>
+            <a:ext cx="5852160" cy="127381"/>
+          </a:xfrm>
+          <a:prstGeom prst="rect">
+            <a:avLst/>
+          </a:prstGeom>
+          <a:noFill/>
+        </p:spPr>
+        <p:txBody>
+          <a:bodyPr wrap="square" anchor="t" lIns="0" rIns="0" tIns="0" bIns="0">
+            <a:spAutoFit/>
+          </a:bodyPr>
+          <a:lstStyle/>
+          <a:p>
+            <a:pPr algn="l"/>
+            <a:r>
+              <a:rPr sz="550" b="1" i="0" spc="300">
+                <a:solidFill>
+                  <a:srgbClr val="6B6690"/>
+                </a:solidFill>
+                <a:latin typeface="Calibri"/>
+              </a:rPr>
+              <a:t>ADMINISTERED THROUGH THE COMPETENCY ADVANCEMENT ACADEMY</a:t>
+            </a:r>
+          </a:p>
+        </p:txBody>
+      </p:sp>
+      <p:sp>
+        <p:nvSpPr>
+          <p:cNvPr id="6" name="TextBox 5"/>
+          <p:cNvSpPr txBox="1"/>
+          <p:nvPr/>
+        </p:nvSpPr>
+        <p:spPr>
+          <a:xfrm>
+            <a:off x="5992063" y="310896"/>
+            <a:ext cx="5669280" cy="127381"/>
+          </a:xfrm>
+          <a:prstGeom prst="rect">
+            <a:avLst/>
+          </a:prstGeom>
+          <a:noFill/>
+        </p:spPr>
+        <p:txBody>
+          <a:bodyPr wrap="square" anchor="t" lIns="0" rIns="0" tIns="0" bIns="0">
+            <a:spAutoFit/>
+          </a:bodyPr>
+          <a:lstStyle/>
+          <a:p>
+            <a:pPr algn="r"/>
+            <a:r>
+              <a:rPr sz="550" b="1" i="0" spc="300">
+                <a:solidFill>
+                  <a:srgbClr val="6B6690"/>
+                </a:solidFill>
+                <a:latin typeface="Calibri"/>
+              </a:rPr>
+              <a:t>WEEK 4  ·  DAY 3  ·  KALPA GLOBAL CAPABILITY CENTRE</a:t>
+            </a:r>
+          </a:p>
+        </p:txBody>
+      </p:sp>
+      <p:sp>
+        <p:nvSpPr>
+          <p:cNvPr id="7" name="TextBox 6"/>
+          <p:cNvSpPr txBox="1"/>
+          <p:nvPr/>
+        </p:nvSpPr>
+        <p:spPr>
+          <a:xfrm>
+            <a:off x="530352" y="676656"/>
+            <a:ext cx="11130991" cy="512064"/>
+          </a:xfrm>
+          <a:prstGeom prst="rect">
+            <a:avLst/>
+          </a:prstGeom>
+          <a:noFill/>
+        </p:spPr>
+        <p:txBody>
+          <a:bodyPr wrap="square" anchor="b" lIns="0" rIns="0" tIns="0" bIns="0">
+            <a:spAutoFit/>
+          </a:bodyPr>
+          <a:lstStyle/>
+          <a:p>
+            <a:pPr algn="l"/>
+            <a:r>
+              <a:rPr sz="2600" b="0" i="0">
+                <a:solidFill>
+                  <a:srgbClr val="1A0F5C"/>
+                </a:solidFill>
+                <a:latin typeface="Georgia"/>
+              </a:rPr>
+              <a:t>The sentence for Friday, and Thursday's question</a:t>
+            </a:r>
+          </a:p>
+        </p:txBody>
+      </p:sp>
+      <p:sp>
+        <p:nvSpPr>
+          <p:cNvPr id="8" name="TextBox 7"/>
+          <p:cNvSpPr txBox="1"/>
+          <p:nvPr/>
+        </p:nvSpPr>
+        <p:spPr>
+          <a:xfrm>
+            <a:off x="530352" y="1243584"/>
+            <a:ext cx="11130991" cy="234696"/>
+          </a:xfrm>
+          <a:prstGeom prst="rect">
+            <a:avLst/>
+          </a:prstGeom>
+          <a:noFill/>
+        </p:spPr>
+        <p:txBody>
+          <a:bodyPr wrap="square" anchor="t" lIns="0" rIns="0" tIns="0" bIns="0">
+            <a:spAutoFit/>
+          </a:bodyPr>
+          <a:lstStyle/>
+          <a:p>
+            <a:pPr algn="l"/>
+            <a:r>
+              <a:rPr sz="1200" b="0" i="0">
+                <a:solidFill>
+                  <a:srgbClr val="6B6690"/>
+                </a:solidFill>
+                <a:latin typeface="Calibri"/>
+              </a:rPr>
+              <a:t>What does the room say on Friday, and what comes next?</a:t>
+            </a:r>
+          </a:p>
+        </p:txBody>
+      </p:sp>
+      <p:sp>
+        <p:nvSpPr>
+          <p:cNvPr id="9" name="Rounded Rectangle 8"/>
           <p:cNvSpPr/>
           <p:nvPr/>
         </p:nvSpPr>
         <p:spPr>
           <a:xfrm>
-            <a:off x="6187287" y="2843784"/>
-            <a:ext cx="1231353" cy="2113280"/>
+            <a:off x="530352" y="1956816"/>
+            <a:ext cx="11130991" cy="1074420"/>
           </a:xfrm>
           <a:prstGeom prst="roundRect">
             <a:avLst>
-              <a:gd name="adj" fmla="val 5000"/>
+              <a:gd name="adj" fmla="val 8000"/>
             </a:avLst>
           </a:prstGeom>
           <a:solidFill>
-            <a:srgbClr val="FFFFFF"/>
+            <a:srgbClr val="F7F5FD"/>
           </a:solidFill>
           <a:ln w="9525">
             <a:solidFill>
               <a:srgbClr val="E4E1F1"/>
             </a:solidFill>
           </a:ln>
-          <a:effectLst>
-            <a:outerShdw blurRad="76200" dist="19050" dir="5400000" algn="bl" rotWithShape="0">
-              <a:srgbClr val="1A0F5C">
-                <a:alpha val="12000"/>
-              </a:srgbClr>
-            </a:outerShdw>
-          </a:effectLst>
+          <a:effectLst/>
         </p:spPr>
         <p:style>
           <a:lnRef idx="1">
@@ -6795,122 +7860,19 @@
       </p:sp>
       <p:sp>
         <p:nvSpPr>
-          <p:cNvPr id="33" name="TextBox 32"/>
-          <p:cNvSpPr txBox="1"/>
-          <p:nvPr/>
-        </p:nvSpPr>
-        <p:spPr>
-          <a:xfrm>
-            <a:off x="6351879" y="2990088"/>
-            <a:ext cx="902169" cy="251205"/>
-          </a:xfrm>
-          <a:prstGeom prst="rect">
-            <a:avLst/>
-          </a:prstGeom>
-          <a:noFill/>
-        </p:spPr>
-        <p:txBody>
-          <a:bodyPr wrap="square" anchor="t" lIns="0" rIns="0" tIns="0" bIns="0">
-            <a:spAutoFit/>
-          </a:bodyPr>
-          <a:lstStyle/>
-          <a:p>
-            <a:pPr algn="l"/>
-            <a:r>
-              <a:rPr sz="1300" b="1" i="0">
-                <a:solidFill>
-                  <a:srgbClr val="1A0F5C"/>
-                </a:solidFill>
-                <a:latin typeface="Calibri"/>
-              </a:rPr>
-              <a:t>The rupee</a:t>
-            </a:r>
-          </a:p>
-        </p:txBody>
-      </p:sp>
-      <p:sp>
-        <p:nvSpPr>
-          <p:cNvPr id="34" name="TextBox 33"/>
-          <p:cNvSpPr txBox="1"/>
-          <p:nvPr/>
-        </p:nvSpPr>
-        <p:spPr>
-          <a:xfrm>
-            <a:off x="6351879" y="3277870"/>
-            <a:ext cx="902169" cy="1192276"/>
-          </a:xfrm>
-          <a:prstGeom prst="rect">
-            <a:avLst/>
-          </a:prstGeom>
-          <a:noFill/>
-        </p:spPr>
-        <p:txBody>
-          <a:bodyPr wrap="square" anchor="t" lIns="0" rIns="0" tIns="0" bIns="0">
-            <a:spAutoFit/>
-          </a:bodyPr>
-          <a:lstStyle/>
-          <a:p>
-            <a:pPr algn="l"/>
-            <a:r>
-              <a:rPr sz="1000" b="0" i="0">
-                <a:solidFill>
-                  <a:srgbClr val="6B6690"/>
-                </a:solidFill>
-                <a:latin typeface="Calibri"/>
-              </a:rPr>
-              <a:t>Rs 14,040 a day per slot is the gap between a milk slot and a chance-beating slot.</a:t>
-            </a:r>
-          </a:p>
-        </p:txBody>
-      </p:sp>
-      <p:sp>
-        <p:nvSpPr>
-          <p:cNvPr id="35" name="TextBox 34"/>
-          <p:cNvSpPr txBox="1"/>
-          <p:nvPr/>
-        </p:nvSpPr>
-        <p:spPr>
-          <a:xfrm>
-            <a:off x="7601521" y="1956816"/>
-            <a:ext cx="1231353" cy="168656"/>
-          </a:xfrm>
-          <a:prstGeom prst="rect">
-            <a:avLst/>
-          </a:prstGeom>
-          <a:noFill/>
-        </p:spPr>
-        <p:txBody>
-          <a:bodyPr wrap="square" anchor="t" lIns="0" rIns="0" tIns="0" bIns="0">
-            <a:spAutoFit/>
-          </a:bodyPr>
-          <a:lstStyle/>
-          <a:p>
-            <a:pPr algn="ctr"/>
-            <a:r>
-              <a:rPr sz="800" b="1" i="0" spc="250">
-                <a:solidFill>
-                  <a:srgbClr val="5B3FD6"/>
-                </a:solidFill>
-                <a:latin typeface="Calibri"/>
-              </a:rPr>
-              <a:t>ITEM 6</a:t>
-            </a:r>
-          </a:p>
-        </p:txBody>
-      </p:sp>
-      <p:sp>
-        <p:nvSpPr>
-          <p:cNvPr id="36" name="Oval 35"/>
+          <p:cNvPr id="10" name="Rounded Rectangle 9"/>
           <p:cNvSpPr/>
           <p:nvPr/>
         </p:nvSpPr>
         <p:spPr>
           <a:xfrm>
-            <a:off x="8116614" y="2432304"/>
-            <a:ext cx="201168" cy="201168"/>
-          </a:xfrm>
-          <a:prstGeom prst="ellipse">
-            <a:avLst/>
+            <a:off x="676656" y="2084832"/>
+            <a:ext cx="45720" cy="818388"/>
+          </a:xfrm>
+          <a:prstGeom prst="roundRect">
+            <a:avLst>
+              <a:gd name="adj" fmla="val 50000"/>
+            </a:avLst>
           </a:prstGeom>
           <a:solidFill>
             <a:srgbClr val="5B3FD6"/>
@@ -6944,35 +7906,72 @@
       </p:sp>
       <p:sp>
         <p:nvSpPr>
-          <p:cNvPr id="37" name="Rounded Rectangle 36"/>
+          <p:cNvPr id="11" name="TextBox 10"/>
+          <p:cNvSpPr txBox="1"/>
+          <p:nvPr/>
+        </p:nvSpPr>
+        <p:spPr>
+          <a:xfrm>
+            <a:off x="877824" y="2075688"/>
+            <a:ext cx="10564063" cy="891540"/>
+          </a:xfrm>
+          <a:prstGeom prst="rect">
+            <a:avLst/>
+          </a:prstGeom>
+          <a:noFill/>
+        </p:spPr>
+        <p:txBody>
+          <a:bodyPr wrap="square" anchor="ctr" lIns="0" rIns="0" tIns="0" bIns="0">
+            <a:spAutoFit/>
+          </a:bodyPr>
+          <a:lstStyle/>
+          <a:p>
+            <a:r>
+              <a:rPr sz="1500" b="1">
+                <a:solidFill>
+                  <a:srgbClr val="5B3FD6"/>
+                </a:solidFill>
+                <a:latin typeface="Calibri"/>
+              </a:rPr>
+              <a:t>The sentence. </a:t>
+            </a:r>
+            <a:r>
+              <a:rPr sz="1500" b="0" i="0">
+                <a:solidFill>
+                  <a:srgbClr val="1A1440"/>
+                </a:solidFill>
+                <a:latin typeface="Calibri"/>
+              </a:rPr>
+              <a:t>"The click-through fell because the strip gave half its slots to milk, which shoppers buy anyway; ranked by lift above a 1 percent floor, the strip shows chips with cold drink, coriander with green chillies and bread with butter, and recovers about Rs 6.3 lakh a month."</a:t>
+            </a:r>
+          </a:p>
+        </p:txBody>
+      </p:sp>
+      <p:sp>
+        <p:nvSpPr>
+          <p:cNvPr id="12" name="Rounded Rectangle 11"/>
           <p:cNvSpPr/>
           <p:nvPr/>
         </p:nvSpPr>
         <p:spPr>
           <a:xfrm>
-            <a:off x="7601521" y="2843784"/>
-            <a:ext cx="1231353" cy="2113280"/>
+            <a:off x="530352" y="3195828"/>
+            <a:ext cx="11130991" cy="807720"/>
           </a:xfrm>
           <a:prstGeom prst="roundRect">
             <a:avLst>
-              <a:gd name="adj" fmla="val 5000"/>
+              <a:gd name="adj" fmla="val 8000"/>
             </a:avLst>
           </a:prstGeom>
           <a:solidFill>
-            <a:srgbClr val="FFFFFF"/>
+            <a:srgbClr val="F7F5FD"/>
           </a:solidFill>
           <a:ln w="9525">
             <a:solidFill>
               <a:srgbClr val="E4E1F1"/>
             </a:solidFill>
           </a:ln>
-          <a:effectLst>
-            <a:outerShdw blurRad="76200" dist="19050" dir="5400000" algn="bl" rotWithShape="0">
-              <a:srgbClr val="1A0F5C">
-                <a:alpha val="12000"/>
-              </a:srgbClr>
-            </a:outerShdw>
-          </a:effectLst>
+          <a:effectLst/>
         </p:spPr>
         <p:style>
           <a:lnRef idx="1">
@@ -6998,122 +7997,19 @@
       </p:sp>
       <p:sp>
         <p:nvSpPr>
-          <p:cNvPr id="38" name="TextBox 37"/>
-          <p:cNvSpPr txBox="1"/>
-          <p:nvPr/>
-        </p:nvSpPr>
-        <p:spPr>
-          <a:xfrm>
-            <a:off x="7766113" y="2990088"/>
-            <a:ext cx="902169" cy="465836"/>
-          </a:xfrm>
-          <a:prstGeom prst="rect">
-            <a:avLst/>
-          </a:prstGeom>
-          <a:noFill/>
-        </p:spPr>
-        <p:txBody>
-          <a:bodyPr wrap="square" anchor="t" lIns="0" rIns="0" tIns="0" bIns="0">
-            <a:spAutoFit/>
-          </a:bodyPr>
-          <a:lstStyle/>
-          <a:p>
-            <a:pPr algn="l"/>
-            <a:r>
-              <a:rPr sz="1300" b="1" i="0">
-                <a:solidFill>
-                  <a:srgbClr val="1A0F5C"/>
-                </a:solidFill>
-                <a:latin typeface="Calibri"/>
-              </a:rPr>
-              <a:t>Return question</a:t>
-            </a:r>
-          </a:p>
-        </p:txBody>
-      </p:sp>
-      <p:sp>
-        <p:nvSpPr>
-          <p:cNvPr id="39" name="TextBox 38"/>
-          <p:cNvSpPr txBox="1"/>
-          <p:nvPr/>
-        </p:nvSpPr>
-        <p:spPr>
-          <a:xfrm>
-            <a:off x="7766113" y="3492500"/>
-            <a:ext cx="902169" cy="1357376"/>
-          </a:xfrm>
-          <a:prstGeom prst="rect">
-            <a:avLst/>
-          </a:prstGeom>
-          <a:noFill/>
-        </p:spPr>
-        <p:txBody>
-          <a:bodyPr wrap="square" anchor="t" lIns="0" rIns="0" tIns="0" bIns="0">
-            <a:spAutoFit/>
-          </a:bodyPr>
-          <a:lstStyle/>
-          <a:p>
-            <a:pPr algn="l"/>
-            <a:r>
-              <a:rPr sz="1000" b="0" i="0">
-                <a:solidFill>
-                  <a:srgbClr val="6B6690"/>
-                </a:solidFill>
-                <a:latin typeface="Calibri"/>
-              </a:rPr>
-              <a:t>The four defence moves from Tuesday, by name: restate, answer, concede, what would change your mind.</a:t>
-            </a:r>
-          </a:p>
-        </p:txBody>
-      </p:sp>
-      <p:sp>
-        <p:nvSpPr>
-          <p:cNvPr id="40" name="TextBox 39"/>
-          <p:cNvSpPr txBox="1"/>
-          <p:nvPr/>
-        </p:nvSpPr>
-        <p:spPr>
-          <a:xfrm>
-            <a:off x="9015755" y="1956816"/>
-            <a:ext cx="1231353" cy="168656"/>
-          </a:xfrm>
-          <a:prstGeom prst="rect">
-            <a:avLst/>
-          </a:prstGeom>
-          <a:noFill/>
-        </p:spPr>
-        <p:txBody>
-          <a:bodyPr wrap="square" anchor="t" lIns="0" rIns="0" tIns="0" bIns="0">
-            <a:spAutoFit/>
-          </a:bodyPr>
-          <a:lstStyle/>
-          <a:p>
-            <a:pPr algn="ctr"/>
-            <a:r>
-              <a:rPr sz="800" b="1" i="0" spc="250">
-                <a:solidFill>
-                  <a:srgbClr val="5B3FD6"/>
-                </a:solidFill>
-                <a:latin typeface="Calibri"/>
-              </a:rPr>
-              <a:t>ITEM 7</a:t>
-            </a:r>
-          </a:p>
-        </p:txBody>
-      </p:sp>
-      <p:sp>
-        <p:nvSpPr>
-          <p:cNvPr id="41" name="Oval 40"/>
+          <p:cNvPr id="13" name="Rounded Rectangle 12"/>
           <p:cNvSpPr/>
           <p:nvPr/>
         </p:nvSpPr>
         <p:spPr>
           <a:xfrm>
-            <a:off x="9530848" y="2432304"/>
-            <a:ext cx="201168" cy="201168"/>
-          </a:xfrm>
-          <a:prstGeom prst="ellipse">
-            <a:avLst/>
+            <a:off x="676656" y="3323844"/>
+            <a:ext cx="45720" cy="551688"/>
+          </a:xfrm>
+          <a:prstGeom prst="roundRect">
+            <a:avLst>
+              <a:gd name="adj" fmla="val 50000"/>
+            </a:avLst>
           </a:prstGeom>
           <a:solidFill>
             <a:srgbClr val="5B3FD6"/>
@@ -7147,35 +8043,92 @@
       </p:sp>
       <p:sp>
         <p:nvSpPr>
-          <p:cNvPr id="42" name="Rounded Rectangle 41"/>
+          <p:cNvPr id="14" name="TextBox 13"/>
+          <p:cNvSpPr txBox="1"/>
+          <p:nvPr/>
+        </p:nvSpPr>
+        <p:spPr>
+          <a:xfrm>
+            <a:off x="877824" y="3314700"/>
+            <a:ext cx="10564063" cy="624840"/>
+          </a:xfrm>
+          <a:prstGeom prst="rect">
+            <a:avLst/>
+          </a:prstGeom>
+          <a:noFill/>
+        </p:spPr>
+        <p:txBody>
+          <a:bodyPr wrap="square" anchor="ctr" lIns="0" rIns="0" tIns="0" bIns="0">
+            <a:spAutoFit/>
+          </a:bodyPr>
+          <a:lstStyle/>
+          <a:p>
+            <a:r>
+              <a:rPr sz="1500" b="1">
+                <a:solidFill>
+                  <a:srgbClr val="5B3FD6"/>
+                </a:solidFill>
+                <a:latin typeface="Calibri"/>
+              </a:rPr>
+              <a:t>Tomorrow. </a:t>
+            </a:r>
+            <a:r>
+              <a:rPr sz="1500" b="0" i="0">
+                <a:solidFill>
+                  <a:srgbClr val="1A1440"/>
+                </a:solidFill>
+                <a:latin typeface="Calibri"/>
+              </a:rPr>
+              <a:t>Zomato Gold in Chennai: a retention number that stays flat while every group of members shrinks. Who is leaving, and at which step?</a:t>
+            </a:r>
+          </a:p>
+        </p:txBody>
+      </p:sp>
+      <p:pic>
+        <p:nvPicPr>
+          <p:cNvPr id="15" name="mermaid diagram" descr="7e07f604c1386171.png"/>
+          <p:cNvPicPr>
+            <a:picLocks noChangeAspect="1"/>
+          </p:cNvPicPr>
+          <p:nvPr/>
+        </p:nvPicPr>
+        <p:blipFill>
+          <a:blip r:embed="rId5"/>
+          <a:stretch>
+            <a:fillRect/>
+          </a:stretch>
+        </p:blipFill>
+        <p:spPr>
+          <a:xfrm>
+            <a:off x="530352" y="4168139"/>
+            <a:ext cx="11130991" cy="1129748"/>
+          </a:xfrm>
+          <a:prstGeom prst="rect">
+            <a:avLst/>
+          </a:prstGeom>
+        </p:spPr>
+      </p:pic>
+      <p:sp>
+        <p:nvSpPr>
+          <p:cNvPr id="16" name="Oval 15"/>
           <p:cNvSpPr/>
           <p:nvPr/>
         </p:nvSpPr>
         <p:spPr>
           <a:xfrm>
-            <a:off x="9015755" y="2843784"/>
-            <a:ext cx="1231353" cy="2113280"/>
-          </a:xfrm>
-          <a:prstGeom prst="roundRect">
-            <a:avLst>
-              <a:gd name="adj" fmla="val 5000"/>
-            </a:avLst>
+            <a:off x="530352" y="6492240"/>
+            <a:ext cx="64008" cy="64008"/>
+          </a:xfrm>
+          <a:prstGeom prst="ellipse">
+            <a:avLst/>
           </a:prstGeom>
           <a:solidFill>
-            <a:srgbClr val="FFFFFF"/>
+            <a:srgbClr val="CFC9EE"/>
           </a:solidFill>
-          <a:ln w="9525">
-            <a:solidFill>
-              <a:srgbClr val="E4E1F1"/>
-            </a:solidFill>
+          <a:ln>
+            <a:noFill/>
           </a:ln>
-          <a:effectLst>
-            <a:outerShdw blurRad="76200" dist="19050" dir="5400000" algn="bl" rotWithShape="0">
-              <a:srgbClr val="1A0F5C">
-                <a:alpha val="12000"/>
-              </a:srgbClr>
-            </a:outerShdw>
-          </a:effectLst>
+          <a:effectLst/>
         </p:spPr>
         <p:style>
           <a:lnRef idx="1">
@@ -7201,14 +8154,14 @@
       </p:sp>
       <p:sp>
         <p:nvSpPr>
-          <p:cNvPr id="43" name="TextBox 42"/>
-          <p:cNvSpPr txBox="1"/>
-          <p:nvPr/>
-        </p:nvSpPr>
-        <p:spPr>
-          <a:xfrm>
-            <a:off x="9180347" y="2990088"/>
-            <a:ext cx="902169" cy="251205"/>
+          <p:cNvPr id="17" name="TextBox 16"/>
+          <p:cNvSpPr txBox="1"/>
+          <p:nvPr/>
+        </p:nvSpPr>
+        <p:spPr>
+          <a:xfrm>
+            <a:off x="640080" y="6437376"/>
+            <a:ext cx="1516475" cy="152146"/>
           </a:xfrm>
           <a:prstGeom prst="rect">
             <a:avLst/>
@@ -7223,27 +8176,71 @@
           <a:p>
             <a:pPr algn="l"/>
             <a:r>
-              <a:rPr sz="1300" b="1" i="0">
-                <a:solidFill>
-                  <a:srgbClr val="1A0F5C"/>
+              <a:rPr sz="700" b="0" i="0">
+                <a:solidFill>
+                  <a:srgbClr val="6B6690"/>
                 </a:solidFill>
                 <a:latin typeface="Calibri"/>
               </a:rPr>
-              <a:t>The caveat</a:t>
-            </a:r>
-          </a:p>
-        </p:txBody>
-      </p:sp>
-      <p:sp>
-        <p:nvSpPr>
-          <p:cNvPr id="44" name="TextBox 43"/>
-          <p:cNvSpPr txBox="1"/>
-          <p:nvPr/>
-        </p:nvSpPr>
-        <p:spPr>
-          <a:xfrm>
-            <a:off x="9180347" y="3277870"/>
-            <a:ext cx="902169" cy="1192276"/>
+              <a:t>Which strip would you ship?</a:t>
+            </a:r>
+          </a:p>
+        </p:txBody>
+      </p:sp>
+      <p:sp>
+        <p:nvSpPr>
+          <p:cNvPr id="18" name="Oval 17"/>
+          <p:cNvSpPr/>
+          <p:nvPr/>
+        </p:nvSpPr>
+        <p:spPr>
+          <a:xfrm>
+            <a:off x="2247995" y="6492240"/>
+            <a:ext cx="64008" cy="64008"/>
+          </a:xfrm>
+          <a:prstGeom prst="ellipse">
+            <a:avLst/>
+          </a:prstGeom>
+          <a:solidFill>
+            <a:srgbClr val="CFC9EE"/>
+          </a:solidFill>
+          <a:ln>
+            <a:noFill/>
+          </a:ln>
+          <a:effectLst/>
+        </p:spPr>
+        <p:style>
+          <a:lnRef idx="1">
+            <a:schemeClr val="accent1"/>
+          </a:lnRef>
+          <a:fillRef idx="3">
+            <a:schemeClr val="accent1"/>
+          </a:fillRef>
+          <a:effectRef idx="2">
+            <a:schemeClr val="accent1"/>
+          </a:effectRef>
+          <a:fontRef idx="minor">
+            <a:schemeClr val="lt1"/>
+          </a:fontRef>
+        </p:style>
+        <p:txBody>
+          <a:bodyPr rtlCol="0" anchor="ctr" wrap="square"/>
+          <a:lstStyle/>
+          <a:p>
+            <a:pPr algn="ctr"/>
+          </a:p>
+        </p:txBody>
+      </p:sp>
+      <p:sp>
+        <p:nvSpPr>
+          <p:cNvPr id="19" name="TextBox 18"/>
+          <p:cNvSpPr txBox="1"/>
+          <p:nvPr/>
+        </p:nvSpPr>
+        <p:spPr>
+          <a:xfrm>
+            <a:off x="2357723" y="6437376"/>
+            <a:ext cx="1102423" cy="152146"/>
           </a:xfrm>
           <a:prstGeom prst="rect">
             <a:avLst/>
@@ -7258,62 +8255,27 @@
           <a:p>
             <a:pPr algn="l"/>
             <a:r>
-              <a:rPr sz="1000" b="0" i="0">
+              <a:rPr sz="700" b="0" i="0">
                 <a:solidFill>
                   <a:srgbClr val="6B6690"/>
                 </a:solidFill>
                 <a:latin typeface="Calibri"/>
               </a:rPr>
-              <a:t>Recomputing per customer drops chips and cold drink's lift because of heavy shoppers.</a:t>
-            </a:r>
-          </a:p>
-        </p:txBody>
-      </p:sp>
-      <p:sp>
-        <p:nvSpPr>
-          <p:cNvPr id="45" name="TextBox 44"/>
-          <p:cNvSpPr txBox="1"/>
-          <p:nvPr/>
-        </p:nvSpPr>
-        <p:spPr>
-          <a:xfrm>
-            <a:off x="10429989" y="1956816"/>
-            <a:ext cx="1231353" cy="168656"/>
-          </a:xfrm>
-          <a:prstGeom prst="rect">
-            <a:avLst/>
-          </a:prstGeom>
-          <a:noFill/>
-        </p:spPr>
-        <p:txBody>
-          <a:bodyPr wrap="square" anchor="t" lIns="0" rIns="0" tIns="0" bIns="0">
-            <a:spAutoFit/>
-          </a:bodyPr>
-          <a:lstStyle/>
-          <a:p>
-            <a:pPr algn="ctr"/>
-            <a:r>
-              <a:rPr sz="800" b="1" i="0" spc="250">
-                <a:solidFill>
-                  <a:srgbClr val="5B3FD6"/>
-                </a:solidFill>
-                <a:latin typeface="Calibri"/>
-              </a:rPr>
-              <a:t>ITEM 8</a:t>
-            </a:r>
-          </a:p>
-        </p:txBody>
-      </p:sp>
-      <p:sp>
-        <p:nvSpPr>
-          <p:cNvPr id="46" name="Oval 45"/>
+              <a:t>The interview room</a:t>
+            </a:r>
+          </a:p>
+        </p:txBody>
+      </p:sp>
+      <p:sp>
+        <p:nvSpPr>
+          <p:cNvPr id="20" name="Oval 19"/>
           <p:cNvSpPr/>
           <p:nvPr/>
         </p:nvSpPr>
         <p:spPr>
           <a:xfrm>
-            <a:off x="10945082" y="2432304"/>
-            <a:ext cx="201168" cy="201168"/>
+            <a:off x="3551586" y="6492240"/>
+            <a:ext cx="64008" cy="64008"/>
           </a:xfrm>
           <a:prstGeom prst="ellipse">
             <a:avLst/>
@@ -7350,68 +8312,14 @@
       </p:sp>
       <p:sp>
         <p:nvSpPr>
-          <p:cNvPr id="47" name="Rounded Rectangle 46"/>
-          <p:cNvSpPr/>
-          <p:nvPr/>
-        </p:nvSpPr>
-        <p:spPr>
-          <a:xfrm>
-            <a:off x="10429989" y="2843784"/>
-            <a:ext cx="1231353" cy="2113280"/>
-          </a:xfrm>
-          <a:prstGeom prst="roundRect">
-            <a:avLst>
-              <a:gd name="adj" fmla="val 5000"/>
-            </a:avLst>
-          </a:prstGeom>
-          <a:solidFill>
-            <a:srgbClr val="FFFFFF"/>
-          </a:solidFill>
-          <a:ln w="9525">
-            <a:solidFill>
-              <a:srgbClr val="E4E1F1"/>
-            </a:solidFill>
-          </a:ln>
-          <a:effectLst>
-            <a:outerShdw blurRad="76200" dist="19050" dir="5400000" algn="bl" rotWithShape="0">
-              <a:srgbClr val="1A0F5C">
-                <a:alpha val="12000"/>
-              </a:srgbClr>
-            </a:outerShdw>
-          </a:effectLst>
-        </p:spPr>
-        <p:style>
-          <a:lnRef idx="1">
-            <a:schemeClr val="accent1"/>
-          </a:lnRef>
-          <a:fillRef idx="3">
-            <a:schemeClr val="accent1"/>
-          </a:fillRef>
-          <a:effectRef idx="2">
-            <a:schemeClr val="accent1"/>
-          </a:effectRef>
-          <a:fontRef idx="minor">
-            <a:schemeClr val="lt1"/>
-          </a:fontRef>
-        </p:style>
-        <p:txBody>
-          <a:bodyPr rtlCol="0" anchor="ctr" wrap="square"/>
-          <a:lstStyle/>
-          <a:p>
-            <a:pPr algn="ctr"/>
-          </a:p>
-        </p:txBody>
-      </p:sp>
-      <p:sp>
-        <p:nvSpPr>
-          <p:cNvPr id="48" name="TextBox 47"/>
-          <p:cNvSpPr txBox="1"/>
-          <p:nvPr/>
-        </p:nvSpPr>
-        <p:spPr>
-          <a:xfrm>
-            <a:off x="10594581" y="2990088"/>
-            <a:ext cx="902169" cy="251205"/>
+          <p:cNvPr id="21" name="TextBox 20"/>
+          <p:cNvSpPr txBox="1"/>
+          <p:nvPr/>
+        </p:nvSpPr>
+        <p:spPr>
+          <a:xfrm>
+            <a:off x="3661314" y="6437376"/>
+            <a:ext cx="1424463" cy="152146"/>
           </a:xfrm>
           <a:prstGeom prst="rect">
             <a:avLst/>
@@ -7426,292 +8334,20 @@
           <a:p>
             <a:pPr algn="l"/>
             <a:r>
-              <a:rPr sz="1300" b="1" i="0">
-                <a:solidFill>
-                  <a:srgbClr val="1A0F5C"/>
+              <a:rPr sz="700" b="1" i="0">
+                <a:solidFill>
+                  <a:srgbClr val="5B3FD6"/>
                 </a:solidFill>
                 <a:latin typeface="Calibri"/>
               </a:rPr>
-              <a:t>AI variant</a:t>
-            </a:r>
-          </a:p>
-        </p:txBody>
-      </p:sp>
-      <p:sp>
-        <p:nvSpPr>
-          <p:cNvPr id="49" name="TextBox 48"/>
-          <p:cNvSpPr txBox="1"/>
-          <p:nvPr/>
-        </p:nvSpPr>
-        <p:spPr>
-          <a:xfrm>
-            <a:off x="10594581" y="3277870"/>
-            <a:ext cx="902169" cy="1357376"/>
-          </a:xfrm>
-          <a:prstGeom prst="rect">
-            <a:avLst/>
-          </a:prstGeom>
-          <a:noFill/>
-        </p:spPr>
-        <p:txBody>
-          <a:bodyPr wrap="square" anchor="t" lIns="0" rIns="0" tIns="0" bIns="0">
-            <a:spAutoFit/>
-          </a:bodyPr>
-          <a:lstStyle/>
-          <a:p>
-            <a:pPr algn="l"/>
-            <a:r>
-              <a:rPr sz="1000" b="0" i="0">
-                <a:solidFill>
-                  <a:srgbClr val="6B6690"/>
-                </a:solidFill>
-                <a:latin typeface="Calibri"/>
-              </a:rPr>
-              <a:t>An LLM assistant that suggests milk is scored on lift over a popularity baseline, then by a holdout.</a:t>
-            </a:r>
-          </a:p>
-        </p:txBody>
-      </p:sp>
-      <p:sp>
-        <p:nvSpPr>
-          <p:cNvPr id="50" name="Oval 49"/>
-          <p:cNvSpPr/>
-          <p:nvPr/>
-        </p:nvSpPr>
-        <p:spPr>
-          <a:xfrm>
-            <a:off x="530352" y="6492240"/>
-            <a:ext cx="64008" cy="64008"/>
-          </a:xfrm>
-          <a:prstGeom prst="ellipse">
-            <a:avLst/>
-          </a:prstGeom>
-          <a:solidFill>
-            <a:srgbClr val="CFC9EE"/>
-          </a:solidFill>
-          <a:ln>
-            <a:noFill/>
-          </a:ln>
-          <a:effectLst/>
-        </p:spPr>
-        <p:style>
-          <a:lnRef idx="1">
-            <a:schemeClr val="accent1"/>
-          </a:lnRef>
-          <a:fillRef idx="3">
-            <a:schemeClr val="accent1"/>
-          </a:fillRef>
-          <a:effectRef idx="2">
-            <a:schemeClr val="accent1"/>
-          </a:effectRef>
-          <a:fontRef idx="minor">
-            <a:schemeClr val="lt1"/>
-          </a:fontRef>
-        </p:style>
-        <p:txBody>
-          <a:bodyPr rtlCol="0" anchor="ctr" wrap="square"/>
-          <a:lstStyle/>
-          <a:p>
-            <a:pPr algn="ctr"/>
-          </a:p>
-        </p:txBody>
-      </p:sp>
-      <p:sp>
-        <p:nvSpPr>
-          <p:cNvPr id="51" name="TextBox 50"/>
-          <p:cNvSpPr txBox="1"/>
-          <p:nvPr/>
-        </p:nvSpPr>
-        <p:spPr>
-          <a:xfrm>
-            <a:off x="640080" y="6437376"/>
-            <a:ext cx="1746504" cy="152146"/>
-          </a:xfrm>
-          <a:prstGeom prst="rect">
-            <a:avLst/>
-          </a:prstGeom>
-          <a:noFill/>
-        </p:spPr>
-        <p:txBody>
-          <a:bodyPr wrap="square" anchor="t" lIns="0" rIns="0" tIns="0" bIns="0">
-            <a:spAutoFit/>
-          </a:bodyPr>
-          <a:lstStyle/>
-          <a:p>
-            <a:pPr algn="l"/>
-            <a:r>
-              <a:rPr sz="700" b="0" i="0">
-                <a:solidFill>
-                  <a:srgbClr val="6B6690"/>
-                </a:solidFill>
-                <a:latin typeface="Calibri"/>
-              </a:rPr>
-              <a:t>Pick three slots and defend them</a:t>
-            </a:r>
-          </a:p>
-        </p:txBody>
-      </p:sp>
-      <p:sp>
-        <p:nvSpPr>
-          <p:cNvPr id="52" name="Oval 51"/>
-          <p:cNvSpPr/>
-          <p:nvPr/>
-        </p:nvSpPr>
-        <p:spPr>
-          <a:xfrm>
-            <a:off x="2478024" y="6492240"/>
-            <a:ext cx="64008" cy="64008"/>
-          </a:xfrm>
-          <a:prstGeom prst="ellipse">
-            <a:avLst/>
-          </a:prstGeom>
-          <a:solidFill>
-            <a:srgbClr val="CFC9EE"/>
-          </a:solidFill>
-          <a:ln>
-            <a:noFill/>
-          </a:ln>
-          <a:effectLst/>
-        </p:spPr>
-        <p:style>
-          <a:lnRef idx="1">
-            <a:schemeClr val="accent1"/>
-          </a:lnRef>
-          <a:fillRef idx="3">
-            <a:schemeClr val="accent1"/>
-          </a:fillRef>
-          <a:effectRef idx="2">
-            <a:schemeClr val="accent1"/>
-          </a:effectRef>
-          <a:fontRef idx="minor">
-            <a:schemeClr val="lt1"/>
-          </a:fontRef>
-        </p:style>
-        <p:txBody>
-          <a:bodyPr rtlCol="0" anchor="ctr" wrap="square"/>
-          <a:lstStyle/>
-          <a:p>
-            <a:pPr algn="ctr"/>
-          </a:p>
-        </p:txBody>
-      </p:sp>
-      <p:sp>
-        <p:nvSpPr>
-          <p:cNvPr id="53" name="TextBox 52"/>
-          <p:cNvSpPr txBox="1"/>
-          <p:nvPr/>
-        </p:nvSpPr>
-        <p:spPr>
-          <a:xfrm>
-            <a:off x="2587752" y="6437376"/>
-            <a:ext cx="1976532" cy="152146"/>
-          </a:xfrm>
-          <a:prstGeom prst="rect">
-            <a:avLst/>
-          </a:prstGeom>
-          <a:noFill/>
-        </p:spPr>
-        <p:txBody>
-          <a:bodyPr wrap="square" anchor="t" lIns="0" rIns="0" tIns="0" bIns="0">
-            <a:spAutoFit/>
-          </a:bodyPr>
-          <a:lstStyle/>
-          <a:p>
-            <a:pPr algn="l"/>
-            <a:r>
-              <a:rPr sz="700" b="0" i="0">
-                <a:solidFill>
-                  <a:srgbClr val="6B6690"/>
-                </a:solidFill>
-                <a:latin typeface="Calibri"/>
-              </a:rPr>
-              <a:t>The interview question the day equips</a:t>
-            </a:r>
-          </a:p>
-        </p:txBody>
-      </p:sp>
-      <p:sp>
-        <p:nvSpPr>
-          <p:cNvPr id="54" name="Oval 53"/>
-          <p:cNvSpPr/>
-          <p:nvPr/>
-        </p:nvSpPr>
-        <p:spPr>
-          <a:xfrm>
-            <a:off x="4655724" y="6492240"/>
-            <a:ext cx="64008" cy="64008"/>
-          </a:xfrm>
-          <a:prstGeom prst="ellipse">
-            <a:avLst/>
-          </a:prstGeom>
-          <a:solidFill>
-            <a:srgbClr val="5B3FD6"/>
-          </a:solidFill>
-          <a:ln>
-            <a:noFill/>
-          </a:ln>
-          <a:effectLst/>
-        </p:spPr>
-        <p:style>
-          <a:lnRef idx="1">
-            <a:schemeClr val="accent1"/>
-          </a:lnRef>
-          <a:fillRef idx="3">
-            <a:schemeClr val="accent1"/>
-          </a:fillRef>
-          <a:effectRef idx="2">
-            <a:schemeClr val="accent1"/>
-          </a:effectRef>
-          <a:fontRef idx="minor">
-            <a:schemeClr val="lt1"/>
-          </a:fontRef>
-        </p:style>
-        <p:txBody>
-          <a:bodyPr rtlCol="0" anchor="ctr" wrap="square"/>
-          <a:lstStyle/>
-          <a:p>
-            <a:pPr algn="ctr"/>
-          </a:p>
-        </p:txBody>
-      </p:sp>
-      <p:sp>
-        <p:nvSpPr>
-          <p:cNvPr id="55" name="TextBox 54"/>
-          <p:cNvSpPr txBox="1"/>
-          <p:nvPr/>
-        </p:nvSpPr>
-        <p:spPr>
-          <a:xfrm>
-            <a:off x="4765452" y="6437376"/>
-            <a:ext cx="2194560" cy="267716"/>
-          </a:xfrm>
-          <a:prstGeom prst="rect">
-            <a:avLst/>
-          </a:prstGeom>
-          <a:noFill/>
-        </p:spPr>
-        <p:txBody>
-          <a:bodyPr wrap="square" anchor="t" lIns="0" rIns="0" tIns="0" bIns="0">
-            <a:spAutoFit/>
-          </a:bodyPr>
-          <a:lstStyle/>
-          <a:p>
-            <a:pPr algn="l"/>
-            <a:r>
-              <a:rPr sz="700" b="1" i="0">
-                <a:solidFill>
-                  <a:srgbClr val="5B3FD6"/>
-                </a:solidFill>
-                <a:latin typeface="Calibri"/>
-              </a:rPr>
-              <a:t>The handoff into the W4-2 faculty block (tentative)</a:t>
-            </a:r>
-          </a:p>
-        </p:txBody>
-      </p:sp>
-      <p:sp>
-        <p:nvSpPr>
-          <p:cNvPr id="56" name="TextBox 55"/>
+              <a:t>The handoff and the close</a:t>
+            </a:r>
+          </a:p>
+        </p:txBody>
+      </p:sp>
+      <p:sp>
+        <p:nvSpPr>
+          <p:cNvPr id="22" name="TextBox 21"/>
           <p:cNvSpPr txBox="1"/>
           <p:nvPr/>
         </p:nvSpPr>
@@ -7739,7 +8375,7 @@
                 </a:solidFill>
                 <a:latin typeface="Calibri"/>
               </a:rPr>
-              <a:t>S46  ·  11 / 11</a:t>
+              <a:t>S46  ·  13 / 13</a:t>
             </a:r>
           </a:p>
         </p:txBody>
@@ -7945,7 +8581,7 @@
                 </a:solidFill>
                 <a:latin typeface="Georgia"/>
               </a:rPr>
-              <a:t>06</a:t>
+              <a:t>03</a:t>
             </a:r>
           </a:p>
         </p:txBody>
@@ -7980,7 +8616,7 @@
                 </a:solidFill>
                 <a:latin typeface="Georgia"/>
               </a:rPr>
-              <a:t>Pick three slots and defend them</a:t>
+              <a:t>Which strip would you ship?</a:t>
             </a:r>
           </a:p>
         </p:txBody>
@@ -7994,7 +8630,7 @@
         <p:spPr>
           <a:xfrm>
             <a:off x="731519" y="3520440"/>
-            <a:ext cx="9509760" cy="284226"/>
+            <a:ext cx="9509760" cy="531876"/>
           </a:xfrm>
           <a:prstGeom prst="rect">
             <a:avLst/>
@@ -8015,7 +8651,7 @@
                 </a:solidFill>
                 <a:latin typeface="Calibri"/>
               </a:rPr>
-              <a:t>The afternoon's unguided chapter 3 part 2.</a:t>
+              <a:t>Which three pairs, priced how, and how do you answer a category manager who wants milk in every slot?</a:t>
             </a:r>
           </a:p>
         </p:txBody>
@@ -8029,7 +8665,7 @@
         <p:spPr>
           <a:xfrm>
             <a:off x="731519" y="5074920"/>
-            <a:ext cx="2148840" cy="310896"/>
+            <a:ext cx="1964591" cy="310896"/>
           </a:xfrm>
           <a:prstGeom prst="roundRect">
             <a:avLst>
@@ -8070,7 +8706,7 @@
                 </a:solidFill>
                 <a:latin typeface="Calibri"/>
               </a:rPr>
-              <a:t>Pick three slots and defend them</a:t>
+              <a:t>Which strip would you ship?</a:t>
             </a:r>
           </a:p>
         </p:txBody>
@@ -8083,8 +8719,8 @@
         </p:nvSpPr>
         <p:spPr>
           <a:xfrm>
-            <a:off x="2990088" y="5074920"/>
-            <a:ext cx="2148840" cy="310896"/>
+            <a:off x="2805839" y="5074920"/>
+            <a:ext cx="1431647" cy="310896"/>
           </a:xfrm>
           <a:prstGeom prst="roundRect">
             <a:avLst>
@@ -8125,7 +8761,7 @@
                 </a:solidFill>
                 <a:latin typeface="Calibri"/>
               </a:rPr>
-              <a:t>The interview question the day equips</a:t>
+              <a:t>The interview room</a:t>
             </a:r>
           </a:p>
         </p:txBody>
@@ -8138,8 +8774,8 @@
         </p:nvSpPr>
         <p:spPr>
           <a:xfrm>
-            <a:off x="5248656" y="5074920"/>
-            <a:ext cx="2148840" cy="310896"/>
+            <a:off x="4347214" y="5074920"/>
+            <a:ext cx="1846159" cy="310896"/>
           </a:xfrm>
           <a:prstGeom prst="roundRect">
             <a:avLst>
@@ -8180,7 +8816,7 @@
                 </a:solidFill>
                 <a:latin typeface="Calibri"/>
               </a:rPr>
-              <a:t>The handoff into the W4-2 faculty block (tentative)</a:t>
+              <a:t>The handoff and the close</a:t>
             </a:r>
           </a:p>
         </p:txBody>
@@ -8215,7 +8851,7 @@
                 </a:solidFill>
                 <a:latin typeface="Calibri"/>
               </a:rPr>
-              <a:t>Week 4, Day 3. The three slots and the Kalpa transfer</a:t>
+              <a:t>Week 4 Day 3: what goes with what, beyond chance</a:t>
             </a:r>
           </a:p>
         </p:txBody>
@@ -8250,7 +8886,7 @@
                 </a:solidFill>
                 <a:latin typeface="Calibri"/>
               </a:rPr>
-              <a:t>2 / 11</a:t>
+              <a:t>2 / 13</a:t>
             </a:r>
           </a:p>
         </p:txBody>
@@ -8456,7 +9092,7 @@
                 </a:solidFill>
                 <a:latin typeface="Georgia"/>
               </a:rPr>
-              <a:t>The prompt: 30 minutes, nine groups, one proposal</a:t>
+              <a:t>Ship one strip in 35 minutes, priced and defended</a:t>
             </a:r>
           </a:p>
         </p:txBody>
@@ -8491,7 +9127,7 @@
                 </a:solidFill>
                 <a:latin typeface="Calibri"/>
               </a:rPr>
-              <a:t>What the room produces by the end of the block.</a:t>
+              <a:t>What does each group hand in?</a:t>
             </a:r>
           </a:p>
         </p:txBody>
@@ -8505,7 +9141,7 @@
         <p:spPr>
           <a:xfrm>
             <a:off x="530352" y="1956816"/>
-            <a:ext cx="2645587" cy="2154428"/>
+            <a:ext cx="2645587" cy="2344420"/>
           </a:xfrm>
           <a:prstGeom prst="roundRect">
             <a:avLst>
@@ -8596,7 +9232,7 @@
       </p:sp>
       <p:pic>
         <p:nvPicPr>
-          <p:cNvPr id="11" name="Picture 10" descr="list_637b34e7c72a.png"/>
+          <p:cNvPr id="11" name="Picture 10" descr="list-ordered_6bff7db210fa.png"/>
           <p:cNvPicPr>
             <a:picLocks noChangeAspect="1"/>
           </p:cNvPicPr>
@@ -8683,7 +9319,7 @@
                 </a:solidFill>
                 <a:latin typeface="Calibri"/>
               </a:rPr>
-              <a:t>Pick three pairs</a:t>
+              <a:t>Rank three pairs</a:t>
             </a:r>
           </a:p>
         </p:txBody>
@@ -8697,7 +9333,7 @@
         <p:spPr>
           <a:xfrm>
             <a:off x="731519" y="3303524"/>
-            <a:ext cx="2243251" cy="581406"/>
+            <a:ext cx="2243251" cy="763016"/>
           </a:xfrm>
           <a:prstGeom prst="rect">
             <a:avLst/>
@@ -8718,7 +9354,7 @@
                 </a:solidFill>
                 <a:latin typeface="Calibri"/>
               </a:rPr>
-              <a:t>From the notebook's pairs table, three with support at least 1 percent and lift well above 1.</a:t>
+              <a:t>From the pairs table: support at least 1 percent, lift well above one, each with its two numbers.</a:t>
             </a:r>
           </a:p>
         </p:txBody>
@@ -8732,7 +9368,7 @@
         <p:spPr>
           <a:xfrm>
             <a:off x="3358819" y="1956816"/>
-            <a:ext cx="2645587" cy="2154428"/>
+            <a:ext cx="2645587" cy="2344420"/>
           </a:xfrm>
           <a:prstGeom prst="roundRect">
             <a:avLst>
@@ -8823,7 +9459,7 @@
       </p:sp>
       <p:pic>
         <p:nvPicPr>
-          <p:cNvPr id="17" name="Picture 16" descr="calculator_852ec1ae1794.png"/>
+          <p:cNvPr id="17" name="Picture 16" descr="indian-rupee_bfbdea5c5650.png"/>
           <p:cNvPicPr>
             <a:picLocks noChangeAspect="1"/>
           </p:cNvPicPr>
@@ -8910,7 +9546,7 @@
                 </a:solidFill>
                 <a:latin typeface="Calibri"/>
               </a:rPr>
-              <a:t>Price each slot</a:t>
+              <a:t>Price the strip</a:t>
             </a:r>
           </a:p>
         </p:txBody>
@@ -8945,7 +9581,7 @@
                 </a:solidFill>
                 <a:latin typeface="Calibri"/>
               </a:rPr>
-              <a:t>Views, click-through, add rate, margin per add; each labelled with its range.</a:t>
+              <a:t>A slot a day and the month recovered, each assumption with its range.</a:t>
             </a:r>
           </a:p>
         </p:txBody>
@@ -8959,7 +9595,7 @@
         <p:spPr>
           <a:xfrm>
             <a:off x="6187287" y="1956816"/>
-            <a:ext cx="2645587" cy="2154428"/>
+            <a:ext cx="2645587" cy="2344420"/>
           </a:xfrm>
           <a:prstGeom prst="roundRect">
             <a:avLst>
@@ -9050,7 +9686,7 @@
       </p:sp>
       <p:pic>
         <p:nvPicPr>
-          <p:cNvPr id="23" name="Picture 22" descr="book_688daf7d17a4.png"/>
+          <p:cNvPr id="23" name="Picture 22" descr="triangle-alert_5ac49fc6abbb.png"/>
           <p:cNvPicPr>
             <a:picLocks noChangeAspect="1"/>
           </p:cNvPicPr>
@@ -9137,7 +9773,7 @@
                 </a:solidFill>
                 <a:latin typeface="Calibri"/>
               </a:rPr>
-              <a:t>Write the caveat</a:t>
+              <a:t>Name two doubts</a:t>
             </a:r>
           </a:p>
         </p:txBody>
@@ -9151,7 +9787,7 @@
         <p:spPr>
           <a:xfrm>
             <a:off x="6388455" y="3303524"/>
-            <a:ext cx="2243251" cy="581406"/>
+            <a:ext cx="2243251" cy="399796"/>
           </a:xfrm>
           <a:prstGeom prst="rect">
             <a:avLst/>
@@ -9172,7 +9808,7 @@
                 </a:solidFill>
                 <a:latin typeface="Calibri"/>
               </a:rPr>
-              <a:t>The heavy tenth and the stock-out; what each would change about the number.</a:t>
+              <a:t>Each with the check and the number it gave.</a:t>
             </a:r>
           </a:p>
         </p:txBody>
@@ -9186,7 +9822,7 @@
         <p:spPr>
           <a:xfrm>
             <a:off x="9015755" y="1956816"/>
-            <a:ext cx="2645587" cy="2154428"/>
+            <a:ext cx="2645587" cy="2344420"/>
           </a:xfrm>
           <a:prstGeom prst="roundRect">
             <a:avLst>
@@ -9349,7 +9985,7 @@
         <p:spPr>
           <a:xfrm>
             <a:off x="9216923" y="2962656"/>
-            <a:ext cx="2243251" cy="267716"/>
+            <a:ext cx="2243251" cy="498856"/>
           </a:xfrm>
           <a:prstGeom prst="rect">
             <a:avLst/>
@@ -9370,7 +10006,7 @@
                 </a:solidFill>
                 <a:latin typeface="Calibri"/>
               </a:rPr>
-              <a:t>Answer the manager</a:t>
+              <a:t>Answer the category manager</a:t>
             </a:r>
           </a:p>
         </p:txBody>
@@ -9383,7 +10019,7 @@
         </p:nvSpPr>
         <p:spPr>
           <a:xfrm>
-            <a:off x="9216923" y="3303524"/>
+            <a:off x="9216923" y="3534664"/>
             <a:ext cx="2243251" cy="399796"/>
           </a:xfrm>
           <a:prstGeom prst="rect">
@@ -9405,7 +10041,7 @@
                 </a:solidFill>
                 <a:latin typeface="Calibri"/>
               </a:rPr>
-              <a:t>Two sentences. The number comes before the explanation.</a:t>
+              <a:t>Two sentences: the number first, then what you concede.</a:t>
             </a:r>
           </a:p>
         </p:txBody>
@@ -9463,7 +10099,7 @@
         <p:spPr>
           <a:xfrm>
             <a:off x="640080" y="6437376"/>
-            <a:ext cx="1746504" cy="152146"/>
+            <a:ext cx="1516475" cy="152146"/>
           </a:xfrm>
           <a:prstGeom prst="rect">
             <a:avLst/>
@@ -9484,7 +10120,7 @@
                 </a:solidFill>
                 <a:latin typeface="Calibri"/>
               </a:rPr>
-              <a:t>Pick three slots and defend them</a:t>
+              <a:t>Which strip would you ship?</a:t>
             </a:r>
           </a:p>
         </p:txBody>
@@ -9497,7 +10133,7 @@
         </p:nvSpPr>
         <p:spPr>
           <a:xfrm>
-            <a:off x="2478024" y="6492240"/>
+            <a:off x="2247995" y="6492240"/>
             <a:ext cx="64008" cy="64008"/>
           </a:xfrm>
           <a:prstGeom prst="ellipse">
@@ -9541,8 +10177,8 @@
         </p:nvSpPr>
         <p:spPr>
           <a:xfrm>
-            <a:off x="2587752" y="6437376"/>
-            <a:ext cx="1976532" cy="152146"/>
+            <a:off x="2357723" y="6437376"/>
+            <a:ext cx="1102423" cy="152146"/>
           </a:xfrm>
           <a:prstGeom prst="rect">
             <a:avLst/>
@@ -9563,7 +10199,7 @@
                 </a:solidFill>
                 <a:latin typeface="Calibri"/>
               </a:rPr>
-              <a:t>The interview question the day equips</a:t>
+              <a:t>The interview room</a:t>
             </a:r>
           </a:p>
         </p:txBody>
@@ -9576,7 +10212,7 @@
         </p:nvSpPr>
         <p:spPr>
           <a:xfrm>
-            <a:off x="4655724" y="6492240"/>
+            <a:off x="3551586" y="6492240"/>
             <a:ext cx="64008" cy="64008"/>
           </a:xfrm>
           <a:prstGeom prst="ellipse">
@@ -9620,8 +10256,8 @@
         </p:nvSpPr>
         <p:spPr>
           <a:xfrm>
-            <a:off x="4765452" y="6437376"/>
-            <a:ext cx="2194560" cy="267716"/>
+            <a:off x="3661314" y="6437376"/>
+            <a:ext cx="1424463" cy="152146"/>
           </a:xfrm>
           <a:prstGeom prst="rect">
             <a:avLst/>
@@ -9642,7 +10278,7 @@
                 </a:solidFill>
                 <a:latin typeface="Calibri"/>
               </a:rPr>
-              <a:t>The handoff into the W4-2 faculty block (tentative)</a:t>
+              <a:t>The handoff and the close</a:t>
             </a:r>
           </a:p>
         </p:txBody>
@@ -9677,7 +10313,7 @@
                 </a:solidFill>
                 <a:latin typeface="Calibri"/>
               </a:rPr>
-              <a:t>S30  ·  3 / 11</a:t>
+              <a:t>S38  ·  3 / 13</a:t>
             </a:r>
           </a:p>
         </p:txBody>
@@ -9883,7 +10519,7 @@
                 </a:solidFill>
                 <a:latin typeface="Georgia"/>
               </a:rPr>
-              <a:t>The proposal template, four fields in one line each</a:t>
+              <a:t>The one-page strip: four fields, one line each</a:t>
             </a:r>
           </a:p>
         </p:txBody>
@@ -9918,270 +10554,77 @@
                 </a:solidFill>
                 <a:latin typeface="Calibri"/>
               </a:rPr>
-              <a:t>What a group's handed-in proposal has to say.</a:t>
-            </a:r>
-          </a:p>
-        </p:txBody>
-      </p:sp>
-      <p:graphicFrame>
-        <p:nvGraphicFramePr>
-          <p:cNvPr id="9" name="Table 8"/>
-          <p:cNvGraphicFramePr>
-            <a:graphicFrameLocks noGrp="1"/>
-          </p:cNvGraphicFramePr>
-          <p:nvPr/>
-        </p:nvGraphicFramePr>
-        <p:xfrm>
-          <a:off x="530352" y="1956816"/>
-          <a:ext cx="11130990" cy="2090928"/>
-        </p:xfrm>
-        <a:graphic>
-          <a:graphicData uri="http://schemas.openxmlformats.org/drawingml/2006/table">
-            <a:tbl>
-              <a:tblPr firstRow="0" bandRow="0">
-                <a:tableStyleId>{2D5ABB26-0587-4C30-8999-92F81FD0307C}</a:tableStyleId>
-              </a:tblPr>
-              <a:tblGrid>
-                <a:gridCol w="4180794"/>
-                <a:gridCol w="6950196"/>
-              </a:tblGrid>
-              <a:tr h="369824">
-                <a:tc>
-                  <a:txBody>
-                    <a:bodyPr/>
-                    <a:lstStyle/>
-                    <a:p>
-                      <a:r>
-                        <a:rPr sz="1450" b="1" i="0">
-                          <a:solidFill>
-                            <a:srgbClr val="FFFFFF"/>
-                          </a:solidFill>
-                          <a:latin typeface="Calibri"/>
-                        </a:rPr>
-                        <a:t>Field</a:t>
-                      </a:r>
-                    </a:p>
-                  </a:txBody>
-                  <a:tcPr marL="101600" marR="101600" marT="38100" marB="38100" anchor="ctr">
-                    <a:solidFill>
-                      <a:srgbClr val="1A0F5C"/>
-                    </a:solidFill>
-                  </a:tcPr>
-                </a:tc>
-                <a:tc>
-                  <a:txBody>
-                    <a:bodyPr/>
-                    <a:lstStyle/>
-                    <a:p>
-                      <a:r>
-                        <a:rPr sz="1450" b="1" i="0">
-                          <a:solidFill>
-                            <a:srgbClr val="FFFFFF"/>
-                          </a:solidFill>
-                          <a:latin typeface="Calibri"/>
-                        </a:rPr>
-                        <a:t>Expected</a:t>
-                      </a:r>
-                    </a:p>
-                  </a:txBody>
-                  <a:tcPr marL="101600" marR="101600" marT="38100" marB="38100" anchor="ctr">
-                    <a:solidFill>
-                      <a:srgbClr val="1A0F5C"/>
-                    </a:solidFill>
-                  </a:tcPr>
-                </a:tc>
-              </a:tr>
-              <a:tr h="369824">
-                <a:tc>
-                  <a:txBody>
-                    <a:bodyPr/>
-                    <a:lstStyle/>
-                    <a:p>
-                      <a:r>
-                        <a:rPr sz="1400" b="0" i="0">
-                          <a:solidFill>
-                            <a:srgbClr val="1A1440"/>
-                          </a:solidFill>
-                          <a:latin typeface="Calibri"/>
-                        </a:rPr>
-                        <a:t>The three pairs</a:t>
-                      </a:r>
-                    </a:p>
-                  </a:txBody>
-                  <a:tcPr marL="101600" marR="101600" marT="38100" marB="38100" anchor="ctr">
-                    <a:solidFill>
-                      <a:srgbClr val="FFFFFF"/>
-                    </a:solidFill>
-                  </a:tcPr>
-                </a:tc>
-                <a:tc>
-                  <a:txBody>
-                    <a:bodyPr/>
-                    <a:lstStyle/>
-                    <a:p>
-                      <a:r>
-                        <a:rPr sz="1400" b="0" i="0">
-                          <a:solidFill>
-                            <a:srgbClr val="1A1440"/>
-                          </a:solidFill>
-                          <a:latin typeface="Calibri"/>
-                        </a:rPr>
-                        <a:t>Named, with support and lift from the notebook</a:t>
-                      </a:r>
-                    </a:p>
-                  </a:txBody>
-                  <a:tcPr marL="101600" marR="101600" marT="38100" marB="38100" anchor="ctr">
-                    <a:solidFill>
-                      <a:srgbClr val="FFFFFF"/>
-                    </a:solidFill>
-                  </a:tcPr>
-                </a:tc>
-              </a:tr>
-              <a:tr h="369824">
-                <a:tc>
-                  <a:txBody>
-                    <a:bodyPr/>
-                    <a:lstStyle/>
-                    <a:p>
-                      <a:r>
-                        <a:rPr sz="1400" b="0" i="0">
-                          <a:solidFill>
-                            <a:srgbClr val="1A1440"/>
-                          </a:solidFill>
-                          <a:latin typeface="Calibri"/>
-                        </a:rPr>
-                        <a:t>The rupee value per slot per month</a:t>
-                      </a:r>
-                    </a:p>
-                  </a:txBody>
-                  <a:tcPr marL="101600" marR="101600" marT="38100" marB="38100" anchor="ctr">
-                    <a:solidFill>
-                      <a:srgbClr val="F4F2FA"/>
-                    </a:solidFill>
-                  </a:tcPr>
-                </a:tc>
-                <a:tc>
-                  <a:txBody>
-                    <a:bodyPr/>
-                    <a:lstStyle/>
-                    <a:p>
-                      <a:r>
-                        <a:rPr sz="1400" b="0" i="0">
-                          <a:solidFill>
-                            <a:srgbClr val="1A1440"/>
-                          </a:solidFill>
-                          <a:latin typeface="Calibri"/>
-                        </a:rPr>
-                        <a:t>From the model, with each assumption's range beside it</a:t>
-                      </a:r>
-                    </a:p>
-                  </a:txBody>
-                  <a:tcPr marL="101600" marR="101600" marT="38100" marB="38100" anchor="ctr">
-                    <a:solidFill>
-                      <a:srgbClr val="F4F2FA"/>
-                    </a:solidFill>
-                  </a:tcPr>
-                </a:tc>
-              </a:tr>
-              <a:tr h="611632">
-                <a:tc>
-                  <a:txBody>
-                    <a:bodyPr/>
-                    <a:lstStyle/>
-                    <a:p>
-                      <a:r>
-                        <a:rPr sz="1400" b="0" i="0">
-                          <a:solidFill>
-                            <a:srgbClr val="1A1440"/>
-                          </a:solidFill>
-                          <a:latin typeface="Calibri"/>
-                        </a:rPr>
-                        <a:t>The two caveats</a:t>
-                      </a:r>
-                    </a:p>
-                  </a:txBody>
-                  <a:tcPr marL="101600" marR="101600" marT="38100" marB="38100" anchor="ctr">
-                    <a:solidFill>
-                      <a:srgbClr val="FFFFFF"/>
-                    </a:solidFill>
-                  </a:tcPr>
-                </a:tc>
-                <a:tc>
-                  <a:txBody>
-                    <a:bodyPr/>
-                    <a:lstStyle/>
-                    <a:p>
-                      <a:r>
-                        <a:rPr sz="1400" b="0" i="0">
-                          <a:solidFill>
-                            <a:srgbClr val="1A1440"/>
-                          </a:solidFill>
-                          <a:latin typeface="Calibri"/>
-                        </a:rPr>
-                        <a:t>Heavy-tenth share and the stock-out, with the recomputation the paper would run</a:t>
-                      </a:r>
-                    </a:p>
-                  </a:txBody>
-                  <a:tcPr marL="101600" marR="101600" marT="38100" marB="38100" anchor="ctr">
-                    <a:solidFill>
-                      <a:srgbClr val="FFFFFF"/>
-                    </a:solidFill>
-                  </a:tcPr>
-                </a:tc>
-              </a:tr>
-              <a:tr h="369824">
-                <a:tc>
-                  <a:txBody>
-                    <a:bodyPr/>
-                    <a:lstStyle/>
-                    <a:p>
-                      <a:r>
-                        <a:rPr sz="1400" b="0" i="0">
-                          <a:solidFill>
-                            <a:srgbClr val="1A1440"/>
-                          </a:solidFill>
-                          <a:latin typeface="Calibri"/>
-                        </a:rPr>
-                        <a:t>The answer to the manager</a:t>
-                      </a:r>
-                    </a:p>
-                  </a:txBody>
-                  <a:tcPr marL="101600" marR="101600" marT="38100" marB="38100" anchor="ctr">
-                    <a:solidFill>
-                      <a:srgbClr val="F4F2FA"/>
-                    </a:solidFill>
-                  </a:tcPr>
-                </a:tc>
-                <a:tc>
-                  <a:txBody>
-                    <a:bodyPr/>
-                    <a:lstStyle/>
-                    <a:p>
-                      <a:r>
-                        <a:rPr sz="1400" b="0" i="0">
-                          <a:solidFill>
-                            <a:srgbClr val="1A1440"/>
-                          </a:solidFill>
-                          <a:latin typeface="Calibri"/>
-                        </a:rPr>
-                        <a:t>Two sentences, the number first, then the mechanism</a:t>
-                      </a:r>
-                    </a:p>
-                  </a:txBody>
-                  <a:tcPr marL="101600" marR="101600" marT="38100" marB="38100" anchor="ctr">
-                    <a:solidFill>
-                      <a:srgbClr val="F4F2FA"/>
-                    </a:solidFill>
-                  </a:tcPr>
-                </a:tc>
-              </a:tr>
-            </a:tbl>
-          </a:graphicData>
-        </a:graphic>
-      </p:graphicFrame>
-      <p:sp>
-        <p:nvSpPr>
-          <p:cNvPr id="10" name="Oval 9"/>
+              <a:t>What must the handed-in page say?</a:t>
+            </a:r>
+          </a:p>
+        </p:txBody>
+      </p:sp>
+      <p:pic>
+        <p:nvPicPr>
+          <p:cNvPr id="9" name="mermaid diagram" descr="5d4b1bd1f6a32e5c.png"/>
+          <p:cNvPicPr>
+            <a:picLocks noChangeAspect="1"/>
+          </p:cNvPicPr>
+          <p:nvPr/>
+        </p:nvPicPr>
+        <p:blipFill>
+          <a:blip r:embed="rId5"/>
+          <a:stretch>
+            <a:fillRect/>
+          </a:stretch>
+        </p:blipFill>
+        <p:spPr>
+          <a:xfrm>
+            <a:off x="780897" y="1956816"/>
+            <a:ext cx="10629900" cy="2100262"/>
+          </a:xfrm>
+          <a:prstGeom prst="rect">
+            <a:avLst/>
+          </a:prstGeom>
+        </p:spPr>
+      </p:pic>
+      <p:sp>
+        <p:nvSpPr>
+          <p:cNvPr id="10" name="TextBox 9"/>
+          <p:cNvSpPr txBox="1"/>
+          <p:nvPr/>
+        </p:nvSpPr>
+        <p:spPr>
+          <a:xfrm>
+            <a:off x="530352" y="4203382"/>
+            <a:ext cx="11130991" cy="495807"/>
+          </a:xfrm>
+          <a:prstGeom prst="rect">
+            <a:avLst/>
+          </a:prstGeom>
+          <a:noFill/>
+        </p:spPr>
+        <p:txBody>
+          <a:bodyPr wrap="square" anchor="t" lIns="0" rIns="0" tIns="0" bIns="0">
+            <a:spAutoFit/>
+          </a:bodyPr>
+          <a:lstStyle/>
+          <a:p>
+            <a:pPr>
+              <a:spcAft>
+                <a:spcPts val="800"/>
+              </a:spcAft>
+            </a:pPr>
+            <a:r>
+              <a:rPr sz="1600" b="0" i="0">
+                <a:solidFill>
+                  <a:srgbClr val="1A1440"/>
+                </a:solidFill>
+                <a:latin typeface="Calibri"/>
+              </a:rPr>
+              <a:t>A strip that names a pair without its support, or a rupee figure without its ranges, is sent back.</a:t>
+            </a:r>
+          </a:p>
+        </p:txBody>
+      </p:sp>
+      <p:sp>
+        <p:nvSpPr>
+          <p:cNvPr id="11" name="Oval 10"/>
           <p:cNvSpPr/>
           <p:nvPr/>
         </p:nvSpPr>
@@ -10225,14 +10668,14 @@
       </p:sp>
       <p:sp>
         <p:nvSpPr>
-          <p:cNvPr id="11" name="TextBox 10"/>
+          <p:cNvPr id="12" name="TextBox 11"/>
           <p:cNvSpPr txBox="1"/>
           <p:nvPr/>
         </p:nvSpPr>
         <p:spPr>
           <a:xfrm>
             <a:off x="640080" y="6437376"/>
-            <a:ext cx="1746504" cy="152146"/>
+            <a:ext cx="1516475" cy="152146"/>
           </a:xfrm>
           <a:prstGeom prst="rect">
             <a:avLst/>
@@ -10253,20 +10696,20 @@
                 </a:solidFill>
                 <a:latin typeface="Calibri"/>
               </a:rPr>
-              <a:t>Pick three slots and defend them</a:t>
-            </a:r>
-          </a:p>
-        </p:txBody>
-      </p:sp>
-      <p:sp>
-        <p:nvSpPr>
-          <p:cNvPr id="12" name="Oval 11"/>
+              <a:t>Which strip would you ship?</a:t>
+            </a:r>
+          </a:p>
+        </p:txBody>
+      </p:sp>
+      <p:sp>
+        <p:nvSpPr>
+          <p:cNvPr id="13" name="Oval 12"/>
           <p:cNvSpPr/>
           <p:nvPr/>
         </p:nvSpPr>
         <p:spPr>
           <a:xfrm>
-            <a:off x="2478024" y="6492240"/>
+            <a:off x="2247995" y="6492240"/>
             <a:ext cx="64008" cy="64008"/>
           </a:xfrm>
           <a:prstGeom prst="ellipse">
@@ -10304,14 +10747,14 @@
       </p:sp>
       <p:sp>
         <p:nvSpPr>
-          <p:cNvPr id="13" name="TextBox 12"/>
-          <p:cNvSpPr txBox="1"/>
-          <p:nvPr/>
-        </p:nvSpPr>
-        <p:spPr>
-          <a:xfrm>
-            <a:off x="2587752" y="6437376"/>
-            <a:ext cx="1976532" cy="152146"/>
+          <p:cNvPr id="14" name="TextBox 13"/>
+          <p:cNvSpPr txBox="1"/>
+          <p:nvPr/>
+        </p:nvSpPr>
+        <p:spPr>
+          <a:xfrm>
+            <a:off x="2357723" y="6437376"/>
+            <a:ext cx="1102423" cy="152146"/>
           </a:xfrm>
           <a:prstGeom prst="rect">
             <a:avLst/>
@@ -10332,20 +10775,20 @@
                 </a:solidFill>
                 <a:latin typeface="Calibri"/>
               </a:rPr>
-              <a:t>The interview question the day equips</a:t>
-            </a:r>
-          </a:p>
-        </p:txBody>
-      </p:sp>
-      <p:sp>
-        <p:nvSpPr>
-          <p:cNvPr id="14" name="Oval 13"/>
+              <a:t>The interview room</a:t>
+            </a:r>
+          </a:p>
+        </p:txBody>
+      </p:sp>
+      <p:sp>
+        <p:nvSpPr>
+          <p:cNvPr id="15" name="Oval 14"/>
           <p:cNvSpPr/>
           <p:nvPr/>
         </p:nvSpPr>
         <p:spPr>
           <a:xfrm>
-            <a:off x="4655724" y="6492240"/>
+            <a:off x="3551586" y="6492240"/>
             <a:ext cx="64008" cy="64008"/>
           </a:xfrm>
           <a:prstGeom prst="ellipse">
@@ -10383,14 +10826,14 @@
       </p:sp>
       <p:sp>
         <p:nvSpPr>
-          <p:cNvPr id="15" name="TextBox 14"/>
-          <p:cNvSpPr txBox="1"/>
-          <p:nvPr/>
-        </p:nvSpPr>
-        <p:spPr>
-          <a:xfrm>
-            <a:off x="4765452" y="6437376"/>
-            <a:ext cx="2194560" cy="267716"/>
+          <p:cNvPr id="16" name="TextBox 15"/>
+          <p:cNvSpPr txBox="1"/>
+          <p:nvPr/>
+        </p:nvSpPr>
+        <p:spPr>
+          <a:xfrm>
+            <a:off x="3661314" y="6437376"/>
+            <a:ext cx="1424463" cy="152146"/>
           </a:xfrm>
           <a:prstGeom prst="rect">
             <a:avLst/>
@@ -10411,14 +10854,14 @@
                 </a:solidFill>
                 <a:latin typeface="Calibri"/>
               </a:rPr>
-              <a:t>The handoff into the W4-2 faculty block (tentative)</a:t>
-            </a:r>
-          </a:p>
-        </p:txBody>
-      </p:sp>
-      <p:sp>
-        <p:nvSpPr>
-          <p:cNvPr id="16" name="TextBox 15"/>
+              <a:t>The handoff and the close</a:t>
+            </a:r>
+          </a:p>
+        </p:txBody>
+      </p:sp>
+      <p:sp>
+        <p:nvSpPr>
+          <p:cNvPr id="17" name="TextBox 16"/>
           <p:cNvSpPr txBox="1"/>
           <p:nvPr/>
         </p:nvSpPr>
@@ -10446,7 +10889,7 @@
                 </a:solidFill>
                 <a:latin typeface="Calibri"/>
               </a:rPr>
-              <a:t>S31  ·  4 / 11</a:t>
+              <a:t>S39  ·  4 / 13</a:t>
             </a:r>
           </a:p>
         </p:txBody>
@@ -10652,7 +11095,7 @@
                 </a:solidFill>
                 <a:latin typeface="Georgia"/>
               </a:rPr>
-              <a:t>The method ladder for the strip proposal</a:t>
+              <a:t>"Milk is our top seller; put it in every slot"</a:t>
             </a:r>
           </a:p>
         </p:txBody>
@@ -10687,14 +11130,339 @@
                 </a:solidFill>
                 <a:latin typeface="Calibri"/>
               </a:rPr>
-              <a:t>What goes from the pairs table to a one-sentence answer?</a:t>
-            </a:r>
+              <a:t>Which part of the category manager's objection is right, and what answers the rest?</a:t>
+            </a:r>
+          </a:p>
+        </p:txBody>
+      </p:sp>
+      <p:sp>
+        <p:nvSpPr>
+          <p:cNvPr id="9" name="Rounded Rectangle 8"/>
+          <p:cNvSpPr/>
+          <p:nvPr/>
+        </p:nvSpPr>
+        <p:spPr>
+          <a:xfrm>
+            <a:off x="530352" y="1956816"/>
+            <a:ext cx="2645587" cy="2385568"/>
+          </a:xfrm>
+          <a:prstGeom prst="roundRect">
+            <a:avLst>
+              <a:gd name="adj" fmla="val 5000"/>
+            </a:avLst>
+          </a:prstGeom>
+          <a:solidFill>
+            <a:srgbClr val="FFFFFF"/>
+          </a:solidFill>
+          <a:ln w="9525">
+            <a:solidFill>
+              <a:srgbClr val="E4E1F1"/>
+            </a:solidFill>
+          </a:ln>
+          <a:effectLst>
+            <a:outerShdw blurRad="76200" dist="19050" dir="5400000" algn="bl" rotWithShape="0">
+              <a:srgbClr val="1A0F5C">
+                <a:alpha val="12000"/>
+              </a:srgbClr>
+            </a:outerShdw>
+          </a:effectLst>
+        </p:spPr>
+        <p:style>
+          <a:lnRef idx="1">
+            <a:schemeClr val="accent1"/>
+          </a:lnRef>
+          <a:fillRef idx="3">
+            <a:schemeClr val="accent1"/>
+          </a:fillRef>
+          <a:effectRef idx="2">
+            <a:schemeClr val="accent1"/>
+          </a:effectRef>
+          <a:fontRef idx="minor">
+            <a:schemeClr val="lt1"/>
+          </a:fontRef>
+        </p:style>
+        <p:txBody>
+          <a:bodyPr rtlCol="0" anchor="ctr" wrap="square"/>
+          <a:lstStyle/>
+          <a:p>
+            <a:pPr algn="ctr"/>
+          </a:p>
+        </p:txBody>
+      </p:sp>
+      <p:sp>
+        <p:nvSpPr>
+          <p:cNvPr id="10" name="Oval 9"/>
+          <p:cNvSpPr/>
+          <p:nvPr/>
+        </p:nvSpPr>
+        <p:spPr>
+          <a:xfrm>
+            <a:off x="731519" y="2157984"/>
+            <a:ext cx="457200" cy="457200"/>
+          </a:xfrm>
+          <a:prstGeom prst="ellipse">
+            <a:avLst/>
+          </a:prstGeom>
+          <a:solidFill>
+            <a:srgbClr val="EEEAFB"/>
+          </a:solidFill>
+          <a:ln>
+            <a:noFill/>
+          </a:ln>
+          <a:effectLst/>
+        </p:spPr>
+        <p:style>
+          <a:lnRef idx="1">
+            <a:schemeClr val="accent1"/>
+          </a:lnRef>
+          <a:fillRef idx="3">
+            <a:schemeClr val="accent1"/>
+          </a:fillRef>
+          <a:effectRef idx="2">
+            <a:schemeClr val="accent1"/>
+          </a:effectRef>
+          <a:fontRef idx="minor">
+            <a:schemeClr val="lt1"/>
+          </a:fontRef>
+        </p:style>
+        <p:txBody>
+          <a:bodyPr rtlCol="0" anchor="ctr" wrap="square"/>
+          <a:lstStyle/>
+          <a:p>
+            <a:pPr algn="ctr"/>
           </a:p>
         </p:txBody>
       </p:sp>
       <p:pic>
         <p:nvPicPr>
-          <p:cNvPr id="9" name="mermaid diagram" descr="86f9cf1fb543b16b.png"/>
+          <p:cNvPr id="11" name="Picture 10" descr="ear_2c90737cfd22.png"/>
+          <p:cNvPicPr>
+            <a:picLocks noChangeAspect="1"/>
+          </p:cNvPicPr>
+          <p:nvPr/>
+        </p:nvPicPr>
+        <p:blipFill>
+          <a:blip r:embed="rId4"/>
+          <a:stretch>
+            <a:fillRect/>
+          </a:stretch>
+        </p:blipFill>
+        <p:spPr>
+          <a:xfrm>
+            <a:off x="841247" y="2267712"/>
+            <a:ext cx="237744" cy="237744"/>
+          </a:xfrm>
+          <a:prstGeom prst="rect">
+            <a:avLst/>
+          </a:prstGeom>
+        </p:spPr>
+      </p:pic>
+      <p:sp>
+        <p:nvSpPr>
+          <p:cNvPr id="12" name="TextBox 11"/>
+          <p:cNvSpPr txBox="1"/>
+          <p:nvPr/>
+        </p:nvSpPr>
+        <p:spPr>
+          <a:xfrm>
+            <a:off x="731519" y="2724912"/>
+            <a:ext cx="2243251" cy="160401"/>
+          </a:xfrm>
+          <a:prstGeom prst="rect">
+            <a:avLst/>
+          </a:prstGeom>
+          <a:noFill/>
+        </p:spPr>
+        <p:txBody>
+          <a:bodyPr wrap="square" anchor="t" lIns="0" rIns="0" tIns="0" bIns="0">
+            <a:spAutoFit/>
+          </a:bodyPr>
+          <a:lstStyle/>
+          <a:p>
+            <a:pPr algn="l"/>
+            <a:r>
+              <a:rPr sz="750" b="1" i="0" spc="250">
+                <a:solidFill>
+                  <a:srgbClr val="5B3FD6"/>
+                </a:solidFill>
+                <a:latin typeface="Calibri"/>
+              </a:rPr>
+              <a:t>RESTATE</a:t>
+            </a:r>
+          </a:p>
+        </p:txBody>
+      </p:sp>
+      <p:sp>
+        <p:nvSpPr>
+          <p:cNvPr id="13" name="TextBox 12"/>
+          <p:cNvSpPr txBox="1"/>
+          <p:nvPr/>
+        </p:nvSpPr>
+        <p:spPr>
+          <a:xfrm>
+            <a:off x="731519" y="2962656"/>
+            <a:ext cx="2243251" cy="267716"/>
+          </a:xfrm>
+          <a:prstGeom prst="rect">
+            <a:avLst/>
+          </a:prstGeom>
+          <a:noFill/>
+        </p:spPr>
+        <p:txBody>
+          <a:bodyPr wrap="square" anchor="t" lIns="0" rIns="0" tIns="0" bIns="0">
+            <a:spAutoFit/>
+          </a:bodyPr>
+          <a:lstStyle/>
+          <a:p>
+            <a:pPr algn="l"/>
+            <a:r>
+              <a:rPr sz="1400" b="1" i="0">
+                <a:solidFill>
+                  <a:srgbClr val="1A0F5C"/>
+                </a:solidFill>
+                <a:latin typeface="Calibri"/>
+              </a:rPr>
+              <a:t>Milk anchors the cart</a:t>
+            </a:r>
+          </a:p>
+        </p:txBody>
+      </p:sp>
+      <p:sp>
+        <p:nvSpPr>
+          <p:cNvPr id="14" name="TextBox 13"/>
+          <p:cNvSpPr txBox="1"/>
+          <p:nvPr/>
+        </p:nvSpPr>
+        <p:spPr>
+          <a:xfrm>
+            <a:off x="731519" y="3303524"/>
+            <a:ext cx="2243251" cy="399796"/>
+          </a:xfrm>
+          <a:prstGeom prst="rect">
+            <a:avLst/>
+          </a:prstGeom>
+          <a:noFill/>
+        </p:spPr>
+        <p:txBody>
+          <a:bodyPr wrap="square" anchor="t" lIns="0" rIns="0" tIns="0" bIns="0">
+            <a:spAutoFit/>
+          </a:bodyPr>
+          <a:lstStyle/>
+          <a:p>
+            <a:pPr algn="l"/>
+            <a:r>
+              <a:rPr sz="1100" b="0" i="0">
+                <a:solidFill>
+                  <a:srgbClr val="6B6690"/>
+                </a:solidFill>
+                <a:latin typeface="Calibri"/>
+              </a:rPr>
+              <a:t>It is in 71 percent of carts and brings shoppers back daily.</a:t>
+            </a:r>
+          </a:p>
+        </p:txBody>
+      </p:sp>
+      <p:sp>
+        <p:nvSpPr>
+          <p:cNvPr id="15" name="Rounded Rectangle 14"/>
+          <p:cNvSpPr/>
+          <p:nvPr/>
+        </p:nvSpPr>
+        <p:spPr>
+          <a:xfrm>
+            <a:off x="3358819" y="1956816"/>
+            <a:ext cx="2645587" cy="2385568"/>
+          </a:xfrm>
+          <a:prstGeom prst="roundRect">
+            <a:avLst>
+              <a:gd name="adj" fmla="val 5000"/>
+            </a:avLst>
+          </a:prstGeom>
+          <a:solidFill>
+            <a:srgbClr val="FFFFFF"/>
+          </a:solidFill>
+          <a:ln w="9525">
+            <a:solidFill>
+              <a:srgbClr val="E4E1F1"/>
+            </a:solidFill>
+          </a:ln>
+          <a:effectLst>
+            <a:outerShdw blurRad="76200" dist="19050" dir="5400000" algn="bl" rotWithShape="0">
+              <a:srgbClr val="1A0F5C">
+                <a:alpha val="12000"/>
+              </a:srgbClr>
+            </a:outerShdw>
+          </a:effectLst>
+        </p:spPr>
+        <p:style>
+          <a:lnRef idx="1">
+            <a:schemeClr val="accent1"/>
+          </a:lnRef>
+          <a:fillRef idx="3">
+            <a:schemeClr val="accent1"/>
+          </a:fillRef>
+          <a:effectRef idx="2">
+            <a:schemeClr val="accent1"/>
+          </a:effectRef>
+          <a:fontRef idx="minor">
+            <a:schemeClr val="lt1"/>
+          </a:fontRef>
+        </p:style>
+        <p:txBody>
+          <a:bodyPr rtlCol="0" anchor="ctr" wrap="square"/>
+          <a:lstStyle/>
+          <a:p>
+            <a:pPr algn="ctr"/>
+          </a:p>
+        </p:txBody>
+      </p:sp>
+      <p:sp>
+        <p:nvSpPr>
+          <p:cNvPr id="16" name="Oval 15"/>
+          <p:cNvSpPr/>
+          <p:nvPr/>
+        </p:nvSpPr>
+        <p:spPr>
+          <a:xfrm>
+            <a:off x="3559987" y="2157984"/>
+            <a:ext cx="457200" cy="457200"/>
+          </a:xfrm>
+          <a:prstGeom prst="ellipse">
+            <a:avLst/>
+          </a:prstGeom>
+          <a:solidFill>
+            <a:srgbClr val="EEEAFB"/>
+          </a:solidFill>
+          <a:ln>
+            <a:noFill/>
+          </a:ln>
+          <a:effectLst/>
+        </p:spPr>
+        <p:style>
+          <a:lnRef idx="1">
+            <a:schemeClr val="accent1"/>
+          </a:lnRef>
+          <a:fillRef idx="3">
+            <a:schemeClr val="accent1"/>
+          </a:fillRef>
+          <a:effectRef idx="2">
+            <a:schemeClr val="accent1"/>
+          </a:effectRef>
+          <a:fontRef idx="minor">
+            <a:schemeClr val="lt1"/>
+          </a:fontRef>
+        </p:style>
+        <p:txBody>
+          <a:bodyPr rtlCol="0" anchor="ctr" wrap="square"/>
+          <a:lstStyle/>
+          <a:p>
+            <a:pPr algn="ctr"/>
+          </a:p>
+        </p:txBody>
+      </p:sp>
+      <p:pic>
+        <p:nvPicPr>
+          <p:cNvPr id="17" name="Picture 16" descr="chart-column_a266b7a04479.png"/>
           <p:cNvPicPr>
             <a:picLocks noChangeAspect="1"/>
           </p:cNvPicPr>
@@ -10708,8 +11476,8 @@
         </p:blipFill>
         <p:spPr>
           <a:xfrm>
-            <a:off x="2454492" y="1682496"/>
-            <a:ext cx="938045" cy="4517136"/>
+            <a:off x="3669715" y="2267712"/>
+            <a:ext cx="237744" cy="237744"/>
           </a:xfrm>
           <a:prstGeom prst="rect">
             <a:avLst/>
@@ -10718,14 +11486,14 @@
       </p:pic>
       <p:sp>
         <p:nvSpPr>
-          <p:cNvPr id="10" name="TextBox 9"/>
-          <p:cNvSpPr txBox="1"/>
-          <p:nvPr/>
-        </p:nvSpPr>
-        <p:spPr>
-          <a:xfrm>
-            <a:off x="5761917" y="1956816"/>
-            <a:ext cx="5899425" cy="1048512"/>
+          <p:cNvPr id="18" name="TextBox 17"/>
+          <p:cNvSpPr txBox="1"/>
+          <p:nvPr/>
+        </p:nvSpPr>
+        <p:spPr>
+          <a:xfrm>
+            <a:off x="3559987" y="2724912"/>
+            <a:ext cx="2243251" cy="160401"/>
           </a:xfrm>
           <a:prstGeom prst="rect">
             <a:avLst/>
@@ -10738,33 +11506,386 @@
           </a:bodyPr>
           <a:lstStyle/>
           <a:p>
-            <a:pPr>
-              <a:spcAft>
-                <a:spcPts val="800"/>
-              </a:spcAft>
-            </a:pPr>
-            <a:r>
-              <a:rPr sz="1600" b="0" i="0">
-                <a:solidFill>
-                  <a:srgbClr val="1A1440"/>
+            <a:pPr algn="l"/>
+            <a:r>
+              <a:rPr sz="750" b="1" i="0" spc="250">
+                <a:solidFill>
+                  <a:srgbClr val="5B3FD6"/>
                 </a:solidFill>
                 <a:latin typeface="Calibri"/>
               </a:rPr>
-              <a:t>The method is a line: table, floor, lift, rupees, caveats, two sentences. The caveats are a labelled line in the proposal, with the recomputation the paper would carry.</a:t>
-            </a:r>
-          </a:p>
-        </p:txBody>
-      </p:sp>
-      <p:sp>
-        <p:nvSpPr>
-          <p:cNvPr id="11" name="Oval 10"/>
+              <a:t>ANSWER</a:t>
+            </a:r>
+          </a:p>
+        </p:txBody>
+      </p:sp>
+      <p:sp>
+        <p:nvSpPr>
+          <p:cNvPr id="19" name="TextBox 18"/>
+          <p:cNvSpPr txBox="1"/>
+          <p:nvPr/>
+        </p:nvSpPr>
+        <p:spPr>
+          <a:xfrm>
+            <a:off x="3559987" y="2962656"/>
+            <a:ext cx="2243251" cy="267716"/>
+          </a:xfrm>
+          <a:prstGeom prst="rect">
+            <a:avLst/>
+          </a:prstGeom>
+          <a:noFill/>
+        </p:spPr>
+        <p:txBody>
+          <a:bodyPr wrap="square" anchor="t" lIns="0" rIns="0" tIns="0" bIns="0">
+            <a:spAutoFit/>
+          </a:bodyPr>
+          <a:lstStyle/>
+          <a:p>
+            <a:pPr algn="l"/>
+            <a:r>
+              <a:rPr sz="1400" b="1" i="0">
+                <a:solidFill>
+                  <a:srgbClr val="1A0F5C"/>
+                </a:solidFill>
+                <a:latin typeface="Calibri"/>
+              </a:rPr>
+              <a:t>The slot moves nothing</a:t>
+            </a:r>
+          </a:p>
+        </p:txBody>
+      </p:sp>
+      <p:sp>
+        <p:nvSpPr>
+          <p:cNvPr id="20" name="TextBox 19"/>
+          <p:cNvSpPr txBox="1"/>
+          <p:nvPr/>
+        </p:nvSpPr>
+        <p:spPr>
+          <a:xfrm>
+            <a:off x="3559987" y="3303524"/>
+            <a:ext cx="2243251" cy="581406"/>
+          </a:xfrm>
+          <a:prstGeom prst="rect">
+            <a:avLst/>
+          </a:prstGeom>
+          <a:noFill/>
+        </p:spPr>
+        <p:txBody>
+          <a:bodyPr wrap="square" anchor="t" lIns="0" rIns="0" tIns="0" bIns="0">
+            <a:spAutoFit/>
+          </a:bodyPr>
+          <a:lstStyle/>
+          <a:p>
+            <a:pPr algn="l"/>
+            <a:r>
+              <a:rPr sz="1100" b="0" i="0">
+                <a:solidFill>
+                  <a:srgbClr val="6B6690"/>
+                </a:solidFill>
+                <a:latin typeface="Calibri"/>
+              </a:rPr>
+              <a:t>Milk slots click at 1.2 percent against 6.4; lift with every common item sits near one.</a:t>
+            </a:r>
+          </a:p>
+        </p:txBody>
+      </p:sp>
+      <p:sp>
+        <p:nvSpPr>
+          <p:cNvPr id="21" name="Rounded Rectangle 20"/>
           <p:cNvSpPr/>
           <p:nvPr/>
         </p:nvSpPr>
         <p:spPr>
           <a:xfrm>
-            <a:off x="530352" y="6492240"/>
-            <a:ext cx="64008" cy="64008"/>
+            <a:off x="6187287" y="1956816"/>
+            <a:ext cx="2645587" cy="2385568"/>
+          </a:xfrm>
+          <a:prstGeom prst="roundRect">
+            <a:avLst>
+              <a:gd name="adj" fmla="val 5000"/>
+            </a:avLst>
+          </a:prstGeom>
+          <a:solidFill>
+            <a:srgbClr val="FFFFFF"/>
+          </a:solidFill>
+          <a:ln w="9525">
+            <a:solidFill>
+              <a:srgbClr val="E4E1F1"/>
+            </a:solidFill>
+          </a:ln>
+          <a:effectLst>
+            <a:outerShdw blurRad="76200" dist="19050" dir="5400000" algn="bl" rotWithShape="0">
+              <a:srgbClr val="1A0F5C">
+                <a:alpha val="12000"/>
+              </a:srgbClr>
+            </a:outerShdw>
+          </a:effectLst>
+        </p:spPr>
+        <p:style>
+          <a:lnRef idx="1">
+            <a:schemeClr val="accent1"/>
+          </a:lnRef>
+          <a:fillRef idx="3">
+            <a:schemeClr val="accent1"/>
+          </a:fillRef>
+          <a:effectRef idx="2">
+            <a:schemeClr val="accent1"/>
+          </a:effectRef>
+          <a:fontRef idx="minor">
+            <a:schemeClr val="lt1"/>
+          </a:fontRef>
+        </p:style>
+        <p:txBody>
+          <a:bodyPr rtlCol="0" anchor="ctr" wrap="square"/>
+          <a:lstStyle/>
+          <a:p>
+            <a:pPr algn="ctr"/>
+          </a:p>
+        </p:txBody>
+      </p:sp>
+      <p:sp>
+        <p:nvSpPr>
+          <p:cNvPr id="22" name="Oval 21"/>
+          <p:cNvSpPr/>
+          <p:nvPr/>
+        </p:nvSpPr>
+        <p:spPr>
+          <a:xfrm>
+            <a:off x="6388455" y="2157984"/>
+            <a:ext cx="457200" cy="457200"/>
+          </a:xfrm>
+          <a:prstGeom prst="ellipse">
+            <a:avLst/>
+          </a:prstGeom>
+          <a:solidFill>
+            <a:srgbClr val="EEEAFB"/>
+          </a:solidFill>
+          <a:ln>
+            <a:noFill/>
+          </a:ln>
+          <a:effectLst/>
+        </p:spPr>
+        <p:style>
+          <a:lnRef idx="1">
+            <a:schemeClr val="accent1"/>
+          </a:lnRef>
+          <a:fillRef idx="3">
+            <a:schemeClr val="accent1"/>
+          </a:fillRef>
+          <a:effectRef idx="2">
+            <a:schemeClr val="accent1"/>
+          </a:effectRef>
+          <a:fontRef idx="minor">
+            <a:schemeClr val="lt1"/>
+          </a:fontRef>
+        </p:style>
+        <p:txBody>
+          <a:bodyPr rtlCol="0" anchor="ctr" wrap="square"/>
+          <a:lstStyle/>
+          <a:p>
+            <a:pPr algn="ctr"/>
+          </a:p>
+        </p:txBody>
+      </p:sp>
+      <p:pic>
+        <p:nvPicPr>
+          <p:cNvPr id="23" name="Picture 22" descr="handshake_e365765057e1.png"/>
+          <p:cNvPicPr>
+            <a:picLocks noChangeAspect="1"/>
+          </p:cNvPicPr>
+          <p:nvPr/>
+        </p:nvPicPr>
+        <p:blipFill>
+          <a:blip r:embed="rId6"/>
+          <a:stretch>
+            <a:fillRect/>
+          </a:stretch>
+        </p:blipFill>
+        <p:spPr>
+          <a:xfrm>
+            <a:off x="6498183" y="2267712"/>
+            <a:ext cx="237744" cy="237744"/>
+          </a:xfrm>
+          <a:prstGeom prst="rect">
+            <a:avLst/>
+          </a:prstGeom>
+        </p:spPr>
+      </p:pic>
+      <p:sp>
+        <p:nvSpPr>
+          <p:cNvPr id="24" name="TextBox 23"/>
+          <p:cNvSpPr txBox="1"/>
+          <p:nvPr/>
+        </p:nvSpPr>
+        <p:spPr>
+          <a:xfrm>
+            <a:off x="6388455" y="2724912"/>
+            <a:ext cx="2243251" cy="160401"/>
+          </a:xfrm>
+          <a:prstGeom prst="rect">
+            <a:avLst/>
+          </a:prstGeom>
+          <a:noFill/>
+        </p:spPr>
+        <p:txBody>
+          <a:bodyPr wrap="square" anchor="t" lIns="0" rIns="0" tIns="0" bIns="0">
+            <a:spAutoFit/>
+          </a:bodyPr>
+          <a:lstStyle/>
+          <a:p>
+            <a:pPr algn="l"/>
+            <a:r>
+              <a:rPr sz="750" b="1" i="0" spc="250">
+                <a:solidFill>
+                  <a:srgbClr val="5B3FD6"/>
+                </a:solidFill>
+                <a:latin typeface="Calibri"/>
+              </a:rPr>
+              <a:t>CONCEDE</a:t>
+            </a:r>
+          </a:p>
+        </p:txBody>
+      </p:sp>
+      <p:sp>
+        <p:nvSpPr>
+          <p:cNvPr id="25" name="TextBox 24"/>
+          <p:cNvSpPr txBox="1"/>
+          <p:nvPr/>
+        </p:nvSpPr>
+        <p:spPr>
+          <a:xfrm>
+            <a:off x="6388455" y="2962656"/>
+            <a:ext cx="2243251" cy="267716"/>
+          </a:xfrm>
+          <a:prstGeom prst="rect">
+            <a:avLst/>
+          </a:prstGeom>
+          <a:noFill/>
+        </p:spPr>
+        <p:txBody>
+          <a:bodyPr wrap="square" anchor="t" lIns="0" rIns="0" tIns="0" bIns="0">
+            <a:spAutoFit/>
+          </a:bodyPr>
+          <a:lstStyle/>
+          <a:p>
+            <a:pPr algn="l"/>
+            <a:r>
+              <a:rPr sz="1400" b="1" i="0">
+                <a:solidFill>
+                  <a:srgbClr val="1A0F5C"/>
+                </a:solidFill>
+                <a:latin typeface="Calibri"/>
+              </a:rPr>
+              <a:t>Milk belongs in the cart</a:t>
+            </a:r>
+          </a:p>
+        </p:txBody>
+      </p:sp>
+      <p:sp>
+        <p:nvSpPr>
+          <p:cNvPr id="26" name="TextBox 25"/>
+          <p:cNvSpPr txBox="1"/>
+          <p:nvPr/>
+        </p:nvSpPr>
+        <p:spPr>
+          <a:xfrm>
+            <a:off x="6388455" y="3303524"/>
+            <a:ext cx="2243251" cy="581406"/>
+          </a:xfrm>
+          <a:prstGeom prst="rect">
+            <a:avLst/>
+          </a:prstGeom>
+          <a:noFill/>
+        </p:spPr>
+        <p:txBody>
+          <a:bodyPr wrap="square" anchor="t" lIns="0" rIns="0" tIns="0" bIns="0">
+            <a:spAutoFit/>
+          </a:bodyPr>
+          <a:lstStyle/>
+          <a:p>
+            <a:pPr algn="l"/>
+            <a:r>
+              <a:rPr sz="1100" b="0" i="0">
+                <a:solidFill>
+                  <a:srgbClr val="6B6690"/>
+                </a:solidFill>
+                <a:latin typeface="Calibri"/>
+              </a:rPr>
+              <a:t>Which is why it needs no reminder; keep it on the home screen and in search.</a:t>
+            </a:r>
+          </a:p>
+        </p:txBody>
+      </p:sp>
+      <p:sp>
+        <p:nvSpPr>
+          <p:cNvPr id="27" name="Rounded Rectangle 26"/>
+          <p:cNvSpPr/>
+          <p:nvPr/>
+        </p:nvSpPr>
+        <p:spPr>
+          <a:xfrm>
+            <a:off x="9015755" y="1956816"/>
+            <a:ext cx="2645587" cy="2385568"/>
+          </a:xfrm>
+          <a:prstGeom prst="roundRect">
+            <a:avLst>
+              <a:gd name="adj" fmla="val 5000"/>
+            </a:avLst>
+          </a:prstGeom>
+          <a:gradFill rotWithShape="1">
+            <a:gsLst>
+              <a:gs pos="0">
+                <a:srgbClr val="2C1A86"/>
+              </a:gs>
+              <a:gs pos="100000">
+                <a:srgbClr val="1A0F5C"/>
+              </a:gs>
+            </a:gsLst>
+            <a:lin scaled="0" ang="16200000"/>
+          </a:gradFill>
+          <a:ln>
+            <a:noFill/>
+          </a:ln>
+          <a:effectLst>
+            <a:outerShdw blurRad="76200" dist="19050" dir="5400000" algn="bl" rotWithShape="0">
+              <a:srgbClr val="1A0F5C">
+                <a:alpha val="12000"/>
+              </a:srgbClr>
+            </a:outerShdw>
+          </a:effectLst>
+        </p:spPr>
+        <p:style>
+          <a:lnRef idx="1">
+            <a:schemeClr val="accent1"/>
+          </a:lnRef>
+          <a:fillRef idx="3">
+            <a:schemeClr val="accent1"/>
+          </a:fillRef>
+          <a:effectRef idx="2">
+            <a:schemeClr val="accent1"/>
+          </a:effectRef>
+          <a:fontRef idx="minor">
+            <a:schemeClr val="lt1"/>
+          </a:fontRef>
+        </p:style>
+        <p:txBody>
+          <a:bodyPr rtlCol="0" anchor="ctr" wrap="square"/>
+          <a:lstStyle/>
+          <a:p>
+            <a:pPr algn="ctr"/>
+          </a:p>
+        </p:txBody>
+      </p:sp>
+      <p:sp>
+        <p:nvSpPr>
+          <p:cNvPr id="28" name="Oval 27"/>
+          <p:cNvSpPr/>
+          <p:nvPr/>
+        </p:nvSpPr>
+        <p:spPr>
+          <a:xfrm>
+            <a:off x="9216923" y="2157984"/>
+            <a:ext cx="457200" cy="457200"/>
           </a:xfrm>
           <a:prstGeom prst="ellipse">
             <a:avLst/>
@@ -10799,16 +11920,189 @@
           </a:p>
         </p:txBody>
       </p:sp>
-      <p:sp>
-        <p:nvSpPr>
-          <p:cNvPr id="12" name="TextBox 11"/>
+      <p:pic>
+        <p:nvPicPr>
+          <p:cNvPr id="29" name="Picture 28" descr="refresh-cw_c3ada071ae1b.png"/>
+          <p:cNvPicPr>
+            <a:picLocks noChangeAspect="1"/>
+          </p:cNvPicPr>
+          <p:nvPr/>
+        </p:nvPicPr>
+        <p:blipFill>
+          <a:blip r:embed="rId7"/>
+          <a:stretch>
+            <a:fillRect/>
+          </a:stretch>
+        </p:blipFill>
+        <p:spPr>
+          <a:xfrm>
+            <a:off x="9326651" y="2267712"/>
+            <a:ext cx="237744" cy="237744"/>
+          </a:xfrm>
+          <a:prstGeom prst="rect">
+            <a:avLst/>
+          </a:prstGeom>
+        </p:spPr>
+      </p:pic>
+      <p:sp>
+        <p:nvSpPr>
+          <p:cNvPr id="30" name="TextBox 29"/>
+          <p:cNvSpPr txBox="1"/>
+          <p:nvPr/>
+        </p:nvSpPr>
+        <p:spPr>
+          <a:xfrm>
+            <a:off x="9216923" y="2724912"/>
+            <a:ext cx="2243251" cy="160401"/>
+          </a:xfrm>
+          <a:prstGeom prst="rect">
+            <a:avLst/>
+          </a:prstGeom>
+          <a:noFill/>
+        </p:spPr>
+        <p:txBody>
+          <a:bodyPr wrap="square" anchor="t" lIns="0" rIns="0" tIns="0" bIns="0">
+            <a:spAutoFit/>
+          </a:bodyPr>
+          <a:lstStyle/>
+          <a:p>
+            <a:pPr algn="l"/>
+            <a:r>
+              <a:rPr sz="750" b="1" i="0" spc="250">
+                <a:solidFill>
+                  <a:srgbClr val="D9A7FF"/>
+                </a:solidFill>
+                <a:latin typeface="Calibri"/>
+              </a:rPr>
+              <a:t>WHAT WOULD CHANGE IT</a:t>
+            </a:r>
+          </a:p>
+        </p:txBody>
+      </p:sp>
+      <p:sp>
+        <p:nvSpPr>
+          <p:cNvPr id="31" name="TextBox 30"/>
+          <p:cNvSpPr txBox="1"/>
+          <p:nvPr/>
+        </p:nvSpPr>
+        <p:spPr>
+          <a:xfrm>
+            <a:off x="9216923" y="2962656"/>
+            <a:ext cx="2243251" cy="498856"/>
+          </a:xfrm>
+          <a:prstGeom prst="rect">
+            <a:avLst/>
+          </a:prstGeom>
+          <a:noFill/>
+        </p:spPr>
+        <p:txBody>
+          <a:bodyPr wrap="square" anchor="t" lIns="0" rIns="0" tIns="0" bIns="0">
+            <a:spAutoFit/>
+          </a:bodyPr>
+          <a:lstStyle/>
+          <a:p>
+            <a:pPr algn="l"/>
+            <a:r>
+              <a:rPr sz="1400" b="1" i="0">
+                <a:solidFill>
+                  <a:srgbClr val="FFFFFF"/>
+                </a:solidFill>
+                <a:latin typeface="Calibri"/>
+              </a:rPr>
+              <a:t>If milk clicked like the rest</a:t>
+            </a:r>
+          </a:p>
+        </p:txBody>
+      </p:sp>
+      <p:sp>
+        <p:nvSpPr>
+          <p:cNvPr id="32" name="TextBox 31"/>
+          <p:cNvSpPr txBox="1"/>
+          <p:nvPr/>
+        </p:nvSpPr>
+        <p:spPr>
+          <a:xfrm>
+            <a:off x="9216923" y="3534664"/>
+            <a:ext cx="2243251" cy="581406"/>
+          </a:xfrm>
+          <a:prstGeom prst="rect">
+            <a:avLst/>
+          </a:prstGeom>
+          <a:noFill/>
+        </p:spPr>
+        <p:txBody>
+          <a:bodyPr wrap="square" anchor="t" lIns="0" rIns="0" tIns="0" bIns="0">
+            <a:spAutoFit/>
+          </a:bodyPr>
+          <a:lstStyle/>
+          <a:p>
+            <a:pPr algn="l"/>
+            <a:r>
+              <a:rPr sz="1100" b="0" i="0">
+                <a:solidFill>
+                  <a:srgbClr val="CFC9EE"/>
+                </a:solidFill>
+                <a:latin typeface="Calibri"/>
+              </a:rPr>
+              <a:t>A two-zone test where milk slots matched 6.4 percent would put milk back.</a:t>
+            </a:r>
+          </a:p>
+        </p:txBody>
+      </p:sp>
+      <p:sp>
+        <p:nvSpPr>
+          <p:cNvPr id="33" name="Oval 32"/>
+          <p:cNvSpPr/>
+          <p:nvPr/>
+        </p:nvSpPr>
+        <p:spPr>
+          <a:xfrm>
+            <a:off x="530352" y="6492240"/>
+            <a:ext cx="64008" cy="64008"/>
+          </a:xfrm>
+          <a:prstGeom prst="ellipse">
+            <a:avLst/>
+          </a:prstGeom>
+          <a:solidFill>
+            <a:srgbClr val="5B3FD6"/>
+          </a:solidFill>
+          <a:ln>
+            <a:noFill/>
+          </a:ln>
+          <a:effectLst/>
+        </p:spPr>
+        <p:style>
+          <a:lnRef idx="1">
+            <a:schemeClr val="accent1"/>
+          </a:lnRef>
+          <a:fillRef idx="3">
+            <a:schemeClr val="accent1"/>
+          </a:fillRef>
+          <a:effectRef idx="2">
+            <a:schemeClr val="accent1"/>
+          </a:effectRef>
+          <a:fontRef idx="minor">
+            <a:schemeClr val="lt1"/>
+          </a:fontRef>
+        </p:style>
+        <p:txBody>
+          <a:bodyPr rtlCol="0" anchor="ctr" wrap="square"/>
+          <a:lstStyle/>
+          <a:p>
+            <a:pPr algn="ctr"/>
+          </a:p>
+        </p:txBody>
+      </p:sp>
+      <p:sp>
+        <p:nvSpPr>
+          <p:cNvPr id="34" name="TextBox 33"/>
           <p:cNvSpPr txBox="1"/>
           <p:nvPr/>
         </p:nvSpPr>
         <p:spPr>
           <a:xfrm>
             <a:off x="640080" y="6437376"/>
-            <a:ext cx="1746504" cy="152146"/>
+            <a:ext cx="1516475" cy="152146"/>
           </a:xfrm>
           <a:prstGeom prst="rect">
             <a:avLst/>
@@ -10829,20 +12123,20 @@
                 </a:solidFill>
                 <a:latin typeface="Calibri"/>
               </a:rPr>
-              <a:t>Pick three slots and defend them</a:t>
-            </a:r>
-          </a:p>
-        </p:txBody>
-      </p:sp>
-      <p:sp>
-        <p:nvSpPr>
-          <p:cNvPr id="13" name="Oval 12"/>
+              <a:t>Which strip would you ship?</a:t>
+            </a:r>
+          </a:p>
+        </p:txBody>
+      </p:sp>
+      <p:sp>
+        <p:nvSpPr>
+          <p:cNvPr id="35" name="Oval 34"/>
           <p:cNvSpPr/>
           <p:nvPr/>
         </p:nvSpPr>
         <p:spPr>
           <a:xfrm>
-            <a:off x="2478024" y="6492240"/>
+            <a:off x="2247995" y="6492240"/>
             <a:ext cx="64008" cy="64008"/>
           </a:xfrm>
           <a:prstGeom prst="ellipse">
@@ -10880,14 +12174,14 @@
       </p:sp>
       <p:sp>
         <p:nvSpPr>
-          <p:cNvPr id="14" name="TextBox 13"/>
-          <p:cNvSpPr txBox="1"/>
-          <p:nvPr/>
-        </p:nvSpPr>
-        <p:spPr>
-          <a:xfrm>
-            <a:off x="2587752" y="6437376"/>
-            <a:ext cx="1976532" cy="152146"/>
+          <p:cNvPr id="36" name="TextBox 35"/>
+          <p:cNvSpPr txBox="1"/>
+          <p:nvPr/>
+        </p:nvSpPr>
+        <p:spPr>
+          <a:xfrm>
+            <a:off x="2357723" y="6437376"/>
+            <a:ext cx="1102423" cy="152146"/>
           </a:xfrm>
           <a:prstGeom prst="rect">
             <a:avLst/>
@@ -10908,20 +12202,20 @@
                 </a:solidFill>
                 <a:latin typeface="Calibri"/>
               </a:rPr>
-              <a:t>The interview question the day equips</a:t>
-            </a:r>
-          </a:p>
-        </p:txBody>
-      </p:sp>
-      <p:sp>
-        <p:nvSpPr>
-          <p:cNvPr id="15" name="Oval 14"/>
+              <a:t>The interview room</a:t>
+            </a:r>
+          </a:p>
+        </p:txBody>
+      </p:sp>
+      <p:sp>
+        <p:nvSpPr>
+          <p:cNvPr id="37" name="Oval 36"/>
           <p:cNvSpPr/>
           <p:nvPr/>
         </p:nvSpPr>
         <p:spPr>
           <a:xfrm>
-            <a:off x="4655724" y="6492240"/>
+            <a:off x="3551586" y="6492240"/>
             <a:ext cx="64008" cy="64008"/>
           </a:xfrm>
           <a:prstGeom prst="ellipse">
@@ -10959,14 +12253,14 @@
       </p:sp>
       <p:sp>
         <p:nvSpPr>
-          <p:cNvPr id="16" name="TextBox 15"/>
-          <p:cNvSpPr txBox="1"/>
-          <p:nvPr/>
-        </p:nvSpPr>
-        <p:spPr>
-          <a:xfrm>
-            <a:off x="4765452" y="6437376"/>
-            <a:ext cx="2194560" cy="267716"/>
+          <p:cNvPr id="38" name="TextBox 37"/>
+          <p:cNvSpPr txBox="1"/>
+          <p:nvPr/>
+        </p:nvSpPr>
+        <p:spPr>
+          <a:xfrm>
+            <a:off x="3661314" y="6437376"/>
+            <a:ext cx="1424463" cy="152146"/>
           </a:xfrm>
           <a:prstGeom prst="rect">
             <a:avLst/>
@@ -10987,14 +12281,14 @@
                 </a:solidFill>
                 <a:latin typeface="Calibri"/>
               </a:rPr>
-              <a:t>The handoff into the W4-2 faculty block (tentative)</a:t>
-            </a:r>
-          </a:p>
-        </p:txBody>
-      </p:sp>
-      <p:sp>
-        <p:nvSpPr>
-          <p:cNvPr id="17" name="TextBox 16"/>
+              <a:t>The handoff and the close</a:t>
+            </a:r>
+          </a:p>
+        </p:txBody>
+      </p:sp>
+      <p:sp>
+        <p:nvSpPr>
+          <p:cNvPr id="39" name="TextBox 38"/>
           <p:cNvSpPr txBox="1"/>
           <p:nvPr/>
         </p:nvSpPr>
@@ -11022,7 +12316,7 @@
                 </a:solidFill>
                 <a:latin typeface="Calibri"/>
               </a:rPr>
-              <a:t>S32  ·  5 / 11</a:t>
+              <a:t>S40  ·  5 / 13</a:t>
             </a:r>
           </a:p>
         </p:txBody>
@@ -11228,7 +12522,7 @@
                 </a:solidFill>
                 <a:latin typeface="Georgia"/>
               </a:rPr>
-              <a:t>07</a:t>
+              <a:t>04</a:t>
             </a:r>
           </a:p>
         </p:txBody>
@@ -11263,7 +12557,7 @@
                 </a:solidFill>
                 <a:latin typeface="Georgia"/>
               </a:rPr>
-              <a:t>The interview question the day equips</a:t>
+              <a:t>The interview room</a:t>
             </a:r>
           </a:p>
         </p:txBody>
@@ -11277,7 +12571,7 @@
         <p:spPr>
           <a:xfrm>
             <a:off x="731519" y="3520440"/>
-            <a:ext cx="9509760" cy="284226"/>
+            <a:ext cx="9509760" cy="531876"/>
           </a:xfrm>
           <a:prstGeom prst="rect">
             <a:avLst/>
@@ -11298,7 +12592,7 @@
                 </a:solidFill>
                 <a:latin typeface="Calibri"/>
               </a:rPr>
-              <a:t>A transcript the room reads in pairs, then the AI-company variant.</a:t>
+              <a:t>How does a strong candidate answer the day's question as Uber, Swiggy, Google or an AI startup would ask it?</a:t>
             </a:r>
           </a:p>
         </p:txBody>
@@ -11312,7 +12606,7 @@
         <p:spPr>
           <a:xfrm>
             <a:off x="731519" y="5074920"/>
-            <a:ext cx="2148840" cy="310896"/>
+            <a:ext cx="1964591" cy="310896"/>
           </a:xfrm>
           <a:prstGeom prst="roundRect">
             <a:avLst>
@@ -11353,7 +12647,7 @@
                 </a:solidFill>
                 <a:latin typeface="Calibri"/>
               </a:rPr>
-              <a:t>Pick three slots and defend them</a:t>
+              <a:t>Which strip would you ship?</a:t>
             </a:r>
           </a:p>
         </p:txBody>
@@ -11366,8 +12660,8 @@
         </p:nvSpPr>
         <p:spPr>
           <a:xfrm>
-            <a:off x="2990088" y="5074920"/>
-            <a:ext cx="2148840" cy="310896"/>
+            <a:off x="2805839" y="5074920"/>
+            <a:ext cx="1431647" cy="310896"/>
           </a:xfrm>
           <a:prstGeom prst="roundRect">
             <a:avLst>
@@ -11408,7 +12702,7 @@
                 </a:solidFill>
                 <a:latin typeface="Calibri"/>
               </a:rPr>
-              <a:t>The interview question the day equips</a:t>
+              <a:t>The interview room</a:t>
             </a:r>
           </a:p>
         </p:txBody>
@@ -11421,8 +12715,8 @@
         </p:nvSpPr>
         <p:spPr>
           <a:xfrm>
-            <a:off x="5248656" y="5074920"/>
-            <a:ext cx="2148840" cy="310896"/>
+            <a:off x="4347214" y="5074920"/>
+            <a:ext cx="1846159" cy="310896"/>
           </a:xfrm>
           <a:prstGeom prst="roundRect">
             <a:avLst>
@@ -11463,7 +12757,7 @@
                 </a:solidFill>
                 <a:latin typeface="Calibri"/>
               </a:rPr>
-              <a:t>The handoff into the W4-2 faculty block (tentative)</a:t>
+              <a:t>The handoff and the close</a:t>
             </a:r>
           </a:p>
         </p:txBody>
@@ -11498,7 +12792,7 @@
                 </a:solidFill>
                 <a:latin typeface="Calibri"/>
               </a:rPr>
-              <a:t>Week 4, Day 3. The three slots and the Kalpa transfer</a:t>
+              <a:t>Week 4 Day 3: what goes with what, beyond chance</a:t>
             </a:r>
           </a:p>
         </p:txBody>
@@ -11533,7 +12827,7 @@
                 </a:solidFill>
                 <a:latin typeface="Calibri"/>
               </a:rPr>
-              <a:t>6 / 11</a:t>
+              <a:t>6 / 13</a:t>
             </a:r>
           </a:p>
         </p:txBody>
@@ -11739,7 +13033,7 @@
                 </a:solidFill>
                 <a:latin typeface="Georgia"/>
               </a:rPr>
-              <a:t>The question, asked exactly as it reaches the room</a:t>
+              <a:t>Lift is the count popularity cannot fool</a:t>
             </a:r>
           </a:p>
         </p:txBody>
@@ -11774,7 +13068,7 @@
                 </a:solidFill>
                 <a:latin typeface="Calibri"/>
               </a:rPr>
-              <a:t>Support, confidence, lift: which cannot be fooled by popularity?</a:t>
+              <a:t>"Support, confidence, lift: which one cannot be fooled by popularity, and why?"</a:t>
             </a:r>
           </a:p>
         </p:txBody>
@@ -11788,7 +13082,234 @@
         <p:spPr>
           <a:xfrm>
             <a:off x="530352" y="1956816"/>
-            <a:ext cx="2645587" cy="2724404"/>
+            <a:ext cx="3588410" cy="2765552"/>
+          </a:xfrm>
+          <a:prstGeom prst="roundRect">
+            <a:avLst>
+              <a:gd name="adj" fmla="val 5000"/>
+            </a:avLst>
+          </a:prstGeom>
+          <a:solidFill>
+            <a:srgbClr val="FFFFFF"/>
+          </a:solidFill>
+          <a:ln w="9525">
+            <a:solidFill>
+              <a:srgbClr val="E4E1F1"/>
+            </a:solidFill>
+          </a:ln>
+          <a:effectLst>
+            <a:outerShdw blurRad="76200" dist="19050" dir="5400000" algn="bl" rotWithShape="0">
+              <a:srgbClr val="1A0F5C">
+                <a:alpha val="12000"/>
+              </a:srgbClr>
+            </a:outerShdw>
+          </a:effectLst>
+        </p:spPr>
+        <p:style>
+          <a:lnRef idx="1">
+            <a:schemeClr val="accent1"/>
+          </a:lnRef>
+          <a:fillRef idx="3">
+            <a:schemeClr val="accent1"/>
+          </a:fillRef>
+          <a:effectRef idx="2">
+            <a:schemeClr val="accent1"/>
+          </a:effectRef>
+          <a:fontRef idx="minor">
+            <a:schemeClr val="lt1"/>
+          </a:fontRef>
+        </p:style>
+        <p:txBody>
+          <a:bodyPr rtlCol="0" anchor="ctr" wrap="square"/>
+          <a:lstStyle/>
+          <a:p>
+            <a:pPr algn="ctr"/>
+          </a:p>
+        </p:txBody>
+      </p:sp>
+      <p:sp>
+        <p:nvSpPr>
+          <p:cNvPr id="10" name="Oval 9"/>
+          <p:cNvSpPr/>
+          <p:nvPr/>
+        </p:nvSpPr>
+        <p:spPr>
+          <a:xfrm>
+            <a:off x="731519" y="2157984"/>
+            <a:ext cx="457200" cy="457200"/>
+          </a:xfrm>
+          <a:prstGeom prst="ellipse">
+            <a:avLst/>
+          </a:prstGeom>
+          <a:solidFill>
+            <a:srgbClr val="EEEAFB"/>
+          </a:solidFill>
+          <a:ln>
+            <a:noFill/>
+          </a:ln>
+          <a:effectLst/>
+        </p:spPr>
+        <p:style>
+          <a:lnRef idx="1">
+            <a:schemeClr val="accent1"/>
+          </a:lnRef>
+          <a:fillRef idx="3">
+            <a:schemeClr val="accent1"/>
+          </a:fillRef>
+          <a:effectRef idx="2">
+            <a:schemeClr val="accent1"/>
+          </a:effectRef>
+          <a:fontRef idx="minor">
+            <a:schemeClr val="lt1"/>
+          </a:fontRef>
+        </p:style>
+        <p:txBody>
+          <a:bodyPr rtlCol="0" anchor="ctr" wrap="square"/>
+          <a:lstStyle/>
+          <a:p>
+            <a:pPr algn="ctr"/>
+          </a:p>
+        </p:txBody>
+      </p:sp>
+      <p:pic>
+        <p:nvPicPr>
+          <p:cNvPr id="11" name="Picture 10" descr="x_1ea7e70f5a06.png"/>
+          <p:cNvPicPr>
+            <a:picLocks noChangeAspect="1"/>
+          </p:cNvPicPr>
+          <p:nvPr/>
+        </p:nvPicPr>
+        <p:blipFill>
+          <a:blip r:embed="rId4"/>
+          <a:stretch>
+            <a:fillRect/>
+          </a:stretch>
+        </p:blipFill>
+        <p:spPr>
+          <a:xfrm>
+            <a:off x="841247" y="2267712"/>
+            <a:ext cx="237744" cy="237744"/>
+          </a:xfrm>
+          <a:prstGeom prst="rect">
+            <a:avLst/>
+          </a:prstGeom>
+        </p:spPr>
+      </p:pic>
+      <p:sp>
+        <p:nvSpPr>
+          <p:cNvPr id="12" name="TextBox 11"/>
+          <p:cNvSpPr txBox="1"/>
+          <p:nvPr/>
+        </p:nvSpPr>
+        <p:spPr>
+          <a:xfrm>
+            <a:off x="731519" y="2724912"/>
+            <a:ext cx="3186074" cy="160401"/>
+          </a:xfrm>
+          <a:prstGeom prst="rect">
+            <a:avLst/>
+          </a:prstGeom>
+          <a:noFill/>
+        </p:spPr>
+        <p:txBody>
+          <a:bodyPr wrap="square" anchor="t" lIns="0" rIns="0" tIns="0" bIns="0">
+            <a:spAutoFit/>
+          </a:bodyPr>
+          <a:lstStyle/>
+          <a:p>
+            <a:pPr algn="l"/>
+            <a:r>
+              <a:rPr sz="750" b="1" i="0" spc="250">
+                <a:solidFill>
+                  <a:srgbClr val="5B3FD6"/>
+                </a:solidFill>
+                <a:latin typeface="Calibri"/>
+              </a:rPr>
+              <a:t>WEAK ANSWER</a:t>
+            </a:r>
+          </a:p>
+        </p:txBody>
+      </p:sp>
+      <p:sp>
+        <p:nvSpPr>
+          <p:cNvPr id="13" name="TextBox 12"/>
+          <p:cNvSpPr txBox="1"/>
+          <p:nvPr/>
+        </p:nvSpPr>
+        <p:spPr>
+          <a:xfrm>
+            <a:off x="731519" y="2962656"/>
+            <a:ext cx="3186074" cy="267716"/>
+          </a:xfrm>
+          <a:prstGeom prst="rect">
+            <a:avLst/>
+          </a:prstGeom>
+          <a:noFill/>
+        </p:spPr>
+        <p:txBody>
+          <a:bodyPr wrap="square" anchor="t" lIns="0" rIns="0" tIns="0" bIns="0">
+            <a:spAutoFit/>
+          </a:bodyPr>
+          <a:lstStyle/>
+          <a:p>
+            <a:pPr algn="l"/>
+            <a:r>
+              <a:rPr sz="1400" b="1" i="0">
+                <a:solidFill>
+                  <a:srgbClr val="1A0F5C"/>
+                </a:solidFill>
+                <a:latin typeface="Calibri"/>
+              </a:rPr>
+              <a:t>Confidence</a:t>
+            </a:r>
+          </a:p>
+        </p:txBody>
+      </p:sp>
+      <p:sp>
+        <p:nvSpPr>
+          <p:cNvPr id="14" name="TextBox 13"/>
+          <p:cNvSpPr txBox="1"/>
+          <p:nvPr/>
+        </p:nvSpPr>
+        <p:spPr>
+          <a:xfrm>
+            <a:off x="731519" y="3303524"/>
+            <a:ext cx="3186074" cy="581406"/>
+          </a:xfrm>
+          <a:prstGeom prst="rect">
+            <a:avLst/>
+          </a:prstGeom>
+          <a:noFill/>
+        </p:spPr>
+        <p:txBody>
+          <a:bodyPr wrap="square" anchor="t" lIns="0" rIns="0" tIns="0" bIns="0">
+            <a:spAutoFit/>
+          </a:bodyPr>
+          <a:lstStyle/>
+          <a:p>
+            <a:pPr algn="l"/>
+            <a:r>
+              <a:rPr sz="1100" b="0" i="0">
+                <a:solidFill>
+                  <a:srgbClr val="6B6690"/>
+                </a:solidFill>
+                <a:latin typeface="Calibri"/>
+              </a:rPr>
+              <a:t>"Confidence is the probability they go together, so the highest confidence pair goes in the strip." It ranks milk first.</a:t>
+            </a:r>
+          </a:p>
+        </p:txBody>
+      </p:sp>
+      <p:sp>
+        <p:nvSpPr>
+          <p:cNvPr id="15" name="Rounded Rectangle 14"/>
+          <p:cNvSpPr/>
+          <p:nvPr/>
+        </p:nvSpPr>
+        <p:spPr>
+          <a:xfrm>
+            <a:off x="4301642" y="1956816"/>
+            <a:ext cx="3588410" cy="2765552"/>
           </a:xfrm>
           <a:prstGeom prst="roundRect">
             <a:avLst>
@@ -11841,13 +13362,13 @@
       </p:sp>
       <p:sp>
         <p:nvSpPr>
-          <p:cNvPr id="10" name="Oval 9"/>
+          <p:cNvPr id="16" name="Oval 15"/>
           <p:cNvSpPr/>
           <p:nvPr/>
         </p:nvSpPr>
         <p:spPr>
           <a:xfrm>
-            <a:off x="731519" y="2157984"/>
+            <a:off x="4502810" y="2157984"/>
             <a:ext cx="457200" cy="457200"/>
           </a:xfrm>
           <a:prstGeom prst="ellipse">
@@ -11885,21 +13406,21 @@
       </p:sp>
       <p:pic>
         <p:nvPicPr>
-          <p:cNvPr id="11" name="Picture 10" descr="user_482bd27f0dcf.png"/>
+          <p:cNvPr id="17" name="Picture 16" descr="check_adac4adaf554.png"/>
           <p:cNvPicPr>
             <a:picLocks noChangeAspect="1"/>
           </p:cNvPicPr>
           <p:nvPr/>
         </p:nvPicPr>
         <p:blipFill>
-          <a:blip r:embed="rId4"/>
+          <a:blip r:embed="rId5"/>
           <a:stretch>
             <a:fillRect/>
           </a:stretch>
         </p:blipFill>
         <p:spPr>
           <a:xfrm>
-            <a:off x="841247" y="2267712"/>
+            <a:off x="4612538" y="2267712"/>
             <a:ext cx="237744" cy="237744"/>
           </a:xfrm>
           <a:prstGeom prst="rect">
@@ -11909,14 +13430,14 @@
       </p:pic>
       <p:sp>
         <p:nvSpPr>
-          <p:cNvPr id="12" name="TextBox 11"/>
-          <p:cNvSpPr txBox="1"/>
-          <p:nvPr/>
-        </p:nvSpPr>
-        <p:spPr>
-          <a:xfrm>
-            <a:off x="731519" y="2724912"/>
-            <a:ext cx="2243251" cy="160401"/>
+          <p:cNvPr id="18" name="TextBox 17"/>
+          <p:cNvSpPr txBox="1"/>
+          <p:nvPr/>
+        </p:nvSpPr>
+        <p:spPr>
+          <a:xfrm>
+            <a:off x="4502810" y="2724912"/>
+            <a:ext cx="3186074" cy="160401"/>
           </a:xfrm>
           <a:prstGeom prst="rect">
             <a:avLst/>
@@ -11937,21 +13458,21 @@
                 </a:solidFill>
                 <a:latin typeface="Calibri"/>
               </a:rPr>
-              <a:t>INTERVIEWER</a:t>
-            </a:r>
-          </a:p>
-        </p:txBody>
-      </p:sp>
-      <p:sp>
-        <p:nvSpPr>
-          <p:cNvPr id="13" name="TextBox 12"/>
-          <p:cNvSpPr txBox="1"/>
-          <p:nvPr/>
-        </p:nvSpPr>
-        <p:spPr>
-          <a:xfrm>
-            <a:off x="731519" y="2962656"/>
-            <a:ext cx="2243251" cy="267716"/>
+              <a:t>HIRE-GRADE ANSWER</a:t>
+            </a:r>
+          </a:p>
+        </p:txBody>
+      </p:sp>
+      <p:sp>
+        <p:nvSpPr>
+          <p:cNvPr id="19" name="TextBox 18"/>
+          <p:cNvSpPr txBox="1"/>
+          <p:nvPr/>
+        </p:nvSpPr>
+        <p:spPr>
+          <a:xfrm>
+            <a:off x="4502810" y="2962656"/>
+            <a:ext cx="3186074" cy="498856"/>
           </a:xfrm>
           <a:prstGeom prst="rect">
             <a:avLst/>
@@ -11972,21 +13493,21 @@
                 </a:solidFill>
                 <a:latin typeface="Calibri"/>
               </a:rPr>
-              <a:t>The question</a:t>
-            </a:r>
-          </a:p>
-        </p:txBody>
-      </p:sp>
-      <p:sp>
-        <p:nvSpPr>
-          <p:cNvPr id="14" name="TextBox 13"/>
-          <p:cNvSpPr txBox="1"/>
-          <p:nvPr/>
-        </p:nvSpPr>
-        <p:spPr>
-          <a:xfrm>
-            <a:off x="731519" y="3303524"/>
-            <a:ext cx="2243251" cy="763016"/>
+              <a:t>Lift, because it divides by the base rate</a:t>
+            </a:r>
+          </a:p>
+        </p:txBody>
+      </p:sp>
+      <p:sp>
+        <p:nvSpPr>
+          <p:cNvPr id="20" name="TextBox 19"/>
+          <p:cNvSpPr txBox="1"/>
+          <p:nvPr/>
+        </p:nvSpPr>
+        <p:spPr>
+          <a:xfrm>
+            <a:off x="4502810" y="3534664"/>
+            <a:ext cx="3186074" cy="944626"/>
           </a:xfrm>
           <a:prstGeom prst="rect">
             <a:avLst/>
@@ -12007,21 +13528,21 @@
                 </a:solidFill>
                 <a:latin typeface="Calibri"/>
               </a:rPr>
-              <a:t>"Support, confidence, lift. Which one cannot be fooled by popularity, and why? Follow up with a product example."</a:t>
-            </a:r>
-          </a:p>
-        </p:txBody>
-      </p:sp>
-      <p:sp>
-        <p:nvSpPr>
-          <p:cNvPr id="15" name="Rounded Rectangle 14"/>
+              <a:t>"Bread to milk reads confidence 0.74, but milk is in 71 percent of carts anyway, so lift is 1.04. Chips and cold drink read 0.42 and lift 3.39. I rank by lift above a support floor."</a:t>
+            </a:r>
+          </a:p>
+        </p:txBody>
+      </p:sp>
+      <p:sp>
+        <p:nvSpPr>
+          <p:cNvPr id="21" name="Rounded Rectangle 20"/>
           <p:cNvSpPr/>
           <p:nvPr/>
         </p:nvSpPr>
         <p:spPr>
           <a:xfrm>
-            <a:off x="3358819" y="1956816"/>
-            <a:ext cx="2645587" cy="2724404"/>
+            <a:off x="8072932" y="1956816"/>
+            <a:ext cx="3588410" cy="2765552"/>
           </a:xfrm>
           <a:prstGeom prst="roundRect">
             <a:avLst>
@@ -12068,13 +13589,13 @@
       </p:sp>
       <p:sp>
         <p:nvSpPr>
-          <p:cNvPr id="16" name="Oval 15"/>
+          <p:cNvPr id="22" name="Oval 21"/>
           <p:cNvSpPr/>
           <p:nvPr/>
         </p:nvSpPr>
         <p:spPr>
           <a:xfrm>
-            <a:off x="3559987" y="2157984"/>
+            <a:off x="8274100" y="2157984"/>
             <a:ext cx="457200" cy="457200"/>
           </a:xfrm>
           <a:prstGeom prst="ellipse">
@@ -12112,234 +13633,7 @@
       </p:sp>
       <p:pic>
         <p:nvPicPr>
-          <p:cNvPr id="17" name="Picture 16" descr="triangle-alert_5ac49fc6abbb.png"/>
-          <p:cNvPicPr>
-            <a:picLocks noChangeAspect="1"/>
-          </p:cNvPicPr>
-          <p:nvPr/>
-        </p:nvPicPr>
-        <p:blipFill>
-          <a:blip r:embed="rId5"/>
-          <a:stretch>
-            <a:fillRect/>
-          </a:stretch>
-        </p:blipFill>
-        <p:spPr>
-          <a:xfrm>
-            <a:off x="3669715" y="2267712"/>
-            <a:ext cx="237744" cy="237744"/>
-          </a:xfrm>
-          <a:prstGeom prst="rect">
-            <a:avLst/>
-          </a:prstGeom>
-        </p:spPr>
-      </p:pic>
-      <p:sp>
-        <p:nvSpPr>
-          <p:cNvPr id="18" name="TextBox 17"/>
-          <p:cNvSpPr txBox="1"/>
-          <p:nvPr/>
-        </p:nvSpPr>
-        <p:spPr>
-          <a:xfrm>
-            <a:off x="3559987" y="2724912"/>
-            <a:ext cx="2243251" cy="160401"/>
-          </a:xfrm>
-          <a:prstGeom prst="rect">
-            <a:avLst/>
-          </a:prstGeom>
-          <a:noFill/>
-        </p:spPr>
-        <p:txBody>
-          <a:bodyPr wrap="square" anchor="t" lIns="0" rIns="0" tIns="0" bIns="0">
-            <a:spAutoFit/>
-          </a:bodyPr>
-          <a:lstStyle/>
-          <a:p>
-            <a:pPr algn="l"/>
-            <a:r>
-              <a:rPr sz="750" b="1" i="0" spc="250">
-                <a:solidFill>
-                  <a:srgbClr val="5B3FD6"/>
-                </a:solidFill>
-                <a:latin typeface="Calibri"/>
-              </a:rPr>
-              <a:t>WEAK ANSWER</a:t>
-            </a:r>
-          </a:p>
-        </p:txBody>
-      </p:sp>
-      <p:sp>
-        <p:nvSpPr>
-          <p:cNvPr id="19" name="TextBox 18"/>
-          <p:cNvSpPr txBox="1"/>
-          <p:nvPr/>
-        </p:nvSpPr>
-        <p:spPr>
-          <a:xfrm>
-            <a:off x="3559987" y="2962656"/>
-            <a:ext cx="2243251" cy="267716"/>
-          </a:xfrm>
-          <a:prstGeom prst="rect">
-            <a:avLst/>
-          </a:prstGeom>
-          <a:noFill/>
-        </p:spPr>
-        <p:txBody>
-          <a:bodyPr wrap="square" anchor="t" lIns="0" rIns="0" tIns="0" bIns="0">
-            <a:spAutoFit/>
-          </a:bodyPr>
-          <a:lstStyle/>
-          <a:p>
-            <a:pPr algn="l"/>
-            <a:r>
-              <a:rPr sz="1400" b="1" i="0">
-                <a:solidFill>
-                  <a:srgbClr val="1A0F5C"/>
-                </a:solidFill>
-                <a:latin typeface="Calibri"/>
-              </a:rPr>
-              <a:t>Confidence</a:t>
-            </a:r>
-          </a:p>
-        </p:txBody>
-      </p:sp>
-      <p:sp>
-        <p:nvSpPr>
-          <p:cNvPr id="20" name="TextBox 19"/>
-          <p:cNvSpPr txBox="1"/>
-          <p:nvPr/>
-        </p:nvSpPr>
-        <p:spPr>
-          <a:xfrm>
-            <a:off x="3559987" y="3303524"/>
-            <a:ext cx="2243251" cy="581406"/>
-          </a:xfrm>
-          <a:prstGeom prst="rect">
-            <a:avLst/>
-          </a:prstGeom>
-          <a:noFill/>
-        </p:spPr>
-        <p:txBody>
-          <a:bodyPr wrap="square" anchor="t" lIns="0" rIns="0" tIns="0" bIns="0">
-            <a:spAutoFit/>
-          </a:bodyPr>
-          <a:lstStyle/>
-          <a:p>
-            <a:pPr algn="l"/>
-            <a:r>
-              <a:rPr sz="1100" b="0" i="0">
-                <a:solidFill>
-                  <a:srgbClr val="6B6690"/>
-                </a:solidFill>
-                <a:latin typeface="Calibri"/>
-              </a:rPr>
-              <a:t>Says confidence is "how likely they are to go together" and stops. The interviewer waits.</a:t>
-            </a:r>
-          </a:p>
-        </p:txBody>
-      </p:sp>
-      <p:sp>
-        <p:nvSpPr>
-          <p:cNvPr id="21" name="Rounded Rectangle 20"/>
-          <p:cNvSpPr/>
-          <p:nvPr/>
-        </p:nvSpPr>
-        <p:spPr>
-          <a:xfrm>
-            <a:off x="6187287" y="1956816"/>
-            <a:ext cx="2645587" cy="2724404"/>
-          </a:xfrm>
-          <a:prstGeom prst="roundRect">
-            <a:avLst>
-              <a:gd name="adj" fmla="val 5000"/>
-            </a:avLst>
-          </a:prstGeom>
-          <a:solidFill>
-            <a:srgbClr val="FFFFFF"/>
-          </a:solidFill>
-          <a:ln w="9525">
-            <a:solidFill>
-              <a:srgbClr val="E4E1F1"/>
-            </a:solidFill>
-          </a:ln>
-          <a:effectLst>
-            <a:outerShdw blurRad="76200" dist="19050" dir="5400000" algn="bl" rotWithShape="0">
-              <a:srgbClr val="1A0F5C">
-                <a:alpha val="12000"/>
-              </a:srgbClr>
-            </a:outerShdw>
-          </a:effectLst>
-        </p:spPr>
-        <p:style>
-          <a:lnRef idx="1">
-            <a:schemeClr val="accent1"/>
-          </a:lnRef>
-          <a:fillRef idx="3">
-            <a:schemeClr val="accent1"/>
-          </a:fillRef>
-          <a:effectRef idx="2">
-            <a:schemeClr val="accent1"/>
-          </a:effectRef>
-          <a:fontRef idx="minor">
-            <a:schemeClr val="lt1"/>
-          </a:fontRef>
-        </p:style>
-        <p:txBody>
-          <a:bodyPr rtlCol="0" anchor="ctr" wrap="square"/>
-          <a:lstStyle/>
-          <a:p>
-            <a:pPr algn="ctr"/>
-          </a:p>
-        </p:txBody>
-      </p:sp>
-      <p:sp>
-        <p:nvSpPr>
-          <p:cNvPr id="22" name="Oval 21"/>
-          <p:cNvSpPr/>
-          <p:nvPr/>
-        </p:nvSpPr>
-        <p:spPr>
-          <a:xfrm>
-            <a:off x="6388455" y="2157984"/>
-            <a:ext cx="457200" cy="457200"/>
-          </a:xfrm>
-          <a:prstGeom prst="ellipse">
-            <a:avLst/>
-          </a:prstGeom>
-          <a:solidFill>
-            <a:srgbClr val="EEEAFB"/>
-          </a:solidFill>
-          <a:ln>
-            <a:noFill/>
-          </a:ln>
-          <a:effectLst/>
-        </p:spPr>
-        <p:style>
-          <a:lnRef idx="1">
-            <a:schemeClr val="accent1"/>
-          </a:lnRef>
-          <a:fillRef idx="3">
-            <a:schemeClr val="accent1"/>
-          </a:fillRef>
-          <a:effectRef idx="2">
-            <a:schemeClr val="accent1"/>
-          </a:effectRef>
-          <a:fontRef idx="minor">
-            <a:schemeClr val="lt1"/>
-          </a:fontRef>
-        </p:style>
-        <p:txBody>
-          <a:bodyPr rtlCol="0" anchor="ctr" wrap="square"/>
-          <a:lstStyle/>
-          <a:p>
-            <a:pPr algn="ctr"/>
-          </a:p>
-        </p:txBody>
-      </p:sp>
-      <p:pic>
-        <p:nvPicPr>
-          <p:cNvPr id="23" name="Picture 22" descr="check_b9076ab140eb.png"/>
+          <p:cNvPr id="23" name="Picture 22" descr="ear_2c90737cfd22.png"/>
           <p:cNvPicPr>
             <a:picLocks noChangeAspect="1"/>
           </p:cNvPicPr>
@@ -12353,7 +13647,7 @@
         </p:blipFill>
         <p:spPr>
           <a:xfrm>
-            <a:off x="6498183" y="2267712"/>
+            <a:off x="8383828" y="2267712"/>
             <a:ext cx="237744" cy="237744"/>
           </a:xfrm>
           <a:prstGeom prst="rect">
@@ -12369,8 +13663,8 @@
         </p:nvSpPr>
         <p:spPr>
           <a:xfrm>
-            <a:off x="6388455" y="2724912"/>
-            <a:ext cx="2243251" cy="160401"/>
+            <a:off x="8274100" y="2724912"/>
+            <a:ext cx="3186074" cy="160401"/>
           </a:xfrm>
           <a:prstGeom prst="rect">
             <a:avLst/>
@@ -12391,7 +13685,7 @@
                 </a:solidFill>
                 <a:latin typeface="Calibri"/>
               </a:rPr>
-              <a:t>HIRE-GRADE</a:t>
+              <a:t>WHAT THE INTERVIEWER LISTENS FOR</a:t>
             </a:r>
           </a:p>
         </p:txBody>
@@ -12404,8 +13698,8 @@
         </p:nvSpPr>
         <p:spPr>
           <a:xfrm>
-            <a:off x="6388455" y="2962656"/>
-            <a:ext cx="2243251" cy="267716"/>
+            <a:off x="8274100" y="2962656"/>
+            <a:ext cx="3186074" cy="267716"/>
           </a:xfrm>
           <a:prstGeom prst="rect">
             <a:avLst/>
@@ -12426,7 +13720,7 @@
                 </a:solidFill>
                 <a:latin typeface="Calibri"/>
               </a:rPr>
-              <a:t>Lift</a:t>
+              <a:t>The base rate named</a:t>
             </a:r>
           </a:p>
         </p:txBody>
@@ -12439,8 +13733,8 @@
         </p:nvSpPr>
         <p:spPr>
           <a:xfrm>
-            <a:off x="6388455" y="3303524"/>
-            <a:ext cx="2243251" cy="1126236"/>
+            <a:off x="8274100" y="3303524"/>
+            <a:ext cx="3186074" cy="399796"/>
           </a:xfrm>
           <a:prstGeom prst="rect">
             <a:avLst/>
@@ -12461,241 +13755,14 @@
                 </a:solidFill>
                 <a:latin typeface="Calibri"/>
               </a:rPr>
-              <a:t>"Lift divides by the base rate, so a popular item cannot inflate it. On Instamart, milk's confidence to bread is 0.74 and its lift is 1.04; lift says they are nearly independent."</a:t>
-            </a:r>
-          </a:p>
-        </p:txBody>
-      </p:sp>
-      <p:sp>
-        <p:nvSpPr>
-          <p:cNvPr id="27" name="Rounded Rectangle 26"/>
-          <p:cNvSpPr/>
-          <p:nvPr/>
-        </p:nvSpPr>
-        <p:spPr>
-          <a:xfrm>
-            <a:off x="9015755" y="1956816"/>
-            <a:ext cx="2645587" cy="2724404"/>
-          </a:xfrm>
-          <a:prstGeom prst="roundRect">
-            <a:avLst>
-              <a:gd name="adj" fmla="val 5000"/>
-            </a:avLst>
-          </a:prstGeom>
-          <a:solidFill>
-            <a:srgbClr val="FFFFFF"/>
-          </a:solidFill>
-          <a:ln w="9525">
-            <a:solidFill>
-              <a:srgbClr val="E4E1F1"/>
-            </a:solidFill>
-          </a:ln>
-          <a:effectLst>
-            <a:outerShdw blurRad="76200" dist="19050" dir="5400000" algn="bl" rotWithShape="0">
-              <a:srgbClr val="1A0F5C">
-                <a:alpha val="12000"/>
-              </a:srgbClr>
-            </a:outerShdw>
-          </a:effectLst>
-        </p:spPr>
-        <p:style>
-          <a:lnRef idx="1">
-            <a:schemeClr val="accent1"/>
-          </a:lnRef>
-          <a:fillRef idx="3">
-            <a:schemeClr val="accent1"/>
-          </a:fillRef>
-          <a:effectRef idx="2">
-            <a:schemeClr val="accent1"/>
-          </a:effectRef>
-          <a:fontRef idx="minor">
-            <a:schemeClr val="lt1"/>
-          </a:fontRef>
-        </p:style>
-        <p:txBody>
-          <a:bodyPr rtlCol="0" anchor="ctr" wrap="square"/>
-          <a:lstStyle/>
-          <a:p>
-            <a:pPr algn="ctr"/>
-          </a:p>
-        </p:txBody>
-      </p:sp>
-      <p:sp>
-        <p:nvSpPr>
-          <p:cNvPr id="28" name="Oval 27"/>
-          <p:cNvSpPr/>
-          <p:nvPr/>
-        </p:nvSpPr>
-        <p:spPr>
-          <a:xfrm>
-            <a:off x="9216923" y="2157984"/>
-            <a:ext cx="457200" cy="457200"/>
-          </a:xfrm>
-          <a:prstGeom prst="ellipse">
-            <a:avLst/>
-          </a:prstGeom>
-          <a:solidFill>
-            <a:srgbClr val="EEEAFB"/>
-          </a:solidFill>
-          <a:ln>
-            <a:noFill/>
-          </a:ln>
-          <a:effectLst/>
-        </p:spPr>
-        <p:style>
-          <a:lnRef idx="1">
-            <a:schemeClr val="accent1"/>
-          </a:lnRef>
-          <a:fillRef idx="3">
-            <a:schemeClr val="accent1"/>
-          </a:fillRef>
-          <a:effectRef idx="2">
-            <a:schemeClr val="accent1"/>
-          </a:effectRef>
-          <a:fontRef idx="minor">
-            <a:schemeClr val="lt1"/>
-          </a:fontRef>
-        </p:style>
-        <p:txBody>
-          <a:bodyPr rtlCol="0" anchor="ctr" wrap="square"/>
-          <a:lstStyle/>
-          <a:p>
-            <a:pPr algn="ctr"/>
-          </a:p>
-        </p:txBody>
-      </p:sp>
-      <p:pic>
-        <p:nvPicPr>
-          <p:cNvPr id="29" name="Picture 28" descr="message-square_192cf68fa4e6.png"/>
-          <p:cNvPicPr>
-            <a:picLocks noChangeAspect="1"/>
-          </p:cNvPicPr>
-          <p:nvPr/>
-        </p:nvPicPr>
-        <p:blipFill>
-          <a:blip r:embed="rId7"/>
-          <a:stretch>
-            <a:fillRect/>
-          </a:stretch>
-        </p:blipFill>
-        <p:spPr>
-          <a:xfrm>
-            <a:off x="9326651" y="2267712"/>
-            <a:ext cx="237744" cy="237744"/>
-          </a:xfrm>
-          <a:prstGeom prst="rect">
-            <a:avLst/>
-          </a:prstGeom>
-        </p:spPr>
-      </p:pic>
-      <p:sp>
-        <p:nvSpPr>
-          <p:cNvPr id="30" name="TextBox 29"/>
-          <p:cNvSpPr txBox="1"/>
-          <p:nvPr/>
-        </p:nvSpPr>
-        <p:spPr>
-          <a:xfrm>
-            <a:off x="9216923" y="2724912"/>
-            <a:ext cx="2243251" cy="160401"/>
-          </a:xfrm>
-          <a:prstGeom prst="rect">
-            <a:avLst/>
-          </a:prstGeom>
-          <a:noFill/>
-        </p:spPr>
-        <p:txBody>
-          <a:bodyPr wrap="square" anchor="t" lIns="0" rIns="0" tIns="0" bIns="0">
-            <a:spAutoFit/>
-          </a:bodyPr>
-          <a:lstStyle/>
-          <a:p>
-            <a:pPr algn="l"/>
-            <a:r>
-              <a:rPr sz="750" b="1" i="0" spc="250">
-                <a:solidFill>
-                  <a:srgbClr val="5B3FD6"/>
-                </a:solidFill>
-                <a:latin typeface="Calibri"/>
-              </a:rPr>
-              <a:t>FOLLOW-UP</a:t>
-            </a:r>
-          </a:p>
-        </p:txBody>
-      </p:sp>
-      <p:sp>
-        <p:nvSpPr>
-          <p:cNvPr id="31" name="TextBox 30"/>
-          <p:cNvSpPr txBox="1"/>
-          <p:nvPr/>
-        </p:nvSpPr>
-        <p:spPr>
-          <a:xfrm>
-            <a:off x="9216923" y="2962656"/>
-            <a:ext cx="2243251" cy="267716"/>
-          </a:xfrm>
-          <a:prstGeom prst="rect">
-            <a:avLst/>
-          </a:prstGeom>
-          <a:noFill/>
-        </p:spPr>
-        <p:txBody>
-          <a:bodyPr wrap="square" anchor="t" lIns="0" rIns="0" tIns="0" bIns="0">
-            <a:spAutoFit/>
-          </a:bodyPr>
-          <a:lstStyle/>
-          <a:p>
-            <a:pPr algn="l"/>
-            <a:r>
-              <a:rPr sz="1400" b="1" i="0">
-                <a:solidFill>
-                  <a:srgbClr val="1A0F5C"/>
-                </a:solidFill>
-                <a:latin typeface="Calibri"/>
-              </a:rPr>
-              <a:t>AI assistant</a:t>
-            </a:r>
-          </a:p>
-        </p:txBody>
-      </p:sp>
-      <p:sp>
-        <p:nvSpPr>
-          <p:cNvPr id="32" name="TextBox 31"/>
-          <p:cNvSpPr txBox="1"/>
-          <p:nvPr/>
-        </p:nvSpPr>
-        <p:spPr>
-          <a:xfrm>
-            <a:off x="9216923" y="3303524"/>
-            <a:ext cx="2243251" cy="581406"/>
-          </a:xfrm>
-          <a:prstGeom prst="rect">
-            <a:avLst/>
-          </a:prstGeom>
-          <a:noFill/>
-        </p:spPr>
-        <p:txBody>
-          <a:bodyPr wrap="square" anchor="t" lIns="0" rIns="0" tIns="0" bIns="0">
-            <a:spAutoFit/>
-          </a:bodyPr>
-          <a:lstStyle/>
-          <a:p>
-            <a:pPr algn="l"/>
-            <a:r>
-              <a:rPr sz="1100" b="0" i="0">
-                <a:solidFill>
-                  <a:srgbClr val="6B6690"/>
-                </a:solidFill>
-                <a:latin typeface="Calibri"/>
-              </a:rPr>
-              <a:t>"An LLM shopping assistant suggests milk often. How would you score it?"</a:t>
-            </a:r>
-          </a:p>
-        </p:txBody>
-      </p:sp>
-      <p:sp>
-        <p:nvSpPr>
-          <p:cNvPr id="33" name="Oval 32"/>
+              <a:t>Three questions kept apart, the denominator said aloud, a floor, a decision.</a:t>
+            </a:r>
+          </a:p>
+        </p:txBody>
+      </p:sp>
+      <p:sp>
+        <p:nvSpPr>
+          <p:cNvPr id="27" name="Oval 26"/>
           <p:cNvSpPr/>
           <p:nvPr/>
         </p:nvSpPr>
@@ -12739,14 +13806,14 @@
       </p:sp>
       <p:sp>
         <p:nvSpPr>
-          <p:cNvPr id="34" name="TextBox 33"/>
+          <p:cNvPr id="28" name="TextBox 27"/>
           <p:cNvSpPr txBox="1"/>
           <p:nvPr/>
         </p:nvSpPr>
         <p:spPr>
           <a:xfrm>
             <a:off x="640080" y="6437376"/>
-            <a:ext cx="1746504" cy="152146"/>
+            <a:ext cx="1516475" cy="152146"/>
           </a:xfrm>
           <a:prstGeom prst="rect">
             <a:avLst/>
@@ -12767,20 +13834,20 @@
                 </a:solidFill>
                 <a:latin typeface="Calibri"/>
               </a:rPr>
-              <a:t>Pick three slots and defend them</a:t>
-            </a:r>
-          </a:p>
-        </p:txBody>
-      </p:sp>
-      <p:sp>
-        <p:nvSpPr>
-          <p:cNvPr id="35" name="Oval 34"/>
+              <a:t>Which strip would you ship?</a:t>
+            </a:r>
+          </a:p>
+        </p:txBody>
+      </p:sp>
+      <p:sp>
+        <p:nvSpPr>
+          <p:cNvPr id="29" name="Oval 28"/>
           <p:cNvSpPr/>
           <p:nvPr/>
         </p:nvSpPr>
         <p:spPr>
           <a:xfrm>
-            <a:off x="2478024" y="6492240"/>
+            <a:off x="2247995" y="6492240"/>
             <a:ext cx="64008" cy="64008"/>
           </a:xfrm>
           <a:prstGeom prst="ellipse">
@@ -12818,14 +13885,14 @@
       </p:sp>
       <p:sp>
         <p:nvSpPr>
-          <p:cNvPr id="36" name="TextBox 35"/>
-          <p:cNvSpPr txBox="1"/>
-          <p:nvPr/>
-        </p:nvSpPr>
-        <p:spPr>
-          <a:xfrm>
-            <a:off x="2587752" y="6437376"/>
-            <a:ext cx="1976532" cy="152146"/>
+          <p:cNvPr id="30" name="TextBox 29"/>
+          <p:cNvSpPr txBox="1"/>
+          <p:nvPr/>
+        </p:nvSpPr>
+        <p:spPr>
+          <a:xfrm>
+            <a:off x="2357723" y="6437376"/>
+            <a:ext cx="1102423" cy="152146"/>
           </a:xfrm>
           <a:prstGeom prst="rect">
             <a:avLst/>
@@ -12846,20 +13913,20 @@
                 </a:solidFill>
                 <a:latin typeface="Calibri"/>
               </a:rPr>
-              <a:t>The interview question the day equips</a:t>
-            </a:r>
-          </a:p>
-        </p:txBody>
-      </p:sp>
-      <p:sp>
-        <p:nvSpPr>
-          <p:cNvPr id="37" name="Oval 36"/>
+              <a:t>The interview room</a:t>
+            </a:r>
+          </a:p>
+        </p:txBody>
+      </p:sp>
+      <p:sp>
+        <p:nvSpPr>
+          <p:cNvPr id="31" name="Oval 30"/>
           <p:cNvSpPr/>
           <p:nvPr/>
         </p:nvSpPr>
         <p:spPr>
           <a:xfrm>
-            <a:off x="4655724" y="6492240"/>
+            <a:off x="3551586" y="6492240"/>
             <a:ext cx="64008" cy="64008"/>
           </a:xfrm>
           <a:prstGeom prst="ellipse">
@@ -12897,14 +13964,14 @@
       </p:sp>
       <p:sp>
         <p:nvSpPr>
-          <p:cNvPr id="38" name="TextBox 37"/>
-          <p:cNvSpPr txBox="1"/>
-          <p:nvPr/>
-        </p:nvSpPr>
-        <p:spPr>
-          <a:xfrm>
-            <a:off x="4765452" y="6437376"/>
-            <a:ext cx="2194560" cy="267716"/>
+          <p:cNvPr id="32" name="TextBox 31"/>
+          <p:cNvSpPr txBox="1"/>
+          <p:nvPr/>
+        </p:nvSpPr>
+        <p:spPr>
+          <a:xfrm>
+            <a:off x="3661314" y="6437376"/>
+            <a:ext cx="1424463" cy="152146"/>
           </a:xfrm>
           <a:prstGeom prst="rect">
             <a:avLst/>
@@ -12925,14 +13992,14 @@
                 </a:solidFill>
                 <a:latin typeface="Calibri"/>
               </a:rPr>
-              <a:t>The handoff into the W4-2 faculty block (tentative)</a:t>
-            </a:r>
-          </a:p>
-        </p:txBody>
-      </p:sp>
-      <p:sp>
-        <p:nvSpPr>
-          <p:cNvPr id="39" name="TextBox 38"/>
+              <a:t>The handoff and the close</a:t>
+            </a:r>
+          </a:p>
+        </p:txBody>
+      </p:sp>
+      <p:sp>
+        <p:nvSpPr>
+          <p:cNvPr id="33" name="TextBox 32"/>
           <p:cNvSpPr txBox="1"/>
           <p:nvPr/>
         </p:nvSpPr>
@@ -12960,7 +14027,7 @@
                 </a:solidFill>
                 <a:latin typeface="Calibri"/>
               </a:rPr>
-              <a:t>S40  ·  7 / 11</a:t>
+              <a:t>S41  ·  7 / 13</a:t>
             </a:r>
           </a:p>
         </p:txBody>
@@ -13166,7 +14233,7 @@
                 </a:solidFill>
                 <a:latin typeface="Georgia"/>
               </a:rPr>
-              <a:t>AI variant: lift over a popularity baseline</a:t>
+              <a:t>Three follow-ups and the line that answers each</a:t>
             </a:r>
           </a:p>
         </p:txBody>
@@ -13201,77 +14268,224 @@
                 </a:solidFill>
                 <a:latin typeface="Calibri"/>
               </a:rPr>
-              <a:t>What is the measure for an LLM shopping assistant's add-on suggestions?</a:t>
-            </a:r>
-          </a:p>
-        </p:txBody>
-      </p:sp>
-      <p:pic>
-        <p:nvPicPr>
-          <p:cNvPr id="9" name="mermaid diagram" descr="daed97f45490616d.png"/>
-          <p:cNvPicPr>
-            <a:picLocks noChangeAspect="1"/>
-          </p:cNvPicPr>
-          <p:nvPr/>
-        </p:nvPicPr>
-        <p:blipFill>
-          <a:blip r:embed="rId5"/>
-          <a:stretch>
-            <a:fillRect/>
-          </a:stretch>
-        </p:blipFill>
-        <p:spPr>
-          <a:xfrm>
-            <a:off x="2152497" y="1956816"/>
-            <a:ext cx="7886700" cy="2357437"/>
-          </a:xfrm>
-          <a:prstGeom prst="rect">
-            <a:avLst/>
-          </a:prstGeom>
-        </p:spPr>
-      </p:pic>
-      <p:sp>
-        <p:nvSpPr>
-          <p:cNvPr id="10" name="TextBox 9"/>
-          <p:cNvSpPr txBox="1"/>
-          <p:nvPr/>
-        </p:nvSpPr>
-        <p:spPr>
-          <a:xfrm>
-            <a:off x="530352" y="4460557"/>
-            <a:ext cx="11130991" cy="1324864"/>
-          </a:xfrm>
-          <a:prstGeom prst="rect">
-            <a:avLst/>
-          </a:prstGeom>
-          <a:noFill/>
-        </p:spPr>
-        <p:txBody>
-          <a:bodyPr wrap="square" anchor="t" lIns="0" rIns="0" tIns="0" bIns="0">
-            <a:spAutoFit/>
-          </a:bodyPr>
-          <a:lstStyle/>
-          <a:p>
-            <a:pPr>
-              <a:spcAft>
-                <a:spcPts val="800"/>
-              </a:spcAft>
-            </a:pPr>
-            <a:r>
-              <a:rPr sz="1600" b="0" i="0">
-                <a:solidFill>
-                  <a:srgbClr val="1A1440"/>
-                </a:solidFill>
-                <a:latin typeface="Calibri"/>
-              </a:rPr>
-              <a:t>The assistant that suggests milk is "accepted" often because milk is popular. The measure is lift of the assistant's suggestions over a popularity baseline, computed on held-out carts. The number is then validated by a holdout in production: run the assistant on half the carts, the baseline on the other half, measure incremental adds per cart. The base-rate trap is the same one Amazon fixed.</a:t>
-            </a:r>
-          </a:p>
-        </p:txBody>
-      </p:sp>
-      <p:sp>
-        <p:nvSpPr>
-          <p:cNvPr id="11" name="Oval 10"/>
+              <a:t>What does the interviewer ask next, and what does a hire-grade answer say?</a:t>
+            </a:r>
+          </a:p>
+        </p:txBody>
+      </p:sp>
+      <p:graphicFrame>
+        <p:nvGraphicFramePr>
+          <p:cNvPr id="9" name="Table 8"/>
+          <p:cNvGraphicFramePr>
+            <a:graphicFrameLocks noGrp="1"/>
+          </p:cNvGraphicFramePr>
+          <p:nvPr/>
+        </p:nvGraphicFramePr>
+        <p:xfrm>
+          <a:off x="530352" y="1956816"/>
+          <a:ext cx="11130990" cy="2688336"/>
+        </p:xfrm>
+        <a:graphic>
+          <a:graphicData uri="http://schemas.openxmlformats.org/drawingml/2006/table">
+            <a:tbl>
+              <a:tblPr firstRow="0" bandRow="0">
+                <a:tableStyleId>{2D5ABB26-0587-4C30-8999-92F81FD0307C}</a:tableStyleId>
+              </a:tblPr>
+              <a:tblGrid>
+                <a:gridCol w="5565495"/>
+                <a:gridCol w="5565495"/>
+              </a:tblGrid>
+              <a:tr h="369824">
+                <a:tc>
+                  <a:txBody>
+                    <a:bodyPr/>
+                    <a:lstStyle/>
+                    <a:p>
+                      <a:r>
+                        <a:rPr sz="1450" b="1" i="0">
+                          <a:solidFill>
+                            <a:srgbClr val="FFFFFF"/>
+                          </a:solidFill>
+                          <a:latin typeface="Calibri"/>
+                        </a:rPr>
+                        <a:t>Follow-up</a:t>
+                      </a:r>
+                    </a:p>
+                  </a:txBody>
+                  <a:tcPr marL="101600" marR="101600" marT="38100" marB="38100" anchor="ctr">
+                    <a:solidFill>
+                      <a:srgbClr val="1A0F5C"/>
+                    </a:solidFill>
+                  </a:tcPr>
+                </a:tc>
+                <a:tc>
+                  <a:txBody>
+                    <a:bodyPr/>
+                    <a:lstStyle/>
+                    <a:p>
+                      <a:r>
+                        <a:rPr sz="1450" b="1" i="0">
+                          <a:solidFill>
+                            <a:srgbClr val="FFFFFF"/>
+                          </a:solidFill>
+                          <a:latin typeface="Calibri"/>
+                        </a:rPr>
+                        <a:t>The hire-grade line</a:t>
+                      </a:r>
+                    </a:p>
+                  </a:txBody>
+                  <a:tcPr marL="101600" marR="101600" marT="38100" marB="38100" anchor="ctr">
+                    <a:solidFill>
+                      <a:srgbClr val="1A0F5C"/>
+                    </a:solidFill>
+                  </a:tcPr>
+                </a:tc>
+              </a:tr>
+              <a:tr h="611632">
+                <a:tc>
+                  <a:txBody>
+                    <a:bodyPr/>
+                    <a:lstStyle/>
+                    <a:p>
+                      <a:r>
+                        <a:rPr sz="1400" b="0" i="0">
+                          <a:solidFill>
+                            <a:srgbClr val="1A1440"/>
+                          </a:solidFill>
+                          <a:latin typeface="Calibri"/>
+                        </a:rPr>
+                        <a:t>A pair has lift 4.6 and support 0.25 percent: act?</a:t>
+                      </a:r>
+                    </a:p>
+                  </a:txBody>
+                  <a:tcPr marL="101600" marR="101600" marT="38100" marB="38100" anchor="ctr">
+                    <a:solidFill>
+                      <a:srgbClr val="FFFFFF"/>
+                    </a:solidFill>
+                  </a:tcPr>
+                </a:tc>
+                <a:tc>
+                  <a:txBody>
+                    <a:bodyPr/>
+                    <a:lstStyle/>
+                    <a:p>
+                      <a:r>
+                        <a:rPr sz="1400" b="0" i="0">
+                          <a:solidFill>
+                            <a:srgbClr val="1A1440"/>
+                          </a:solidFill>
+                          <a:latin typeface="Calibri"/>
+                        </a:rPr>
+                        <a:t>Not yet: 100 carts cannot repay a slot shown to everyone; it goes on a watch list and a two-zone test</a:t>
+                      </a:r>
+                    </a:p>
+                  </a:txBody>
+                  <a:tcPr marL="101600" marR="101600" marT="38100" marB="38100" anchor="ctr">
+                    <a:solidFill>
+                      <a:srgbClr val="FFFFFF"/>
+                    </a:solidFill>
+                  </a:tcPr>
+                </a:tc>
+              </a:tr>
+              <a:tr h="853440">
+                <a:tc>
+                  <a:txBody>
+                    <a:bodyPr/>
+                    <a:lstStyle/>
+                    <a:p>
+                      <a:r>
+                        <a:rPr sz="1400" b="0" i="0">
+                          <a:solidFill>
+                            <a:srgbClr val="1A1440"/>
+                          </a:solidFill>
+                          <a:latin typeface="Calibri"/>
+                        </a:rPr>
+                        <a:t>Heavy buyers buy everything: what does that do to lift?</a:t>
+                      </a:r>
+                    </a:p>
+                  </a:txBody>
+                  <a:tcPr marL="101600" marR="101600" marT="38100" marB="38100" anchor="ctr">
+                    <a:solidFill>
+                      <a:srgbClr val="F4F2FA"/>
+                    </a:solidFill>
+                  </a:tcPr>
+                </a:tc>
+                <a:tc>
+                  <a:txBody>
+                    <a:bodyPr/>
+                    <a:lstStyle/>
+                    <a:p>
+                      <a:r>
+                        <a:rPr sz="1400" b="0" i="0">
+                          <a:solidFill>
+                            <a:srgbClr val="1A1440"/>
+                          </a:solidFill>
+                          <a:latin typeface="Calibri"/>
+                        </a:rPr>
+                        <a:t>It inflates the pair counts of whatever they buy together; count each customer once and the party pair falls from 3.39 to 2.56</a:t>
+                      </a:r>
+                    </a:p>
+                  </a:txBody>
+                  <a:tcPr marL="101600" marR="101600" marT="38100" marB="38100" anchor="ctr">
+                    <a:solidFill>
+                      <a:srgbClr val="F4F2FA"/>
+                    </a:solidFill>
+                  </a:tcPr>
+                </a:tc>
+              </a:tr>
+              <a:tr h="853440">
+                <a:tc>
+                  <a:txBody>
+                    <a:bodyPr/>
+                    <a:lstStyle/>
+                    <a:p>
+                      <a:r>
+                        <a:rPr sz="1400" b="0" i="0">
+                          <a:solidFill>
+                            <a:srgbClr val="1A1440"/>
+                          </a:solidFill>
+                          <a:latin typeface="Calibri"/>
+                        </a:rPr>
+                        <a:t>Make it a rupee recommendation: what cost line do most forget?</a:t>
+                      </a:r>
+                    </a:p>
+                  </a:txBody>
+                  <a:tcPr marL="101600" marR="101600" marT="38100" marB="38100" anchor="ctr">
+                    <a:solidFill>
+                      <a:srgbClr val="FFFFFF"/>
+                    </a:solidFill>
+                  </a:tcPr>
+                </a:tc>
+                <a:tc>
+                  <a:txBody>
+                    <a:bodyPr/>
+                    <a:lstStyle/>
+                    <a:p>
+                      <a:r>
+                        <a:rPr sz="1400" b="0" i="0">
+                          <a:solidFill>
+                            <a:srgbClr val="1A1440"/>
+                          </a:solidFill>
+                          <a:latin typeface="Calibri"/>
+                        </a:rPr>
+                        <a:t>The margin handed back by any bundle discount, and the adds that would have happened anyway; sales are never the gain</a:t>
+                      </a:r>
+                    </a:p>
+                  </a:txBody>
+                  <a:tcPr marL="101600" marR="101600" marT="38100" marB="38100" anchor="ctr">
+                    <a:solidFill>
+                      <a:srgbClr val="FFFFFF"/>
+                    </a:solidFill>
+                  </a:tcPr>
+                </a:tc>
+              </a:tr>
+            </a:tbl>
+          </a:graphicData>
+        </a:graphic>
+      </p:graphicFrame>
+      <p:sp>
+        <p:nvSpPr>
+          <p:cNvPr id="10" name="Oval 9"/>
           <p:cNvSpPr/>
           <p:nvPr/>
         </p:nvSpPr>
@@ -13315,14 +14529,14 @@
       </p:sp>
       <p:sp>
         <p:nvSpPr>
-          <p:cNvPr id="12" name="TextBox 11"/>
+          <p:cNvPr id="11" name="TextBox 10"/>
           <p:cNvSpPr txBox="1"/>
           <p:nvPr/>
         </p:nvSpPr>
         <p:spPr>
           <a:xfrm>
             <a:off x="640080" y="6437376"/>
-            <a:ext cx="1746504" cy="152146"/>
+            <a:ext cx="1516475" cy="152146"/>
           </a:xfrm>
           <a:prstGeom prst="rect">
             <a:avLst/>
@@ -13343,20 +14557,20 @@
                 </a:solidFill>
                 <a:latin typeface="Calibri"/>
               </a:rPr>
-              <a:t>Pick three slots and defend them</a:t>
-            </a:r>
-          </a:p>
-        </p:txBody>
-      </p:sp>
-      <p:sp>
-        <p:nvSpPr>
-          <p:cNvPr id="13" name="Oval 12"/>
+              <a:t>Which strip would you ship?</a:t>
+            </a:r>
+          </a:p>
+        </p:txBody>
+      </p:sp>
+      <p:sp>
+        <p:nvSpPr>
+          <p:cNvPr id="12" name="Oval 11"/>
           <p:cNvSpPr/>
           <p:nvPr/>
         </p:nvSpPr>
         <p:spPr>
           <a:xfrm>
-            <a:off x="2478024" y="6492240"/>
+            <a:off x="2247995" y="6492240"/>
             <a:ext cx="64008" cy="64008"/>
           </a:xfrm>
           <a:prstGeom prst="ellipse">
@@ -13394,14 +14608,14 @@
       </p:sp>
       <p:sp>
         <p:nvSpPr>
-          <p:cNvPr id="14" name="TextBox 13"/>
-          <p:cNvSpPr txBox="1"/>
-          <p:nvPr/>
-        </p:nvSpPr>
-        <p:spPr>
-          <a:xfrm>
-            <a:off x="2587752" y="6437376"/>
-            <a:ext cx="1976532" cy="152146"/>
+          <p:cNvPr id="13" name="TextBox 12"/>
+          <p:cNvSpPr txBox="1"/>
+          <p:nvPr/>
+        </p:nvSpPr>
+        <p:spPr>
+          <a:xfrm>
+            <a:off x="2357723" y="6437376"/>
+            <a:ext cx="1102423" cy="152146"/>
           </a:xfrm>
           <a:prstGeom prst="rect">
             <a:avLst/>
@@ -13422,20 +14636,20 @@
                 </a:solidFill>
                 <a:latin typeface="Calibri"/>
               </a:rPr>
-              <a:t>The interview question the day equips</a:t>
-            </a:r>
-          </a:p>
-        </p:txBody>
-      </p:sp>
-      <p:sp>
-        <p:nvSpPr>
-          <p:cNvPr id="15" name="Oval 14"/>
+              <a:t>The interview room</a:t>
+            </a:r>
+          </a:p>
+        </p:txBody>
+      </p:sp>
+      <p:sp>
+        <p:nvSpPr>
+          <p:cNvPr id="14" name="Oval 13"/>
           <p:cNvSpPr/>
           <p:nvPr/>
         </p:nvSpPr>
         <p:spPr>
           <a:xfrm>
-            <a:off x="4655724" y="6492240"/>
+            <a:off x="3551586" y="6492240"/>
             <a:ext cx="64008" cy="64008"/>
           </a:xfrm>
           <a:prstGeom prst="ellipse">
@@ -13473,42 +14687,42 @@
       </p:sp>
       <p:sp>
         <p:nvSpPr>
+          <p:cNvPr id="15" name="TextBox 14"/>
+          <p:cNvSpPr txBox="1"/>
+          <p:nvPr/>
+        </p:nvSpPr>
+        <p:spPr>
+          <a:xfrm>
+            <a:off x="3661314" y="6437376"/>
+            <a:ext cx="1424463" cy="152146"/>
+          </a:xfrm>
+          <a:prstGeom prst="rect">
+            <a:avLst/>
+          </a:prstGeom>
+          <a:noFill/>
+        </p:spPr>
+        <p:txBody>
+          <a:bodyPr wrap="square" anchor="t" lIns="0" rIns="0" tIns="0" bIns="0">
+            <a:spAutoFit/>
+          </a:bodyPr>
+          <a:lstStyle/>
+          <a:p>
+            <a:pPr algn="l"/>
+            <a:r>
+              <a:rPr sz="700" b="0" i="0">
+                <a:solidFill>
+                  <a:srgbClr val="6B6690"/>
+                </a:solidFill>
+                <a:latin typeface="Calibri"/>
+              </a:rPr>
+              <a:t>The handoff and the close</a:t>
+            </a:r>
+          </a:p>
+        </p:txBody>
+      </p:sp>
+      <p:sp>
+        <p:nvSpPr>
           <p:cNvPr id="16" name="TextBox 15"/>
-          <p:cNvSpPr txBox="1"/>
-          <p:nvPr/>
-        </p:nvSpPr>
-        <p:spPr>
-          <a:xfrm>
-            <a:off x="4765452" y="6437376"/>
-            <a:ext cx="2194560" cy="267716"/>
-          </a:xfrm>
-          <a:prstGeom prst="rect">
-            <a:avLst/>
-          </a:prstGeom>
-          <a:noFill/>
-        </p:spPr>
-        <p:txBody>
-          <a:bodyPr wrap="square" anchor="t" lIns="0" rIns="0" tIns="0" bIns="0">
-            <a:spAutoFit/>
-          </a:bodyPr>
-          <a:lstStyle/>
-          <a:p>
-            <a:pPr algn="l"/>
-            <a:r>
-              <a:rPr sz="700" b="0" i="0">
-                <a:solidFill>
-                  <a:srgbClr val="6B6690"/>
-                </a:solidFill>
-                <a:latin typeface="Calibri"/>
-              </a:rPr>
-              <a:t>The handoff into the W4-2 faculty block (tentative)</a:t>
-            </a:r>
-          </a:p>
-        </p:txBody>
-      </p:sp>
-      <p:sp>
-        <p:nvSpPr>
-          <p:cNvPr id="17" name="TextBox 16"/>
           <p:cNvSpPr txBox="1"/>
           <p:nvPr/>
         </p:nvSpPr>
@@ -13536,7 +14750,7 @@
                 </a:solidFill>
                 <a:latin typeface="Calibri"/>
               </a:rPr>
-              <a:t>S41  ·  8 / 11</a:t>
+              <a:t>S42  ·  8 / 13</a:t>
             </a:r>
           </a:p>
         </p:txBody>
@@ -13561,7 +14775,7 @@
       <p:grpSpPr/>
       <p:pic>
         <p:nvPicPr>
-          <p:cNvPr id="2" name="Picture 1" descr="bg_dark.jpg"/>
+          <p:cNvPr id="2" name="Picture 1" descr="bg_light.jpg"/>
           <p:cNvPicPr>
             <a:picLocks noChangeAspect="1"/>
           </p:cNvPicPr>
@@ -13633,7 +14847,7 @@
             <a:r>
               <a:rPr sz="900" b="1" i="0">
                 <a:solidFill>
-                  <a:srgbClr val="FFFFFF"/>
+                  <a:srgbClr val="1A0F5C"/>
                 </a:solidFill>
                 <a:latin typeface="Calibri"/>
               </a:rPr>
@@ -13668,7 +14882,7 @@
             <a:r>
               <a:rPr sz="550" b="1" i="0" spc="300">
                 <a:solidFill>
-                  <a:srgbClr val="CFC9EE"/>
+                  <a:srgbClr val="6B6690"/>
                 </a:solidFill>
                 <a:latin typeface="Calibri"/>
               </a:rPr>
@@ -13703,11 +14917,11 @@
             <a:r>
               <a:rPr sz="550" b="1" i="0" spc="300">
                 <a:solidFill>
-                  <a:srgbClr val="CFC9EE"/>
+                  <a:srgbClr val="6B6690"/>
                 </a:solidFill>
                 <a:latin typeface="Calibri"/>
               </a:rPr>
-              <a:t>PG DIPLOMA IN AI-ML AND AGENTIC AI ENGINEERING  ·  COHORT 2</a:t>
+              <a:t>WEEK 4  ·  DAY 3  ·  KALPA GLOBAL CAPABILITY CENTRE</a:t>
             </a:r>
           </a:p>
         </p:txBody>
@@ -13720,8 +14934,43 @@
         </p:nvSpPr>
         <p:spPr>
           <a:xfrm>
-            <a:off x="731519" y="1143000"/>
-            <a:ext cx="3657600" cy="1371600"/>
+            <a:off x="530352" y="676656"/>
+            <a:ext cx="11130991" cy="512064"/>
+          </a:xfrm>
+          <a:prstGeom prst="rect">
+            <a:avLst/>
+          </a:prstGeom>
+          <a:noFill/>
+        </p:spPr>
+        <p:txBody>
+          <a:bodyPr wrap="square" anchor="b" lIns="0" rIns="0" tIns="0" bIns="0">
+            <a:spAutoFit/>
+          </a:bodyPr>
+          <a:lstStyle/>
+          <a:p>
+            <a:pPr algn="l"/>
+            <a:r>
+              <a:rPr sz="2600" b="0" i="0">
+                <a:solidFill>
+                  <a:srgbClr val="1A0F5C"/>
+                </a:solidFill>
+                <a:latin typeface="Georgia"/>
+              </a:rPr>
+              <a:t>An LLM shopping assistant meets the same base rate</a:t>
+            </a:r>
+          </a:p>
+        </p:txBody>
+      </p:sp>
+      <p:sp>
+        <p:nvSpPr>
+          <p:cNvPr id="8" name="TextBox 7"/>
+          <p:cNvSpPr txBox="1"/>
+          <p:nvPr/>
+        </p:nvSpPr>
+        <p:spPr>
+          <a:xfrm>
+            <a:off x="530352" y="1243584"/>
+            <a:ext cx="11130991" cy="234696"/>
           </a:xfrm>
           <a:prstGeom prst="rect">
             <a:avLst/>
@@ -13736,27 +14985,51 @@
           <a:p>
             <a:pPr algn="l"/>
             <a:r>
-              <a:rPr sz="9600" b="0" i="0">
-                <a:solidFill>
-                  <a:srgbClr val="D9A7FF"/>
-                </a:solidFill>
-                <a:latin typeface="Georgia"/>
-              </a:rPr>
-              <a:t>08</a:t>
-            </a:r>
-          </a:p>
-        </p:txBody>
-      </p:sp>
-      <p:sp>
-        <p:nvSpPr>
-          <p:cNvPr id="8" name="TextBox 7"/>
-          <p:cNvSpPr txBox="1"/>
-          <p:nvPr/>
-        </p:nvSpPr>
-        <p:spPr>
-          <a:xfrm>
-            <a:off x="731519" y="2606040"/>
-            <a:ext cx="10673791" cy="731520"/>
+              <a:rPr sz="1200" b="0" i="0">
+                <a:solidFill>
+                  <a:srgbClr val="6B6690"/>
+                </a:solidFill>
+                <a:latin typeface="Calibri"/>
+              </a:rPr>
+              <a:t>How would you score an assistant that suggests add-ons?</a:t>
+            </a:r>
+          </a:p>
+        </p:txBody>
+      </p:sp>
+      <p:pic>
+        <p:nvPicPr>
+          <p:cNvPr id="9" name="mermaid diagram" descr="ebaf94bbf531a44e.png"/>
+          <p:cNvPicPr>
+            <a:picLocks noChangeAspect="1"/>
+          </p:cNvPicPr>
+          <p:nvPr/>
+        </p:nvPicPr>
+        <p:blipFill>
+          <a:blip r:embed="rId5"/>
+          <a:stretch>
+            <a:fillRect/>
+          </a:stretch>
+        </p:blipFill>
+        <p:spPr>
+          <a:xfrm>
+            <a:off x="780897" y="1956816"/>
+            <a:ext cx="10629900" cy="2614612"/>
+          </a:xfrm>
+          <a:prstGeom prst="rect">
+            <a:avLst/>
+          </a:prstGeom>
+        </p:spPr>
+      </p:pic>
+      <p:sp>
+        <p:nvSpPr>
+          <p:cNvPr id="10" name="TextBox 9"/>
+          <p:cNvSpPr txBox="1"/>
+          <p:nvPr/>
+        </p:nvSpPr>
+        <p:spPr>
+          <a:xfrm>
+            <a:off x="530352" y="4717732"/>
+            <a:ext cx="11130991" cy="1048512"/>
           </a:xfrm>
           <a:prstGeom prst="rect">
             <a:avLst/>
@@ -13769,75 +15042,42 @@
           </a:bodyPr>
           <a:lstStyle/>
           <a:p>
-            <a:pPr algn="l"/>
-            <a:r>
-              <a:rPr sz="4000" b="0" i="0">
-                <a:solidFill>
-                  <a:srgbClr val="FFFFFF"/>
-                </a:solidFill>
-                <a:latin typeface="Georgia"/>
-              </a:rPr>
-              <a:t>The handoff into the W4-2 faculty block (tentative)</a:t>
-            </a:r>
-          </a:p>
-        </p:txBody>
-      </p:sp>
-      <p:sp>
-        <p:nvSpPr>
-          <p:cNvPr id="9" name="TextBox 8"/>
-          <p:cNvSpPr txBox="1"/>
-          <p:nvPr/>
-        </p:nvSpPr>
-        <p:spPr>
-          <a:xfrm>
-            <a:off x="731519" y="3520440"/>
-            <a:ext cx="9509760" cy="284226"/>
-          </a:xfrm>
-          <a:prstGeom prst="rect">
-            <a:avLst/>
-          </a:prstGeom>
-          <a:noFill/>
-        </p:spPr>
-        <p:txBody>
-          <a:bodyPr wrap="square" anchor="t" lIns="0" rIns="0" tIns="0" bIns="0">
-            <a:spAutoFit/>
-          </a:bodyPr>
-          <a:lstStyle/>
-          <a:p>
-            <a:pPr algn="l"/>
-            <a:r>
-              <a:rPr sz="1500" b="0" i="0">
-                <a:solidFill>
-                  <a:srgbClr val="E4E1F1"/>
+            <a:pPr>
+              <a:spcAft>
+                <a:spcPts val="800"/>
+              </a:spcAft>
+            </a:pPr>
+            <a:r>
+              <a:rPr sz="1600" b="0" i="0">
+                <a:solidFill>
+                  <a:srgbClr val="1A1440"/>
                 </a:solidFill>
                 <a:latin typeface="Calibri"/>
               </a:rPr>
-              <a:t>What the trainer hands to the faculty, in one line.</a:t>
-            </a:r>
-          </a:p>
-        </p:txBody>
-      </p:sp>
-      <p:sp>
-        <p:nvSpPr>
-          <p:cNvPr id="10" name="Rounded Rectangle 9"/>
+              <a:t>An assistant that suggests milk is "accepted" often because milk is popular. Score it offline by the lift of its accepted suggestions over a baseline that always suggests the most popular items, on carts it never saw; then confirm online with a holdout, counting only the adds the assistant caused.</a:t>
+            </a:r>
+          </a:p>
+        </p:txBody>
+      </p:sp>
+      <p:sp>
+        <p:nvSpPr>
+          <p:cNvPr id="11" name="Oval 10"/>
           <p:cNvSpPr/>
           <p:nvPr/>
         </p:nvSpPr>
         <p:spPr>
           <a:xfrm>
-            <a:off x="731519" y="5074920"/>
-            <a:ext cx="2148840" cy="310896"/>
-          </a:xfrm>
-          <a:prstGeom prst="roundRect">
-            <a:avLst>
-              <a:gd name="adj" fmla="val 50000"/>
-            </a:avLst>
-          </a:prstGeom>
-          <a:noFill/>
-          <a:ln w="9525">
-            <a:solidFill>
-              <a:srgbClr val="CFC9EE"/>
-            </a:solidFill>
+            <a:off x="530352" y="6492240"/>
+            <a:ext cx="64008" cy="64008"/>
+          </a:xfrm>
+          <a:prstGeom prst="ellipse">
+            <a:avLst/>
+          </a:prstGeom>
+          <a:solidFill>
+            <a:srgbClr val="CFC9EE"/>
+          </a:solidFill>
+          <a:ln>
+            <a:noFill/>
           </a:ln>
           <a:effectLst/>
         </p:spPr>
@@ -13856,43 +15096,67 @@
           </a:fontRef>
         </p:style>
         <p:txBody>
-          <a:bodyPr rtlCol="0" anchor="ctr" wrap="none" lIns="25400" rIns="25400" tIns="0" bIns="0"/>
+          <a:bodyPr rtlCol="0" anchor="ctr" wrap="square"/>
           <a:lstStyle/>
           <a:p>
             <a:pPr algn="ctr"/>
-            <a:r>
-              <a:rPr sz="850" b="0">
-                <a:solidFill>
-                  <a:srgbClr val="CFC9EE"/>
+          </a:p>
+        </p:txBody>
+      </p:sp>
+      <p:sp>
+        <p:nvSpPr>
+          <p:cNvPr id="12" name="TextBox 11"/>
+          <p:cNvSpPr txBox="1"/>
+          <p:nvPr/>
+        </p:nvSpPr>
+        <p:spPr>
+          <a:xfrm>
+            <a:off x="640080" y="6437376"/>
+            <a:ext cx="1516475" cy="152146"/>
+          </a:xfrm>
+          <a:prstGeom prst="rect">
+            <a:avLst/>
+          </a:prstGeom>
+          <a:noFill/>
+        </p:spPr>
+        <p:txBody>
+          <a:bodyPr wrap="square" anchor="t" lIns="0" rIns="0" tIns="0" bIns="0">
+            <a:spAutoFit/>
+          </a:bodyPr>
+          <a:lstStyle/>
+          <a:p>
+            <a:pPr algn="l"/>
+            <a:r>
+              <a:rPr sz="700" b="0" i="0">
+                <a:solidFill>
+                  <a:srgbClr val="6B6690"/>
                 </a:solidFill>
                 <a:latin typeface="Calibri"/>
               </a:rPr>
-              <a:t>Pick three slots and defend them</a:t>
-            </a:r>
-          </a:p>
-        </p:txBody>
-      </p:sp>
-      <p:sp>
-        <p:nvSpPr>
-          <p:cNvPr id="11" name="Rounded Rectangle 10"/>
+              <a:t>Which strip would you ship?</a:t>
+            </a:r>
+          </a:p>
+        </p:txBody>
+      </p:sp>
+      <p:sp>
+        <p:nvSpPr>
+          <p:cNvPr id="13" name="Oval 12"/>
           <p:cNvSpPr/>
           <p:nvPr/>
         </p:nvSpPr>
         <p:spPr>
           <a:xfrm>
-            <a:off x="2990088" y="5074920"/>
-            <a:ext cx="2148840" cy="310896"/>
-          </a:xfrm>
-          <a:prstGeom prst="roundRect">
-            <a:avLst>
-              <a:gd name="adj" fmla="val 50000"/>
-            </a:avLst>
-          </a:prstGeom>
-          <a:noFill/>
-          <a:ln w="9525">
-            <a:solidFill>
-              <a:srgbClr val="CFC9EE"/>
-            </a:solidFill>
+            <a:off x="2247995" y="6492240"/>
+            <a:ext cx="64008" cy="64008"/>
+          </a:xfrm>
+          <a:prstGeom prst="ellipse">
+            <a:avLst/>
+          </a:prstGeom>
+          <a:solidFill>
+            <a:srgbClr val="5B3FD6"/>
+          </a:solidFill>
+          <a:ln>
+            <a:noFill/>
           </a:ln>
           <a:effectLst/>
         </p:spPr>
@@ -13911,40 +15175,64 @@
           </a:fontRef>
         </p:style>
         <p:txBody>
-          <a:bodyPr rtlCol="0" anchor="ctr" wrap="none" lIns="25400" rIns="25400" tIns="0" bIns="0"/>
+          <a:bodyPr rtlCol="0" anchor="ctr" wrap="square"/>
           <a:lstStyle/>
           <a:p>
             <a:pPr algn="ctr"/>
-            <a:r>
-              <a:rPr sz="850" b="0">
-                <a:solidFill>
-                  <a:srgbClr val="CFC9EE"/>
+          </a:p>
+        </p:txBody>
+      </p:sp>
+      <p:sp>
+        <p:nvSpPr>
+          <p:cNvPr id="14" name="TextBox 13"/>
+          <p:cNvSpPr txBox="1"/>
+          <p:nvPr/>
+        </p:nvSpPr>
+        <p:spPr>
+          <a:xfrm>
+            <a:off x="2357723" y="6437376"/>
+            <a:ext cx="1102423" cy="152146"/>
+          </a:xfrm>
+          <a:prstGeom prst="rect">
+            <a:avLst/>
+          </a:prstGeom>
+          <a:noFill/>
+        </p:spPr>
+        <p:txBody>
+          <a:bodyPr wrap="square" anchor="t" lIns="0" rIns="0" tIns="0" bIns="0">
+            <a:spAutoFit/>
+          </a:bodyPr>
+          <a:lstStyle/>
+          <a:p>
+            <a:pPr algn="l"/>
+            <a:r>
+              <a:rPr sz="700" b="1" i="0">
+                <a:solidFill>
+                  <a:srgbClr val="5B3FD6"/>
                 </a:solidFill>
                 <a:latin typeface="Calibri"/>
               </a:rPr>
-              <a:t>The interview question the day equips</a:t>
-            </a:r>
-          </a:p>
-        </p:txBody>
-      </p:sp>
-      <p:sp>
-        <p:nvSpPr>
-          <p:cNvPr id="12" name="Rounded Rectangle 11"/>
+              <a:t>The interview room</a:t>
+            </a:r>
+          </a:p>
+        </p:txBody>
+      </p:sp>
+      <p:sp>
+        <p:nvSpPr>
+          <p:cNvPr id="15" name="Oval 14"/>
           <p:cNvSpPr/>
           <p:nvPr/>
         </p:nvSpPr>
         <p:spPr>
           <a:xfrm>
-            <a:off x="5248656" y="5074920"/>
-            <a:ext cx="2148840" cy="310896"/>
-          </a:xfrm>
-          <a:prstGeom prst="roundRect">
-            <a:avLst>
-              <a:gd name="adj" fmla="val 50000"/>
-            </a:avLst>
+            <a:off x="3551586" y="6492240"/>
+            <a:ext cx="64008" cy="64008"/>
+          </a:xfrm>
+          <a:prstGeom prst="ellipse">
+            <a:avLst/>
           </a:prstGeom>
           <a:solidFill>
-            <a:srgbClr val="D9A7FF"/>
+            <a:srgbClr val="CFC9EE"/>
           </a:solidFill>
           <a:ln>
             <a:noFill/>
@@ -13966,60 +15254,51 @@
           </a:fontRef>
         </p:style>
         <p:txBody>
-          <a:bodyPr rtlCol="0" anchor="ctr" wrap="none" lIns="25400" rIns="25400" tIns="0" bIns="0"/>
+          <a:bodyPr rtlCol="0" anchor="ctr" wrap="square"/>
           <a:lstStyle/>
           <a:p>
             <a:pPr algn="ctr"/>
-            <a:r>
-              <a:rPr sz="850" b="1">
-                <a:solidFill>
-                  <a:srgbClr val="1A0F5C"/>
+          </a:p>
+        </p:txBody>
+      </p:sp>
+      <p:sp>
+        <p:nvSpPr>
+          <p:cNvPr id="16" name="TextBox 15"/>
+          <p:cNvSpPr txBox="1"/>
+          <p:nvPr/>
+        </p:nvSpPr>
+        <p:spPr>
+          <a:xfrm>
+            <a:off x="3661314" y="6437376"/>
+            <a:ext cx="1424463" cy="152146"/>
+          </a:xfrm>
+          <a:prstGeom prst="rect">
+            <a:avLst/>
+          </a:prstGeom>
+          <a:noFill/>
+        </p:spPr>
+        <p:txBody>
+          <a:bodyPr wrap="square" anchor="t" lIns="0" rIns="0" tIns="0" bIns="0">
+            <a:spAutoFit/>
+          </a:bodyPr>
+          <a:lstStyle/>
+          <a:p>
+            <a:pPr algn="l"/>
+            <a:r>
+              <a:rPr sz="700" b="0" i="0">
+                <a:solidFill>
+                  <a:srgbClr val="6B6690"/>
                 </a:solidFill>
                 <a:latin typeface="Calibri"/>
               </a:rPr>
-              <a:t>The handoff into the W4-2 faculty block (tentative)</a:t>
-            </a:r>
-          </a:p>
-        </p:txBody>
-      </p:sp>
-      <p:sp>
-        <p:nvSpPr>
-          <p:cNvPr id="13" name="TextBox 12"/>
-          <p:cNvSpPr txBox="1"/>
-          <p:nvPr/>
-        </p:nvSpPr>
-        <p:spPr>
-          <a:xfrm>
-            <a:off x="530352" y="6437376"/>
-            <a:ext cx="9667951" cy="160401"/>
-          </a:xfrm>
-          <a:prstGeom prst="rect">
-            <a:avLst/>
-          </a:prstGeom>
-          <a:noFill/>
-        </p:spPr>
-        <p:txBody>
-          <a:bodyPr wrap="square" anchor="t" lIns="0" rIns="0" tIns="0" bIns="0">
-            <a:spAutoFit/>
-          </a:bodyPr>
-          <a:lstStyle/>
-          <a:p>
-            <a:pPr algn="l"/>
-            <a:r>
-              <a:rPr sz="750" b="0" i="0">
-                <a:solidFill>
-                  <a:srgbClr val="CFC9EE"/>
-                </a:solidFill>
-                <a:latin typeface="Calibri"/>
-              </a:rPr>
-              <a:t>Week 4, Day 3. The three slots and the Kalpa transfer</a:t>
-            </a:r>
-          </a:p>
-        </p:txBody>
-      </p:sp>
-      <p:sp>
-        <p:nvSpPr>
-          <p:cNvPr id="14" name="TextBox 13"/>
+              <a:t>The handoff and the close</a:t>
+            </a:r>
+          </a:p>
+        </p:txBody>
+      </p:sp>
+      <p:sp>
+        <p:nvSpPr>
+          <p:cNvPr id="17" name="TextBox 16"/>
           <p:cNvSpPr txBox="1"/>
           <p:nvPr/>
         </p:nvSpPr>
@@ -14043,11 +15322,11 @@
             <a:r>
               <a:rPr sz="750" b="0" i="0">
                 <a:solidFill>
-                  <a:srgbClr val="CFC9EE"/>
+                  <a:srgbClr val="6B6690"/>
                 </a:solidFill>
                 <a:latin typeface="Calibri"/>
               </a:rPr>
-              <a:t>9 / 11</a:t>
+              <a:t>S43  ·  9 / 13</a:t>
             </a:r>
           </a:p>
         </p:txBody>

--- a/content/W04/D3/slides/C2_W04_D03_half2_STUDENT.pptx
+++ b/content/W04/D3/slides/C2_W04_D03_half2_STUDENT.pptx
@@ -899,7 +899,7 @@
           <a:lstStyle/>
           <a:p>
             <a:r>
-              <a:t>LIVE, 1 minute. Chapter 3, part two, level L5, unguided in the nine groups on notebook 03.</a:t>
+              <a:t>LIVE, 1 minute. Chapter 3, part two, level L5, unguided in groups of about four on notebook 03.</a:t>
             </a:r>
           </a:p>
           <a:p>
@@ -5528,7 +5528,7 @@
                 </a:solidFill>
                 <a:latin typeface="Calibri"/>
               </a:rPr>
-              <a:t>Week 4 Day 3: what goes with what, beyond chance</a:t>
+              <a:t>Week 4, Day 3. Instamart Pune: the strip re-ranked, priced and defended</a:t>
             </a:r>
           </a:p>
         </p:txBody>
@@ -8851,7 +8851,7 @@
                 </a:solidFill>
                 <a:latin typeface="Calibri"/>
               </a:rPr>
-              <a:t>Week 4 Day 3: what goes with what, beyond chance</a:t>
+              <a:t>Week 4, Day 3. Instamart Pune: the strip re-ranked, priced and defended</a:t>
             </a:r>
           </a:p>
         </p:txBody>
@@ -12792,7 +12792,7 @@
                 </a:solidFill>
                 <a:latin typeface="Calibri"/>
               </a:rPr>
-              <a:t>Week 4 Day 3: what goes with what, beyond chance</a:t>
+              <a:t>Week 4, Day 3. Instamart Pune: the strip re-ranked, priced and defended</a:t>
             </a:r>
           </a:p>
         </p:txBody>

--- a/content/W04/D3/slides/C2_W04_D03_half2_STUDENT.pptx
+++ b/content/W04/D3/slides/C2_W04_D03_half2_STUDENT.pptx
@@ -908,7 +908,7 @@
           <a:lstStyle/>
           <a:p>
             <a:r>
-              <a:t>LIVE, 1 minute. The template sits in exercises/unguided; the worked answer is released at the</a:t>
+              <a:t>LIVE, 1 minute. The four fields on this slide are the template; the strip set's solutions file is released at the</a:t>
             </a:r>
           </a:p>
           <a:p>
@@ -1293,12 +1293,22 @@
           <a:lstStyle/>
           <a:p>
             <a:r>
-              <a:t>LIVE, 3 minutes. Programme-written variant; it names no company figure. The base-rate trap is the</a:t>
-            </a:r>
-          </a:p>
-          <a:p>
-            <a:r>
-              <a:t>same one the strip fell into, now inside a model's evaluation. Transition: the handoff.</a:t>
+              <a:t>LIVE, 3 minutes. Programme-written variant. The base-rate trap is the same one the strip fell</a:t>
+            </a:r>
+          </a:p>
+          <a:p>
+            <a:r>
+              <a:t>into, now inside a model's evaluation. Amazon's Prime Video team saw why the cutoff date matters</a:t>
+            </a:r>
+          </a:p>
+          <a:p>
+            <a:r>
+              <a:t>(Amazon Science, checked 12 October 2026): its first autoencoder trailed a popularity ranking of</a:t>
+            </a:r>
+          </a:p>
+          <a:p>
+            <a:r>
+              <a:t>recent rentals until it was trained on viewing sorted by time. Transition: the handoff.</a:t>
             </a:r>
           </a:p>
         </p:txBody>
@@ -5202,7 +5212,7 @@
         <p:spPr>
           <a:xfrm>
             <a:off x="530352" y="3139440"/>
-            <a:ext cx="11130991" cy="495807"/>
+            <a:ext cx="11130991" cy="1048512"/>
           </a:xfrm>
           <a:prstGeom prst="rect">
             <a:avLst/>
@@ -5227,7 +5237,7 @@
                 </a:solidFill>
                 <a:latin typeface="Calibri"/>
               </a:rPr>
-              <a:t>The IITGN faculty session is tentative until IIT Gandhinagar confirms it.</a:t>
+              <a:t>Independent means that knowing one item is in the cart tells you nothing about the other, and a rule is a sentence such as "bread, so milk". The IITGN faculty session is tentative until IIT Gandhinagar confirms it.</a:t>
             </a:r>
           </a:p>
         </p:txBody>
@@ -5705,7 +5715,7 @@
                 </a:solidFill>
                 <a:latin typeface="Georgia"/>
               </a:rPr>
-              <a:t>Eight questions, twenty seconds each</a:t>
+              <a:t>Eight quick questions, one with a minute to compute</a:t>
             </a:r>
           </a:p>
         </p:txBody>
@@ -7390,7 +7400,7 @@
       </p:sp>
       <p:pic>
         <p:nvPicPr>
-          <p:cNvPr id="15" name="mermaid diagram" descr="7e07f604c1386171.png"/>
+          <p:cNvPr id="15" name="mermaid diagram" descr="fa124bfc310babd0.png"/>
           <p:cNvPicPr>
             <a:picLocks noChangeAspect="1"/>
           </p:cNvPicPr>
@@ -7405,7 +7415,7 @@
         <p:spPr>
           <a:xfrm>
             <a:off x="530352" y="4168139"/>
-            <a:ext cx="11130991" cy="1129748"/>
+            <a:ext cx="11130991" cy="1331913"/>
           </a:xfrm>
           <a:prstGeom prst="rect">
             <a:avLst/>
@@ -8147,7 +8157,7 @@
                 </a:solidFill>
                 <a:latin typeface="Calibri"/>
               </a:rPr>
-              <a:t>From the pairs table: support at least 1 percent, lift well above one, each with its two numbers.</a:t>
+              <a:t>From the pairs table: support at least 1 percent and lift 1.5 or more, each with its two numbers.</a:t>
             </a:r>
           </a:p>
         </p:txBody>
@@ -8841,7 +8851,46 @@
       </p:sp>
       <p:sp>
         <p:nvSpPr>
-          <p:cNvPr id="33" name="Oval 32"/>
+          <p:cNvPr id="33" name="TextBox 32"/>
+          <p:cNvSpPr txBox="1"/>
+          <p:nvPr/>
+        </p:nvSpPr>
+        <p:spPr>
+          <a:xfrm>
+            <a:off x="530352" y="4484116"/>
+            <a:ext cx="11130991" cy="772160"/>
+          </a:xfrm>
+          <a:prstGeom prst="rect">
+            <a:avLst/>
+          </a:prstGeom>
+          <a:noFill/>
+        </p:spPr>
+        <p:txBody>
+          <a:bodyPr wrap="square" anchor="t" lIns="0" rIns="0" tIns="0" bIns="0">
+            <a:spAutoFit/>
+          </a:bodyPr>
+          <a:lstStyle/>
+          <a:p>
+            <a:pPr>
+              <a:spcAft>
+                <a:spcPts val="800"/>
+              </a:spcAft>
+            </a:pPr>
+            <a:r>
+              <a:rPr sz="1600" b="0" i="0">
+                <a:solidFill>
+                  <a:srgbClr val="1A1440"/>
+                </a:solidFill>
+                <a:latin typeface="Calibri"/>
+              </a:rPr>
+              <a:t>The one-page strip is what each group hands in. The strip set in exercises/unguided asks the same steps as five items; a group posts its five letters once its page is done.</a:t>
+            </a:r>
+          </a:p>
+        </p:txBody>
+      </p:sp>
+      <p:sp>
+        <p:nvSpPr>
+          <p:cNvPr id="34" name="Oval 33"/>
           <p:cNvSpPr/>
           <p:nvPr/>
         </p:nvSpPr>
@@ -8885,7 +8934,7 @@
       </p:sp>
       <p:sp>
         <p:nvSpPr>
-          <p:cNvPr id="34" name="TextBox 33"/>
+          <p:cNvPr id="35" name="TextBox 34"/>
           <p:cNvSpPr txBox="1"/>
           <p:nvPr/>
         </p:nvSpPr>
@@ -8920,7 +8969,7 @@
       </p:sp>
       <p:sp>
         <p:nvSpPr>
-          <p:cNvPr id="35" name="Oval 34"/>
+          <p:cNvPr id="36" name="Oval 35"/>
           <p:cNvSpPr/>
           <p:nvPr/>
         </p:nvSpPr>
@@ -8964,7 +9013,7 @@
       </p:sp>
       <p:sp>
         <p:nvSpPr>
-          <p:cNvPr id="36" name="TextBox 35"/>
+          <p:cNvPr id="37" name="TextBox 36"/>
           <p:cNvSpPr txBox="1"/>
           <p:nvPr/>
         </p:nvSpPr>
@@ -8999,7 +9048,7 @@
       </p:sp>
       <p:sp>
         <p:nvSpPr>
-          <p:cNvPr id="37" name="Oval 36"/>
+          <p:cNvPr id="38" name="Oval 37"/>
           <p:cNvSpPr/>
           <p:nvPr/>
         </p:nvSpPr>
@@ -9043,7 +9092,7 @@
       </p:sp>
       <p:sp>
         <p:nvSpPr>
-          <p:cNvPr id="38" name="TextBox 37"/>
+          <p:cNvPr id="39" name="TextBox 38"/>
           <p:cNvSpPr txBox="1"/>
           <p:nvPr/>
         </p:nvSpPr>
@@ -9078,7 +9127,7 @@
       </p:sp>
       <p:sp>
         <p:nvSpPr>
-          <p:cNvPr id="39" name="TextBox 38"/>
+          <p:cNvPr id="40" name="TextBox 39"/>
           <p:cNvSpPr txBox="1"/>
           <p:nvPr/>
         </p:nvSpPr>
@@ -10115,7 +10164,7 @@
                 </a:solidFill>
                 <a:latin typeface="Calibri"/>
               </a:rPr>
-              <a:t>Milk anchors the cart</a:t>
+              <a:t>Milk is in most carts</a:t>
             </a:r>
           </a:p>
         </p:txBody>
@@ -11364,7 +11413,7 @@
         <p:spPr>
           <a:xfrm>
             <a:off x="731519" y="3520440"/>
-            <a:ext cx="9509760" cy="531876"/>
+            <a:ext cx="9509760" cy="284226"/>
           </a:xfrm>
           <a:prstGeom prst="rect">
             <a:avLst/>
@@ -11385,7 +11434,7 @@
                 </a:solidFill>
                 <a:latin typeface="Calibri"/>
               </a:rPr>
-              <a:t>How does a strong candidate answer the day's question as Uber, Swiggy, Google or an AI startup would ask it?</a:t>
+              <a:t>How does a strong candidate answer the day's question in a product-analytics interview?</a:t>
             </a:r>
           </a:p>
         </p:txBody>
@@ -11826,7 +11875,7 @@
                 </a:solidFill>
                 <a:latin typeface="Georgia"/>
               </a:rPr>
-              <a:t>Lift is the count popularity cannot fool</a:t>
+              <a:t>Lift divides popularity out; confidence does not</a:t>
             </a:r>
           </a:p>
         </p:txBody>
@@ -12088,7 +12137,7 @@
                 </a:solidFill>
                 <a:latin typeface="Calibri"/>
               </a:rPr>
-              <a:t>"Confidence is the probability they go together, so the highest confidence pair goes in the strip." It ranks milk first.</a:t>
+              <a:t>"Confidence, because it is the probability of B given A, so the highest-confidence pair goes in the strip." It ranks milk first.</a:t>
             </a:r>
           </a:p>
         </p:txBody>
@@ -12513,7 +12562,7 @@
                 </a:solidFill>
                 <a:latin typeface="Calibri"/>
               </a:rPr>
-              <a:t>The base rate named</a:t>
+              <a:t>The base rate and its window</a:t>
             </a:r>
           </a:p>
         </p:txBody>
@@ -12548,7 +12597,7 @@
                 </a:solidFill>
                 <a:latin typeface="Calibri"/>
               </a:rPr>
-              <a:t>Three questions kept apart, the denominator said aloud, a floor, a decision.</a:t>
+              <a:t>Three questions kept apart, the denominator and window said aloud, a floor, a decision.</a:t>
             </a:r>
           </a:p>
         </p:txBody>
@@ -13076,7 +13125,7 @@
         </p:nvGraphicFramePr>
         <p:xfrm>
           <a:off x="530352" y="1956816"/>
-          <a:ext cx="11130990" cy="2688336"/>
+          <a:ext cx="11130990" cy="3413760"/>
         </p:xfrm>
         <a:graphic>
           <a:graphicData uri="http://schemas.openxmlformats.org/drawingml/2006/table">
@@ -13134,7 +13183,7 @@
                   </a:tcPr>
                 </a:tc>
               </a:tr>
-              <a:tr h="611632">
+              <a:tr h="1095248">
                 <a:tc>
                   <a:txBody>
                     <a:bodyPr/>
@@ -13169,7 +13218,7 @@
                           </a:solidFill>
                           <a:latin typeface="Calibri"/>
                         </a:rPr>
-                        <a:t>Not yet: 100 carts cannot repay a slot shown to everyone; it goes on a watch list and a two-zone test</a:t>
+                        <a:t>The pair is real, 100 carts against 22 by chance, but it shows only beside ice cream, 1,600 carts in four weeks, so it is worth little in rupees; it goes on the watch list and a test on ice-cream carts</a:t>
                       </a:r>
                     </a:p>
                   </a:txBody>
@@ -13215,7 +13264,7 @@
                           </a:solidFill>
                           <a:latin typeface="Calibri"/>
                         </a:rPr>
-                        <a:t>It inflates the pair counts of whatever they buy together; count each customer once and the party pair falls from 3.39 to 2.56</a:t>
+                        <a:t>They repeat the party pair, so count each customer once and 3.39 falls to 2.56; bigger baskets hold any pair by chance, so size the expected count by cart; rank on 2.56</a:t>
                       </a:r>
                     </a:p>
                   </a:txBody>
@@ -13226,7 +13275,7 @@
                   </a:tcPr>
                 </a:tc>
               </a:tr>
-              <a:tr h="853440">
+              <a:tr h="1095248">
                 <a:tc>
                   <a:txBody>
                     <a:bodyPr/>
@@ -13261,7 +13310,7 @@
                           </a:solidFill>
                           <a:latin typeface="Calibri"/>
                         </a:rPr>
-                        <a:t>The margin handed back by any bundle discount, and the adds that would have happened anyway; sales are never the gain</a:t>
+                        <a:t>Incrementality: some adds come through search or habit anyway, so the Rs 6.3 lakh a month (Rs 3.9 lakh to Rs 9.3 lakh) is a ceiling a holdout measures; sales are never the gain</a:t>
                       </a:r>
                     </a:p>
                   </a:txBody>
@@ -13791,7 +13840,7 @@
       </p:sp>
       <p:pic>
         <p:nvPicPr>
-          <p:cNvPr id="9" name="mermaid diagram" descr="ebaf94bbf531a44e.png"/>
+          <p:cNvPr id="9" name="mermaid diagram" descr="a9a2ab03b6319fe8.png"/>
           <p:cNvPicPr>
             <a:picLocks noChangeAspect="1"/>
           </p:cNvPicPr>
@@ -13805,8 +13854,8 @@
         </p:blipFill>
         <p:spPr>
           <a:xfrm>
-            <a:off x="780897" y="1956816"/>
-            <a:ext cx="10629900" cy="2614612"/>
+            <a:off x="1067196" y="1664208"/>
+            <a:ext cx="10057302" cy="2703575"/>
           </a:xfrm>
           <a:prstGeom prst="rect">
             <a:avLst/>
@@ -13821,8 +13870,8 @@
         </p:nvSpPr>
         <p:spPr>
           <a:xfrm>
-            <a:off x="530352" y="4717732"/>
-            <a:ext cx="11130991" cy="1048512"/>
+            <a:off x="530352" y="4413504"/>
+            <a:ext cx="11130991" cy="1786128"/>
           </a:xfrm>
           <a:prstGeom prst="rect">
             <a:avLst/>
@@ -13835,11 +13884,6 @@
           </a:bodyPr>
           <a:lstStyle/>
           <a:p>
-            <a:pPr>
-              <a:spcAft>
-                <a:spcPts val="800"/>
-              </a:spcAft>
-            </a:pPr>
             <a:r>
               <a:rPr sz="1600" b="0" i="0">
                 <a:solidFill>
@@ -13847,7 +13891,7 @@
                 </a:solidFill>
                 <a:latin typeface="Calibri"/>
               </a:rPr>
-              <a:t>An assistant that suggests milk is "accepted" often because milk is popular. Score it offline by the lift of its accepted suggestions over a baseline that always suggests the most popular items, on carts it never saw; then confirm online with a holdout, counting only the adds the assistant caused.</a:t>
+              <a:t>Acceptance flatters an assistant as confidence flattered milk. Offline is a gate: on held-out carts placed after a cutoff date, which it never saw while it was built, hide one item in each and check that it recovers the item more often than a popularity list and the current strip, leaving out each shopper's weekly staples. Online decides: customers, never carts, randomised to three arms for a length fixed in advance, scored on incremental adds, the ones that would not have happened without it, as margin per customer less serving cost.</a:t>
             </a:r>
           </a:p>
         </p:txBody>

--- a/content/W04/D3/slides/C2_W04_D03_half2_STUDENT.pptx
+++ b/content/W04/D3/slides/C2_W04_D03_half2_STUDENT.pptx
@@ -13125,7 +13125,7 @@
         </p:nvGraphicFramePr>
         <p:xfrm>
           <a:off x="530352" y="1956816"/>
-          <a:ext cx="11130990" cy="3413760"/>
+          <a:ext cx="11130990" cy="3897376"/>
         </p:xfrm>
         <a:graphic>
           <a:graphicData uri="http://schemas.openxmlformats.org/drawingml/2006/table">
@@ -13218,7 +13218,7 @@
                           </a:solidFill>
                           <a:latin typeface="Calibri"/>
                         </a:rPr>
-                        <a:t>The pair is real, 100 carts against 22 by chance, but it shows only beside ice cream, 1,600 carts in four weeks, so it is worth little in rupees; it goes on the watch list and a test on ice-cream carts</a:t>
+                        <a:t>The pair is real, 100 carts against 22 by chance, but it shows only beside ice cream, about 2,400 views a day, so in place of milk it earns about Rs 17,000 a month; it goes on the watch list and a margin test on ice-cream carts</a:t>
                       </a:r>
                     </a:p>
                   </a:txBody>
@@ -13229,7 +13229,7 @@
                   </a:tcPr>
                 </a:tc>
               </a:tr>
-              <a:tr h="853440">
+              <a:tr h="1337056">
                 <a:tc>
                   <a:txBody>
                     <a:bodyPr/>
@@ -13264,7 +13264,7 @@
                           </a:solidFill>
                           <a:latin typeface="Calibri"/>
                         </a:rPr>
-                        <a:t>They repeat the party pair, so count each customer once and 3.39 falls to 2.56; bigger baskets hold any pair by chance, so size the expected count by cart; rank on 2.56</a:t>
+                        <a:t>They repeat the party pair, so count each customer once and 3.39 falls to 2.56; bigger baskets hold any pair by chance, so size the expected count by cart. Corrected for both, chips and cold drink reads 1.95 and keeps its slot, and onions and tomatoes falls to 1.38, below the 1.5 bar</a:t>
                       </a:r>
                     </a:p>
                   </a:txBody>

--- a/content/W04/D3/slides/C2_W04_D03_half2_STUDENT.pptx
+++ b/content/W04/D3/slides/C2_W04_D03_half2_STUDENT.pptx
@@ -8883,7 +8883,7 @@
                 </a:solidFill>
                 <a:latin typeface="Calibri"/>
               </a:rPr>
-              <a:t>The one-page strip is what each group hands in. The strip set in exercises/unguided asks the same steps as five items; a group posts its five letters once its page is done.</a:t>
+              <a:t>The one-page strip is what each group hands in. The strip set in exercises/unguided asks the same steps as four items; a group posts its four letters once its page is done.</a:t>
             </a:r>
           </a:p>
         </p:txBody>

--- a/content/W04/D3/slides/C2_W04_D03_half2_STUDENT.pptx
+++ b/content/W04/D3/slides/C2_W04_D03_half2_STUDENT.pptx
@@ -1303,12 +1303,17 @@
           </a:p>
           <a:p>
             <a:r>
-              <a:t>(Amazon Science, checked 12 October 2026): its first autoencoder trailed a popularity ranking of</a:t>
-            </a:r>
-          </a:p>
-          <a:p>
-            <a:r>
-              <a:t>recent rentals until it was trained on viewing sorted by time. Transition: the handoff.</a:t>
+              <a:t>(Amazon Science, checked 12 October 2026): its first autoencoder trailed a list of the past two</a:t>
+            </a:r>
+          </a:p>
+          <a:p>
+            <a:r>
+              <a:t>weeks' most popular rentals until it was trained on viewing before a cutoff and scored on the two</a:t>
+            </a:r>
+          </a:p>
+          <a:p>
+            <a:r>
+              <a:t>weeks after it. Transition: the handoff.</a:t>
             </a:r>
           </a:p>
         </p:txBody>
@@ -13125,7 +13130,7 @@
         </p:nvGraphicFramePr>
         <p:xfrm>
           <a:off x="530352" y="1956816"/>
-          <a:ext cx="11130990" cy="3897376"/>
+          <a:ext cx="11130990" cy="3413760"/>
         </p:xfrm>
         <a:graphic>
           <a:graphicData uri="http://schemas.openxmlformats.org/drawingml/2006/table">
@@ -13134,17 +13139,17 @@
                 <a:tableStyleId>{2D5ABB26-0587-4C30-8999-92F81FD0307C}</a:tableStyleId>
               </a:tblPr>
               <a:tblGrid>
-                <a:gridCol w="5565495"/>
-                <a:gridCol w="5565495"/>
+                <a:gridCol w="5327600"/>
+                <a:gridCol w="5803390"/>
               </a:tblGrid>
-              <a:tr h="369824">
+              <a:tr h="335280">
                 <a:tc>
                   <a:txBody>
                     <a:bodyPr/>
                     <a:lstStyle/>
                     <a:p>
                       <a:r>
-                        <a:rPr sz="1450" b="1" i="0">
+                        <a:rPr sz="1250" b="1" i="0">
                           <a:solidFill>
                             <a:srgbClr val="FFFFFF"/>
                           </a:solidFill>
@@ -13166,7 +13171,7 @@
                     <a:lstStyle/>
                     <a:p>
                       <a:r>
-                        <a:rPr sz="1450" b="1" i="0">
+                        <a:rPr sz="1250" b="1" i="0">
                           <a:solidFill>
                             <a:srgbClr val="FFFFFF"/>
                           </a:solidFill>
@@ -13183,14 +13188,14 @@
                   </a:tcPr>
                 </a:tc>
               </a:tr>
-              <a:tr h="1095248">
+              <a:tr h="1164336">
                 <a:tc>
                   <a:txBody>
                     <a:bodyPr/>
                     <a:lstStyle/>
                     <a:p>
                       <a:r>
-                        <a:rPr sz="1400" b="0" i="0">
+                        <a:rPr sz="1200" b="0" i="0">
                           <a:solidFill>
                             <a:srgbClr val="1A1440"/>
                           </a:solidFill>
@@ -13212,13 +13217,13 @@
                     <a:lstStyle/>
                     <a:p>
                       <a:r>
-                        <a:rPr sz="1400" b="0" i="0">
+                        <a:rPr sz="1200" b="0" i="0">
                           <a:solidFill>
                             <a:srgbClr val="1A1440"/>
                           </a:solidFill>
                           <a:latin typeface="Calibri"/>
                         </a:rPr>
-                        <a:t>The pair is real, 100 carts against 22 by chance, but it shows only beside ice cream, about 2,400 views a day, so in place of milk it earns about Rs 17,000 a month; it goes on the watch list and a margin test on ice-cream carts</a:t>
+                        <a:t>The pair is real, 100 carts against 22 by chance, and beside ice cream, about 2,400 views a day, sauce's Rs 37.40 margin makes it worth about Rs 85,000 a month in place of milk; 100 carts cannot say how it clicks, so it goes on the watch list and a test of how often ice-cream carts buy sauce</a:t>
                       </a:r>
                     </a:p>
                   </a:txBody>
@@ -13229,14 +13234,14 @@
                   </a:tcPr>
                 </a:tc>
               </a:tr>
-              <a:tr h="1337056">
+              <a:tr h="1164336">
                 <a:tc>
                   <a:txBody>
                     <a:bodyPr/>
                     <a:lstStyle/>
                     <a:p>
                       <a:r>
-                        <a:rPr sz="1400" b="0" i="0">
+                        <a:rPr sz="1200" b="0" i="0">
                           <a:solidFill>
                             <a:srgbClr val="1A1440"/>
                           </a:solidFill>
@@ -13258,7 +13263,7 @@
                     <a:lstStyle/>
                     <a:p>
                       <a:r>
-                        <a:rPr sz="1400" b="0" i="0">
+                        <a:rPr sz="1200" b="0" i="0">
                           <a:solidFill>
                             <a:srgbClr val="1A1440"/>
                           </a:solidFill>
@@ -13275,14 +13280,14 @@
                   </a:tcPr>
                 </a:tc>
               </a:tr>
-              <a:tr h="1095248">
+              <a:tr h="749808">
                 <a:tc>
                   <a:txBody>
                     <a:bodyPr/>
                     <a:lstStyle/>
                     <a:p>
                       <a:r>
-                        <a:rPr sz="1400" b="0" i="0">
+                        <a:rPr sz="1200" b="0" i="0">
                           <a:solidFill>
                             <a:srgbClr val="1A1440"/>
                           </a:solidFill>
@@ -13304,7 +13309,7 @@
                     <a:lstStyle/>
                     <a:p>
                       <a:r>
-                        <a:rPr sz="1400" b="0" i="0">
+                        <a:rPr sz="1200" b="0" i="0">
                           <a:solidFill>
                             <a:srgbClr val="1A1440"/>
                           </a:solidFill>
@@ -13840,7 +13845,7 @@
       </p:sp>
       <p:pic>
         <p:nvPicPr>
-          <p:cNvPr id="9" name="mermaid diagram" descr="a9a2ab03b6319fe8.png"/>
+          <p:cNvPr id="9" name="mermaid diagram" descr="40b6a72b96f1bf50.png"/>
           <p:cNvPicPr>
             <a:picLocks noChangeAspect="1"/>
           </p:cNvPicPr>
@@ -13854,8 +13859,8 @@
         </p:blipFill>
         <p:spPr>
           <a:xfrm>
-            <a:off x="1067196" y="1664208"/>
-            <a:ext cx="10057302" cy="2703575"/>
+            <a:off x="1953979" y="1664208"/>
+            <a:ext cx="8283736" cy="2427224"/>
           </a:xfrm>
           <a:prstGeom prst="rect">
             <a:avLst/>
@@ -13870,8 +13875,8 @@
         </p:nvSpPr>
         <p:spPr>
           <a:xfrm>
-            <a:off x="530352" y="4413504"/>
-            <a:ext cx="11130991" cy="1786128"/>
+            <a:off x="530352" y="4137152"/>
+            <a:ext cx="11130991" cy="2062480"/>
           </a:xfrm>
           <a:prstGeom prst="rect">
             <a:avLst/>
@@ -13891,7 +13896,7 @@
                 </a:solidFill>
                 <a:latin typeface="Calibri"/>
               </a:rPr>
-              <a:t>Acceptance flatters an assistant as confidence flattered milk. Offline is a gate: on held-out carts placed after a cutoff date, which it never saw while it was built, hide one item in each and check that it recovers the item more often than a popularity list and the current strip, leaving out each shopper's weekly staples. Online decides: customers, never carts, randomised to three arms for a length fixed in advance, scored on incremental adds, the ones that would not have happened without it, as margin per customer less serving cost.</a:t>
+              <a:t>Acceptance flatters an assistant as confidence flattered milk. Offline is a gate: on held-out carts placed after a cutoff date, which it never saw while it was built, hide one item in each and check that it recovers the item more often than a popularity list and the strip re-ranked by lift, leaving out each shopper's weekly staples. Online decides: customers, never carts, randomised to three arms for a length fixed in advance, scored on incremental adds, the ones that would not have happened without it, as margin per customer less serving cost. The re-ranked strip is the bar, since re-ranking is free and the assistant must beat it by more than it costs to serve.</a:t>
             </a:r>
           </a:p>
         </p:txBody>

--- a/content/W04/D3/slides/C2_W04_D03_half2_STUDENT.pptx
+++ b/content/W04/D3/slides/C2_W04_D03_half2_STUDENT.pptx
@@ -528,17 +528,22 @@
           </a:p>
           <a:p>
             <a:r>
-              <a:t>topic "Cross-sell and upsell reasoning; expected value in rupees". It opens the afternoon so the</a:t>
-            </a:r>
-          </a:p>
-          <a:p>
-            <a:r>
-              <a:t>morning carried four topics and this one gets fresh heads. Sharma Kirana's month sheet goes on</a:t>
-            </a:r>
-          </a:p>
-          <a:p>
-            <a:r>
-              <a:t>every table. Transition: who needs the answer.</a:t>
+              <a:t>topic "Cross-sell and upsell reasoning; expected value in rupees", 18 minutes with the second</a:t>
+            </a:r>
+          </a:p>
+          <a:p>
+            <a:r>
+              <a:t>concept drill inside them. It opens the afternoon so the morning carried four topics and this one</a:t>
+            </a:r>
+          </a:p>
+          <a:p>
+            <a:r>
+              <a:t>gets fresh heads. Sharma Kirana's month sheet goes on every table. Transition: who needs the</a:t>
+            </a:r>
+          </a:p>
+          <a:p>
+            <a:r>
+              <a:t>answer.</a:t>
             </a:r>
           </a:p>
         </p:txBody>
@@ -608,7 +613,7 @@
           <a:lstStyle/>
           <a:p>
             <a:r>
-              <a:t>LIVE, 4 minutes. The same four regions chapter 6 drew for the canteen: promote above the floor and</a:t>
+              <a:t>LIVE, 3 minutes. The same four regions chapter 6 drew for the canteen: promote above the floor and</a:t>
             </a:r>
           </a:p>
           <a:p>
@@ -1448,7 +1453,7 @@
           <a:lstStyle/>
           <a:p>
             <a:r>
-              <a:t>LIVE, 2 minutes. Define the two words with the shop's own items: cross-sell suggests an additional</a:t>
+              <a:t>LIVE, 1 minute 30 seconds. Define the two words with the shop's own items: cross-sell suggests an additional</a:t>
             </a:r>
           </a:p>
           <a:p>
@@ -1768,7 +1773,7 @@
           <a:lstStyle/>
           <a:p>
             <a:r>
-              <a:t>LIVE, 3 minutes. The misconception first: a promotion is worth the sales it touches. Groups vote</a:t>
+              <a:t>LIVE, 2 minutes. The misconception first: a promotion is worth the sales it touches. Groups vote</a:t>
             </a:r>
           </a:p>
           <a:p>
@@ -1853,7 +1858,7 @@
           <a:lstStyle/>
           <a:p>
             <a:r>
-              <a:t>LIVE, 5 minutes. Build the bridge left to right on the board, one bar at a time (StatQuest). The</a:t>
+              <a:t>LIVE, 3 minutes. Build the bridge left to right on the board, one bar at a time (StatQuest). The</a:t>
             </a:r>
           </a:p>
           <a:p>
@@ -1958,7 +1963,7 @@
           <a:lstStyle/>
           <a:p>
             <a:r>
-              <a:t>LIVE, 6 minutes. Read the top panel first: each rupee off costs Rs 168 a month, so the card earns</a:t>
+              <a:t>LIVE, 4 minutes. Read the top panel first: each rupee off costs Rs 168 a month, so the card earns</a:t>
             </a:r>
           </a:p>
           <a:p>
@@ -2063,22 +2068,42 @@
           <a:lstStyle/>
           <a:p>
             <a:r>
-              <a:t>LIVE, 1 minute. Fill the concept map's last box: all five topics are now on the board. Check</a:t>
-            </a:r>
-          </a:p>
-          <a:p>
-            <a:r>
-              <a:t>question before moving on: "A card reaches 2,000 bills, 5 percent add one pack at Rs 10 of margin,</a:t>
-            </a:r>
-          </a:p>
-          <a:p>
-            <a:r>
-              <a:t>and the cards cost Rs 600: what is it worth?" 100 packs, Rs 1,000 of margin, less Rs 600, so Rs 400.</a:t>
-            </a:r>
-          </a:p>
-          <a:p>
-            <a:r>
-              <a:t>Transition: chapter 10, the strip ranked and priced.</a:t>
+              <a:t>LIVE, 7 minutes. One minute for the rules: fill the concept map's last box, so all five topics are</a:t>
+            </a:r>
+          </a:p>
+          <a:p>
+            <a:r>
+              <a:t>now on the board. Check question before moving on: "A card reaches 2,000 bills, 5 percent add one</a:t>
+            </a:r>
+          </a:p>
+          <a:p>
+            <a:r>
+              <a:t>pack at Rs 10 of margin, and the cards cost Rs 600: what is it worth?" 100 packs, Rs 1,000 of</a:t>
+            </a:r>
+          </a:p>
+          <a:p>
+            <a:r>
+              <a:t>margin, less Rs 600, so Rs 400. Then the second concept drill, items 5 to 7 of</a:t>
+            </a:r>
+          </a:p>
+          <a:p>
+            <a:r>
+              <a:t>`exercises/unguided/C2_W04_D03_canteen_concepts_STUDENT.md`, on paper, 6 minutes: pairs from one</a:t>
+            </a:r>
+          </a:p>
+          <a:p>
+            <a:r>
+              <a:t>order, the floor on the canteen's month, and the kirana's forgotten cost line. Checkpoint: the room</a:t>
+            </a:r>
+          </a:p>
+          <a:p>
+            <a:r>
+              <a:t>says the expected-value line in the topic's words, margin on the purchases a card changes less</a:t>
+            </a:r>
+          </a:p>
+          <a:p>
+            <a:r>
+              <a:t>every rupee it hands back. Transition: chapter 10, the strip ranked and priced.</a:t>
             </a:r>
           </a:p>
         </p:txBody>
@@ -2223,12 +2248,12 @@
           <a:lstStyle/>
           <a:p>
             <a:r>
-              <a:t>LIVE, 1 minute. Read the four questions. Each is a morning topic used on the case: the floor and</a:t>
-            </a:r>
-          </a:p>
-          <a:p>
-            <a:r>
-              <a:t>the watch list from chapter 6, the rupees from chapter 9. Transition: the problem first.</a:t>
+              <a:t>LIVE, 30 seconds. Read the four questions. Each is a topic used on the case: the floor and the</a:t>
+            </a:r>
+          </a:p>
+          <a:p>
+            <a:r>
+              <a:t>watch list from chapter 6, the rupees from chapter 9. Transition: the problem first.</a:t>
             </a:r>
           </a:p>
         </p:txBody>
@@ -2298,17 +2323,27 @@
           <a:lstStyle/>
           <a:p>
             <a:r>
-              <a:t>LIVE, 3 minutes. Vote, argue, vote again (Brilliant: the problem before the explanation). The split</a:t>
-            </a:r>
-          </a:p>
-          <a:p>
-            <a:r>
-              <a:t>is usually b against c; a learner who drew chapter 6's canteen action map should call it at once.</a:t>
-            </a:r>
-          </a:p>
-          <a:p>
-            <a:r>
-              <a:t>Transition: every pair on one picture.</a:t>
+              <a:t>LIVE, 4 minutes. The prediction is sat as the unguided set</a:t>
+            </a:r>
+          </a:p>
+          <a:p>
+            <a:r>
+              <a:t>`exercises/unguided/C2_W04_D03_ch3_four_pairs_STUDENT.md` on paper, four letters posted in four</a:t>
+            </a:r>
+          </a:p>
+          <a:p>
+            <a:r>
+              <a:t>minutes; its first item is this slide's question under the stated rule (Brilliant: the problem</a:t>
+            </a:r>
+          </a:p>
+          <a:p>
+            <a:r>
+              <a:t>before the explanation). The split is usually b against c; a learner who drew chapter 6's canteen</a:t>
+            </a:r>
+          </a:p>
+          <a:p>
+            <a:r>
+              <a:t>action map should call it at once. Transition: every pair on one picture.</a:t>
             </a:r>
           </a:p>
         </p:txBody>

--- a/content/W04/D3/slides/C2_W04_D03_half2_STUDENT.pptx
+++ b/content/W04/D3/slides/C2_W04_D03_half2_STUDENT.pptx
@@ -26,7 +26,6 @@
     <p:sldId id="274" r:id="rId26"/>
     <p:sldId id="275" r:id="rId27"/>
     <p:sldId id="276" r:id="rId28"/>
-    <p:sldId id="277" r:id="rId29"/>
   </p:sldIdLst>
   <p:sldSz cx="12191695" cy="6858000" type="screen4x3"/>
   <p:notesSz cx="6858000" cy="9144000"/>
@@ -613,22 +612,42 @@
           <a:lstStyle/>
           <a:p>
             <a:r>
-              <a:t>LIVE, 3 minutes. The same four regions chapter 6 drew for the canteen: promote above the floor and</a:t>
-            </a:r>
-          </a:p>
-          <a:p>
-            <a:r>
-              <a:t>well above one; watch, high lift below the floor; ignore, near one, where milk's pairs sit. The</a:t>
-            </a:r>
-          </a:p>
-          <a:p>
-            <a:r>
-              <a:t>floor is a decision: 0.5 percent admits more pairs on thinner ground, 2 percent fewer. Explorer:</a:t>
-            </a:r>
-          </a:p>
-          <a:p>
-            <a:r>
-              <a:t>scene W5, the floor slider counts the pairs that survive. Transition: the thin pair.</a:t>
+              <a:t>LIVE, 3 minutes. The fifth pair above the floor reads 1.09, near one. Run notebook 10's first</a:t>
+            </a:r>
+          </a:p>
+          <a:p>
+            <a:r>
+              <a:t>cells, which rank the pairs above the floor and list the strong ones below it, then hand out the pair cards: each group places its nine cards on chapter 6's</a:t>
+            </a:r>
+          </a:p>
+          <a:p>
+            <a:r>
+              <a:t>four regions and defends one placement in a sentence (the run sheet has the placements). Promote is</a:t>
+            </a:r>
+          </a:p>
+          <a:p>
+            <a:r>
+              <a:t>above the floor and over the bar; watch, over the bar below the floor; trap, near one above the</a:t>
+            </a:r>
+          </a:p>
+          <a:p>
+            <a:r>
+              <a:t>floor, where milk's pairs sit; ignore, near one below it. Each step right on the picture is ten</a:t>
+            </a:r>
+          </a:p>
+          <a:p>
+            <a:r>
+              <a:t>times more carts. The floor is a decision: 0.5 percent admits more pairs on thinner ground, 2</a:t>
+            </a:r>
+          </a:p>
+          <a:p>
+            <a:r>
+              <a:t>percent fewer. Explorer: scene W5, the floor slider counts the pairs that survive. Transition: the</a:t>
+            </a:r>
+          </a:p>
+          <a:p>
+            <a:r>
+              <a:t>thin pair.</a:t>
             </a:r>
           </a:p>
         </p:txBody>
@@ -703,7 +722,17 @@
           </a:p>
           <a:p>
             <a:r>
-              <a:t>earns a trial, never a slot. How long a trial must run to trust its answer is a sample-size</a:t>
+              <a:t>earns a trial, never a slot. Notebook 10 searches the band between 0.2 percent (80 carts) and the</a:t>
+            </a:r>
+          </a:p>
+          <a:p>
+            <a:r>
+              <a:t>floor, since thousands of pairs on a handful of carts read wild lifts by luck, as chapter 6's month</a:t>
+            </a:r>
+          </a:p>
+          <a:p>
+            <a:r>
+              <a:t>showed. How long a trial must run to trust its answer is a sample-size</a:t>
             </a:r>
           </a:p>
           <a:p>
@@ -778,7 +807,12 @@
           <a:lstStyle/>
           <a:p>
             <a:r>
-              <a:t>LIVE, 1 minute. Guess first, then build it. Transition: the cascade.</a:t>
+              <a:t>LIVE, 1 minute. Guess first, then build it; the split is usually b against c. Transition: the</a:t>
+            </a:r>
+          </a:p>
+          <a:p>
+            <a:r>
+              <a:t>cascade.</a:t>
             </a:r>
           </a:p>
         </p:txBody>
@@ -848,37 +882,67 @@
           <a:lstStyle/>
           <a:p>
             <a:r>
-              <a:t>LIVE, 2 minutes. Build it left to right on the board, each factor said with its source and its</a:t>
-            </a:r>
-          </a:p>
-          <a:p>
-            <a:r>
-              <a:t>range, as the kirana's 4 percent was. Margin is what Instamart keeps from a sale after the item's</a:t>
-            </a:r>
-          </a:p>
-          <a:p>
-            <a:r>
-              <a:t>cost: bread sells for Rs 45 and keeps Rs 6.70. Milk earns Rs 2 a pouch, so a milk slot earns even</a:t>
-            </a:r>
-          </a:p>
-          <a:p>
-            <a:r>
-              <a:t>less than the Rs 9 assumption gives it. Back to S64's thin pair, priced at its own margins, Rs</a:t>
-            </a:r>
-          </a:p>
-          <a:p>
-            <a:r>
-              <a:t>37.40 for sauce against Rs 2 for milk: on about 2,400 views a day in place of milk it earns about Rs</a:t>
-            </a:r>
-          </a:p>
-          <a:p>
-            <a:r>
-              <a:t>85,000 a month, which is why it earns a test and never a blind slot. Explorer: scene W4, the strip</a:t>
-            </a:r>
-          </a:p>
-          <a:p>
-            <a:r>
-              <a:t>simulator, rank by count against rank by lift. Transition: the number people get wrong.</a:t>
+              <a:t>LIVE, 2 minutes. The kirana's card at city scale: margin on the adds a slot makes, never its sales.</a:t>
+            </a:r>
+          </a:p>
+          <a:p>
+            <a:r>
+              <a:t>Build it left to right on the board, each factor said with its source and its range, as the</a:t>
+            </a:r>
+          </a:p>
+          <a:p>
+            <a:r>
+              <a:t>kirana's 4 percent was. Margin is what Instamart keeps from a sale after the item's cost: bread</a:t>
+            </a:r>
+          </a:p>
+          <a:p>
+            <a:r>
+              <a:t>sells for Rs 45 and keeps Rs 6.70. Every add is priced at the basket's average Rs 9, milk's too.</a:t>
+            </a:r>
+          </a:p>
+          <a:p>
+            <a:r>
+              <a:t>Two corrections pull opposite ways and both land inside the range: milk earns only Rs 2 a pouch,</a:t>
+            </a:r>
+          </a:p>
+          <a:p>
+            <a:r>
+              <a:t>which raises the gain, and the strip's own adds earned about Rs 7, which lowers it; with both,</a:t>
+            </a:r>
+          </a:p>
+          <a:p>
+            <a:r>
+              <a:t>about Rs 5.7 lakh. Whether a lift-ranked pair clicks better than any other suggestion is not in</a:t>
+            </a:r>
+          </a:p>
+          <a:p>
+            <a:r>
+              <a:t>this log: a test with a count-ranked arm, milk left out, against a lift-ranked arm measures it.</a:t>
+            </a:r>
+          </a:p>
+          <a:p>
+            <a:r>
+              <a:t>Back to S64's thin pair, priced at its own margins, Rs 37.40 for sauce against Rs 2 for milk: on</a:t>
+            </a:r>
+          </a:p>
+          <a:p>
+            <a:r>
+              <a:t>about 2,400 views a day in place of milk, 2,400 x 30 x (0.064 x 0.5 x Rs 37.40 less 0.012 x 0.5 x</a:t>
+            </a:r>
+          </a:p>
+          <a:p>
+            <a:r>
+              <a:t>Rs 2), it earns about Rs 85,000 a month, which is why it earns a test and never a blind slot.</a:t>
+            </a:r>
+          </a:p>
+          <a:p>
+            <a:r>
+              <a:t>Explorer: scene W4, the strip simulator, rank by count against rank by lift. Transition: the</a:t>
+            </a:r>
+          </a:p>
+          <a:p>
+            <a:r>
+              <a:t>number people get wrong.</a:t>
             </a:r>
           </a:p>
         </p:txBody>
@@ -953,12 +1017,12 @@
           </a:p>
           <a:p>
             <a:r>
-              <a:t>add falls by the discount. The doubts and the heavy tenth follow as two self-study slides, read in</a:t>
-            </a:r>
-          </a:p>
-          <a:p>
-            <a:r>
-              <a:t>the lab; the unguided work uses them. Transition: the doubts, for self-study, then the brief.</a:t>
+              <a:t>add falls by the discount. The doubts on D68 are read inside S70's group work, and the heavy tenth</a:t>
+            </a:r>
+          </a:p>
+          <a:p>
+            <a:r>
+              <a:t>on D69 is self-study. Transition: the doubts, then the brief.</a:t>
             </a:r>
           </a:p>
         </p:txBody>
@@ -1028,12 +1092,22 @@
           <a:lstStyle/>
           <a:p>
             <a:r>
-              <a:t>SELF-STUDY, 0 minutes live. Each doubt has its number in notebook 10. A check that comes back clean</a:t>
-            </a:r>
-          </a:p>
-          <a:p>
-            <a:r>
-              <a:t>is said in one line, as the time-of-day check does. In Hadapsar and Viman Nagar from 15 to 21</a:t>
+              <a:t>SELF-STUDY, 0 minutes live: groups read it inside S70's work. Each doubt has its number in notebook 10; the slot row is D54's</a:t>
+            </a:r>
+          </a:p>
+          <a:p>
+            <a:r>
+              <a:t>picture and notebook 10's slot split. A check that comes back clean is said in one line, as the</a:t>
+            </a:r>
+          </a:p>
+          <a:p>
+            <a:r>
+              <a:t>time-of-day check does. One more doubt sits under S66: whether a lift-ranked pair clicks better</a:t>
+            </a:r>
+          </a:p>
+          <a:p>
+            <a:r>
+              <a:t>than any other suggestion, which this log cannot say and a count-against-lift test measures. In Hadapsar and Viman Nagar from 15 to 21</a:t>
             </a:r>
           </a:p>
           <a:p>
@@ -1203,12 +1277,17 @@
           </a:p>
           <a:p>
             <a:r>
-              <a:t>"which number does the growth lead keep?". The doubts sit on D68 and in notebook 10's last cells.</a:t>
-            </a:r>
-          </a:p>
-          <a:p>
-            <a:r>
-              <a:t>The strip set's solutions file is released at the close. Transition: the objection each group must</a:t>
+              <a:t>"which number does the growth lead keep?". Groups read D68 for step 3 inside the ten minutes.</a:t>
+            </a:r>
+          </a:p>
+          <a:p>
+            <a:r>
+              <a:t>Checkpoint: every group hands in one strip with a rupee range. The strip set's solutions file is</a:t>
+            </a:r>
+          </a:p>
+          <a:p>
+            <a:r>
+              <a:t>released at the close. Transition: the objection each group must</a:t>
             </a:r>
           </a:p>
           <a:p>
@@ -1463,22 +1542,27 @@
           </a:p>
           <a:p>
             <a:r>
-              <a:t>upselling pages, checked 13 October 2026). Callback to chapter 3: tea and rusk sit in 150 of 1,000</a:t>
-            </a:r>
-          </a:p>
-          <a:p>
-            <a:r>
-              <a:t>bills where chance gives 120, so lift 1.25 on plenty of bills; the pair beats chance, and the</a:t>
-            </a:r>
-          </a:p>
-          <a:p>
-            <a:r>
-              <a:t>question is now what a card is worth. Instamart's strip suggests a different item beside the one</a:t>
-            </a:r>
-          </a:p>
-          <a:p>
-            <a:r>
-              <a:t>in the cart, which is cross-sell. Transition: the prediction.</a:t>
+              <a:t>upselling pages, checked 13 October 2026). Callback to chapters 3 and 6: tea and rusk sit in 150</a:t>
+            </a:r>
+          </a:p>
+          <a:p>
+            <a:r>
+              <a:t>of 1,000 bills where chance gives 120, lift 1.25 on plenty of bills, under the 1.5 bar, so chapter</a:t>
+            </a:r>
+          </a:p>
+          <a:p>
+            <a:r>
+              <a:t>6's sort would give the pair no slot of its own. A card is the shop's cheapest bet on a weak pull,</a:t>
+            </a:r>
+          </a:p>
+          <a:p>
+            <a:r>
+              <a:t>and this chapter prices what such a bet earns. Instamart's strip suggests a different item beside</a:t>
+            </a:r>
+          </a:p>
+          <a:p>
+            <a:r>
+              <a:t>the one in the cart, which is cross-sell. Transition: the prediction.</a:t>
             </a:r>
           </a:p>
         </p:txBody>
@@ -1548,12 +1632,32 @@
           <a:lstStyle/>
           <a:p>
             <a:r>
-              <a:t>LIVE, 1 minute. Read the line as it stands. Park any question about how long a watch-list trial</a:t>
-            </a:r>
-          </a:p>
-          <a:p>
-            <a:r>
-              <a:t>must run for the faculty session (tentative). Transition: the Kahoot.</a:t>
+              <a:t>LIVE, 8 minutes: 1 for the line, read as it stands, and 7 for the Kahoot pack from the kahoot</a:t>
+            </a:r>
+          </a:p>
+          <a:p>
+            <a:r>
+              <a:t>folder, ungraded, eight items: the three counts and a lift from three counts; a popular partner and</a:t>
+            </a:r>
+          </a:p>
+          <a:p>
+            <a:r>
+              <a:t>the strip's blended click-through; a strong thin pair, what a promotion is worth and one cart's</a:t>
+            </a:r>
+          </a:p>
+          <a:p>
+            <a:r>
+              <a:t>pairs; Tuesday's four moves. Re-teach in one line any item most of the room misses. Park any</a:t>
+            </a:r>
+          </a:p>
+          <a:p>
+            <a:r>
+              <a:t>question about how long a watch-list trial must run for the faculty session (tentative).</a:t>
+            </a:r>
+          </a:p>
+          <a:p>
+            <a:r>
+              <a:t>Transition: the close.</a:t>
             </a:r>
           </a:p>
         </p:txBody>
@@ -1623,81 +1727,6 @@
           <a:lstStyle/>
           <a:p>
             <a:r>
-              <a:t>LIVE, 7 minutes. Run the Kahoot pack from the kahoot folder; it is ungraded. Re-teach in one line</a:t>
-            </a:r>
-          </a:p>
-          <a:p>
-            <a:r>
-              <a:t>any item most of the room misses. Transition: the close.</a:t>
-            </a:r>
-          </a:p>
-        </p:txBody>
-      </p:sp>
-      <p:sp>
-        <p:nvSpPr>
-          <p:cNvPr id="4" name="Slide Number Placeholder 3"/>
-          <p:cNvSpPr>
-            <a:spLocks noGrp="1"/>
-          </p:cNvSpPr>
-          <p:nvPr>
-            <p:ph type="sldNum" idx="5" sz="quarter"/>
-          </p:nvPr>
-        </p:nvSpPr>
-        <p:spPr/>
-      </p:sp>
-    </p:spTree>
-  </p:cSld>
-  <p:clrMapOvr>
-    <a:masterClrMapping/>
-  </p:clrMapOvr>
-</p:notes>
-</file>
-
-<file path=ppt/notesSlides/notesSlide22.xml><?xml version="1.0" encoding="utf-8"?>
-<p:notes xmlns:a="http://schemas.openxmlformats.org/drawingml/2006/main" xmlns:p="http://schemas.openxmlformats.org/presentationml/2006/main" xmlns:r="http://schemas.openxmlformats.org/officeDocument/2006/relationships">
-  <p:cSld>
-    <p:spTree>
-      <p:nvGrpSpPr>
-        <p:cNvPr id="1" name=""/>
-        <p:cNvGrpSpPr/>
-        <p:nvPr/>
-      </p:nvGrpSpPr>
-      <p:grpSpPr>
-        <a:xfrm>
-          <a:off x="0" y="0"/>
-          <a:ext cx="0" cy="0"/>
-          <a:chOff x="0" y="0"/>
-          <a:chExt cx="0" cy="0"/>
-        </a:xfrm>
-      </p:grpSpPr>
-      <p:sp>
-        <p:nvSpPr>
-          <p:cNvPr id="2" name="Slide Image Placeholder 1"/>
-          <p:cNvSpPr>
-            <a:spLocks noGrp="1"/>
-          </p:cNvSpPr>
-          <p:nvPr>
-            <p:ph type="sldImg" idx="2"/>
-          </p:nvPr>
-        </p:nvSpPr>
-        <p:spPr/>
-      </p:sp>
-      <p:sp>
-        <p:nvSpPr>
-          <p:cNvPr id="3" name="Notes Placeholder 2"/>
-          <p:cNvSpPr>
-            <a:spLocks noGrp="1"/>
-          </p:cNvSpPr>
-          <p:nvPr>
-            <p:ph type="body" idx="3" sz="quarter"/>
-          </p:nvPr>
-        </p:nvSpPr>
-        <p:spPr/>
-        <p:txBody>
-          <a:bodyPr/>
-          <a:lstStyle/>
-          <a:p>
-            <a:r>
               <a:t>LIVE, 2 minutes. Ask two learners to say the sentence without notes. The lab after class runs the</a:t>
             </a:r>
           </a:p>
@@ -1963,12 +1992,17 @@
           <a:lstStyle/>
           <a:p>
             <a:r>
-              <a:t>LIVE, 4 minutes. Read the top panel first: each rupee off costs Rs 168 a month, so the card earns</a:t>
-            </a:r>
-          </a:p>
-          <a:p>
-            <a:r>
-              <a:t>nothing at about Rs 1.17 off and loses Rs 140 at Rs 2. Then the bottom panel: at 2 percent the card</a:t>
+              <a:t>LIVE, 4 minutes. Read the top panel first: each rupee off costs Rs 168 a month, so at the same 4</a:t>
+            </a:r>
+          </a:p>
+          <a:p>
+            <a:r>
+              <a:t>percent response the card earns nothing at about Rs 1.17 off and loses Rs 140 at Rs 2; a bigger</a:t>
+            </a:r>
+          </a:p>
+          <a:p>
+            <a:r>
+              <a:t>discount may draw more buyers, which only a trial of the card would show. Then the bottom panel: at 2 percent the card</a:t>
             </a:r>
           </a:p>
           <a:p>
@@ -2328,17 +2362,17 @@
           </a:p>
           <a:p>
             <a:r>
-              <a:t>`exercises/unguided/C2_W04_D03_ch3_four_pairs_STUDENT.md` on paper, four letters posted in four</a:t>
-            </a:r>
-          </a:p>
-          <a:p>
-            <a:r>
-              <a:t>minutes; its first item is this slide's question under the stated rule (Brilliant: the problem</a:t>
-            </a:r>
-          </a:p>
-          <a:p>
-            <a:r>
-              <a:t>before the explanation). The split is usually b against c; a learner who drew chapter 6's canteen</a:t>
+              <a:t>`exercises/unguided/C2_W04_D03_ch10_four_pairs_STUDENT.md` on paper, four letters posted in four</a:t>
+            </a:r>
+          </a:p>
+          <a:p>
+            <a:r>
+              <a:t>minutes; its first item asks which pairs clear the stated rule, and this slide asks which of them</a:t>
+            </a:r>
+          </a:p>
+          <a:p>
+            <a:r>
+              <a:t>ranks first (Brilliant: the problem before the explanation). The split is usually b against c; a learner who drew chapter 6's canteen</a:t>
             </a:r>
           </a:p>
           <a:p>
@@ -5817,7 +5851,7 @@
                 </a:solidFill>
                 <a:latin typeface="Calibri"/>
               </a:rPr>
-              <a:t>1 / 22</a:t>
+              <a:t>1 / 21</a:t>
             </a:r>
           </a:p>
         </p:txBody>
@@ -6151,7 +6185,7 @@
                 </a:solidFill>
                 <a:latin typeface="Calibri"/>
               </a:rPr>
-              <a:t>Above a floor of 1 percent of carts (400 carts), 246 pairs qualify and four reach lift 1.5 or more: chips and cold drink 3.39, coriander and green chillies 3.00, bread and butter 2.21, onions and tomatoes 1.70. The fifth reads 1.09. The strip has three slots, so onions and tomatoes waits as the first replacement. Each step right on the picture is ten times more carts.</a:t>
+              <a:t>Above a floor of 1 percent of carts (400 carts), 246 pairs qualify; four reach lift 1.5: chips and cold drink 3.39, coriander and green chillies 3.00, bread and butter 2.21, onions and tomatoes 1.70. Each fills a slot beside its own item, and elsewhere the strip falls back to the curated list it ran before 7 September. No partner of milk can pass 1 / 0.71 = 1.41.</a:t>
             </a:r>
           </a:p>
         </p:txBody>
@@ -6344,7 +6378,7 @@
                 </a:solidFill>
                 <a:latin typeface="Calibri"/>
               </a:rPr>
-              <a:t>S63  ·  10 / 22</a:t>
+              <a:t>S63  ·  10 / 21</a:t>
             </a:r>
           </a:p>
         </p:txBody>
@@ -6624,7 +6658,7 @@
                 </a:solidFill>
                 <a:latin typeface="Calibri"/>
               </a:rPr>
-              <a:t>Ice cream and chocolate sauce read lift 4.60, the strongest pair between 0.2 percent (80 carts, too few even to trial below it) and the 1 percent floor. The pair is real, 100 carts where chance gives 22, but the strip suggests it only beside ice cream, which is in 4 percent of carts: about 2,400 of the strip's 60,000 views a day, if views follow carts, and 100 carts cannot say how shoppers will click it there. It goes on the watch list: in two zones, a random half of shoppers see it beside ice cream, and it takes the slot only if their ice-cream carts buy sauce more often than the other half's, by a gap set before the trial, with margin per shopper as the guardrail.</a:t>
+              <a:t>Ice cream and chocolate sauce read lift 4.60 on 100 carts, the strongest pair below the 1 percent floor with enough carts to trial. The pair is real, 100 carts where chance gives 22, but the strip suggests it only beside ice cream, which is in 4 percent of carts: about 2,400 of the strip's 60,000 views a day, if views follow carts, and 100 carts cannot say how shoppers will click it there. It goes on the watch list: in two zones, a random half of shoppers see it beside ice cream, and it takes the slot only if their ice-cream carts buy sauce more often than the other half's, by a gap set before the trial, with margin per shopper as the guardrail, a number that must not fall while the trial runs.</a:t>
             </a:r>
           </a:p>
         </p:txBody>
@@ -6817,7 +6851,7 @@
                 </a:solidFill>
                 <a:latin typeface="Calibri"/>
               </a:rPr>
-              <a:t>S64  ·  11 / 22</a:t>
+              <a:t>S64  ·  11 / 21</a:t>
             </a:r>
           </a:p>
         </p:txBody>
@@ -7023,7 +7057,7 @@
                 </a:solidFill>
                 <a:latin typeface="Georgia"/>
               </a:rPr>
-              <a:t>What does re-ranking recover in a month?</a:t>
+              <a:t>What does taking milk out recover in a month?</a:t>
             </a:r>
           </a:p>
         </p:txBody>
@@ -7058,7 +7092,7 @@
                 </a:solidFill>
                 <a:latin typeface="Calibri"/>
               </a:rPr>
-              <a:t>Milk holds half the slot impressions at 1.2 percent. Moving them to pairs that click at 6.4 recovers how much?</a:t>
+              <a:t>Milk holds half the slot impressions at 1.2 percent. Given to suggestions that click at 6.4, how much does a month recover?</a:t>
             </a:r>
           </a:p>
         </p:txBody>
@@ -7973,7 +8007,46 @@
       </p:sp>
       <p:sp>
         <p:nvSpPr>
-          <p:cNvPr id="33" name="Oval 32"/>
+          <p:cNvPr id="33" name="TextBox 32"/>
+          <p:cNvSpPr txBox="1"/>
+          <p:nvPr/>
+        </p:nvSpPr>
+        <p:spPr>
+          <a:xfrm>
+            <a:off x="530352" y="4104132"/>
+            <a:ext cx="11130991" cy="495807"/>
+          </a:xfrm>
+          <a:prstGeom prst="rect">
+            <a:avLst/>
+          </a:prstGeom>
+          <a:noFill/>
+        </p:spPr>
+        <p:txBody>
+          <a:bodyPr wrap="square" anchor="t" lIns="0" rIns="0" tIns="0" bIns="0">
+            <a:spAutoFit/>
+          </a:bodyPr>
+          <a:lstStyle/>
+          <a:p>
+            <a:pPr>
+              <a:spcAft>
+                <a:spcPts val="800"/>
+              </a:spcAft>
+            </a:pPr>
+            <a:r>
+              <a:rPr sz="1600" b="0" i="0">
+                <a:solidFill>
+                  <a:srgbClr val="1A1440"/>
+                </a:solidFill>
+                <a:latin typeface="Calibri"/>
+              </a:rPr>
+              <a:t>The inputs: 60,000 views a slot a day, 0.5 adds per click, Rs 9 of margin an add, 30 days.</a:t>
+            </a:r>
+          </a:p>
+        </p:txBody>
+      </p:sp>
+      <p:sp>
+        <p:nvSpPr>
+          <p:cNvPr id="34" name="Oval 33"/>
           <p:cNvSpPr/>
           <p:nvPr/>
         </p:nvSpPr>
@@ -8017,7 +8090,7 @@
       </p:sp>
       <p:sp>
         <p:nvSpPr>
-          <p:cNvPr id="34" name="TextBox 33"/>
+          <p:cNvPr id="35" name="TextBox 34"/>
           <p:cNvSpPr txBox="1"/>
           <p:nvPr/>
         </p:nvSpPr>
@@ -8052,7 +8125,7 @@
       </p:sp>
       <p:sp>
         <p:nvSpPr>
-          <p:cNvPr id="35" name="Oval 34"/>
+          <p:cNvPr id="36" name="Oval 35"/>
           <p:cNvSpPr/>
           <p:nvPr/>
         </p:nvSpPr>
@@ -8096,7 +8169,7 @@
       </p:sp>
       <p:sp>
         <p:nvSpPr>
-          <p:cNvPr id="36" name="TextBox 35"/>
+          <p:cNvPr id="37" name="TextBox 36"/>
           <p:cNvSpPr txBox="1"/>
           <p:nvPr/>
         </p:nvSpPr>
@@ -8131,7 +8204,7 @@
       </p:sp>
       <p:sp>
         <p:nvSpPr>
-          <p:cNvPr id="37" name="TextBox 36"/>
+          <p:cNvPr id="38" name="TextBox 37"/>
           <p:cNvSpPr txBox="1"/>
           <p:nvPr/>
         </p:nvSpPr>
@@ -8159,7 +8232,7 @@
                 </a:solidFill>
                 <a:latin typeface="Calibri"/>
               </a:rPr>
-              <a:t>S65  ·  12 / 22</a:t>
+              <a:t>S65  ·  12 / 21</a:t>
             </a:r>
           </a:p>
         </p:txBody>
@@ -8365,7 +8438,7 @@
                 </a:solidFill>
                 <a:latin typeface="Georgia"/>
               </a:rPr>
-              <a:t>Answer: c, about Rs 6.3 lakh a month</a:t>
+              <a:t>Answer: c, about Rs 6.3 lakh a month, gross</a:t>
             </a:r>
           </a:p>
         </p:txBody>
@@ -8400,7 +8473,7 @@
                 </a:solidFill>
                 <a:latin typeface="Calibri"/>
               </a:rPr>
-              <a:t>How do chapter 9's rupees price a slot, and what does a month recover?</a:t>
+              <a:t>How do chapter 9's rupees price a slot, and where does the month's money come from?</a:t>
             </a:r>
           </a:p>
         </p:txBody>
@@ -8421,8 +8494,8 @@
         </p:blipFill>
         <p:spPr>
           <a:xfrm>
-            <a:off x="1303292" y="1664208"/>
-            <a:ext cx="9585109" cy="3077464"/>
+            <a:off x="1679861" y="1664208"/>
+            <a:ext cx="8831971" cy="2835656"/>
           </a:xfrm>
           <a:prstGeom prst="rect">
             <a:avLst/>
@@ -8437,7 +8510,7 @@
         </p:nvSpPr>
         <p:spPr>
           <a:xfrm>
-            <a:off x="530352" y="4778248"/>
+            <a:off x="530352" y="4536440"/>
             <a:ext cx="11130991" cy="316992"/>
           </a:xfrm>
           <a:prstGeom prst="rect">
@@ -8472,8 +8545,8 @@
         </p:nvSpPr>
         <p:spPr>
           <a:xfrm>
-            <a:off x="530352" y="5104384"/>
-            <a:ext cx="11130991" cy="1095247"/>
+            <a:off x="530352" y="4862576"/>
+            <a:ext cx="11130991" cy="1337056"/>
           </a:xfrm>
           <a:prstGeom prst="rect">
             <a:avLst/>
@@ -8493,7 +8566,7 @@
                 </a:solidFill>
                 <a:latin typeface="Calibri"/>
               </a:rPr>
-              <a:t>The kirana's card at city scale: margin on the adds a slot makes, never its sales. A slot's day is 60,000 views (strip_log) x click-through x 0.5 adds per click (strip_log, range 0.4 to 0.6) x Rs 9 margin an add (the average cart_items line, range Rs 7 to Rs 11), with the promoted pairs assumed to click at the 6.4 percent the rest drew. Milk holds 1.5 slots' worth: Rs 4.2 lakh x 1.5 = Rs 6.3 lakh a month, Rs 3.9 lakh at 0.4 x Rs 7 and Rs 9.3 lakh at 0.6 x Rs 11.</a:t>
+              <a:t>A slot's day is 60,000 views (strip_log) x click-through x 0.5 adds per click (strip_log, range 0.4 to 0.6) x Rs 9 margin an add (the average cart_items line, range Rs 7 to Rs 11). Milk holds 1.5 slots' worth: Rs 4.2 lakh x 1.5 = Rs 6.3 lakh a month, Rs 3.9 lakh to Rs 9.3 lakh across the ranges, before the adds that would have come anyway. The 6.4 percent is what any suggestion but milk drew: in slot 1, cold drink beside chips (lift 3.39) drew 8.2 percent and bread beside eggs (0.99) 8.4, so the money comes from taking milk out.</a:t>
             </a:r>
           </a:p>
         </p:txBody>
@@ -8686,7 +8759,7 @@
                 </a:solidFill>
                 <a:latin typeface="Calibri"/>
               </a:rPr>
-              <a:t>S66  ·  13 / 22</a:t>
+              <a:t>S66  ·  13 / 21</a:t>
             </a:r>
           </a:p>
         </p:txBody>
@@ -8892,7 +8965,7 @@
                 </a:solidFill>
                 <a:latin typeface="Georgia"/>
               </a:rPr>
-              <a:t>The trap: Rs 80,197 of sales is not the gain</a:t>
+              <a:t>The trap: about Rs 80,200 of sales is not the gain</a:t>
             </a:r>
           </a:p>
         </p:txBody>
@@ -8927,7 +9000,7 @@
                 </a:solidFill>
                 <a:latin typeface="Calibri"/>
               </a:rPr>
-              <a:t>Which number would overstate the slot four times over?</a:t>
+              <a:t>Which number would overstate the slot four and a half times over?</a:t>
             </a:r>
           </a:p>
         </p:txBody>
@@ -8966,7 +9039,7 @@
                 </a:solidFill>
                 <a:latin typeface="Calibri"/>
               </a:rPr>
-              <a:t>The plausible wrong answer books sales, the kirana's Rs 5,040 at city scale: a slot at 6.4 percent makes 1,920 adds a day, each selling for about Rs 41.77, so Rs 80,197 a day of "strip revenue". The growth lead keeps the margin, Rs 17,280. If the strip ever adds a bundle discount, the discount is margin handed back, on adds that might have happened anyway, as on the kirana's 150 bills that held both before the card. Swiggy's shareholder letter for April to June 2025 describes Maxxsaver, a discount unlocked once a basket passes a set size, as margin returned to the user: the cost line a rupee case must carry (checked 12 October 2026).</a:t>
+              <a:t>The plausible wrong answer books sales, the kirana's Rs 5,040 at city scale: a slot at 6.4 percent makes 1,920 adds a day, each selling for Rs 41.77 on average, so about Rs 80,200 a day of "strip revenue". The growth lead keeps the margin, Rs 17,280. If the strip ever adds a bundle discount, the discount is margin handed back, on adds that might have happened anyway, as on the kirana's 150 bills that held both before the card. Swiggy's shareholder letter for April to June 2025 describes Maxxsaver, a discount unlocked once a basket passes a set size, as margin returned to the user: the cost line a rupee case must carry (checked 12 October 2026).</a:t>
             </a:r>
           </a:p>
         </p:txBody>
@@ -9159,7 +9232,7 @@
                 </a:solidFill>
                 <a:latin typeface="Calibri"/>
               </a:rPr>
-              <a:t>S67  ·  14 / 22</a:t>
+              <a:t>S67  ·  14 / 21</a:t>
             </a:r>
           </a:p>
         </p:txBody>
@@ -9586,7 +9659,7 @@
                           </a:solidFill>
                           <a:latin typeface="Calibri"/>
                         </a:rPr>
-                        <a:t>A holdout: a share of shoppers kept on the old strip, compared with the rest</a:t>
+                        <a:t>A holdout: a random share of shoppers who see no strip, compared with the rest</a:t>
                       </a:r>
                     </a:p>
                   </a:txBody>
@@ -10151,7 +10224,7 @@
                 </a:solidFill>
                 <a:latin typeface="Calibri"/>
               </a:rPr>
-              <a:t>D68  ·  15 / 22</a:t>
+              <a:t>D68  ·  15 / 21</a:t>
             </a:r>
           </a:p>
         </p:txBody>
@@ -10468,8 +10541,8 @@
         </p:blipFill>
         <p:spPr>
           <a:xfrm>
-            <a:off x="1551914" y="1664208"/>
-            <a:ext cx="9087866" cy="2662936"/>
+            <a:off x="1257191" y="1664208"/>
+            <a:ext cx="9677312" cy="2835656"/>
           </a:xfrm>
           <a:prstGeom prst="rect">
             <a:avLst/>
@@ -10484,7 +10557,7 @@
         </p:nvSpPr>
         <p:spPr>
           <a:xfrm>
-            <a:off x="530352" y="4363720"/>
+            <a:off x="530352" y="4536440"/>
             <a:ext cx="11130991" cy="316992"/>
           </a:xfrm>
           <a:prstGeom prst="rect">
@@ -10519,28 +10592,28 @@
         </p:nvSpPr>
         <p:spPr>
           <a:xfrm>
-            <a:off x="530352" y="4689856"/>
-            <a:ext cx="11130991" cy="1509775"/>
-          </a:xfrm>
-          <a:prstGeom prst="rect">
-            <a:avLst/>
-          </a:prstGeom>
-          <a:noFill/>
-        </p:spPr>
-        <p:txBody>
-          <a:bodyPr wrap="square" anchor="t" lIns="0" rIns="0" tIns="0" bIns="0">
-            <a:spAutoFit/>
-          </a:bodyPr>
-          <a:lstStyle/>
-          <a:p>
-            <a:r>
-              <a:rPr sz="1600" b="0" i="0">
+            <a:off x="530352" y="4862576"/>
+            <a:ext cx="11130991" cy="1337056"/>
+          </a:xfrm>
+          <a:prstGeom prst="rect">
+            <a:avLst/>
+          </a:prstGeom>
+          <a:noFill/>
+        </p:spPr>
+        <p:txBody>
+          <a:bodyPr wrap="square" anchor="t" lIns="0" rIns="0" tIns="0" bIns="0">
+            <a:spAutoFit/>
+          </a:bodyPr>
+          <a:lstStyle/>
+          <a:p>
+            <a:r>
+              <a:rPr sz="1400" b="0" i="0">
                 <a:solidFill>
                   <a:srgbClr val="1A1440"/>
                 </a:solidFill>
                 <a:latin typeface="Calibri"/>
               </a:rPr>
-              <a:t>The top tenth of customers place 38 percent of the carts and 73 percent of the carts holding both chips and a cold drink. Counting every customer once gives each cart a weight of one over its customer's number of carts, so a shopper with 4 carts counts each as 0.25. Counted that way, the pair's lift falls from 3.39 to 2.56 and still beats chance; bread and milk stays at 1.04. The pair keeps its slot, and the growth lead says the smaller number.</a:t>
+              <a:t>The top tenth of customers place 38 percent of the carts and 73 percent of the carts holding both chips and a cold drink. Counting every customer once gives each cart a weight of one over its customer's number of carts, so a shopper with 4 carts counts each as 0.25; lift is then the weighted share of carts holding both over the weighted shares holding each, multiplied. Counted that way, the pair's lift falls from 3.39 to 2.56 and still beats chance; bread and milk stays at 1.04. The pair keeps its slot, and the growth lead says the smaller number.</a:t>
             </a:r>
           </a:p>
         </p:txBody>
@@ -10733,7 +10806,7 @@
                 </a:solidFill>
                 <a:latin typeface="Calibri"/>
               </a:rPr>
-              <a:t>D69  ·  16 / 22</a:t>
+              <a:t>D69  ·  16 / 21</a:t>
             </a:r>
           </a:p>
         </p:txBody>
@@ -10939,7 +11012,7 @@
                 </a:solidFill>
                 <a:latin typeface="Georgia"/>
               </a:rPr>
-              <a:t>Ship one strip in 15 minutes, priced and defended</a:t>
+              <a:t>Ship one strip, priced and defended</a:t>
             </a:r>
           </a:p>
         </p:txBody>
@@ -12120,7 +12193,7 @@
                 </a:solidFill>
                 <a:latin typeface="Calibri"/>
               </a:rPr>
-              <a:t>S70  ·  17 / 22</a:t>
+              <a:t>S70  ·  17 / 21</a:t>
             </a:r>
           </a:p>
         </p:txBody>
@@ -12375,7 +12448,7 @@
         <p:spPr>
           <a:xfrm>
             <a:off x="530352" y="1956816"/>
-            <a:ext cx="2645587" cy="2385568"/>
+            <a:ext cx="2645587" cy="2534412"/>
           </a:xfrm>
           <a:prstGeom prst="roundRect">
             <a:avLst>
@@ -12602,7 +12675,7 @@
         <p:spPr>
           <a:xfrm>
             <a:off x="3358819" y="1956816"/>
-            <a:ext cx="2645587" cy="2385568"/>
+            <a:ext cx="2645587" cy="2534412"/>
           </a:xfrm>
           <a:prstGeom prst="roundRect">
             <a:avLst>
@@ -12815,7 +12888,7 @@
                 </a:solidFill>
                 <a:latin typeface="Calibri"/>
               </a:rPr>
-              <a:t>Milk slots click at 1.2 percent against 6.4; lift with every common item sits near one.</a:t>
+              <a:t>Milk slots click at 1.2 percent against 6.4, and no item's lift with milk can pass 1.41.</a:t>
             </a:r>
           </a:p>
         </p:txBody>
@@ -12829,7 +12902,7 @@
         <p:spPr>
           <a:xfrm>
             <a:off x="6187287" y="1956816"/>
-            <a:ext cx="2645587" cy="2385568"/>
+            <a:ext cx="2645587" cy="2534412"/>
           </a:xfrm>
           <a:prstGeom prst="roundRect">
             <a:avLst>
@@ -13056,7 +13129,7 @@
         <p:spPr>
           <a:xfrm>
             <a:off x="9015755" y="1956816"/>
-            <a:ext cx="2645587" cy="2385568"/>
+            <a:ext cx="2645587" cy="2534412"/>
           </a:xfrm>
           <a:prstGeom prst="roundRect">
             <a:avLst>
@@ -13219,7 +13292,7 @@
         <p:spPr>
           <a:xfrm>
             <a:off x="9216923" y="2962656"/>
-            <a:ext cx="2243251" cy="498856"/>
+            <a:ext cx="2243251" cy="267716"/>
           </a:xfrm>
           <a:prstGeom prst="rect">
             <a:avLst/>
@@ -13240,7 +13313,7 @@
                 </a:solidFill>
                 <a:latin typeface="Calibri"/>
               </a:rPr>
-              <a:t>If milk clicked like the rest</a:t>
+              <a:t>If milk earned its slot</a:t>
             </a:r>
           </a:p>
         </p:txBody>
@@ -13253,8 +13326,8 @@
         </p:nvSpPr>
         <p:spPr>
           <a:xfrm>
-            <a:off x="9216923" y="3534664"/>
-            <a:ext cx="2243251" cy="581406"/>
+            <a:off x="9216923" y="3303524"/>
+            <a:ext cx="2243251" cy="944626"/>
           </a:xfrm>
           <a:prstGeom prst="rect">
             <a:avLst/>
@@ -13275,7 +13348,7 @@
                 </a:solidFill>
                 <a:latin typeface="Calibri"/>
               </a:rPr>
-              <a:t>A two-zone test where milk slots matched 6.4 percent would put milk back.</a:t>
+              <a:t>A test with shoppers randomised, in which a milk slot earned as much margin per shopper as the suggestion it replaced, would put milk back.</a:t>
             </a:r>
           </a:p>
         </p:txBody>
@@ -13468,7 +13541,7 @@
                 </a:solidFill>
                 <a:latin typeface="Calibri"/>
               </a:rPr>
-              <a:t>S71  ·  18 / 22</a:t>
+              <a:t>S71  ·  18 / 21</a:t>
             </a:r>
           </a:p>
         </p:txBody>
@@ -13723,7 +13796,7 @@
         <p:spPr>
           <a:xfrm>
             <a:off x="530352" y="1956816"/>
-            <a:ext cx="3588410" cy="2765552"/>
+            <a:ext cx="3588410" cy="2955544"/>
           </a:xfrm>
           <a:prstGeom prst="roundRect">
             <a:avLst>
@@ -13950,7 +14023,7 @@
         <p:spPr>
           <a:xfrm>
             <a:off x="4301642" y="1956816"/>
-            <a:ext cx="3588410" cy="2765552"/>
+            <a:ext cx="3588410" cy="2955544"/>
           </a:xfrm>
           <a:prstGeom prst="roundRect">
             <a:avLst>
@@ -14148,7 +14221,7 @@
         <p:spPr>
           <a:xfrm>
             <a:off x="4502810" y="3534664"/>
-            <a:ext cx="3186074" cy="944626"/>
+            <a:ext cx="3186074" cy="1126236"/>
           </a:xfrm>
           <a:prstGeom prst="rect">
             <a:avLst/>
@@ -14169,7 +14242,7 @@
                 </a:solidFill>
                 <a:latin typeface="Calibri"/>
               </a:rPr>
-              <a:t>"Bread to milk reads confidence 0.74, but milk is in 71 percent of carts anyway, so lift is 1.04. Chips and cold drink read 0.42 and lift 3.39. I rank by lift above a support floor."</a:t>
+              <a:t>"Bread to milk reads confidence 0.74, but milk is in 71 percent of carts anyway, so lift is 1.04. Chips and cold drink read 0.42 and lift 3.39. I rank by lift above a floor of 1 percent of September's carts, 400 carts, and slot a pair only at 1.5 or more."</a:t>
             </a:r>
           </a:p>
         </p:txBody>
@@ -14183,7 +14256,7 @@
         <p:spPr>
           <a:xfrm>
             <a:off x="8072932" y="1956816"/>
-            <a:ext cx="3588410" cy="2765552"/>
+            <a:ext cx="3588410" cy="2955544"/>
           </a:xfrm>
           <a:prstGeom prst="roundRect">
             <a:avLst>
@@ -14589,7 +14662,7 @@
                 </a:solidFill>
                 <a:latin typeface="Calibri"/>
               </a:rPr>
-              <a:t>S72  ·  19 / 22</a:t>
+              <a:t>S72  ·  19 / 21</a:t>
             </a:r>
           </a:p>
         </p:txBody>
@@ -16153,7 +16226,7 @@
                 </a:solidFill>
                 <a:latin typeface="Calibri"/>
               </a:rPr>
-              <a:t>S56  ·  2 / 22</a:t>
+              <a:t>S56  ·  2 / 21</a:t>
             </a:r>
           </a:p>
         </p:txBody>
@@ -16394,7 +16467,7 @@
                 </a:solidFill>
                 <a:latin typeface="Calibri"/>
               </a:rPr>
-              <a:t>What does the IITGN faculty session (tentative) pick up from the morning?</a:t>
+              <a:t>What does the IITGN faculty session (tentative) pick up from today?</a:t>
             </a:r>
           </a:p>
         </p:txBody>
@@ -16706,7 +16779,7 @@
                 </a:solidFill>
                 <a:latin typeface="Calibri"/>
               </a:rPr>
-              <a:t>S73  ·  20 / 22</a:t>
+              <a:t>S73  ·  20 / 21</a:t>
             </a:r>
           </a:p>
         </p:txBody>
@@ -16912,7 +16985,7 @@
                 </a:solidFill>
                 <a:latin typeface="Georgia"/>
               </a:rPr>
-              <a:t>Eight quick questions, one with a minute to compute</a:t>
+              <a:t>The sentence for Friday, and Thursday's question</a:t>
             </a:r>
           </a:p>
         </p:txBody>
@@ -16947,1296 +17020,6 @@
                 </a:solidFill>
                 <a:latin typeface="Calibri"/>
               </a:rPr>
-              <a:t>Can the room make the day's calls at speed?</a:t>
-            </a:r>
-          </a:p>
-        </p:txBody>
-      </p:sp>
-      <p:sp>
-        <p:nvSpPr>
-          <p:cNvPr id="9" name="Rectangle 8"/>
-          <p:cNvSpPr/>
-          <p:nvPr/>
-        </p:nvSpPr>
-        <p:spPr>
-          <a:xfrm>
-            <a:off x="1853145" y="2523744"/>
-            <a:ext cx="8485403" cy="18288"/>
-          </a:xfrm>
-          <a:prstGeom prst="rect">
-            <a:avLst/>
-          </a:prstGeom>
-          <a:solidFill>
-            <a:srgbClr val="CFC9EE"/>
-          </a:solidFill>
-          <a:ln>
-            <a:noFill/>
-          </a:ln>
-          <a:effectLst/>
-        </p:spPr>
-        <p:style>
-          <a:lnRef idx="1">
-            <a:schemeClr val="accent1"/>
-          </a:lnRef>
-          <a:fillRef idx="3">
-            <a:schemeClr val="accent1"/>
-          </a:fillRef>
-          <a:effectRef idx="2">
-            <a:schemeClr val="accent1"/>
-          </a:effectRef>
-          <a:fontRef idx="minor">
-            <a:schemeClr val="lt1"/>
-          </a:fontRef>
-        </p:style>
-        <p:txBody>
-          <a:bodyPr rtlCol="0" anchor="ctr" wrap="square"/>
-          <a:lstStyle/>
-          <a:p>
-            <a:pPr algn="ctr"/>
-          </a:p>
-        </p:txBody>
-      </p:sp>
-      <p:sp>
-        <p:nvSpPr>
-          <p:cNvPr id="10" name="TextBox 9"/>
-          <p:cNvSpPr txBox="1"/>
-          <p:nvPr/>
-        </p:nvSpPr>
-        <p:spPr>
-          <a:xfrm>
-            <a:off x="530352" y="1956816"/>
-            <a:ext cx="2645587" cy="168656"/>
-          </a:xfrm>
-          <a:prstGeom prst="rect">
-            <a:avLst/>
-          </a:prstGeom>
-          <a:noFill/>
-        </p:spPr>
-        <p:txBody>
-          <a:bodyPr wrap="square" anchor="t" lIns="0" rIns="0" tIns="0" bIns="0">
-            <a:spAutoFit/>
-          </a:bodyPr>
-          <a:lstStyle/>
-          <a:p>
-            <a:pPr algn="ctr"/>
-            <a:r>
-              <a:rPr sz="800" b="1" i="0" spc="250">
-                <a:solidFill>
-                  <a:srgbClr val="5B3FD6"/>
-                </a:solidFill>
-                <a:latin typeface="Calibri"/>
-              </a:rPr>
-              <a:t>ITEMS 1 AND 2</a:t>
-            </a:r>
-          </a:p>
-        </p:txBody>
-      </p:sp>
-      <p:sp>
-        <p:nvSpPr>
-          <p:cNvPr id="11" name="Oval 10"/>
-          <p:cNvSpPr/>
-          <p:nvPr/>
-        </p:nvSpPr>
-        <p:spPr>
-          <a:xfrm>
-            <a:off x="1752561" y="2432304"/>
-            <a:ext cx="201168" cy="201168"/>
-          </a:xfrm>
-          <a:prstGeom prst="ellipse">
-            <a:avLst/>
-          </a:prstGeom>
-          <a:solidFill>
-            <a:srgbClr val="5B3FD6"/>
-          </a:solidFill>
-          <a:ln>
-            <a:noFill/>
-          </a:ln>
-          <a:effectLst/>
-        </p:spPr>
-        <p:style>
-          <a:lnRef idx="1">
-            <a:schemeClr val="accent1"/>
-          </a:lnRef>
-          <a:fillRef idx="3">
-            <a:schemeClr val="accent1"/>
-          </a:fillRef>
-          <a:effectRef idx="2">
-            <a:schemeClr val="accent1"/>
-          </a:effectRef>
-          <a:fontRef idx="minor">
-            <a:schemeClr val="lt1"/>
-          </a:fontRef>
-        </p:style>
-        <p:txBody>
-          <a:bodyPr rtlCol="0" anchor="ctr" wrap="square"/>
-          <a:lstStyle/>
-          <a:p>
-            <a:pPr algn="ctr"/>
-          </a:p>
-        </p:txBody>
-      </p:sp>
-      <p:sp>
-        <p:nvSpPr>
-          <p:cNvPr id="12" name="Rounded Rectangle 11"/>
-          <p:cNvSpPr/>
-          <p:nvPr/>
-        </p:nvSpPr>
-        <p:spPr>
-          <a:xfrm>
-            <a:off x="530352" y="2843784"/>
-            <a:ext cx="2645587" cy="1076960"/>
-          </a:xfrm>
-          <a:prstGeom prst="roundRect">
-            <a:avLst>
-              <a:gd name="adj" fmla="val 5000"/>
-            </a:avLst>
-          </a:prstGeom>
-          <a:solidFill>
-            <a:srgbClr val="FFFFFF"/>
-          </a:solidFill>
-          <a:ln w="9525">
-            <a:solidFill>
-              <a:srgbClr val="E4E1F1"/>
-            </a:solidFill>
-          </a:ln>
-          <a:effectLst>
-            <a:outerShdw blurRad="76200" dist="19050" dir="5400000" algn="bl" rotWithShape="0">
-              <a:srgbClr val="1A0F5C">
-                <a:alpha val="12000"/>
-              </a:srgbClr>
-            </a:outerShdw>
-          </a:effectLst>
-        </p:spPr>
-        <p:style>
-          <a:lnRef idx="1">
-            <a:schemeClr val="accent1"/>
-          </a:lnRef>
-          <a:fillRef idx="3">
-            <a:schemeClr val="accent1"/>
-          </a:fillRef>
-          <a:effectRef idx="2">
-            <a:schemeClr val="accent1"/>
-          </a:effectRef>
-          <a:fontRef idx="minor">
-            <a:schemeClr val="lt1"/>
-          </a:fontRef>
-        </p:style>
-        <p:txBody>
-          <a:bodyPr rtlCol="0" anchor="ctr" wrap="square"/>
-          <a:lstStyle/>
-          <a:p>
-            <a:pPr algn="ctr"/>
-          </a:p>
-        </p:txBody>
-      </p:sp>
-      <p:sp>
-        <p:nvSpPr>
-          <p:cNvPr id="13" name="TextBox 12"/>
-          <p:cNvSpPr txBox="1"/>
-          <p:nvPr/>
-        </p:nvSpPr>
-        <p:spPr>
-          <a:xfrm>
-            <a:off x="694944" y="2990088"/>
-            <a:ext cx="2316403" cy="251205"/>
-          </a:xfrm>
-          <a:prstGeom prst="rect">
-            <a:avLst/>
-          </a:prstGeom>
-          <a:noFill/>
-        </p:spPr>
-        <p:txBody>
-          <a:bodyPr wrap="square" anchor="t" lIns="0" rIns="0" tIns="0" bIns="0">
-            <a:spAutoFit/>
-          </a:bodyPr>
-          <a:lstStyle/>
-          <a:p>
-            <a:pPr algn="l"/>
-            <a:r>
-              <a:rPr sz="1300" b="1" i="0">
-                <a:solidFill>
-                  <a:srgbClr val="1A0F5C"/>
-                </a:solidFill>
-                <a:latin typeface="Calibri"/>
-              </a:rPr>
-              <a:t>The three counts</a:t>
-            </a:r>
-          </a:p>
-        </p:txBody>
-      </p:sp>
-      <p:sp>
-        <p:nvSpPr>
-          <p:cNvPr id="14" name="TextBox 13"/>
-          <p:cNvSpPr txBox="1"/>
-          <p:nvPr/>
-        </p:nvSpPr>
-        <p:spPr>
-          <a:xfrm>
-            <a:off x="694944" y="3277870"/>
-            <a:ext cx="2316403" cy="366776"/>
-          </a:xfrm>
-          <a:prstGeom prst="rect">
-            <a:avLst/>
-          </a:prstGeom>
-          <a:noFill/>
-        </p:spPr>
-        <p:txBody>
-          <a:bodyPr wrap="square" anchor="t" lIns="0" rIns="0" tIns="0" bIns="0">
-            <a:spAutoFit/>
-          </a:bodyPr>
-          <a:lstStyle/>
-          <a:p>
-            <a:pPr algn="l"/>
-            <a:r>
-              <a:rPr sz="1000" b="0" i="0">
-                <a:solidFill>
-                  <a:srgbClr val="6B6690"/>
-                </a:solidFill>
-                <a:latin typeface="Calibri"/>
-              </a:rPr>
-              <a:t>Match each count to its question; compute lift from three counts.</a:t>
-            </a:r>
-          </a:p>
-        </p:txBody>
-      </p:sp>
-      <p:sp>
-        <p:nvSpPr>
-          <p:cNvPr id="15" name="TextBox 14"/>
-          <p:cNvSpPr txBox="1"/>
-          <p:nvPr/>
-        </p:nvSpPr>
-        <p:spPr>
-          <a:xfrm>
-            <a:off x="3358819" y="1956816"/>
-            <a:ext cx="2645587" cy="168656"/>
-          </a:xfrm>
-          <a:prstGeom prst="rect">
-            <a:avLst/>
-          </a:prstGeom>
-          <a:noFill/>
-        </p:spPr>
-        <p:txBody>
-          <a:bodyPr wrap="square" anchor="t" lIns="0" rIns="0" tIns="0" bIns="0">
-            <a:spAutoFit/>
-          </a:bodyPr>
-          <a:lstStyle/>
-          <a:p>
-            <a:pPr algn="ctr"/>
-            <a:r>
-              <a:rPr sz="800" b="1" i="0" spc="250">
-                <a:solidFill>
-                  <a:srgbClr val="5B3FD6"/>
-                </a:solidFill>
-                <a:latin typeface="Calibri"/>
-              </a:rPr>
-              <a:t>ITEMS 3 AND 7</a:t>
-            </a:r>
-          </a:p>
-        </p:txBody>
-      </p:sp>
-      <p:sp>
-        <p:nvSpPr>
-          <p:cNvPr id="16" name="Oval 15"/>
-          <p:cNvSpPr/>
-          <p:nvPr/>
-        </p:nvSpPr>
-        <p:spPr>
-          <a:xfrm>
-            <a:off x="4581029" y="2432304"/>
-            <a:ext cx="201168" cy="201168"/>
-          </a:xfrm>
-          <a:prstGeom prst="ellipse">
-            <a:avLst/>
-          </a:prstGeom>
-          <a:solidFill>
-            <a:srgbClr val="5B3FD6"/>
-          </a:solidFill>
-          <a:ln>
-            <a:noFill/>
-          </a:ln>
-          <a:effectLst/>
-        </p:spPr>
-        <p:style>
-          <a:lnRef idx="1">
-            <a:schemeClr val="accent1"/>
-          </a:lnRef>
-          <a:fillRef idx="3">
-            <a:schemeClr val="accent1"/>
-          </a:fillRef>
-          <a:effectRef idx="2">
-            <a:schemeClr val="accent1"/>
-          </a:effectRef>
-          <a:fontRef idx="minor">
-            <a:schemeClr val="lt1"/>
-          </a:fontRef>
-        </p:style>
-        <p:txBody>
-          <a:bodyPr rtlCol="0" anchor="ctr" wrap="square"/>
-          <a:lstStyle/>
-          <a:p>
-            <a:pPr algn="ctr"/>
-          </a:p>
-        </p:txBody>
-      </p:sp>
-      <p:sp>
-        <p:nvSpPr>
-          <p:cNvPr id="17" name="Rounded Rectangle 16"/>
-          <p:cNvSpPr/>
-          <p:nvPr/>
-        </p:nvSpPr>
-        <p:spPr>
-          <a:xfrm>
-            <a:off x="3358819" y="2843784"/>
-            <a:ext cx="2645587" cy="1076960"/>
-          </a:xfrm>
-          <a:prstGeom prst="roundRect">
-            <a:avLst>
-              <a:gd name="adj" fmla="val 5000"/>
-            </a:avLst>
-          </a:prstGeom>
-          <a:solidFill>
-            <a:srgbClr val="FFFFFF"/>
-          </a:solidFill>
-          <a:ln w="9525">
-            <a:solidFill>
-              <a:srgbClr val="E4E1F1"/>
-            </a:solidFill>
-          </a:ln>
-          <a:effectLst>
-            <a:outerShdw blurRad="76200" dist="19050" dir="5400000" algn="bl" rotWithShape="0">
-              <a:srgbClr val="1A0F5C">
-                <a:alpha val="12000"/>
-              </a:srgbClr>
-            </a:outerShdw>
-          </a:effectLst>
-        </p:spPr>
-        <p:style>
-          <a:lnRef idx="1">
-            <a:schemeClr val="accent1"/>
-          </a:lnRef>
-          <a:fillRef idx="3">
-            <a:schemeClr val="accent1"/>
-          </a:fillRef>
-          <a:effectRef idx="2">
-            <a:schemeClr val="accent1"/>
-          </a:effectRef>
-          <a:fontRef idx="minor">
-            <a:schemeClr val="lt1"/>
-          </a:fontRef>
-        </p:style>
-        <p:txBody>
-          <a:bodyPr rtlCol="0" anchor="ctr" wrap="square"/>
-          <a:lstStyle/>
-          <a:p>
-            <a:pPr algn="ctr"/>
-          </a:p>
-        </p:txBody>
-      </p:sp>
-      <p:sp>
-        <p:nvSpPr>
-          <p:cNvPr id="18" name="TextBox 17"/>
-          <p:cNvSpPr txBox="1"/>
-          <p:nvPr/>
-        </p:nvSpPr>
-        <p:spPr>
-          <a:xfrm>
-            <a:off x="3523411" y="2990088"/>
-            <a:ext cx="2316403" cy="251205"/>
-          </a:xfrm>
-          <a:prstGeom prst="rect">
-            <a:avLst/>
-          </a:prstGeom>
-          <a:noFill/>
-        </p:spPr>
-        <p:txBody>
-          <a:bodyPr wrap="square" anchor="t" lIns="0" rIns="0" tIns="0" bIns="0">
-            <a:spAutoFit/>
-          </a:bodyPr>
-          <a:lstStyle/>
-          <a:p>
-            <a:pPr algn="l"/>
-            <a:r>
-              <a:rPr sz="1300" b="1" i="0">
-                <a:solidFill>
-                  <a:srgbClr val="1A0F5C"/>
-                </a:solidFill>
-                <a:latin typeface="Calibri"/>
-              </a:rPr>
-              <a:t>Lift near one</a:t>
-            </a:r>
-          </a:p>
-        </p:txBody>
-      </p:sp>
-      <p:sp>
-        <p:nvSpPr>
-          <p:cNvPr id="19" name="TextBox 18"/>
-          <p:cNvSpPr txBox="1"/>
-          <p:nvPr/>
-        </p:nvSpPr>
-        <p:spPr>
-          <a:xfrm>
-            <a:off x="3523411" y="3277870"/>
-            <a:ext cx="2316403" cy="366776"/>
-          </a:xfrm>
-          <a:prstGeom prst="rect">
-            <a:avLst/>
-          </a:prstGeom>
-          <a:noFill/>
-        </p:spPr>
-        <p:txBody>
-          <a:bodyPr wrap="square" anchor="t" lIns="0" rIns="0" tIns="0" bIns="0">
-            <a:spAutoFit/>
-          </a:bodyPr>
-          <a:lstStyle/>
-          <a:p>
-            <a:pPr algn="l"/>
-            <a:r>
-              <a:rPr sz="1000" b="0" i="0">
-                <a:solidFill>
-                  <a:srgbClr val="6B6690"/>
-                </a:solidFill>
-                <a:latin typeface="Calibri"/>
-              </a:rPr>
-              <a:t>A popular partner read right; the strip's blended click-through.</a:t>
-            </a:r>
-          </a:p>
-        </p:txBody>
-      </p:sp>
-      <p:sp>
-        <p:nvSpPr>
-          <p:cNvPr id="20" name="TextBox 19"/>
-          <p:cNvSpPr txBox="1"/>
-          <p:nvPr/>
-        </p:nvSpPr>
-        <p:spPr>
-          <a:xfrm>
-            <a:off x="6187287" y="1956816"/>
-            <a:ext cx="2645587" cy="168656"/>
-          </a:xfrm>
-          <a:prstGeom prst="rect">
-            <a:avLst/>
-          </a:prstGeom>
-          <a:noFill/>
-        </p:spPr>
-        <p:txBody>
-          <a:bodyPr wrap="square" anchor="t" lIns="0" rIns="0" tIns="0" bIns="0">
-            <a:spAutoFit/>
-          </a:bodyPr>
-          <a:lstStyle/>
-          <a:p>
-            <a:pPr algn="ctr"/>
-            <a:r>
-              <a:rPr sz="800" b="1" i="0" spc="250">
-                <a:solidFill>
-                  <a:srgbClr val="5B3FD6"/>
-                </a:solidFill>
-                <a:latin typeface="Calibri"/>
-              </a:rPr>
-              <a:t>ITEMS 4, 5 AND 8</a:t>
-            </a:r>
-          </a:p>
-        </p:txBody>
-      </p:sp>
-      <p:sp>
-        <p:nvSpPr>
-          <p:cNvPr id="21" name="Oval 20"/>
-          <p:cNvSpPr/>
-          <p:nvPr/>
-        </p:nvSpPr>
-        <p:spPr>
-          <a:xfrm>
-            <a:off x="7409497" y="2432304"/>
-            <a:ext cx="201168" cy="201168"/>
-          </a:xfrm>
-          <a:prstGeom prst="ellipse">
-            <a:avLst/>
-          </a:prstGeom>
-          <a:solidFill>
-            <a:srgbClr val="5B3FD6"/>
-          </a:solidFill>
-          <a:ln>
-            <a:noFill/>
-          </a:ln>
-          <a:effectLst/>
-        </p:spPr>
-        <p:style>
-          <a:lnRef idx="1">
-            <a:schemeClr val="accent1"/>
-          </a:lnRef>
-          <a:fillRef idx="3">
-            <a:schemeClr val="accent1"/>
-          </a:fillRef>
-          <a:effectRef idx="2">
-            <a:schemeClr val="accent1"/>
-          </a:effectRef>
-          <a:fontRef idx="minor">
-            <a:schemeClr val="lt1"/>
-          </a:fontRef>
-        </p:style>
-        <p:txBody>
-          <a:bodyPr rtlCol="0" anchor="ctr" wrap="square"/>
-          <a:lstStyle/>
-          <a:p>
-            <a:pPr algn="ctr"/>
-          </a:p>
-        </p:txBody>
-      </p:sp>
-      <p:sp>
-        <p:nvSpPr>
-          <p:cNvPr id="22" name="Rounded Rectangle 21"/>
-          <p:cNvSpPr/>
-          <p:nvPr/>
-        </p:nvSpPr>
-        <p:spPr>
-          <a:xfrm>
-            <a:off x="6187287" y="2843784"/>
-            <a:ext cx="2645587" cy="1076960"/>
-          </a:xfrm>
-          <a:prstGeom prst="roundRect">
-            <a:avLst>
-              <a:gd name="adj" fmla="val 5000"/>
-            </a:avLst>
-          </a:prstGeom>
-          <a:solidFill>
-            <a:srgbClr val="FFFFFF"/>
-          </a:solidFill>
-          <a:ln w="9525">
-            <a:solidFill>
-              <a:srgbClr val="E4E1F1"/>
-            </a:solidFill>
-          </a:ln>
-          <a:effectLst>
-            <a:outerShdw blurRad="76200" dist="19050" dir="5400000" algn="bl" rotWithShape="0">
-              <a:srgbClr val="1A0F5C">
-                <a:alpha val="12000"/>
-              </a:srgbClr>
-            </a:outerShdw>
-          </a:effectLst>
-        </p:spPr>
-        <p:style>
-          <a:lnRef idx="1">
-            <a:schemeClr val="accent1"/>
-          </a:lnRef>
-          <a:fillRef idx="3">
-            <a:schemeClr val="accent1"/>
-          </a:fillRef>
-          <a:effectRef idx="2">
-            <a:schemeClr val="accent1"/>
-          </a:effectRef>
-          <a:fontRef idx="minor">
-            <a:schemeClr val="lt1"/>
-          </a:fontRef>
-        </p:style>
-        <p:txBody>
-          <a:bodyPr rtlCol="0" anchor="ctr" wrap="square"/>
-          <a:lstStyle/>
-          <a:p>
-            <a:pPr algn="ctr"/>
-          </a:p>
-        </p:txBody>
-      </p:sp>
-      <p:sp>
-        <p:nvSpPr>
-          <p:cNvPr id="23" name="TextBox 22"/>
-          <p:cNvSpPr txBox="1"/>
-          <p:nvPr/>
-        </p:nvSpPr>
-        <p:spPr>
-          <a:xfrm>
-            <a:off x="6351879" y="2990088"/>
-            <a:ext cx="2316403" cy="465836"/>
-          </a:xfrm>
-          <a:prstGeom prst="rect">
-            <a:avLst/>
-          </a:prstGeom>
-          <a:noFill/>
-        </p:spPr>
-        <p:txBody>
-          <a:bodyPr wrap="square" anchor="t" lIns="0" rIns="0" tIns="0" bIns="0">
-            <a:spAutoFit/>
-          </a:bodyPr>
-          <a:lstStyle/>
-          <a:p>
-            <a:pPr algn="l"/>
-            <a:r>
-              <a:rPr sz="1300" b="1" i="0">
-                <a:solidFill>
-                  <a:srgbClr val="1A0F5C"/>
-                </a:solidFill>
-                <a:latin typeface="Calibri"/>
-              </a:rPr>
-              <a:t>The floor, the rupee and the pairs</a:t>
-            </a:r>
-          </a:p>
-        </p:txBody>
-      </p:sp>
-      <p:sp>
-        <p:nvSpPr>
-          <p:cNvPr id="24" name="TextBox 23"/>
-          <p:cNvSpPr txBox="1"/>
-          <p:nvPr/>
-        </p:nvSpPr>
-        <p:spPr>
-          <a:xfrm>
-            <a:off x="6351879" y="3492500"/>
-            <a:ext cx="2316403" cy="366776"/>
-          </a:xfrm>
-          <a:prstGeom prst="rect">
-            <a:avLst/>
-          </a:prstGeom>
-          <a:noFill/>
-        </p:spPr>
-        <p:txBody>
-          <a:bodyPr wrap="square" anchor="t" lIns="0" rIns="0" tIns="0" bIns="0">
-            <a:spAutoFit/>
-          </a:bodyPr>
-          <a:lstStyle/>
-          <a:p>
-            <a:pPr algn="l"/>
-            <a:r>
-              <a:rPr sz="1000" b="0" i="0">
-                <a:solidFill>
-                  <a:srgbClr val="6B6690"/>
-                </a:solidFill>
-                <a:latin typeface="Calibri"/>
-              </a:rPr>
-              <a:t>A strong thin pair; what a promotion is worth; one cart's pairs.</a:t>
-            </a:r>
-          </a:p>
-        </p:txBody>
-      </p:sp>
-      <p:sp>
-        <p:nvSpPr>
-          <p:cNvPr id="25" name="TextBox 24"/>
-          <p:cNvSpPr txBox="1"/>
-          <p:nvPr/>
-        </p:nvSpPr>
-        <p:spPr>
-          <a:xfrm>
-            <a:off x="9015755" y="1956816"/>
-            <a:ext cx="2645587" cy="168656"/>
-          </a:xfrm>
-          <a:prstGeom prst="rect">
-            <a:avLst/>
-          </a:prstGeom>
-          <a:noFill/>
-        </p:spPr>
-        <p:txBody>
-          <a:bodyPr wrap="square" anchor="t" lIns="0" rIns="0" tIns="0" bIns="0">
-            <a:spAutoFit/>
-          </a:bodyPr>
-          <a:lstStyle/>
-          <a:p>
-            <a:pPr algn="ctr"/>
-            <a:r>
-              <a:rPr sz="800" b="1" i="0" spc="250">
-                <a:solidFill>
-                  <a:srgbClr val="5B3FD6"/>
-                </a:solidFill>
-                <a:latin typeface="Calibri"/>
-              </a:rPr>
-              <a:t>ITEM 6</a:t>
-            </a:r>
-          </a:p>
-        </p:txBody>
-      </p:sp>
-      <p:sp>
-        <p:nvSpPr>
-          <p:cNvPr id="26" name="Oval 25"/>
-          <p:cNvSpPr/>
-          <p:nvPr/>
-        </p:nvSpPr>
-        <p:spPr>
-          <a:xfrm>
-            <a:off x="10237965" y="2432304"/>
-            <a:ext cx="201168" cy="201168"/>
-          </a:xfrm>
-          <a:prstGeom prst="ellipse">
-            <a:avLst/>
-          </a:prstGeom>
-          <a:solidFill>
-            <a:srgbClr val="5B3FD6"/>
-          </a:solidFill>
-          <a:ln>
-            <a:noFill/>
-          </a:ln>
-          <a:effectLst/>
-        </p:spPr>
-        <p:style>
-          <a:lnRef idx="1">
-            <a:schemeClr val="accent1"/>
-          </a:lnRef>
-          <a:fillRef idx="3">
-            <a:schemeClr val="accent1"/>
-          </a:fillRef>
-          <a:effectRef idx="2">
-            <a:schemeClr val="accent1"/>
-          </a:effectRef>
-          <a:fontRef idx="minor">
-            <a:schemeClr val="lt1"/>
-          </a:fontRef>
-        </p:style>
-        <p:txBody>
-          <a:bodyPr rtlCol="0" anchor="ctr" wrap="square"/>
-          <a:lstStyle/>
-          <a:p>
-            <a:pPr algn="ctr"/>
-          </a:p>
-        </p:txBody>
-      </p:sp>
-      <p:sp>
-        <p:nvSpPr>
-          <p:cNvPr id="27" name="Rounded Rectangle 26"/>
-          <p:cNvSpPr/>
-          <p:nvPr/>
-        </p:nvSpPr>
-        <p:spPr>
-          <a:xfrm>
-            <a:off x="9015755" y="2843784"/>
-            <a:ext cx="2645587" cy="1076960"/>
-          </a:xfrm>
-          <a:prstGeom prst="roundRect">
-            <a:avLst>
-              <a:gd name="adj" fmla="val 5000"/>
-            </a:avLst>
-          </a:prstGeom>
-          <a:solidFill>
-            <a:srgbClr val="FFFFFF"/>
-          </a:solidFill>
-          <a:ln w="9525">
-            <a:solidFill>
-              <a:srgbClr val="E4E1F1"/>
-            </a:solidFill>
-          </a:ln>
-          <a:effectLst>
-            <a:outerShdw blurRad="76200" dist="19050" dir="5400000" algn="bl" rotWithShape="0">
-              <a:srgbClr val="1A0F5C">
-                <a:alpha val="12000"/>
-              </a:srgbClr>
-            </a:outerShdw>
-          </a:effectLst>
-        </p:spPr>
-        <p:style>
-          <a:lnRef idx="1">
-            <a:schemeClr val="accent1"/>
-          </a:lnRef>
-          <a:fillRef idx="3">
-            <a:schemeClr val="accent1"/>
-          </a:fillRef>
-          <a:effectRef idx="2">
-            <a:schemeClr val="accent1"/>
-          </a:effectRef>
-          <a:fontRef idx="minor">
-            <a:schemeClr val="lt1"/>
-          </a:fontRef>
-        </p:style>
-        <p:txBody>
-          <a:bodyPr rtlCol="0" anchor="ctr" wrap="square"/>
-          <a:lstStyle/>
-          <a:p>
-            <a:pPr algn="ctr"/>
-          </a:p>
-        </p:txBody>
-      </p:sp>
-      <p:sp>
-        <p:nvSpPr>
-          <p:cNvPr id="28" name="TextBox 27"/>
-          <p:cNvSpPr txBox="1"/>
-          <p:nvPr/>
-        </p:nvSpPr>
-        <p:spPr>
-          <a:xfrm>
-            <a:off x="9180347" y="2990088"/>
-            <a:ext cx="2316403" cy="251205"/>
-          </a:xfrm>
-          <a:prstGeom prst="rect">
-            <a:avLst/>
-          </a:prstGeom>
-          <a:noFill/>
-        </p:spPr>
-        <p:txBody>
-          <a:bodyPr wrap="square" anchor="t" lIns="0" rIns="0" tIns="0" bIns="0">
-            <a:spAutoFit/>
-          </a:bodyPr>
-          <a:lstStyle/>
-          <a:p>
-            <a:pPr algn="l"/>
-            <a:r>
-              <a:rPr sz="1300" b="1" i="0">
-                <a:solidFill>
-                  <a:srgbClr val="1A0F5C"/>
-                </a:solidFill>
-                <a:latin typeface="Calibri"/>
-              </a:rPr>
-              <a:t>Tuesday's return question</a:t>
-            </a:r>
-          </a:p>
-        </p:txBody>
-      </p:sp>
-      <p:sp>
-        <p:nvSpPr>
-          <p:cNvPr id="29" name="TextBox 28"/>
-          <p:cNvSpPr txBox="1"/>
-          <p:nvPr/>
-        </p:nvSpPr>
-        <p:spPr>
-          <a:xfrm>
-            <a:off x="9180347" y="3277870"/>
-            <a:ext cx="2316403" cy="366776"/>
-          </a:xfrm>
-          <a:prstGeom prst="rect">
-            <a:avLst/>
-          </a:prstGeom>
-          <a:noFill/>
-        </p:spPr>
-        <p:txBody>
-          <a:bodyPr wrap="square" anchor="t" lIns="0" rIns="0" tIns="0" bIns="0">
-            <a:spAutoFit/>
-          </a:bodyPr>
-          <a:lstStyle/>
-          <a:p>
-            <a:pPr algn="l"/>
-            <a:r>
-              <a:rPr sz="1000" b="0" i="0">
-                <a:solidFill>
-                  <a:srgbClr val="6B6690"/>
-                </a:solidFill>
-                <a:latin typeface="Calibri"/>
-              </a:rPr>
-              <a:t>The four moves of an answer to an objection that is partly right.</a:t>
-            </a:r>
-          </a:p>
-        </p:txBody>
-      </p:sp>
-      <p:sp>
-        <p:nvSpPr>
-          <p:cNvPr id="30" name="Oval 29"/>
-          <p:cNvSpPr/>
-          <p:nvPr/>
-        </p:nvSpPr>
-        <p:spPr>
-          <a:xfrm>
-            <a:off x="530352" y="6492240"/>
-            <a:ext cx="64008" cy="64008"/>
-          </a:xfrm>
-          <a:prstGeom prst="ellipse">
-            <a:avLst/>
-          </a:prstGeom>
-          <a:solidFill>
-            <a:srgbClr val="CFC9EE"/>
-          </a:solidFill>
-          <a:ln>
-            <a:noFill/>
-          </a:ln>
-          <a:effectLst/>
-        </p:spPr>
-        <p:style>
-          <a:lnRef idx="1">
-            <a:schemeClr val="accent1"/>
-          </a:lnRef>
-          <a:fillRef idx="3">
-            <a:schemeClr val="accent1"/>
-          </a:fillRef>
-          <a:effectRef idx="2">
-            <a:schemeClr val="accent1"/>
-          </a:effectRef>
-          <a:fontRef idx="minor">
-            <a:schemeClr val="lt1"/>
-          </a:fontRef>
-        </p:style>
-        <p:txBody>
-          <a:bodyPr rtlCol="0" anchor="ctr" wrap="square"/>
-          <a:lstStyle/>
-          <a:p>
-            <a:pPr algn="ctr"/>
-          </a:p>
-        </p:txBody>
-      </p:sp>
-      <p:sp>
-        <p:nvSpPr>
-          <p:cNvPr id="31" name="TextBox 30"/>
-          <p:cNvSpPr txBox="1"/>
-          <p:nvPr/>
-        </p:nvSpPr>
-        <p:spPr>
-          <a:xfrm>
-            <a:off x="640080" y="6437376"/>
-            <a:ext cx="1286446" cy="152146"/>
-          </a:xfrm>
-          <a:prstGeom prst="rect">
-            <a:avLst/>
-          </a:prstGeom>
-          <a:noFill/>
-        </p:spPr>
-        <p:txBody>
-          <a:bodyPr wrap="square" anchor="t" lIns="0" rIns="0" tIns="0" bIns="0">
-            <a:spAutoFit/>
-          </a:bodyPr>
-          <a:lstStyle/>
-          <a:p>
-            <a:pPr algn="l"/>
-            <a:r>
-              <a:rPr sz="700" b="0" i="0">
-                <a:solidFill>
-                  <a:srgbClr val="6B6690"/>
-                </a:solidFill>
-                <a:latin typeface="Calibri"/>
-              </a:rPr>
-              <a:t>What is a combo worth?</a:t>
-            </a:r>
-          </a:p>
-        </p:txBody>
-      </p:sp>
-      <p:sp>
-        <p:nvSpPr>
-          <p:cNvPr id="32" name="Oval 31"/>
-          <p:cNvSpPr/>
-          <p:nvPr/>
-        </p:nvSpPr>
-        <p:spPr>
-          <a:xfrm>
-            <a:off x="2017966" y="6492240"/>
-            <a:ext cx="64008" cy="64008"/>
-          </a:xfrm>
-          <a:prstGeom prst="ellipse">
-            <a:avLst/>
-          </a:prstGeom>
-          <a:solidFill>
-            <a:srgbClr val="5B3FD6"/>
-          </a:solidFill>
-          <a:ln>
-            <a:noFill/>
-          </a:ln>
-          <a:effectLst/>
-        </p:spPr>
-        <p:style>
-          <a:lnRef idx="1">
-            <a:schemeClr val="accent1"/>
-          </a:lnRef>
-          <a:fillRef idx="3">
-            <a:schemeClr val="accent1"/>
-          </a:fillRef>
-          <a:effectRef idx="2">
-            <a:schemeClr val="accent1"/>
-          </a:effectRef>
-          <a:fontRef idx="minor">
-            <a:schemeClr val="lt1"/>
-          </a:fontRef>
-        </p:style>
-        <p:txBody>
-          <a:bodyPr rtlCol="0" anchor="ctr" wrap="square"/>
-          <a:lstStyle/>
-          <a:p>
-            <a:pPr algn="ctr"/>
-          </a:p>
-        </p:txBody>
-      </p:sp>
-      <p:sp>
-        <p:nvSpPr>
-          <p:cNvPr id="33" name="TextBox 32"/>
-          <p:cNvSpPr txBox="1"/>
-          <p:nvPr/>
-        </p:nvSpPr>
-        <p:spPr>
-          <a:xfrm>
-            <a:off x="2127694" y="6437376"/>
-            <a:ext cx="1240440" cy="152146"/>
-          </a:xfrm>
-          <a:prstGeom prst="rect">
-            <a:avLst/>
-          </a:prstGeom>
-          <a:noFill/>
-        </p:spPr>
-        <p:txBody>
-          <a:bodyPr wrap="square" anchor="t" lIns="0" rIns="0" tIns="0" bIns="0">
-            <a:spAutoFit/>
-          </a:bodyPr>
-          <a:lstStyle/>
-          <a:p>
-            <a:pPr algn="l"/>
-            <a:r>
-              <a:rPr sz="700" b="1" i="0">
-                <a:solidFill>
-                  <a:srgbClr val="5B3FD6"/>
-                </a:solidFill>
-                <a:latin typeface="Calibri"/>
-              </a:rPr>
-              <a:t>What is a slot worth?</a:t>
-            </a:r>
-          </a:p>
-        </p:txBody>
-      </p:sp>
-      <p:sp>
-        <p:nvSpPr>
-          <p:cNvPr id="34" name="TextBox 33"/>
-          <p:cNvSpPr txBox="1"/>
-          <p:nvPr/>
-        </p:nvSpPr>
-        <p:spPr>
-          <a:xfrm>
-            <a:off x="10198303" y="6437376"/>
-            <a:ext cx="1463040" cy="160401"/>
-          </a:xfrm>
-          <a:prstGeom prst="rect">
-            <a:avLst/>
-          </a:prstGeom>
-          <a:noFill/>
-        </p:spPr>
-        <p:txBody>
-          <a:bodyPr wrap="square" anchor="t" lIns="0" rIns="0" tIns="0" bIns="0">
-            <a:spAutoFit/>
-          </a:bodyPr>
-          <a:lstStyle/>
-          <a:p>
-            <a:pPr algn="r"/>
-            <a:r>
-              <a:rPr sz="750" b="0" i="0">
-                <a:solidFill>
-                  <a:srgbClr val="6B6690"/>
-                </a:solidFill>
-                <a:latin typeface="Calibri"/>
-              </a:rPr>
-              <a:t>S74  ·  21 / 22</a:t>
-            </a:r>
-          </a:p>
-        </p:txBody>
-      </p:sp>
-    </p:spTree>
-  </p:cSld>
-  <p:clrMapOvr>
-    <a:masterClrMapping/>
-  </p:clrMapOvr>
-</p:sld>
-</file>
-
-<file path=ppt/slides/slide22.xml><?xml version="1.0" encoding="utf-8"?>
-<p:sld xmlns:a="http://schemas.openxmlformats.org/drawingml/2006/main" xmlns:p="http://schemas.openxmlformats.org/presentationml/2006/main" xmlns:r="http://schemas.openxmlformats.org/officeDocument/2006/relationships">
-  <p:cSld>
-    <p:spTree>
-      <p:nvGrpSpPr>
-        <p:cNvPr id="1" name=""/>
-        <p:cNvGrpSpPr/>
-        <p:nvPr/>
-      </p:nvGrpSpPr>
-      <p:grpSpPr/>
-      <p:pic>
-        <p:nvPicPr>
-          <p:cNvPr id="2" name="Picture 1" descr="bg_light.jpg"/>
-          <p:cNvPicPr>
-            <a:picLocks noChangeAspect="1"/>
-          </p:cNvPicPr>
-          <p:nvPr/>
-        </p:nvPicPr>
-        <p:blipFill>
-          <a:blip r:embed="rId2"/>
-          <a:stretch>
-            <a:fillRect/>
-          </a:stretch>
-        </p:blipFill>
-        <p:spPr>
-          <a:xfrm>
-            <a:off x="0" y="0"/>
-            <a:ext cx="12191695" cy="6858000"/>
-          </a:xfrm>
-          <a:prstGeom prst="rect">
-            <a:avLst/>
-          </a:prstGeom>
-        </p:spPr>
-      </p:pic>
-      <p:pic>
-        <p:nvPicPr>
-          <p:cNvPr id="3" name="Picture 2" descr="iitgn_logo.png"/>
-          <p:cNvPicPr>
-            <a:picLocks noChangeAspect="1"/>
-          </p:cNvPicPr>
-          <p:nvPr/>
-        </p:nvPicPr>
-        <p:blipFill>
-          <a:blip r:embed="rId3"/>
-          <a:stretch>
-            <a:fillRect/>
-          </a:stretch>
-        </p:blipFill>
-        <p:spPr>
-          <a:xfrm>
-            <a:off x="530352" y="201168"/>
-            <a:ext cx="420624" cy="420624"/>
-          </a:xfrm>
-          <a:prstGeom prst="rect">
-            <a:avLst/>
-          </a:prstGeom>
-        </p:spPr>
-      </p:pic>
-      <p:sp>
-        <p:nvSpPr>
-          <p:cNvPr id="4" name="TextBox 3"/>
-          <p:cNvSpPr txBox="1"/>
-          <p:nvPr/>
-        </p:nvSpPr>
-        <p:spPr>
-          <a:xfrm>
-            <a:off x="1042416" y="228600"/>
-            <a:ext cx="5120640" cy="185166"/>
-          </a:xfrm>
-          <a:prstGeom prst="rect">
-            <a:avLst/>
-          </a:prstGeom>
-          <a:noFill/>
-        </p:spPr>
-        <p:txBody>
-          <a:bodyPr wrap="square" anchor="t" lIns="0" rIns="0" tIns="0" bIns="0">
-            <a:spAutoFit/>
-          </a:bodyPr>
-          <a:lstStyle/>
-          <a:p>
-            <a:pPr algn="l"/>
-            <a:r>
-              <a:rPr sz="900" b="1" i="0">
-                <a:solidFill>
-                  <a:srgbClr val="1A0F5C"/>
-                </a:solidFill>
-                <a:latin typeface="Calibri"/>
-              </a:rPr>
-              <a:t>Indian Institute of Technology Gandhinagar</a:t>
-            </a:r>
-          </a:p>
-        </p:txBody>
-      </p:sp>
-      <p:sp>
-        <p:nvSpPr>
-          <p:cNvPr id="5" name="TextBox 4"/>
-          <p:cNvSpPr txBox="1"/>
-          <p:nvPr/>
-        </p:nvSpPr>
-        <p:spPr>
-          <a:xfrm>
-            <a:off x="1042416" y="420623"/>
-            <a:ext cx="5852160" cy="127381"/>
-          </a:xfrm>
-          <a:prstGeom prst="rect">
-            <a:avLst/>
-          </a:prstGeom>
-          <a:noFill/>
-        </p:spPr>
-        <p:txBody>
-          <a:bodyPr wrap="square" anchor="t" lIns="0" rIns="0" tIns="0" bIns="0">
-            <a:spAutoFit/>
-          </a:bodyPr>
-          <a:lstStyle/>
-          <a:p>
-            <a:pPr algn="l"/>
-            <a:r>
-              <a:rPr sz="550" b="1" i="0" spc="300">
-                <a:solidFill>
-                  <a:srgbClr val="6B6690"/>
-                </a:solidFill>
-                <a:latin typeface="Calibri"/>
-              </a:rPr>
-              <a:t>ADMINISTERED THROUGH THE COMPETENCY ADVANCEMENT ACADEMY</a:t>
-            </a:r>
-          </a:p>
-        </p:txBody>
-      </p:sp>
-      <p:sp>
-        <p:nvSpPr>
-          <p:cNvPr id="6" name="TextBox 5"/>
-          <p:cNvSpPr txBox="1"/>
-          <p:nvPr/>
-        </p:nvSpPr>
-        <p:spPr>
-          <a:xfrm>
-            <a:off x="5992063" y="310896"/>
-            <a:ext cx="5669280" cy="127381"/>
-          </a:xfrm>
-          <a:prstGeom prst="rect">
-            <a:avLst/>
-          </a:prstGeom>
-          <a:noFill/>
-        </p:spPr>
-        <p:txBody>
-          <a:bodyPr wrap="square" anchor="t" lIns="0" rIns="0" tIns="0" bIns="0">
-            <a:spAutoFit/>
-          </a:bodyPr>
-          <a:lstStyle/>
-          <a:p>
-            <a:pPr algn="r"/>
-            <a:r>
-              <a:rPr sz="550" b="1" i="0" spc="300">
-                <a:solidFill>
-                  <a:srgbClr val="6B6690"/>
-                </a:solidFill>
-                <a:latin typeface="Calibri"/>
-              </a:rPr>
-              <a:t>WEEK 4  ·  WEDNESDAY  ·  MARKET BASKET, LIFT AND CROSS-SELL</a:t>
-            </a:r>
-          </a:p>
-        </p:txBody>
-      </p:sp>
-      <p:sp>
-        <p:nvSpPr>
-          <p:cNvPr id="7" name="TextBox 6"/>
-          <p:cNvSpPr txBox="1"/>
-          <p:nvPr/>
-        </p:nvSpPr>
-        <p:spPr>
-          <a:xfrm>
-            <a:off x="530352" y="676656"/>
-            <a:ext cx="11130991" cy="512064"/>
-          </a:xfrm>
-          <a:prstGeom prst="rect">
-            <a:avLst/>
-          </a:prstGeom>
-          <a:noFill/>
-        </p:spPr>
-        <p:txBody>
-          <a:bodyPr wrap="square" anchor="b" lIns="0" rIns="0" tIns="0" bIns="0">
-            <a:spAutoFit/>
-          </a:bodyPr>
-          <a:lstStyle/>
-          <a:p>
-            <a:pPr algn="l"/>
-            <a:r>
-              <a:rPr sz="2600" b="0" i="0">
-                <a:solidFill>
-                  <a:srgbClr val="1A0F5C"/>
-                </a:solidFill>
-                <a:latin typeface="Georgia"/>
-              </a:rPr>
-              <a:t>The sentence for Friday, and Thursday's question</a:t>
-            </a:r>
-          </a:p>
-        </p:txBody>
-      </p:sp>
-      <p:sp>
-        <p:nvSpPr>
-          <p:cNvPr id="8" name="TextBox 7"/>
-          <p:cNvSpPr txBox="1"/>
-          <p:nvPr/>
-        </p:nvSpPr>
-        <p:spPr>
-          <a:xfrm>
-            <a:off x="530352" y="1243584"/>
-            <a:ext cx="11130991" cy="234696"/>
-          </a:xfrm>
-          <a:prstGeom prst="rect">
-            <a:avLst/>
-          </a:prstGeom>
-          <a:noFill/>
-        </p:spPr>
-        <p:txBody>
-          <a:bodyPr wrap="square" anchor="t" lIns="0" rIns="0" tIns="0" bIns="0">
-            <a:spAutoFit/>
-          </a:bodyPr>
-          <a:lstStyle/>
-          <a:p>
-            <a:pPr algn="l"/>
-            <a:r>
-              <a:rPr sz="1200" b="0" i="0">
-                <a:solidFill>
-                  <a:srgbClr val="6B6690"/>
-                </a:solidFill>
-                <a:latin typeface="Calibri"/>
-              </a:rPr>
               <a:t>What does the room say on Friday, and what comes next?</a:t>
             </a:r>
           </a:p>
@@ -18251,7 +17034,7 @@
         <p:spPr>
           <a:xfrm>
             <a:off x="530352" y="1956816"/>
-            <a:ext cx="11130991" cy="1074420"/>
+            <a:ext cx="11130991" cy="1341120"/>
           </a:xfrm>
           <a:prstGeom prst="roundRect">
             <a:avLst>
@@ -18299,7 +17082,7 @@
         <p:spPr>
           <a:xfrm>
             <a:off x="676656" y="2084832"/>
-            <a:ext cx="45720" cy="818388"/>
+            <a:ext cx="45720" cy="1085088"/>
           </a:xfrm>
           <a:prstGeom prst="roundRect">
             <a:avLst>
@@ -18345,7 +17128,7 @@
         <p:spPr>
           <a:xfrm>
             <a:off x="877824" y="2075688"/>
-            <a:ext cx="10564063" cy="891540"/>
+            <a:ext cx="10564063" cy="1158240"/>
           </a:xfrm>
           <a:prstGeom prst="rect">
             <a:avLst/>
@@ -18374,7 +17157,7 @@
                 </a:solidFill>
                 <a:latin typeface="Calibri"/>
               </a:rPr>
-              <a:t>"The click-through fell because the strip gave half its slots to milk, which shoppers buy anyway; ranked by lift above a 1 percent floor, the strip shows chips with cold drink, coriander with green chillies and bread with butter, and recovers about Rs 6.3 lakh a month."</a:t>
+              <a:t>"The click-through fell because the strip gave half its slots to milk, which shoppers buy anyway. Taking milk out, which ranking by lift above a 1 percent floor and a 1.5 bar does by arithmetic, recovers about Rs 6.3 lakh a month before the adds that would have come anyway; a test against a count ranking without milk shows whether lift earns more."</a:t>
             </a:r>
           </a:p>
         </p:txBody>
@@ -18387,7 +17170,7 @@
         </p:nvSpPr>
         <p:spPr>
           <a:xfrm>
-            <a:off x="530352" y="3195828"/>
+            <a:off x="530352" y="3462528"/>
             <a:ext cx="11130991" cy="807720"/>
           </a:xfrm>
           <a:prstGeom prst="roundRect">
@@ -18435,7 +17218,7 @@
         </p:nvSpPr>
         <p:spPr>
           <a:xfrm>
-            <a:off x="676656" y="3323844"/>
+            <a:off x="676656" y="3590544"/>
             <a:ext cx="45720" cy="551688"/>
           </a:xfrm>
           <a:prstGeom prst="roundRect">
@@ -18481,7 +17264,7 @@
         </p:nvSpPr>
         <p:spPr>
           <a:xfrm>
-            <a:off x="877824" y="3314700"/>
+            <a:off x="877824" y="3581400"/>
             <a:ext cx="10564063" cy="624840"/>
           </a:xfrm>
           <a:prstGeom prst="rect">
@@ -18532,7 +17315,7 @@
         </p:blipFill>
         <p:spPr>
           <a:xfrm>
-            <a:off x="530352" y="4168139"/>
+            <a:off x="530352" y="4434840"/>
             <a:ext cx="11130991" cy="1331913"/>
           </a:xfrm>
           <a:prstGeom prst="rect">
@@ -18728,7 +17511,7 @@
                 </a:solidFill>
                 <a:latin typeface="Calibri"/>
               </a:rPr>
-              <a:t>S75  ·  22 / 22</a:t>
+              <a:t>S74  ·  21 / 21</a:t>
             </a:r>
           </a:p>
         </p:txBody>
@@ -18984,7 +17767,7 @@
         </p:nvGraphicFramePr>
         <p:xfrm>
           <a:off x="530352" y="1956816"/>
-          <a:ext cx="11130991" cy="2218944"/>
+          <a:ext cx="11130990" cy="2588768"/>
         </p:xfrm>
         <a:graphic>
           <a:graphicData uri="http://schemas.openxmlformats.org/drawingml/2006/table">
@@ -18993,8 +17776,8 @@
                 <a:tableStyleId>{2D5ABB26-0587-4C30-8999-92F81FD0307C}</a:tableStyleId>
               </a:tblPr>
               <a:tblGrid>
-                <a:gridCol w="7351928"/>
-                <a:gridCol w="3779063"/>
+                <a:gridCol w="7543831"/>
+                <a:gridCol w="3587159"/>
               </a:tblGrid>
               <a:tr h="369824">
                 <a:tc>
@@ -19147,7 +17930,7 @@
                           </a:solidFill>
                           <a:latin typeface="Calibri"/>
                         </a:rPr>
-                        <a:t>The card's discount, on every bill holding both</a:t>
+                        <a:t>Rusk's margin, what the shop keeps: price less cost</a:t>
                       </a:r>
                     </a:p>
                   </a:txBody>
@@ -19169,7 +17952,7 @@
                           </a:solidFill>
                           <a:latin typeface="Calibri"/>
                         </a:rPr>
-                        <a:t>Rs 1</a:t>
+                        <a:t>Rs 12</a:t>
                       </a:r>
                     </a:p>
                   </a:txBody>
@@ -19193,7 +17976,7 @@
                           </a:solidFill>
                           <a:latin typeface="Calibri"/>
                         </a:rPr>
-                        <a:t>Printing the cards</a:t>
+                        <a:t>The card's discount, on every bill holding both</a:t>
                       </a:r>
                     </a:p>
                   </a:txBody>
@@ -19215,7 +17998,7 @@
                           </a:solidFill>
                           <a:latin typeface="Calibri"/>
                         </a:rPr>
-                        <a:t>Rs 20</a:t>
+                        <a:t>Rs 1</a:t>
                       </a:r>
                     </a:p>
                   </a:txBody>
@@ -19239,7 +18022,7 @@
                           </a:solidFill>
                           <a:latin typeface="Calibri"/>
                         </a:rPr>
-                        <a:t>Tea bills without rusk that add a pack, assumed</a:t>
+                        <a:t>Printing the cards</a:t>
                       </a:r>
                     </a:p>
                   </a:txBody>
@@ -19261,7 +18044,7 @@
                           </a:solidFill>
                           <a:latin typeface="Calibri"/>
                         </a:rPr>
-                        <a:t>4 percent, range 2 to 6</a:t>
+                        <a:t>Rs 20</a:t>
                       </a:r>
                     </a:p>
                   </a:txBody>
@@ -19272,6 +18055,52 @@
                   </a:tcPr>
                 </a:tc>
               </a:tr>
+              <a:tr h="369824">
+                <a:tc>
+                  <a:txBody>
+                    <a:bodyPr/>
+                    <a:lstStyle/>
+                    <a:p>
+                      <a:r>
+                        <a:rPr sz="1400" b="0" i="0">
+                          <a:solidFill>
+                            <a:srgbClr val="1A1440"/>
+                          </a:solidFill>
+                          <a:latin typeface="Calibri"/>
+                        </a:rPr>
+                        <a:t>Tea bills without rusk that add a pack, assumed</a:t>
+                      </a:r>
+                    </a:p>
+                  </a:txBody>
+                  <a:tcPr marL="101600" marR="101600" marT="38100" marB="38100" anchor="ctr">
+                    <a:solidFill>
+                      <a:srgbClr val="F4F2FA"/>
+                    </a:solidFill>
+                  </a:tcPr>
+                </a:tc>
+                <a:tc>
+                  <a:txBody>
+                    <a:bodyPr/>
+                    <a:lstStyle/>
+                    <a:p>
+                      <a:r>
+                        <a:rPr sz="1400" b="0" i="0">
+                          <a:solidFill>
+                            <a:srgbClr val="1A1440"/>
+                          </a:solidFill>
+                          <a:latin typeface="Calibri"/>
+                        </a:rPr>
+                        <a:t>4 percent, range 2 to 6</a:t>
+                      </a:r>
+                    </a:p>
+                  </a:txBody>
+                  <a:tcPr marL="101600" marR="101600" marT="38100" marB="38100" anchor="ctr">
+                    <a:solidFill>
+                      <a:srgbClr val="F4F2FA"/>
+                    </a:solidFill>
+                  </a:tcPr>
+                </a:tc>
+              </a:tr>
             </a:tbl>
           </a:graphicData>
         </a:graphic>
@@ -19284,7 +18113,7 @@
         </p:nvSpPr>
         <p:spPr>
           <a:xfrm>
-            <a:off x="530352" y="4431792"/>
+            <a:off x="530352" y="4801616"/>
             <a:ext cx="11130991" cy="1048512"/>
           </a:xfrm>
           <a:prstGeom prst="rect">
@@ -19503,7 +18332,7 @@
                 </a:solidFill>
                 <a:latin typeface="Calibri"/>
               </a:rPr>
-              <a:t>S57  ·  3 / 22</a:t>
+              <a:t>S57  ·  3 / 21</a:t>
             </a:r>
           </a:p>
         </p:txBody>
@@ -19837,7 +18666,7 @@
                 </a:solidFill>
                 <a:latin typeface="Calibri"/>
               </a:rPr>
-              <a:t>Only the 450 tea bills without rusk can change: 4 percent of them, 18 bills, add a pack, and 18 x Rs 12 is Rs 216 of margin. The card hands Rs 1 back on all 168 bills that hold both, the 150 that held both anyway and the 18 new ones, and the cards cost Rs 20, so Rs 216 less Rs 168 less Rs 20 leaves Rs 28. Option a books rusk sales on all 168 bills, Rs 5,040, which is 180 times the gain.</a:t>
+              <a:t>The card is assumed to change only the 450 tea bills without rusk: 4 percent of them, 18 bills, add a pack, and 18 x Rs 12 is Rs 216 of margin. The card hands Rs 1 back on all 168 bills that hold both, the 150 that held both anyway and the 18 new ones, and the cards cost Rs 20, so Rs 216 less Rs 168 less Rs 20 leaves Rs 28. Option a books rusk sales on all 168 bills, Rs 5,040, which is 180 times the gain.</a:t>
             </a:r>
           </a:p>
         </p:txBody>
@@ -20030,7 +18859,7 @@
                 </a:solidFill>
                 <a:latin typeface="Calibri"/>
               </a:rPr>
-              <a:t>S58  ·  4 / 22</a:t>
+              <a:t>S58  ·  4 / 21</a:t>
             </a:r>
           </a:p>
         </p:txBody>
@@ -20236,7 +19065,7 @@
                 </a:solidFill>
                 <a:latin typeface="Georgia"/>
               </a:rPr>
-              <a:t>Rs 2 off loses Rs 140; the response sets the sign</a:t>
+              <a:t>At the same 4 percent, Rs 2 off loses Rs 140</a:t>
             </a:r>
           </a:p>
         </p:txBody>
@@ -20888,7 +19717,7 @@
                 </a:solidFill>
                 <a:latin typeface="Calibri"/>
               </a:rPr>
-              <a:t>S59  ·  5 / 22</a:t>
+              <a:t>S59  ·  5 / 21</a:t>
             </a:r>
           </a:p>
         </p:txBody>
@@ -21143,7 +19972,7 @@
         <p:spPr>
           <a:xfrm>
             <a:off x="530352" y="1645920"/>
-            <a:ext cx="502920" cy="300735"/>
+            <a:ext cx="502920" cy="267716"/>
           </a:xfrm>
           <a:prstGeom prst="rect">
             <a:avLst/>
@@ -21158,7 +19987,7 @@
           <a:p>
             <a:pPr algn="l"/>
             <a:r>
-              <a:rPr sz="1600" b="0" i="0">
+              <a:rPr sz="1400" b="0" i="0">
                 <a:solidFill>
                   <a:srgbClr val="5B3FD6"/>
                 </a:solidFill>
@@ -21178,21 +20007,21 @@
         <p:spPr>
           <a:xfrm>
             <a:off x="1097280" y="1682496"/>
-            <a:ext cx="10564063" cy="334264"/>
-          </a:xfrm>
-          <a:prstGeom prst="rect">
-            <a:avLst/>
-          </a:prstGeom>
-          <a:noFill/>
-        </p:spPr>
-        <p:txBody>
-          <a:bodyPr wrap="square" anchor="t" lIns="0" rIns="0" tIns="0" bIns="0">
-            <a:spAutoFit/>
-          </a:bodyPr>
-          <a:lstStyle/>
-          <a:p>
-            <a:r>
-              <a:rPr sz="1300" b="0" i="0">
+            <a:ext cx="10564063" cy="299720"/>
+          </a:xfrm>
+          <a:prstGeom prst="rect">
+            <a:avLst/>
+          </a:prstGeom>
+          <a:noFill/>
+        </p:spPr>
+        <p:txBody>
+          <a:bodyPr wrap="square" anchor="t" lIns="0" rIns="0" tIns="0" bIns="0">
+            <a:spAutoFit/>
+          </a:bodyPr>
+          <a:lstStyle/>
+          <a:p>
+            <a:r>
+              <a:rPr sz="1100" b="0" i="0">
                 <a:solidFill>
                   <a:srgbClr val="1A1440"/>
                 </a:solidFill>
@@ -21211,8 +20040,8 @@
         </p:nvSpPr>
         <p:spPr>
           <a:xfrm>
-            <a:off x="530352" y="2053336"/>
-            <a:ext cx="502920" cy="300735"/>
+            <a:off x="530352" y="2018792"/>
+            <a:ext cx="502920" cy="267716"/>
           </a:xfrm>
           <a:prstGeom prst="rect">
             <a:avLst/>
@@ -21227,7 +20056,7 @@
           <a:p>
             <a:pPr algn="l"/>
             <a:r>
-              <a:rPr sz="1600" b="0" i="0">
+              <a:rPr sz="1400" b="0" i="0">
                 <a:solidFill>
                   <a:srgbClr val="5B3FD6"/>
                 </a:solidFill>
@@ -21246,22 +20075,22 @@
         </p:nvSpPr>
         <p:spPr>
           <a:xfrm>
-            <a:off x="1097280" y="2089912"/>
-            <a:ext cx="10564063" cy="334264"/>
-          </a:xfrm>
-          <a:prstGeom prst="rect">
-            <a:avLst/>
-          </a:prstGeom>
-          <a:noFill/>
-        </p:spPr>
-        <p:txBody>
-          <a:bodyPr wrap="square" anchor="t" lIns="0" rIns="0" tIns="0" bIns="0">
-            <a:spAutoFit/>
-          </a:bodyPr>
-          <a:lstStyle/>
-          <a:p>
-            <a:r>
-              <a:rPr sz="1300" b="0" i="0">
+            <a:off x="1097280" y="2055368"/>
+            <a:ext cx="10564063" cy="299720"/>
+          </a:xfrm>
+          <a:prstGeom prst="rect">
+            <a:avLst/>
+          </a:prstGeom>
+          <a:noFill/>
+        </p:spPr>
+        <p:txBody>
+          <a:bodyPr wrap="square" anchor="t" lIns="0" rIns="0" tIns="0" bIns="0">
+            <a:spAutoFit/>
+          </a:bodyPr>
+          <a:lstStyle/>
+          <a:p>
+            <a:r>
+              <a:rPr sz="1100" b="0" i="0">
                 <a:solidFill>
                   <a:srgbClr val="1A1440"/>
                 </a:solidFill>
@@ -21280,8 +20109,8 @@
         </p:nvSpPr>
         <p:spPr>
           <a:xfrm>
-            <a:off x="530352" y="2460752"/>
-            <a:ext cx="502920" cy="300735"/>
+            <a:off x="530352" y="2391664"/>
+            <a:ext cx="502920" cy="267716"/>
           </a:xfrm>
           <a:prstGeom prst="rect">
             <a:avLst/>
@@ -21296,7 +20125,7 @@
           <a:p>
             <a:pPr algn="l"/>
             <a:r>
-              <a:rPr sz="1600" b="0" i="0">
+              <a:rPr sz="1400" b="0" i="0">
                 <a:solidFill>
                   <a:srgbClr val="5B3FD6"/>
                 </a:solidFill>
@@ -21315,22 +20144,22 @@
         </p:nvSpPr>
         <p:spPr>
           <a:xfrm>
-            <a:off x="1097280" y="2497328"/>
-            <a:ext cx="10564063" cy="334264"/>
-          </a:xfrm>
-          <a:prstGeom prst="rect">
-            <a:avLst/>
-          </a:prstGeom>
-          <a:noFill/>
-        </p:spPr>
-        <p:txBody>
-          <a:bodyPr wrap="square" anchor="t" lIns="0" rIns="0" tIns="0" bIns="0">
-            <a:spAutoFit/>
-          </a:bodyPr>
-          <a:lstStyle/>
-          <a:p>
-            <a:r>
-              <a:rPr sz="1300" b="0" i="0">
+            <a:off x="1097280" y="2428240"/>
+            <a:ext cx="10564063" cy="299720"/>
+          </a:xfrm>
+          <a:prstGeom prst="rect">
+            <a:avLst/>
+          </a:prstGeom>
+          <a:noFill/>
+        </p:spPr>
+        <p:txBody>
+          <a:bodyPr wrap="square" anchor="t" lIns="0" rIns="0" tIns="0" bIns="0">
+            <a:spAutoFit/>
+          </a:bodyPr>
+          <a:lstStyle/>
+          <a:p>
+            <a:r>
+              <a:rPr sz="1100" b="0" i="0">
                 <a:solidFill>
                   <a:srgbClr val="1A1440"/>
                 </a:solidFill>
@@ -21349,8 +20178,8 @@
         </p:nvSpPr>
         <p:spPr>
           <a:xfrm>
-            <a:off x="530352" y="2868168"/>
-            <a:ext cx="502920" cy="300735"/>
+            <a:off x="530352" y="2764536"/>
+            <a:ext cx="502920" cy="267716"/>
           </a:xfrm>
           <a:prstGeom prst="rect">
             <a:avLst/>
@@ -21365,7 +20194,7 @@
           <a:p>
             <a:pPr algn="l"/>
             <a:r>
-              <a:rPr sz="1600" b="0" i="0">
+              <a:rPr sz="1400" b="0" i="0">
                 <a:solidFill>
                   <a:srgbClr val="5B3FD6"/>
                 </a:solidFill>
@@ -21384,22 +20213,22 @@
         </p:nvSpPr>
         <p:spPr>
           <a:xfrm>
-            <a:off x="1097280" y="2904744"/>
-            <a:ext cx="10564063" cy="334264"/>
-          </a:xfrm>
-          <a:prstGeom prst="rect">
-            <a:avLst/>
-          </a:prstGeom>
-          <a:noFill/>
-        </p:spPr>
-        <p:txBody>
-          <a:bodyPr wrap="square" anchor="t" lIns="0" rIns="0" tIns="0" bIns="0">
-            <a:spAutoFit/>
-          </a:bodyPr>
-          <a:lstStyle/>
-          <a:p>
-            <a:r>
-              <a:rPr sz="1300" b="0" i="0">
+            <a:off x="1097280" y="2801112"/>
+            <a:ext cx="10564063" cy="299720"/>
+          </a:xfrm>
+          <a:prstGeom prst="rect">
+            <a:avLst/>
+          </a:prstGeom>
+          <a:noFill/>
+        </p:spPr>
+        <p:txBody>
+          <a:bodyPr wrap="square" anchor="t" lIns="0" rIns="0" tIns="0" bIns="0">
+            <a:spAutoFit/>
+          </a:bodyPr>
+          <a:lstStyle/>
+          <a:p>
+            <a:r>
+              <a:rPr sz="1100" b="0" i="0">
                 <a:solidFill>
                   <a:srgbClr val="1A1440"/>
                 </a:solidFill>
@@ -21418,8 +20247,8 @@
         </p:nvSpPr>
         <p:spPr>
           <a:xfrm>
-            <a:off x="530352" y="3421888"/>
-            <a:ext cx="11130991" cy="1052576"/>
+            <a:off x="530352" y="3283712"/>
+            <a:ext cx="11130991" cy="983488"/>
           </a:xfrm>
           <a:prstGeom prst="roundRect">
             <a:avLst>
@@ -21472,7 +20301,7 @@
         </p:nvSpPr>
         <p:spPr>
           <a:xfrm>
-            <a:off x="758952" y="3719576"/>
+            <a:off x="758952" y="3546856"/>
             <a:ext cx="457200" cy="457200"/>
           </a:xfrm>
           <a:prstGeom prst="ellipse">
@@ -21524,7 +20353,7 @@
         </p:blipFill>
         <p:spPr>
           <a:xfrm>
-            <a:off x="868680" y="3829304"/>
+            <a:off x="868680" y="3656584"/>
             <a:ext cx="237744" cy="237744"/>
           </a:xfrm>
           <a:prstGeom prst="rect">
@@ -21540,7 +20369,7 @@
         </p:nvSpPr>
         <p:spPr>
           <a:xfrm>
-            <a:off x="1399031" y="3568192"/>
+            <a:off x="1399031" y="3430016"/>
             <a:ext cx="9987991" cy="160401"/>
           </a:xfrm>
           <a:prstGeom prst="rect">
@@ -21575,35 +20404,35 @@
         </p:nvSpPr>
         <p:spPr>
           <a:xfrm>
-            <a:off x="1399031" y="3787648"/>
-            <a:ext cx="9987991" cy="613664"/>
-          </a:xfrm>
-          <a:prstGeom prst="rect">
-            <a:avLst/>
-          </a:prstGeom>
-          <a:noFill/>
-        </p:spPr>
-        <p:txBody>
-          <a:bodyPr wrap="square" anchor="t" lIns="0" rIns="0" tIns="0" bIns="0">
-            <a:spAutoFit/>
-          </a:bodyPr>
-          <a:lstStyle/>
-          <a:p>
-            <a:r>
-              <a:rPr sz="1300" b="0" i="0">
+            <a:off x="1399031" y="3649472"/>
+            <a:ext cx="9987991" cy="544576"/>
+          </a:xfrm>
+          <a:prstGeom prst="rect">
+            <a:avLst/>
+          </a:prstGeom>
+          <a:noFill/>
+        </p:spPr>
+        <p:txBody>
+          <a:bodyPr wrap="square" anchor="t" lIns="0" rIns="0" tIns="0" bIns="0">
+            <a:spAutoFit/>
+          </a:bodyPr>
+          <a:lstStyle/>
+          <a:p>
+            <a:r>
+              <a:rPr sz="1100" b="0" i="0">
                 <a:solidFill>
                   <a:srgbClr val="1A1440"/>
                 </a:solidFill>
                 <a:latin typeface="Calibri"/>
               </a:rPr>
-              <a:t>[F] "A combo offer lifts the pair's sales; is it worth running?" Margin on the purchases that would not have happened, less the discount paid on all of them, less the fixed cost, said as a range.</a:t>
+              <a:t>[F] "A combo offer lifts the pair's sales; is it worth running?" Margin on the purchases the offer creates, less the discount paid on every purchase that takes it, including those that would have happened anyway, less the fixed cost, said as a range.</a:t>
             </a:r>
           </a:p>
         </p:txBody>
       </p:sp>
       <p:pic>
         <p:nvPicPr>
-          <p:cNvPr id="22" name="mermaid diagram" descr="badb4b84bcb7b044.png"/>
+          <p:cNvPr id="22" name="mermaid diagram" descr="4f662cc80396841e.png"/>
           <p:cNvPicPr>
             <a:picLocks noChangeAspect="1"/>
           </p:cNvPicPr>
@@ -21617,8 +20446,8 @@
         </p:blipFill>
         <p:spPr>
           <a:xfrm>
-            <a:off x="3236072" y="4639056"/>
-            <a:ext cx="5719549" cy="1560576"/>
+            <a:off x="2856259" y="4431792"/>
+            <a:ext cx="6479177" cy="1767839"/>
           </a:xfrm>
           <a:prstGeom prst="rect">
             <a:avLst/>
@@ -21813,7 +20642,7 @@
                 </a:solidFill>
                 <a:latin typeface="Calibri"/>
               </a:rPr>
-              <a:t>S60  ·  6 / 22</a:t>
+              <a:t>S60  ·  6 / 21</a:t>
             </a:r>
           </a:p>
         </p:txBody>
@@ -22304,7 +21133,7 @@
                 </a:solidFill>
                 <a:latin typeface="Calibri"/>
               </a:rPr>
-              <a:t>7 / 22</a:t>
+              <a:t>7 / 21</a:t>
             </a:r>
           </a:p>
         </p:txBody>
@@ -23868,7 +22697,7 @@
                 </a:solidFill>
                 <a:latin typeface="Calibri"/>
               </a:rPr>
-              <a:t>S61  ·  8 / 22</a:t>
+              <a:t>S61  ·  8 / 21</a:t>
             </a:r>
           </a:p>
         </p:txBody>
@@ -24074,7 +22903,7 @@
                 </a:solidFill>
                 <a:latin typeface="Georgia"/>
               </a:rPr>
-              <a:t>Which of these four pairs would you promote?</a:t>
+              <a:t>Which pair ranks first under the floor rule?</a:t>
             </a:r>
           </a:p>
         </p:txBody>
@@ -24109,7 +22938,7 @@
                 </a:solidFill>
                 <a:latin typeface="Calibri"/>
               </a:rPr>
-              <a:t>Each pair shows its support and its lift. Which takes the strip's first slot?</a:t>
+              <a:t>Each pair shows its support and its lift. Under a 1 percent floor and a 1.5 bar, which ranks first?</a:t>
             </a:r>
           </a:p>
         </p:txBody>
@@ -25210,7 +24039,7 @@
                 </a:solidFill>
                 <a:latin typeface="Calibri"/>
               </a:rPr>
-              <a:t>S62  ·  9 / 22</a:t>
+              <a:t>S62  ·  9 / 21</a:t>
             </a:r>
           </a:p>
         </p:txBody>
